--- a/docs/plots/carbo/jx_carbo_linsubhr_ratio_anemia3.pptx
+++ b/docs/plots/carbo/jx_carbo_linsubhr_ratio_anemia3.pptx
@@ -3003,524 +3003,527 @@
           <p:spPr>
             <a:xfrm>
               <a:off x="817517" y="1896563"/>
-              <a:ext cx="7370972" cy="3622626"/>
+              <a:ext cx="7370972" cy="3616459"/>
             </a:xfrm>
             <a:custGeom>
               <a:avLst/>
               <a:pathLst>
-                <a:path w="7370972" h="3622626">
+                <a:path w="7370972" h="3616459">
                   <a:moveTo>
-                    <a:pt x="1687831" y="0"/>
+                    <a:pt x="1588181" y="0"/>
                   </a:moveTo>
                   <a:lnTo>
-                    <a:pt x="1703687" y="49875"/>
-                  </a:lnTo>
-                  <a:lnTo>
-                    <a:pt x="1781321" y="278579"/>
-                  </a:lnTo>
-                  <a:lnTo>
-                    <a:pt x="1858955" y="492766"/>
-                  </a:lnTo>
-                  <a:lnTo>
-                    <a:pt x="1936589" y="693355"/>
-                  </a:lnTo>
-                  <a:lnTo>
-                    <a:pt x="2014223" y="881212"/>
-                  </a:lnTo>
-                  <a:lnTo>
-                    <a:pt x="2091857" y="1057143"/>
-                  </a:lnTo>
-                  <a:lnTo>
-                    <a:pt x="2169491" y="1221906"/>
-                  </a:lnTo>
-                  <a:lnTo>
-                    <a:pt x="2247125" y="1376209"/>
-                  </a:lnTo>
-                  <a:lnTo>
-                    <a:pt x="2324759" y="1520718"/>
-                  </a:lnTo>
-                  <a:lnTo>
-                    <a:pt x="2402393" y="1656053"/>
-                  </a:lnTo>
-                  <a:lnTo>
-                    <a:pt x="2480027" y="1782797"/>
-                  </a:lnTo>
-                  <a:lnTo>
-                    <a:pt x="2557661" y="1901495"/>
-                  </a:lnTo>
-                  <a:lnTo>
-                    <a:pt x="2635295" y="2012659"/>
-                  </a:lnTo>
-                  <a:lnTo>
-                    <a:pt x="2712930" y="2116765"/>
-                  </a:lnTo>
-                  <a:lnTo>
-                    <a:pt x="2790564" y="2214263"/>
-                  </a:lnTo>
-                  <a:lnTo>
-                    <a:pt x="2868198" y="2305572"/>
-                  </a:lnTo>
-                  <a:lnTo>
-                    <a:pt x="2945832" y="2391084"/>
-                  </a:lnTo>
-                  <a:lnTo>
-                    <a:pt x="3023466" y="2471168"/>
-                  </a:lnTo>
-                  <a:lnTo>
-                    <a:pt x="3101100" y="2546169"/>
-                  </a:lnTo>
-                  <a:lnTo>
-                    <a:pt x="3178734" y="2616408"/>
-                  </a:lnTo>
-                  <a:lnTo>
-                    <a:pt x="3256368" y="2682188"/>
-                  </a:lnTo>
-                  <a:lnTo>
-                    <a:pt x="3334002" y="2743793"/>
-                  </a:lnTo>
-                  <a:lnTo>
-                    <a:pt x="3411636" y="2783833"/>
-                  </a:lnTo>
-                  <a:lnTo>
-                    <a:pt x="3489270" y="2786468"/>
-                  </a:lnTo>
-                  <a:lnTo>
-                    <a:pt x="3566904" y="2789095"/>
-                  </a:lnTo>
-                  <a:lnTo>
-                    <a:pt x="3644538" y="2791714"/>
-                  </a:lnTo>
-                  <a:lnTo>
-                    <a:pt x="3722172" y="2794326"/>
-                  </a:lnTo>
-                  <a:lnTo>
-                    <a:pt x="3799806" y="2796929"/>
-                  </a:lnTo>
-                  <a:lnTo>
-                    <a:pt x="3877440" y="2799524"/>
-                  </a:lnTo>
-                  <a:lnTo>
-                    <a:pt x="3955074" y="2802112"/>
-                  </a:lnTo>
-                  <a:lnTo>
-                    <a:pt x="4032708" y="2804691"/>
-                  </a:lnTo>
-                  <a:lnTo>
-                    <a:pt x="4110342" y="2807263"/>
-                  </a:lnTo>
-                  <a:lnTo>
-                    <a:pt x="4187976" y="2809827"/>
-                  </a:lnTo>
-                  <a:lnTo>
-                    <a:pt x="4265610" y="2812384"/>
-                  </a:lnTo>
-                  <a:lnTo>
-                    <a:pt x="4343244" y="2814932"/>
-                  </a:lnTo>
-                  <a:lnTo>
-                    <a:pt x="4420879" y="2817473"/>
-                  </a:lnTo>
-                  <a:lnTo>
-                    <a:pt x="4498513" y="2820006"/>
-                  </a:lnTo>
-                  <a:lnTo>
-                    <a:pt x="4576147" y="2822531"/>
-                  </a:lnTo>
-                  <a:lnTo>
-                    <a:pt x="4653781" y="2825049"/>
-                  </a:lnTo>
-                  <a:lnTo>
-                    <a:pt x="4731415" y="2827559"/>
-                  </a:lnTo>
-                  <a:lnTo>
-                    <a:pt x="4809049" y="2830062"/>
-                  </a:lnTo>
-                  <a:lnTo>
-                    <a:pt x="4886683" y="2832557"/>
-                  </a:lnTo>
-                  <a:lnTo>
-                    <a:pt x="4964317" y="2835044"/>
-                  </a:lnTo>
-                  <a:lnTo>
-                    <a:pt x="5041951" y="2837524"/>
-                  </a:lnTo>
-                  <a:lnTo>
-                    <a:pt x="5119585" y="2839996"/>
-                  </a:lnTo>
-                  <a:lnTo>
-                    <a:pt x="5197219" y="2842461"/>
-                  </a:lnTo>
-                  <a:lnTo>
-                    <a:pt x="5274853" y="2844918"/>
-                  </a:lnTo>
-                  <a:lnTo>
-                    <a:pt x="5352487" y="2847368"/>
-                  </a:lnTo>
-                  <a:lnTo>
-                    <a:pt x="5430121" y="2849811"/>
-                  </a:lnTo>
-                  <a:lnTo>
-                    <a:pt x="5507755" y="2852246"/>
-                  </a:lnTo>
-                  <a:lnTo>
-                    <a:pt x="5585389" y="2854673"/>
-                  </a:lnTo>
-                  <a:lnTo>
-                    <a:pt x="5663023" y="2857093"/>
-                  </a:lnTo>
-                  <a:lnTo>
-                    <a:pt x="5740657" y="2859506"/>
-                  </a:lnTo>
-                  <a:lnTo>
-                    <a:pt x="5818291" y="2861912"/>
-                  </a:lnTo>
-                  <a:lnTo>
-                    <a:pt x="5895925" y="2864310"/>
-                  </a:lnTo>
-                  <a:lnTo>
-                    <a:pt x="5973559" y="2866701"/>
-                  </a:lnTo>
-                  <a:lnTo>
-                    <a:pt x="6051193" y="2869085"/>
-                  </a:lnTo>
-                  <a:lnTo>
-                    <a:pt x="6128827" y="2871462"/>
-                  </a:lnTo>
-                  <a:lnTo>
-                    <a:pt x="6206462" y="2873831"/>
-                  </a:lnTo>
-                  <a:lnTo>
-                    <a:pt x="6284096" y="2876193"/>
-                  </a:lnTo>
-                  <a:lnTo>
-                    <a:pt x="6361730" y="2878548"/>
-                  </a:lnTo>
-                  <a:lnTo>
-                    <a:pt x="6439364" y="2880896"/>
-                  </a:lnTo>
-                  <a:lnTo>
-                    <a:pt x="6516998" y="2883237"/>
-                  </a:lnTo>
-                  <a:lnTo>
-                    <a:pt x="6594632" y="2885570"/>
-                  </a:lnTo>
-                  <a:lnTo>
-                    <a:pt x="6672266" y="2887897"/>
-                  </a:lnTo>
-                  <a:lnTo>
-                    <a:pt x="6749900" y="2890216"/>
-                  </a:lnTo>
-                  <a:lnTo>
-                    <a:pt x="6827534" y="2892529"/>
-                  </a:lnTo>
-                  <a:lnTo>
-                    <a:pt x="6905168" y="2894834"/>
-                  </a:lnTo>
-                  <a:lnTo>
-                    <a:pt x="6982802" y="2897133"/>
-                  </a:lnTo>
-                  <a:lnTo>
-                    <a:pt x="7060436" y="2899424"/>
-                  </a:lnTo>
-                  <a:lnTo>
-                    <a:pt x="7138070" y="2901709"/>
-                  </a:lnTo>
-                  <a:lnTo>
-                    <a:pt x="7215704" y="2903986"/>
-                  </a:lnTo>
-                  <a:lnTo>
-                    <a:pt x="7293338" y="2906257"/>
-                  </a:lnTo>
-                  <a:lnTo>
-                    <a:pt x="7370972" y="2908521"/>
-                  </a:lnTo>
-                  <a:lnTo>
-                    <a:pt x="7370972" y="3622626"/>
-                  </a:lnTo>
-                  <a:lnTo>
-                    <a:pt x="7293338" y="3620591"/>
-                  </a:lnTo>
-                  <a:lnTo>
-                    <a:pt x="7215704" y="3618419"/>
-                  </a:lnTo>
-                  <a:lnTo>
-                    <a:pt x="7138070" y="3616099"/>
-                  </a:lnTo>
-                  <a:lnTo>
-                    <a:pt x="7060436" y="3613622"/>
-                  </a:lnTo>
-                  <a:lnTo>
-                    <a:pt x="6982802" y="3610977"/>
-                  </a:lnTo>
-                  <a:lnTo>
-                    <a:pt x="6905168" y="3608152"/>
-                  </a:lnTo>
-                  <a:lnTo>
-                    <a:pt x="6827534" y="3605137"/>
-                  </a:lnTo>
-                  <a:lnTo>
-                    <a:pt x="6749900" y="3601916"/>
-                  </a:lnTo>
-                  <a:lnTo>
-                    <a:pt x="6672266" y="3598478"/>
-                  </a:lnTo>
-                  <a:lnTo>
-                    <a:pt x="6594632" y="3594806"/>
-                  </a:lnTo>
-                  <a:lnTo>
-                    <a:pt x="6516998" y="3590886"/>
-                  </a:lnTo>
-                  <a:lnTo>
-                    <a:pt x="6439364" y="3586700"/>
-                  </a:lnTo>
-                  <a:lnTo>
-                    <a:pt x="6361730" y="3582230"/>
-                  </a:lnTo>
-                  <a:lnTo>
-                    <a:pt x="6284096" y="3577457"/>
-                  </a:lnTo>
-                  <a:lnTo>
-                    <a:pt x="6206462" y="3572361"/>
-                  </a:lnTo>
-                  <a:lnTo>
-                    <a:pt x="6128827" y="3566919"/>
-                  </a:lnTo>
-                  <a:lnTo>
-                    <a:pt x="6051193" y="3561109"/>
-                  </a:lnTo>
-                  <a:lnTo>
-                    <a:pt x="5973559" y="3554904"/>
-                  </a:lnTo>
-                  <a:lnTo>
-                    <a:pt x="5895925" y="3548279"/>
-                  </a:lnTo>
-                  <a:lnTo>
-                    <a:pt x="5818291" y="3541205"/>
-                  </a:lnTo>
-                  <a:lnTo>
-                    <a:pt x="5740657" y="3533651"/>
-                  </a:lnTo>
-                  <a:lnTo>
-                    <a:pt x="5663023" y="3525586"/>
-                  </a:lnTo>
-                  <a:lnTo>
-                    <a:pt x="5585389" y="3516973"/>
-                  </a:lnTo>
-                  <a:lnTo>
-                    <a:pt x="5507755" y="3507777"/>
-                  </a:lnTo>
-                  <a:lnTo>
-                    <a:pt x="5430121" y="3497958"/>
-                  </a:lnTo>
-                  <a:lnTo>
-                    <a:pt x="5352487" y="3487473"/>
-                  </a:lnTo>
-                  <a:lnTo>
-                    <a:pt x="5274853" y="3476277"/>
-                  </a:lnTo>
-                  <a:lnTo>
-                    <a:pt x="5197219" y="3464322"/>
-                  </a:lnTo>
-                  <a:lnTo>
-                    <a:pt x="5119585" y="3451557"/>
-                  </a:lnTo>
-                  <a:lnTo>
-                    <a:pt x="5041951" y="3437927"/>
-                  </a:lnTo>
-                  <a:lnTo>
-                    <a:pt x="4964317" y="3423373"/>
-                  </a:lnTo>
-                  <a:lnTo>
-                    <a:pt x="4886683" y="3407832"/>
-                  </a:lnTo>
-                  <a:lnTo>
-                    <a:pt x="4809049" y="3391238"/>
-                  </a:lnTo>
-                  <a:lnTo>
-                    <a:pt x="4731415" y="3373519"/>
-                  </a:lnTo>
-                  <a:lnTo>
-                    <a:pt x="4653781" y="3354599"/>
-                  </a:lnTo>
-                  <a:lnTo>
-                    <a:pt x="4576147" y="3334397"/>
-                  </a:lnTo>
-                  <a:lnTo>
-                    <a:pt x="4498513" y="3312825"/>
-                  </a:lnTo>
-                  <a:lnTo>
-                    <a:pt x="4420879" y="3289791"/>
-                  </a:lnTo>
-                  <a:lnTo>
-                    <a:pt x="4343244" y="3265196"/>
-                  </a:lnTo>
-                  <a:lnTo>
-                    <a:pt x="4265610" y="3238934"/>
-                  </a:lnTo>
-                  <a:lnTo>
-                    <a:pt x="4187976" y="3210891"/>
-                  </a:lnTo>
-                  <a:lnTo>
-                    <a:pt x="4110342" y="3180948"/>
-                  </a:lnTo>
-                  <a:lnTo>
-                    <a:pt x="4032708" y="3148975"/>
-                  </a:lnTo>
-                  <a:lnTo>
-                    <a:pt x="3955074" y="3114834"/>
-                  </a:lnTo>
-                  <a:lnTo>
-                    <a:pt x="3877440" y="3078380"/>
-                  </a:lnTo>
-                  <a:lnTo>
-                    <a:pt x="3799806" y="3039455"/>
-                  </a:lnTo>
-                  <a:lnTo>
-                    <a:pt x="3722172" y="2997891"/>
-                  </a:lnTo>
-                  <a:lnTo>
-                    <a:pt x="3644538" y="2953510"/>
-                  </a:lnTo>
-                  <a:lnTo>
-                    <a:pt x="3566904" y="2906120"/>
-                  </a:lnTo>
-                  <a:lnTo>
-                    <a:pt x="3489270" y="2855519"/>
-                  </a:lnTo>
-                  <a:lnTo>
-                    <a:pt x="3411636" y="2801487"/>
-                  </a:lnTo>
-                  <a:lnTo>
-                    <a:pt x="3334002" y="2781190"/>
-                  </a:lnTo>
-                  <a:lnTo>
-                    <a:pt x="3256368" y="2778539"/>
-                  </a:lnTo>
-                  <a:lnTo>
-                    <a:pt x="3178734" y="2775879"/>
-                  </a:lnTo>
-                  <a:lnTo>
-                    <a:pt x="3101100" y="2773212"/>
-                  </a:lnTo>
-                  <a:lnTo>
-                    <a:pt x="3023466" y="2770536"/>
-                  </a:lnTo>
-                  <a:lnTo>
-                    <a:pt x="2945832" y="2767853"/>
-                  </a:lnTo>
-                  <a:lnTo>
-                    <a:pt x="2868198" y="2765161"/>
-                  </a:lnTo>
-                  <a:lnTo>
-                    <a:pt x="2790564" y="2762461"/>
-                  </a:lnTo>
-                  <a:lnTo>
-                    <a:pt x="2712930" y="2759753"/>
-                  </a:lnTo>
-                  <a:lnTo>
-                    <a:pt x="2635295" y="2757037"/>
-                  </a:lnTo>
-                  <a:lnTo>
-                    <a:pt x="2557661" y="2754312"/>
-                  </a:lnTo>
-                  <a:lnTo>
-                    <a:pt x="2480027" y="2751579"/>
-                  </a:lnTo>
-                  <a:lnTo>
-                    <a:pt x="2402393" y="2748838"/>
-                  </a:lnTo>
-                  <a:lnTo>
-                    <a:pt x="2324759" y="2746088"/>
-                  </a:lnTo>
-                  <a:lnTo>
-                    <a:pt x="2247125" y="2743330"/>
-                  </a:lnTo>
-                  <a:lnTo>
-                    <a:pt x="2169491" y="2740564"/>
-                  </a:lnTo>
-                  <a:lnTo>
-                    <a:pt x="2091857" y="2737789"/>
-                  </a:lnTo>
-                  <a:lnTo>
-                    <a:pt x="2014223" y="2735006"/>
-                  </a:lnTo>
-                  <a:lnTo>
-                    <a:pt x="1936589" y="2732214"/>
-                  </a:lnTo>
-                  <a:lnTo>
-                    <a:pt x="1858955" y="2729414"/>
-                  </a:lnTo>
-                  <a:lnTo>
-                    <a:pt x="1781321" y="2726605"/>
-                  </a:lnTo>
-                  <a:lnTo>
-                    <a:pt x="1703687" y="2723788"/>
-                  </a:lnTo>
-                  <a:lnTo>
-                    <a:pt x="1626053" y="2720962"/>
-                  </a:lnTo>
-                  <a:lnTo>
-                    <a:pt x="1548419" y="2718128"/>
-                  </a:lnTo>
-                  <a:lnTo>
-                    <a:pt x="1470785" y="2715285"/>
-                  </a:lnTo>
-                  <a:lnTo>
-                    <a:pt x="1393151" y="2712433"/>
-                  </a:lnTo>
-                  <a:lnTo>
-                    <a:pt x="1315517" y="2709573"/>
-                  </a:lnTo>
-                  <a:lnTo>
-                    <a:pt x="1237883" y="2706704"/>
-                  </a:lnTo>
-                  <a:lnTo>
-                    <a:pt x="1160249" y="2703826"/>
-                  </a:lnTo>
-                  <a:lnTo>
-                    <a:pt x="1082615" y="2700939"/>
-                  </a:lnTo>
-                  <a:lnTo>
-                    <a:pt x="1004981" y="2698044"/>
-                  </a:lnTo>
-                  <a:lnTo>
-                    <a:pt x="927346" y="2695140"/>
-                  </a:lnTo>
-                  <a:lnTo>
-                    <a:pt x="849712" y="2692227"/>
-                  </a:lnTo>
-                  <a:lnTo>
-                    <a:pt x="772078" y="2689305"/>
-                  </a:lnTo>
-                  <a:lnTo>
-                    <a:pt x="694444" y="2686374"/>
-                  </a:lnTo>
-                  <a:lnTo>
-                    <a:pt x="616810" y="2683435"/>
-                  </a:lnTo>
-                  <a:lnTo>
-                    <a:pt x="539176" y="2680486"/>
-                  </a:lnTo>
-                  <a:lnTo>
-                    <a:pt x="461542" y="2677528"/>
-                  </a:lnTo>
-                  <a:lnTo>
-                    <a:pt x="383908" y="2674562"/>
-                  </a:lnTo>
-                  <a:lnTo>
-                    <a:pt x="306274" y="2671586"/>
-                  </a:lnTo>
-                  <a:lnTo>
-                    <a:pt x="228640" y="2668602"/>
-                  </a:lnTo>
-                  <a:lnTo>
-                    <a:pt x="151006" y="2665608"/>
-                  </a:lnTo>
-                  <a:lnTo>
-                    <a:pt x="73372" y="2662605"/>
-                  </a:lnTo>
-                  <a:lnTo>
-                    <a:pt x="0" y="2659759"/>
+                    <a:pt x="1626053" y="110423"/>
+                  </a:lnTo>
+                  <a:lnTo>
+                    <a:pt x="1703687" y="323185"/>
+                  </a:lnTo>
+                  <a:lnTo>
+                    <a:pt x="1781321" y="523168"/>
+                  </a:lnTo>
+                  <a:lnTo>
+                    <a:pt x="1858955" y="711139"/>
+                  </a:lnTo>
+                  <a:lnTo>
+                    <a:pt x="1936589" y="887820"/>
+                  </a:lnTo>
+                  <a:lnTo>
+                    <a:pt x="2014223" y="1053889"/>
+                  </a:lnTo>
+                  <a:lnTo>
+                    <a:pt x="2091857" y="1209982"/>
+                  </a:lnTo>
+                  <a:lnTo>
+                    <a:pt x="2169491" y="1356700"/>
+                  </a:lnTo>
+                  <a:lnTo>
+                    <a:pt x="2247125" y="1494605"/>
+                  </a:lnTo>
+                  <a:lnTo>
+                    <a:pt x="2324759" y="1624227"/>
+                  </a:lnTo>
+                  <a:lnTo>
+                    <a:pt x="2402393" y="1746063"/>
+                  </a:lnTo>
+                  <a:lnTo>
+                    <a:pt x="2480027" y="1860582"/>
+                  </a:lnTo>
+                  <a:lnTo>
+                    <a:pt x="2557661" y="1968221"/>
+                  </a:lnTo>
+                  <a:lnTo>
+                    <a:pt x="2635295" y="2069396"/>
+                  </a:lnTo>
+                  <a:lnTo>
+                    <a:pt x="2712930" y="2164493"/>
+                  </a:lnTo>
+                  <a:lnTo>
+                    <a:pt x="2790564" y="2253878"/>
+                  </a:lnTo>
+                  <a:lnTo>
+                    <a:pt x="2868198" y="2337895"/>
+                  </a:lnTo>
+                  <a:lnTo>
+                    <a:pt x="2945832" y="2416865"/>
+                  </a:lnTo>
+                  <a:lnTo>
+                    <a:pt x="3023466" y="2491092"/>
+                  </a:lnTo>
+                  <a:lnTo>
+                    <a:pt x="3101100" y="2560860"/>
+                  </a:lnTo>
+                  <a:lnTo>
+                    <a:pt x="3178734" y="2626438"/>
+                  </a:lnTo>
+                  <a:lnTo>
+                    <a:pt x="3256368" y="2688076"/>
+                  </a:lnTo>
+                  <a:lnTo>
+                    <a:pt x="3334002" y="2746013"/>
+                  </a:lnTo>
+                  <a:lnTo>
+                    <a:pt x="3411636" y="2779650"/>
+                  </a:lnTo>
+                  <a:lnTo>
+                    <a:pt x="3489270" y="2769470"/>
+                  </a:lnTo>
+                  <a:lnTo>
+                    <a:pt x="3566904" y="2759170"/>
+                  </a:lnTo>
+                  <a:lnTo>
+                    <a:pt x="3644538" y="2748751"/>
+                  </a:lnTo>
+                  <a:lnTo>
+                    <a:pt x="3722172" y="2738210"/>
+                  </a:lnTo>
+                  <a:lnTo>
+                    <a:pt x="3799806" y="2727546"/>
+                  </a:lnTo>
+                  <a:lnTo>
+                    <a:pt x="3877440" y="2716757"/>
+                  </a:lnTo>
+                  <a:lnTo>
+                    <a:pt x="3955074" y="2705843"/>
+                  </a:lnTo>
+                  <a:lnTo>
+                    <a:pt x="4032708" y="2694802"/>
+                  </a:lnTo>
+                  <a:lnTo>
+                    <a:pt x="4110342" y="2683632"/>
+                  </a:lnTo>
+                  <a:lnTo>
+                    <a:pt x="4187976" y="2672331"/>
+                  </a:lnTo>
+                  <a:lnTo>
+                    <a:pt x="4265610" y="2660899"/>
+                  </a:lnTo>
+                  <a:lnTo>
+                    <a:pt x="4343244" y="2649333"/>
+                  </a:lnTo>
+                  <a:lnTo>
+                    <a:pt x="4420879" y="2637633"/>
+                  </a:lnTo>
+                  <a:lnTo>
+                    <a:pt x="4498513" y="2625796"/>
+                  </a:lnTo>
+                  <a:lnTo>
+                    <a:pt x="4576147" y="2613821"/>
+                  </a:lnTo>
+                  <a:lnTo>
+                    <a:pt x="4653781" y="2601707"/>
+                  </a:lnTo>
+                  <a:lnTo>
+                    <a:pt x="4731415" y="2589451"/>
+                  </a:lnTo>
+                  <a:lnTo>
+                    <a:pt x="4809049" y="2577052"/>
+                  </a:lnTo>
+                  <a:lnTo>
+                    <a:pt x="4886683" y="2564509"/>
+                  </a:lnTo>
+                  <a:lnTo>
+                    <a:pt x="4964317" y="2551819"/>
+                  </a:lnTo>
+                  <a:lnTo>
+                    <a:pt x="5041951" y="2538982"/>
+                  </a:lnTo>
+                  <a:lnTo>
+                    <a:pt x="5119585" y="2525994"/>
+                  </a:lnTo>
+                  <a:lnTo>
+                    <a:pt x="5197219" y="2512855"/>
+                  </a:lnTo>
+                  <a:lnTo>
+                    <a:pt x="5274853" y="2499563"/>
+                  </a:lnTo>
+                  <a:lnTo>
+                    <a:pt x="5352487" y="2486116"/>
+                  </a:lnTo>
+                  <a:lnTo>
+                    <a:pt x="5430121" y="2472513"/>
+                  </a:lnTo>
+                  <a:lnTo>
+                    <a:pt x="5507755" y="2458750"/>
+                  </a:lnTo>
+                  <a:lnTo>
+                    <a:pt x="5585389" y="2444827"/>
+                  </a:lnTo>
+                  <a:lnTo>
+                    <a:pt x="5663023" y="2430742"/>
+                  </a:lnTo>
+                  <a:lnTo>
+                    <a:pt x="5740657" y="2416492"/>
+                  </a:lnTo>
+                  <a:lnTo>
+                    <a:pt x="5818291" y="2402076"/>
+                  </a:lnTo>
+                  <a:lnTo>
+                    <a:pt x="5895925" y="2387493"/>
+                  </a:lnTo>
+                  <a:lnTo>
+                    <a:pt x="5973559" y="2372739"/>
+                  </a:lnTo>
+                  <a:lnTo>
+                    <a:pt x="6051193" y="2357813"/>
+                  </a:lnTo>
+                  <a:lnTo>
+                    <a:pt x="6128827" y="2342712"/>
+                  </a:lnTo>
+                  <a:lnTo>
+                    <a:pt x="6206462" y="2327436"/>
+                  </a:lnTo>
+                  <a:lnTo>
+                    <a:pt x="6284096" y="2311982"/>
+                  </a:lnTo>
+                  <a:lnTo>
+                    <a:pt x="6361730" y="2296347"/>
+                  </a:lnTo>
+                  <a:lnTo>
+                    <a:pt x="6439364" y="2280531"/>
+                  </a:lnTo>
+                  <a:lnTo>
+                    <a:pt x="6516998" y="2264529"/>
+                  </a:lnTo>
+                  <a:lnTo>
+                    <a:pt x="6594632" y="2248341"/>
+                  </a:lnTo>
+                  <a:lnTo>
+                    <a:pt x="6672266" y="2231965"/>
+                  </a:lnTo>
+                  <a:lnTo>
+                    <a:pt x="6749900" y="2215397"/>
+                  </a:lnTo>
+                  <a:lnTo>
+                    <a:pt x="6827534" y="2198636"/>
+                  </a:lnTo>
+                  <a:lnTo>
+                    <a:pt x="6905168" y="2181680"/>
+                  </a:lnTo>
+                  <a:lnTo>
+                    <a:pt x="6982802" y="2164525"/>
+                  </a:lnTo>
+                  <a:lnTo>
+                    <a:pt x="7060436" y="2147171"/>
+                  </a:lnTo>
+                  <a:lnTo>
+                    <a:pt x="7138070" y="2129615"/>
+                  </a:lnTo>
+                  <a:lnTo>
+                    <a:pt x="7215704" y="2111853"/>
+                  </a:lnTo>
+                  <a:lnTo>
+                    <a:pt x="7293338" y="2093885"/>
+                  </a:lnTo>
+                  <a:lnTo>
+                    <a:pt x="7370972" y="2075707"/>
+                  </a:lnTo>
+                  <a:lnTo>
+                    <a:pt x="7370972" y="3616459"/>
+                  </a:lnTo>
+                  <a:lnTo>
+                    <a:pt x="7293338" y="3614146"/>
+                  </a:lnTo>
+                  <a:lnTo>
+                    <a:pt x="7215704" y="3611686"/>
+                  </a:lnTo>
+                  <a:lnTo>
+                    <a:pt x="7138070" y="3609069"/>
+                  </a:lnTo>
+                  <a:lnTo>
+                    <a:pt x="7060436" y="3606285"/>
+                  </a:lnTo>
+                  <a:lnTo>
+                    <a:pt x="6982802" y="3603322"/>
+                  </a:lnTo>
+                  <a:lnTo>
+                    <a:pt x="6905168" y="3600170"/>
+                  </a:lnTo>
+                  <a:lnTo>
+                    <a:pt x="6827534" y="3596817"/>
+                  </a:lnTo>
+                  <a:lnTo>
+                    <a:pt x="6749900" y="3593250"/>
+                  </a:lnTo>
+                  <a:lnTo>
+                    <a:pt x="6672266" y="3589454"/>
+                  </a:lnTo>
+                  <a:lnTo>
+                    <a:pt x="6594632" y="3585416"/>
+                  </a:lnTo>
+                  <a:lnTo>
+                    <a:pt x="6516998" y="3581120"/>
+                  </a:lnTo>
+                  <a:lnTo>
+                    <a:pt x="6439364" y="3576550"/>
+                  </a:lnTo>
+                  <a:lnTo>
+                    <a:pt x="6361730" y="3571687"/>
+                  </a:lnTo>
+                  <a:lnTo>
+                    <a:pt x="6284096" y="3566514"/>
+                  </a:lnTo>
+                  <a:lnTo>
+                    <a:pt x="6206462" y="3561010"/>
+                  </a:lnTo>
+                  <a:lnTo>
+                    <a:pt x="6128827" y="3555154"/>
+                  </a:lnTo>
+                  <a:lnTo>
+                    <a:pt x="6051193" y="3548924"/>
+                  </a:lnTo>
+                  <a:lnTo>
+                    <a:pt x="5973559" y="3542296"/>
+                  </a:lnTo>
+                  <a:lnTo>
+                    <a:pt x="5895925" y="3535245"/>
+                  </a:lnTo>
+                  <a:lnTo>
+                    <a:pt x="5818291" y="3527743"/>
+                  </a:lnTo>
+                  <a:lnTo>
+                    <a:pt x="5740657" y="3519761"/>
+                  </a:lnTo>
+                  <a:lnTo>
+                    <a:pt x="5663023" y="3511270"/>
+                  </a:lnTo>
+                  <a:lnTo>
+                    <a:pt x="5585389" y="3502235"/>
+                  </a:lnTo>
+                  <a:lnTo>
+                    <a:pt x="5507755" y="3492624"/>
+                  </a:lnTo>
+                  <a:lnTo>
+                    <a:pt x="5430121" y="3482398"/>
+                  </a:lnTo>
+                  <a:lnTo>
+                    <a:pt x="5352487" y="3471519"/>
+                  </a:lnTo>
+                  <a:lnTo>
+                    <a:pt x="5274853" y="3459945"/>
+                  </a:lnTo>
+                  <a:lnTo>
+                    <a:pt x="5197219" y="3447631"/>
+                  </a:lnTo>
+                  <a:lnTo>
+                    <a:pt x="5119585" y="3434530"/>
+                  </a:lnTo>
+                  <a:lnTo>
+                    <a:pt x="5041951" y="3420591"/>
+                  </a:lnTo>
+                  <a:lnTo>
+                    <a:pt x="4964317" y="3405763"/>
+                  </a:lnTo>
+                  <a:lnTo>
+                    <a:pt x="4886683" y="3389986"/>
+                  </a:lnTo>
+                  <a:lnTo>
+                    <a:pt x="4809049" y="3373202"/>
+                  </a:lnTo>
+                  <a:lnTo>
+                    <a:pt x="4731415" y="3355344"/>
+                  </a:lnTo>
+                  <a:lnTo>
+                    <a:pt x="4653781" y="3336346"/>
+                  </a:lnTo>
+                  <a:lnTo>
+                    <a:pt x="4576147" y="3316134"/>
+                  </a:lnTo>
+                  <a:lnTo>
+                    <a:pt x="4498513" y="3294630"/>
+                  </a:lnTo>
+                  <a:lnTo>
+                    <a:pt x="4420879" y="3271752"/>
+                  </a:lnTo>
+                  <a:lnTo>
+                    <a:pt x="4343244" y="3247412"/>
+                  </a:lnTo>
+                  <a:lnTo>
+                    <a:pt x="4265610" y="3221516"/>
+                  </a:lnTo>
+                  <a:lnTo>
+                    <a:pt x="4187976" y="3193966"/>
+                  </a:lnTo>
+                  <a:lnTo>
+                    <a:pt x="4110342" y="3164655"/>
+                  </a:lnTo>
+                  <a:lnTo>
+                    <a:pt x="4032708" y="3133471"/>
+                  </a:lnTo>
+                  <a:lnTo>
+                    <a:pt x="3955074" y="3100294"/>
+                  </a:lnTo>
+                  <a:lnTo>
+                    <a:pt x="3877440" y="3064997"/>
+                  </a:lnTo>
+                  <a:lnTo>
+                    <a:pt x="3799806" y="3027445"/>
+                  </a:lnTo>
+                  <a:lnTo>
+                    <a:pt x="3722172" y="2987493"/>
+                  </a:lnTo>
+                  <a:lnTo>
+                    <a:pt x="3644538" y="2944988"/>
+                  </a:lnTo>
+                  <a:lnTo>
+                    <a:pt x="3566904" y="2899766"/>
+                  </a:lnTo>
+                  <a:lnTo>
+                    <a:pt x="3489270" y="2851655"/>
+                  </a:lnTo>
+                  <a:lnTo>
+                    <a:pt x="3411636" y="2800469"/>
+                  </a:lnTo>
+                  <a:lnTo>
+                    <a:pt x="3334002" y="2789714"/>
+                  </a:lnTo>
+                  <a:lnTo>
+                    <a:pt x="3256368" y="2799661"/>
+                  </a:lnTo>
+                  <a:lnTo>
+                    <a:pt x="3178734" y="2809494"/>
+                  </a:lnTo>
+                  <a:lnTo>
+                    <a:pt x="3101100" y="2819213"/>
+                  </a:lnTo>
+                  <a:lnTo>
+                    <a:pt x="3023466" y="2828820"/>
+                  </a:lnTo>
+                  <a:lnTo>
+                    <a:pt x="2945832" y="2838317"/>
+                  </a:lnTo>
+                  <a:lnTo>
+                    <a:pt x="2868198" y="2847704"/>
+                  </a:lnTo>
+                  <a:lnTo>
+                    <a:pt x="2790564" y="2856983"/>
+                  </a:lnTo>
+                  <a:lnTo>
+                    <a:pt x="2712930" y="2866155"/>
+                  </a:lnTo>
+                  <a:lnTo>
+                    <a:pt x="2635295" y="2875221"/>
+                  </a:lnTo>
+                  <a:lnTo>
+                    <a:pt x="2557661" y="2884182"/>
+                  </a:lnTo>
+                  <a:lnTo>
+                    <a:pt x="2480027" y="2893041"/>
+                  </a:lnTo>
+                  <a:lnTo>
+                    <a:pt x="2402393" y="2901797"/>
+                  </a:lnTo>
+                  <a:lnTo>
+                    <a:pt x="2324759" y="2910452"/>
+                  </a:lnTo>
+                  <a:lnTo>
+                    <a:pt x="2247125" y="2919008"/>
+                  </a:lnTo>
+                  <a:lnTo>
+                    <a:pt x="2169491" y="2927465"/>
+                  </a:lnTo>
+                  <a:lnTo>
+                    <a:pt x="2091857" y="2935824"/>
+                  </a:lnTo>
+                  <a:lnTo>
+                    <a:pt x="2014223" y="2944087"/>
+                  </a:lnTo>
+                  <a:lnTo>
+                    <a:pt x="1936589" y="2952255"/>
+                  </a:lnTo>
+                  <a:lnTo>
+                    <a:pt x="1858955" y="2960329"/>
+                  </a:lnTo>
+                  <a:lnTo>
+                    <a:pt x="1781321" y="2968309"/>
+                  </a:lnTo>
+                  <a:lnTo>
+                    <a:pt x="1703687" y="2976198"/>
+                  </a:lnTo>
+                  <a:lnTo>
+                    <a:pt x="1626053" y="2983995"/>
+                  </a:lnTo>
+                  <a:lnTo>
+                    <a:pt x="1548419" y="2991703"/>
+                  </a:lnTo>
+                  <a:lnTo>
+                    <a:pt x="1470785" y="2999322"/>
+                  </a:lnTo>
+                  <a:lnTo>
+                    <a:pt x="1393151" y="3006853"/>
+                  </a:lnTo>
+                  <a:lnTo>
+                    <a:pt x="1315517" y="3014297"/>
+                  </a:lnTo>
+                  <a:lnTo>
+                    <a:pt x="1237883" y="3021656"/>
+                  </a:lnTo>
+                  <a:lnTo>
+                    <a:pt x="1160249" y="3028930"/>
+                  </a:lnTo>
+                  <a:lnTo>
+                    <a:pt x="1082615" y="3036119"/>
+                  </a:lnTo>
+                  <a:lnTo>
+                    <a:pt x="1004981" y="3043226"/>
+                  </a:lnTo>
+                  <a:lnTo>
+                    <a:pt x="927346" y="3050251"/>
+                  </a:lnTo>
+                  <a:lnTo>
+                    <a:pt x="849712" y="3057195"/>
+                  </a:lnTo>
+                  <a:lnTo>
+                    <a:pt x="772078" y="3064059"/>
+                  </a:lnTo>
+                  <a:lnTo>
+                    <a:pt x="694444" y="3070844"/>
+                  </a:lnTo>
+                  <a:lnTo>
+                    <a:pt x="616810" y="3077551"/>
+                  </a:lnTo>
+                  <a:lnTo>
+                    <a:pt x="539176" y="3084180"/>
+                  </a:lnTo>
+                  <a:lnTo>
+                    <a:pt x="461542" y="3090733"/>
+                  </a:lnTo>
+                  <a:lnTo>
+                    <a:pt x="383908" y="3097210"/>
+                  </a:lnTo>
+                  <a:lnTo>
+                    <a:pt x="306274" y="3103613"/>
+                  </a:lnTo>
+                  <a:lnTo>
+                    <a:pt x="228640" y="3109942"/>
+                  </a:lnTo>
+                  <a:lnTo>
+                    <a:pt x="151006" y="3116198"/>
+                  </a:lnTo>
+                  <a:lnTo>
+                    <a:pt x="73372" y="3122382"/>
+                  </a:lnTo>
+                  <a:lnTo>
+                    <a:pt x="0" y="3128159"/>
                   </a:lnTo>
                   <a:close/>
                 </a:path>
@@ -3546,237 +3549,240 @@
           </p:nvSpPr>
           <p:spPr>
             <a:xfrm>
-              <a:off x="2505349" y="1896563"/>
-              <a:ext cx="5683140" cy="2908521"/>
+              <a:off x="2405699" y="1896563"/>
+              <a:ext cx="5782791" cy="2779650"/>
             </a:xfrm>
             <a:custGeom>
               <a:avLst/>
               <a:pathLst>
-                <a:path w="5683140" h="2908521">
+                <a:path w="5782791" h="2779650">
                   <a:moveTo>
                     <a:pt x="0" y="0"/>
                   </a:moveTo>
                   <a:lnTo>
-                    <a:pt x="15855" y="49875"/>
-                  </a:lnTo>
-                  <a:lnTo>
-                    <a:pt x="93489" y="278579"/>
-                  </a:lnTo>
-                  <a:lnTo>
-                    <a:pt x="171123" y="492766"/>
-                  </a:lnTo>
-                  <a:lnTo>
-                    <a:pt x="248757" y="693355"/>
-                  </a:lnTo>
-                  <a:lnTo>
-                    <a:pt x="326391" y="881212"/>
-                  </a:lnTo>
-                  <a:lnTo>
-                    <a:pt x="404025" y="1057143"/>
-                  </a:lnTo>
-                  <a:lnTo>
-                    <a:pt x="481659" y="1221906"/>
-                  </a:lnTo>
-                  <a:lnTo>
-                    <a:pt x="559293" y="1376209"/>
-                  </a:lnTo>
-                  <a:lnTo>
-                    <a:pt x="636927" y="1520718"/>
-                  </a:lnTo>
-                  <a:lnTo>
-                    <a:pt x="714561" y="1656053"/>
-                  </a:lnTo>
-                  <a:lnTo>
-                    <a:pt x="792195" y="1782797"/>
-                  </a:lnTo>
-                  <a:lnTo>
-                    <a:pt x="869829" y="1901495"/>
-                  </a:lnTo>
-                  <a:lnTo>
-                    <a:pt x="947463" y="2012659"/>
-                  </a:lnTo>
-                  <a:lnTo>
-                    <a:pt x="1025098" y="2116765"/>
-                  </a:lnTo>
-                  <a:lnTo>
-                    <a:pt x="1102732" y="2214263"/>
-                  </a:lnTo>
-                  <a:lnTo>
-                    <a:pt x="1180366" y="2305572"/>
-                  </a:lnTo>
-                  <a:lnTo>
-                    <a:pt x="1258000" y="2391084"/>
-                  </a:lnTo>
-                  <a:lnTo>
-                    <a:pt x="1335634" y="2471168"/>
-                  </a:lnTo>
-                  <a:lnTo>
-                    <a:pt x="1413268" y="2546169"/>
-                  </a:lnTo>
-                  <a:lnTo>
-                    <a:pt x="1490902" y="2616408"/>
-                  </a:lnTo>
-                  <a:lnTo>
-                    <a:pt x="1568536" y="2682188"/>
-                  </a:lnTo>
-                  <a:lnTo>
-                    <a:pt x="1646170" y="2743793"/>
-                  </a:lnTo>
-                  <a:lnTo>
-                    <a:pt x="1723804" y="2783833"/>
-                  </a:lnTo>
-                  <a:lnTo>
-                    <a:pt x="1801438" y="2786468"/>
-                  </a:lnTo>
-                  <a:lnTo>
-                    <a:pt x="1879072" y="2789095"/>
-                  </a:lnTo>
-                  <a:lnTo>
-                    <a:pt x="1956706" y="2791714"/>
-                  </a:lnTo>
-                  <a:lnTo>
-                    <a:pt x="2034340" y="2794326"/>
-                  </a:lnTo>
-                  <a:lnTo>
-                    <a:pt x="2111974" y="2796929"/>
-                  </a:lnTo>
-                  <a:lnTo>
-                    <a:pt x="2189608" y="2799524"/>
-                  </a:lnTo>
-                  <a:lnTo>
-                    <a:pt x="2267242" y="2802112"/>
-                  </a:lnTo>
-                  <a:lnTo>
-                    <a:pt x="2344876" y="2804691"/>
-                  </a:lnTo>
-                  <a:lnTo>
-                    <a:pt x="2422510" y="2807263"/>
-                  </a:lnTo>
-                  <a:lnTo>
-                    <a:pt x="2500144" y="2809827"/>
-                  </a:lnTo>
-                  <a:lnTo>
-                    <a:pt x="2577778" y="2812384"/>
-                  </a:lnTo>
-                  <a:lnTo>
-                    <a:pt x="2655412" y="2814932"/>
-                  </a:lnTo>
-                  <a:lnTo>
-                    <a:pt x="2733047" y="2817473"/>
-                  </a:lnTo>
-                  <a:lnTo>
-                    <a:pt x="2810681" y="2820006"/>
-                  </a:lnTo>
-                  <a:lnTo>
-                    <a:pt x="2888315" y="2822531"/>
-                  </a:lnTo>
-                  <a:lnTo>
-                    <a:pt x="2965949" y="2825049"/>
-                  </a:lnTo>
-                  <a:lnTo>
-                    <a:pt x="3043583" y="2827559"/>
-                  </a:lnTo>
-                  <a:lnTo>
-                    <a:pt x="3121217" y="2830062"/>
-                  </a:lnTo>
-                  <a:lnTo>
-                    <a:pt x="3198851" y="2832557"/>
-                  </a:lnTo>
-                  <a:lnTo>
-                    <a:pt x="3276485" y="2835044"/>
-                  </a:lnTo>
-                  <a:lnTo>
-                    <a:pt x="3354119" y="2837524"/>
-                  </a:lnTo>
-                  <a:lnTo>
-                    <a:pt x="3431753" y="2839996"/>
-                  </a:lnTo>
-                  <a:lnTo>
-                    <a:pt x="3509387" y="2842461"/>
-                  </a:lnTo>
-                  <a:lnTo>
-                    <a:pt x="3587021" y="2844918"/>
-                  </a:lnTo>
-                  <a:lnTo>
-                    <a:pt x="3664655" y="2847368"/>
-                  </a:lnTo>
-                  <a:lnTo>
-                    <a:pt x="3742289" y="2849811"/>
-                  </a:lnTo>
-                  <a:lnTo>
-                    <a:pt x="3819923" y="2852246"/>
-                  </a:lnTo>
-                  <a:lnTo>
-                    <a:pt x="3897557" y="2854673"/>
-                  </a:lnTo>
-                  <a:lnTo>
-                    <a:pt x="3975191" y="2857093"/>
-                  </a:lnTo>
-                  <a:lnTo>
-                    <a:pt x="4052825" y="2859506"/>
-                  </a:lnTo>
-                  <a:lnTo>
-                    <a:pt x="4130459" y="2861912"/>
-                  </a:lnTo>
-                  <a:lnTo>
-                    <a:pt x="4208093" y="2864310"/>
-                  </a:lnTo>
-                  <a:lnTo>
-                    <a:pt x="4285727" y="2866701"/>
-                  </a:lnTo>
-                  <a:lnTo>
-                    <a:pt x="4363361" y="2869085"/>
-                  </a:lnTo>
-                  <a:lnTo>
-                    <a:pt x="4440996" y="2871462"/>
-                  </a:lnTo>
-                  <a:lnTo>
-                    <a:pt x="4518630" y="2873831"/>
-                  </a:lnTo>
-                  <a:lnTo>
-                    <a:pt x="4596264" y="2876193"/>
-                  </a:lnTo>
-                  <a:lnTo>
-                    <a:pt x="4673898" y="2878548"/>
-                  </a:lnTo>
-                  <a:lnTo>
-                    <a:pt x="4751532" y="2880896"/>
-                  </a:lnTo>
-                  <a:lnTo>
-                    <a:pt x="4829166" y="2883237"/>
-                  </a:lnTo>
-                  <a:lnTo>
-                    <a:pt x="4906800" y="2885570"/>
-                  </a:lnTo>
-                  <a:lnTo>
-                    <a:pt x="4984434" y="2887897"/>
-                  </a:lnTo>
-                  <a:lnTo>
-                    <a:pt x="5062068" y="2890216"/>
-                  </a:lnTo>
-                  <a:lnTo>
-                    <a:pt x="5139702" y="2892529"/>
-                  </a:lnTo>
-                  <a:lnTo>
-                    <a:pt x="5217336" y="2894834"/>
-                  </a:lnTo>
-                  <a:lnTo>
-                    <a:pt x="5294970" y="2897133"/>
-                  </a:lnTo>
-                  <a:lnTo>
-                    <a:pt x="5372604" y="2899424"/>
-                  </a:lnTo>
-                  <a:lnTo>
-                    <a:pt x="5450238" y="2901709"/>
-                  </a:lnTo>
-                  <a:lnTo>
-                    <a:pt x="5527872" y="2903986"/>
-                  </a:lnTo>
-                  <a:lnTo>
-                    <a:pt x="5605506" y="2906257"/>
-                  </a:lnTo>
-                  <a:lnTo>
-                    <a:pt x="5683140" y="2908521"/>
+                    <a:pt x="37871" y="110423"/>
+                  </a:lnTo>
+                  <a:lnTo>
+                    <a:pt x="115505" y="323185"/>
+                  </a:lnTo>
+                  <a:lnTo>
+                    <a:pt x="193139" y="523168"/>
+                  </a:lnTo>
+                  <a:lnTo>
+                    <a:pt x="270773" y="711139"/>
+                  </a:lnTo>
+                  <a:lnTo>
+                    <a:pt x="348407" y="887820"/>
+                  </a:lnTo>
+                  <a:lnTo>
+                    <a:pt x="426041" y="1053889"/>
+                  </a:lnTo>
+                  <a:lnTo>
+                    <a:pt x="503676" y="1209982"/>
+                  </a:lnTo>
+                  <a:lnTo>
+                    <a:pt x="581310" y="1356700"/>
+                  </a:lnTo>
+                  <a:lnTo>
+                    <a:pt x="658944" y="1494605"/>
+                  </a:lnTo>
+                  <a:lnTo>
+                    <a:pt x="736578" y="1624227"/>
+                  </a:lnTo>
+                  <a:lnTo>
+                    <a:pt x="814212" y="1746063"/>
+                  </a:lnTo>
+                  <a:lnTo>
+                    <a:pt x="891846" y="1860582"/>
+                  </a:lnTo>
+                  <a:lnTo>
+                    <a:pt x="969480" y="1968221"/>
+                  </a:lnTo>
+                  <a:lnTo>
+                    <a:pt x="1047114" y="2069396"/>
+                  </a:lnTo>
+                  <a:lnTo>
+                    <a:pt x="1124748" y="2164493"/>
+                  </a:lnTo>
+                  <a:lnTo>
+                    <a:pt x="1202382" y="2253878"/>
+                  </a:lnTo>
+                  <a:lnTo>
+                    <a:pt x="1280016" y="2337895"/>
+                  </a:lnTo>
+                  <a:lnTo>
+                    <a:pt x="1357650" y="2416865"/>
+                  </a:lnTo>
+                  <a:lnTo>
+                    <a:pt x="1435284" y="2491092"/>
+                  </a:lnTo>
+                  <a:lnTo>
+                    <a:pt x="1512918" y="2560860"/>
+                  </a:lnTo>
+                  <a:lnTo>
+                    <a:pt x="1590552" y="2626438"/>
+                  </a:lnTo>
+                  <a:lnTo>
+                    <a:pt x="1668186" y="2688076"/>
+                  </a:lnTo>
+                  <a:lnTo>
+                    <a:pt x="1745820" y="2746013"/>
+                  </a:lnTo>
+                  <a:lnTo>
+                    <a:pt x="1823454" y="2779650"/>
+                  </a:lnTo>
+                  <a:lnTo>
+                    <a:pt x="1901088" y="2769470"/>
+                  </a:lnTo>
+                  <a:lnTo>
+                    <a:pt x="1978722" y="2759170"/>
+                  </a:lnTo>
+                  <a:lnTo>
+                    <a:pt x="2056356" y="2748751"/>
+                  </a:lnTo>
+                  <a:lnTo>
+                    <a:pt x="2133990" y="2738210"/>
+                  </a:lnTo>
+                  <a:lnTo>
+                    <a:pt x="2211624" y="2727546"/>
+                  </a:lnTo>
+                  <a:lnTo>
+                    <a:pt x="2289259" y="2716757"/>
+                  </a:lnTo>
+                  <a:lnTo>
+                    <a:pt x="2366893" y="2705843"/>
+                  </a:lnTo>
+                  <a:lnTo>
+                    <a:pt x="2444527" y="2694802"/>
+                  </a:lnTo>
+                  <a:lnTo>
+                    <a:pt x="2522161" y="2683632"/>
+                  </a:lnTo>
+                  <a:lnTo>
+                    <a:pt x="2599795" y="2672331"/>
+                  </a:lnTo>
+                  <a:lnTo>
+                    <a:pt x="2677429" y="2660899"/>
+                  </a:lnTo>
+                  <a:lnTo>
+                    <a:pt x="2755063" y="2649333"/>
+                  </a:lnTo>
+                  <a:lnTo>
+                    <a:pt x="2832697" y="2637633"/>
+                  </a:lnTo>
+                  <a:lnTo>
+                    <a:pt x="2910331" y="2625796"/>
+                  </a:lnTo>
+                  <a:lnTo>
+                    <a:pt x="2987965" y="2613821"/>
+                  </a:lnTo>
+                  <a:lnTo>
+                    <a:pt x="3065599" y="2601707"/>
+                  </a:lnTo>
+                  <a:lnTo>
+                    <a:pt x="3143233" y="2589451"/>
+                  </a:lnTo>
+                  <a:lnTo>
+                    <a:pt x="3220867" y="2577052"/>
+                  </a:lnTo>
+                  <a:lnTo>
+                    <a:pt x="3298501" y="2564509"/>
+                  </a:lnTo>
+                  <a:lnTo>
+                    <a:pt x="3376135" y="2551819"/>
+                  </a:lnTo>
+                  <a:lnTo>
+                    <a:pt x="3453769" y="2538982"/>
+                  </a:lnTo>
+                  <a:lnTo>
+                    <a:pt x="3531403" y="2525994"/>
+                  </a:lnTo>
+                  <a:lnTo>
+                    <a:pt x="3609037" y="2512855"/>
+                  </a:lnTo>
+                  <a:lnTo>
+                    <a:pt x="3686671" y="2499563"/>
+                  </a:lnTo>
+                  <a:lnTo>
+                    <a:pt x="3764305" y="2486116"/>
+                  </a:lnTo>
+                  <a:lnTo>
+                    <a:pt x="3841939" y="2472513"/>
+                  </a:lnTo>
+                  <a:lnTo>
+                    <a:pt x="3919573" y="2458750"/>
+                  </a:lnTo>
+                  <a:lnTo>
+                    <a:pt x="3997208" y="2444827"/>
+                  </a:lnTo>
+                  <a:lnTo>
+                    <a:pt x="4074842" y="2430742"/>
+                  </a:lnTo>
+                  <a:lnTo>
+                    <a:pt x="4152476" y="2416492"/>
+                  </a:lnTo>
+                  <a:lnTo>
+                    <a:pt x="4230110" y="2402076"/>
+                  </a:lnTo>
+                  <a:lnTo>
+                    <a:pt x="4307744" y="2387493"/>
+                  </a:lnTo>
+                  <a:lnTo>
+                    <a:pt x="4385378" y="2372739"/>
+                  </a:lnTo>
+                  <a:lnTo>
+                    <a:pt x="4463012" y="2357813"/>
+                  </a:lnTo>
+                  <a:lnTo>
+                    <a:pt x="4540646" y="2342712"/>
+                  </a:lnTo>
+                  <a:lnTo>
+                    <a:pt x="4618280" y="2327436"/>
+                  </a:lnTo>
+                  <a:lnTo>
+                    <a:pt x="4695914" y="2311982"/>
+                  </a:lnTo>
+                  <a:lnTo>
+                    <a:pt x="4773548" y="2296347"/>
+                  </a:lnTo>
+                  <a:lnTo>
+                    <a:pt x="4851182" y="2280531"/>
+                  </a:lnTo>
+                  <a:lnTo>
+                    <a:pt x="4928816" y="2264529"/>
+                  </a:lnTo>
+                  <a:lnTo>
+                    <a:pt x="5006450" y="2248341"/>
+                  </a:lnTo>
+                  <a:lnTo>
+                    <a:pt x="5084084" y="2231965"/>
+                  </a:lnTo>
+                  <a:lnTo>
+                    <a:pt x="5161718" y="2215397"/>
+                  </a:lnTo>
+                  <a:lnTo>
+                    <a:pt x="5239352" y="2198636"/>
+                  </a:lnTo>
+                  <a:lnTo>
+                    <a:pt x="5316986" y="2181680"/>
+                  </a:lnTo>
+                  <a:lnTo>
+                    <a:pt x="5394620" y="2164525"/>
+                  </a:lnTo>
+                  <a:lnTo>
+                    <a:pt x="5472254" y="2147171"/>
+                  </a:lnTo>
+                  <a:lnTo>
+                    <a:pt x="5549888" y="2129615"/>
+                  </a:lnTo>
+                  <a:lnTo>
+                    <a:pt x="5627522" y="2111853"/>
+                  </a:lnTo>
+                  <a:lnTo>
+                    <a:pt x="5705157" y="2093885"/>
+                  </a:lnTo>
+                  <a:lnTo>
+                    <a:pt x="5782791" y="2075707"/>
                   </a:lnTo>
                 </a:path>
               </a:pathLst>
@@ -3796,300 +3802,300 @@
           </p:nvSpPr>
           <p:spPr>
             <a:xfrm>
-              <a:off x="817517" y="4556322"/>
-              <a:ext cx="7370972" cy="962867"/>
+              <a:off x="817517" y="4686277"/>
+              <a:ext cx="7370972" cy="826745"/>
             </a:xfrm>
             <a:custGeom>
               <a:avLst/>
               <a:pathLst>
-                <a:path w="7370972" h="962867">
+                <a:path w="7370972" h="826745">
                   <a:moveTo>
-                    <a:pt x="7370972" y="962867"/>
+                    <a:pt x="7370972" y="826745"/>
                   </a:moveTo>
                   <a:lnTo>
-                    <a:pt x="7293338" y="960832"/>
-                  </a:lnTo>
-                  <a:lnTo>
-                    <a:pt x="7215704" y="958659"/>
-                  </a:lnTo>
-                  <a:lnTo>
-                    <a:pt x="7138070" y="956340"/>
-                  </a:lnTo>
-                  <a:lnTo>
-                    <a:pt x="7060436" y="953863"/>
-                  </a:lnTo>
-                  <a:lnTo>
-                    <a:pt x="6982802" y="951217"/>
-                  </a:lnTo>
-                  <a:lnTo>
-                    <a:pt x="6905168" y="948393"/>
-                  </a:lnTo>
-                  <a:lnTo>
-                    <a:pt x="6827534" y="945377"/>
-                  </a:lnTo>
-                  <a:lnTo>
-                    <a:pt x="6749900" y="942157"/>
-                  </a:lnTo>
-                  <a:lnTo>
-                    <a:pt x="6672266" y="938719"/>
-                  </a:lnTo>
-                  <a:lnTo>
-                    <a:pt x="6594632" y="935047"/>
-                  </a:lnTo>
-                  <a:lnTo>
-                    <a:pt x="6516998" y="931127"/>
-                  </a:lnTo>
-                  <a:lnTo>
-                    <a:pt x="6439364" y="926941"/>
-                  </a:lnTo>
-                  <a:lnTo>
-                    <a:pt x="6361730" y="922471"/>
-                  </a:lnTo>
-                  <a:lnTo>
-                    <a:pt x="6284096" y="917698"/>
-                  </a:lnTo>
-                  <a:lnTo>
-                    <a:pt x="6206462" y="912602"/>
-                  </a:lnTo>
-                  <a:lnTo>
-                    <a:pt x="6128827" y="907160"/>
-                  </a:lnTo>
-                  <a:lnTo>
-                    <a:pt x="6051193" y="901350"/>
-                  </a:lnTo>
-                  <a:lnTo>
-                    <a:pt x="5973559" y="895145"/>
-                  </a:lnTo>
-                  <a:lnTo>
-                    <a:pt x="5895925" y="888520"/>
-                  </a:lnTo>
-                  <a:lnTo>
-                    <a:pt x="5818291" y="881446"/>
-                  </a:lnTo>
-                  <a:lnTo>
-                    <a:pt x="5740657" y="873892"/>
-                  </a:lnTo>
-                  <a:lnTo>
-                    <a:pt x="5663023" y="865827"/>
-                  </a:lnTo>
-                  <a:lnTo>
-                    <a:pt x="5585389" y="857214"/>
-                  </a:lnTo>
-                  <a:lnTo>
-                    <a:pt x="5507755" y="848018"/>
-                  </a:lnTo>
-                  <a:lnTo>
-                    <a:pt x="5430121" y="838199"/>
-                  </a:lnTo>
-                  <a:lnTo>
-                    <a:pt x="5352487" y="827713"/>
-                  </a:lnTo>
-                  <a:lnTo>
-                    <a:pt x="5274853" y="816518"/>
-                  </a:lnTo>
-                  <a:lnTo>
-                    <a:pt x="5197219" y="804563"/>
-                  </a:lnTo>
-                  <a:lnTo>
-                    <a:pt x="5119585" y="791798"/>
-                  </a:lnTo>
-                  <a:lnTo>
-                    <a:pt x="5041951" y="778168"/>
-                  </a:lnTo>
-                  <a:lnTo>
-                    <a:pt x="4964317" y="763614"/>
-                  </a:lnTo>
-                  <a:lnTo>
-                    <a:pt x="4886683" y="748073"/>
-                  </a:lnTo>
-                  <a:lnTo>
-                    <a:pt x="4809049" y="731479"/>
-                  </a:lnTo>
-                  <a:lnTo>
-                    <a:pt x="4731415" y="713760"/>
-                  </a:lnTo>
-                  <a:lnTo>
-                    <a:pt x="4653781" y="694840"/>
-                  </a:lnTo>
-                  <a:lnTo>
-                    <a:pt x="4576147" y="674638"/>
-                  </a:lnTo>
-                  <a:lnTo>
-                    <a:pt x="4498513" y="653066"/>
-                  </a:lnTo>
-                  <a:lnTo>
-                    <a:pt x="4420879" y="630032"/>
-                  </a:lnTo>
-                  <a:lnTo>
-                    <a:pt x="4343244" y="605437"/>
-                  </a:lnTo>
-                  <a:lnTo>
-                    <a:pt x="4265610" y="579174"/>
-                  </a:lnTo>
-                  <a:lnTo>
-                    <a:pt x="4187976" y="551132"/>
-                  </a:lnTo>
-                  <a:lnTo>
-                    <a:pt x="4110342" y="521189"/>
-                  </a:lnTo>
-                  <a:lnTo>
-                    <a:pt x="4032708" y="489216"/>
-                  </a:lnTo>
-                  <a:lnTo>
-                    <a:pt x="3955074" y="455075"/>
-                  </a:lnTo>
-                  <a:lnTo>
-                    <a:pt x="3877440" y="418621"/>
-                  </a:lnTo>
-                  <a:lnTo>
-                    <a:pt x="3799806" y="379696"/>
-                  </a:lnTo>
-                  <a:lnTo>
-                    <a:pt x="3722172" y="338132"/>
-                  </a:lnTo>
-                  <a:lnTo>
-                    <a:pt x="3644538" y="293751"/>
-                  </a:lnTo>
-                  <a:lnTo>
-                    <a:pt x="3566904" y="246361"/>
-                  </a:lnTo>
-                  <a:lnTo>
-                    <a:pt x="3489270" y="195760"/>
-                  </a:lnTo>
-                  <a:lnTo>
-                    <a:pt x="3411636" y="141728"/>
-                  </a:lnTo>
-                  <a:lnTo>
-                    <a:pt x="3334002" y="121431"/>
-                  </a:lnTo>
-                  <a:lnTo>
-                    <a:pt x="3256368" y="118779"/>
-                  </a:lnTo>
-                  <a:lnTo>
-                    <a:pt x="3178734" y="116120"/>
-                  </a:lnTo>
-                  <a:lnTo>
-                    <a:pt x="3101100" y="113453"/>
-                  </a:lnTo>
-                  <a:lnTo>
-                    <a:pt x="3023466" y="110777"/>
-                  </a:lnTo>
-                  <a:lnTo>
-                    <a:pt x="2945832" y="108094"/>
-                  </a:lnTo>
-                  <a:lnTo>
-                    <a:pt x="2868198" y="105402"/>
-                  </a:lnTo>
-                  <a:lnTo>
-                    <a:pt x="2790564" y="102702"/>
-                  </a:lnTo>
-                  <a:lnTo>
-                    <a:pt x="2712930" y="99994"/>
-                  </a:lnTo>
-                  <a:lnTo>
-                    <a:pt x="2635295" y="97278"/>
-                  </a:lnTo>
-                  <a:lnTo>
-                    <a:pt x="2557661" y="94553"/>
-                  </a:lnTo>
-                  <a:lnTo>
-                    <a:pt x="2480027" y="91820"/>
-                  </a:lnTo>
-                  <a:lnTo>
-                    <a:pt x="2402393" y="89079"/>
-                  </a:lnTo>
-                  <a:lnTo>
-                    <a:pt x="2324759" y="86329"/>
-                  </a:lnTo>
-                  <a:lnTo>
-                    <a:pt x="2247125" y="83571"/>
-                  </a:lnTo>
-                  <a:lnTo>
-                    <a:pt x="2169491" y="80805"/>
-                  </a:lnTo>
-                  <a:lnTo>
-                    <a:pt x="2091857" y="78030"/>
-                  </a:lnTo>
-                  <a:lnTo>
-                    <a:pt x="2014223" y="75247"/>
-                  </a:lnTo>
-                  <a:lnTo>
-                    <a:pt x="1936589" y="72455"/>
-                  </a:lnTo>
-                  <a:lnTo>
-                    <a:pt x="1858955" y="69655"/>
-                  </a:lnTo>
-                  <a:lnTo>
-                    <a:pt x="1781321" y="66846"/>
-                  </a:lnTo>
-                  <a:lnTo>
-                    <a:pt x="1703687" y="64029"/>
-                  </a:lnTo>
-                  <a:lnTo>
-                    <a:pt x="1626053" y="61203"/>
-                  </a:lnTo>
-                  <a:lnTo>
-                    <a:pt x="1548419" y="58369"/>
-                  </a:lnTo>
-                  <a:lnTo>
-                    <a:pt x="1470785" y="55526"/>
-                  </a:lnTo>
-                  <a:lnTo>
-                    <a:pt x="1393151" y="52674"/>
-                  </a:lnTo>
-                  <a:lnTo>
-                    <a:pt x="1315517" y="49814"/>
-                  </a:lnTo>
-                  <a:lnTo>
-                    <a:pt x="1237883" y="46944"/>
-                  </a:lnTo>
-                  <a:lnTo>
-                    <a:pt x="1160249" y="44067"/>
-                  </a:lnTo>
-                  <a:lnTo>
-                    <a:pt x="1082615" y="41180"/>
-                  </a:lnTo>
-                  <a:lnTo>
-                    <a:pt x="1004981" y="38285"/>
-                  </a:lnTo>
-                  <a:lnTo>
-                    <a:pt x="927346" y="35381"/>
-                  </a:lnTo>
-                  <a:lnTo>
-                    <a:pt x="849712" y="32468"/>
-                  </a:lnTo>
-                  <a:lnTo>
-                    <a:pt x="772078" y="29546"/>
-                  </a:lnTo>
-                  <a:lnTo>
-                    <a:pt x="694444" y="26615"/>
-                  </a:lnTo>
-                  <a:lnTo>
-                    <a:pt x="616810" y="23676"/>
-                  </a:lnTo>
-                  <a:lnTo>
-                    <a:pt x="539176" y="20727"/>
-                  </a:lnTo>
-                  <a:lnTo>
-                    <a:pt x="461542" y="17769"/>
-                  </a:lnTo>
-                  <a:lnTo>
-                    <a:pt x="383908" y="14803"/>
-                  </a:lnTo>
-                  <a:lnTo>
-                    <a:pt x="306274" y="11827"/>
-                  </a:lnTo>
-                  <a:lnTo>
-                    <a:pt x="228640" y="8843"/>
-                  </a:lnTo>
-                  <a:lnTo>
-                    <a:pt x="151006" y="5849"/>
-                  </a:lnTo>
-                  <a:lnTo>
-                    <a:pt x="73372" y="2846"/>
-                  </a:lnTo>
-                  <a:lnTo>
-                    <a:pt x="0" y="0"/>
+                    <a:pt x="7293338" y="824432"/>
+                  </a:lnTo>
+                  <a:lnTo>
+                    <a:pt x="7215704" y="821972"/>
+                  </a:lnTo>
+                  <a:lnTo>
+                    <a:pt x="7138070" y="819355"/>
+                  </a:lnTo>
+                  <a:lnTo>
+                    <a:pt x="7060436" y="816570"/>
+                  </a:lnTo>
+                  <a:lnTo>
+                    <a:pt x="6982802" y="813608"/>
+                  </a:lnTo>
+                  <a:lnTo>
+                    <a:pt x="6905168" y="810456"/>
+                  </a:lnTo>
+                  <a:lnTo>
+                    <a:pt x="6827534" y="807103"/>
+                  </a:lnTo>
+                  <a:lnTo>
+                    <a:pt x="6749900" y="803536"/>
+                  </a:lnTo>
+                  <a:lnTo>
+                    <a:pt x="6672266" y="799740"/>
+                  </a:lnTo>
+                  <a:lnTo>
+                    <a:pt x="6594632" y="795702"/>
+                  </a:lnTo>
+                  <a:lnTo>
+                    <a:pt x="6516998" y="791406"/>
+                  </a:lnTo>
+                  <a:lnTo>
+                    <a:pt x="6439364" y="786836"/>
+                  </a:lnTo>
+                  <a:lnTo>
+                    <a:pt x="6361730" y="781973"/>
+                  </a:lnTo>
+                  <a:lnTo>
+                    <a:pt x="6284096" y="776800"/>
+                  </a:lnTo>
+                  <a:lnTo>
+                    <a:pt x="6206462" y="771296"/>
+                  </a:lnTo>
+                  <a:lnTo>
+                    <a:pt x="6128827" y="765440"/>
+                  </a:lnTo>
+                  <a:lnTo>
+                    <a:pt x="6051193" y="759210"/>
+                  </a:lnTo>
+                  <a:lnTo>
+                    <a:pt x="5973559" y="752582"/>
+                  </a:lnTo>
+                  <a:lnTo>
+                    <a:pt x="5895925" y="745531"/>
+                  </a:lnTo>
+                  <a:lnTo>
+                    <a:pt x="5818291" y="738029"/>
+                  </a:lnTo>
+                  <a:lnTo>
+                    <a:pt x="5740657" y="730047"/>
+                  </a:lnTo>
+                  <a:lnTo>
+                    <a:pt x="5663023" y="721555"/>
+                  </a:lnTo>
+                  <a:lnTo>
+                    <a:pt x="5585389" y="712521"/>
+                  </a:lnTo>
+                  <a:lnTo>
+                    <a:pt x="5507755" y="702910"/>
+                  </a:lnTo>
+                  <a:lnTo>
+                    <a:pt x="5430121" y="692684"/>
+                  </a:lnTo>
+                  <a:lnTo>
+                    <a:pt x="5352487" y="681805"/>
+                  </a:lnTo>
+                  <a:lnTo>
+                    <a:pt x="5274853" y="670230"/>
+                  </a:lnTo>
+                  <a:lnTo>
+                    <a:pt x="5197219" y="657916"/>
+                  </a:lnTo>
+                  <a:lnTo>
+                    <a:pt x="5119585" y="644815"/>
+                  </a:lnTo>
+                  <a:lnTo>
+                    <a:pt x="5041951" y="630877"/>
+                  </a:lnTo>
+                  <a:lnTo>
+                    <a:pt x="4964317" y="616049"/>
+                  </a:lnTo>
+                  <a:lnTo>
+                    <a:pt x="4886683" y="600272"/>
+                  </a:lnTo>
+                  <a:lnTo>
+                    <a:pt x="4809049" y="583487"/>
+                  </a:lnTo>
+                  <a:lnTo>
+                    <a:pt x="4731415" y="565630"/>
+                  </a:lnTo>
+                  <a:lnTo>
+                    <a:pt x="4653781" y="546632"/>
+                  </a:lnTo>
+                  <a:lnTo>
+                    <a:pt x="4576147" y="526420"/>
+                  </a:lnTo>
+                  <a:lnTo>
+                    <a:pt x="4498513" y="504916"/>
+                  </a:lnTo>
+                  <a:lnTo>
+                    <a:pt x="4420879" y="482038"/>
+                  </a:lnTo>
+                  <a:lnTo>
+                    <a:pt x="4343244" y="457697"/>
+                  </a:lnTo>
+                  <a:lnTo>
+                    <a:pt x="4265610" y="431802"/>
+                  </a:lnTo>
+                  <a:lnTo>
+                    <a:pt x="4187976" y="404251"/>
+                  </a:lnTo>
+                  <a:lnTo>
+                    <a:pt x="4110342" y="374941"/>
+                  </a:lnTo>
+                  <a:lnTo>
+                    <a:pt x="4032708" y="343757"/>
+                  </a:lnTo>
+                  <a:lnTo>
+                    <a:pt x="3955074" y="310580"/>
+                  </a:lnTo>
+                  <a:lnTo>
+                    <a:pt x="3877440" y="275283"/>
+                  </a:lnTo>
+                  <a:lnTo>
+                    <a:pt x="3799806" y="237731"/>
+                  </a:lnTo>
+                  <a:lnTo>
+                    <a:pt x="3722172" y="197779"/>
+                  </a:lnTo>
+                  <a:lnTo>
+                    <a:pt x="3644538" y="155273"/>
+                  </a:lnTo>
+                  <a:lnTo>
+                    <a:pt x="3566904" y="110052"/>
+                  </a:lnTo>
+                  <a:lnTo>
+                    <a:pt x="3489270" y="61941"/>
+                  </a:lnTo>
+                  <a:lnTo>
+                    <a:pt x="3411636" y="10755"/>
+                  </a:lnTo>
+                  <a:lnTo>
+                    <a:pt x="3334002" y="0"/>
+                  </a:lnTo>
+                  <a:lnTo>
+                    <a:pt x="3256368" y="9947"/>
+                  </a:lnTo>
+                  <a:lnTo>
+                    <a:pt x="3178734" y="19779"/>
+                  </a:lnTo>
+                  <a:lnTo>
+                    <a:pt x="3101100" y="29499"/>
+                  </a:lnTo>
+                  <a:lnTo>
+                    <a:pt x="3023466" y="39106"/>
+                  </a:lnTo>
+                  <a:lnTo>
+                    <a:pt x="2945832" y="48603"/>
+                  </a:lnTo>
+                  <a:lnTo>
+                    <a:pt x="2868198" y="57990"/>
+                  </a:lnTo>
+                  <a:lnTo>
+                    <a:pt x="2790564" y="67269"/>
+                  </a:lnTo>
+                  <a:lnTo>
+                    <a:pt x="2712930" y="76440"/>
+                  </a:lnTo>
+                  <a:lnTo>
+                    <a:pt x="2635295" y="85507"/>
+                  </a:lnTo>
+                  <a:lnTo>
+                    <a:pt x="2557661" y="94468"/>
+                  </a:lnTo>
+                  <a:lnTo>
+                    <a:pt x="2480027" y="103327"/>
+                  </a:lnTo>
+                  <a:lnTo>
+                    <a:pt x="2402393" y="112083"/>
+                  </a:lnTo>
+                  <a:lnTo>
+                    <a:pt x="2324759" y="120738"/>
+                  </a:lnTo>
+                  <a:lnTo>
+                    <a:pt x="2247125" y="129294"/>
+                  </a:lnTo>
+                  <a:lnTo>
+                    <a:pt x="2169491" y="137751"/>
+                  </a:lnTo>
+                  <a:lnTo>
+                    <a:pt x="2091857" y="146110"/>
+                  </a:lnTo>
+                  <a:lnTo>
+                    <a:pt x="2014223" y="154373"/>
+                  </a:lnTo>
+                  <a:lnTo>
+                    <a:pt x="1936589" y="162541"/>
+                  </a:lnTo>
+                  <a:lnTo>
+                    <a:pt x="1858955" y="170614"/>
+                  </a:lnTo>
+                  <a:lnTo>
+                    <a:pt x="1781321" y="178595"/>
+                  </a:lnTo>
+                  <a:lnTo>
+                    <a:pt x="1703687" y="186484"/>
+                  </a:lnTo>
+                  <a:lnTo>
+                    <a:pt x="1626053" y="194281"/>
+                  </a:lnTo>
+                  <a:lnTo>
+                    <a:pt x="1548419" y="201989"/>
+                  </a:lnTo>
+                  <a:lnTo>
+                    <a:pt x="1470785" y="209608"/>
+                  </a:lnTo>
+                  <a:lnTo>
+                    <a:pt x="1393151" y="217139"/>
+                  </a:lnTo>
+                  <a:lnTo>
+                    <a:pt x="1315517" y="224583"/>
+                  </a:lnTo>
+                  <a:lnTo>
+                    <a:pt x="1237883" y="231942"/>
+                  </a:lnTo>
+                  <a:lnTo>
+                    <a:pt x="1160249" y="239215"/>
+                  </a:lnTo>
+                  <a:lnTo>
+                    <a:pt x="1082615" y="246405"/>
+                  </a:lnTo>
+                  <a:lnTo>
+                    <a:pt x="1004981" y="253512"/>
+                  </a:lnTo>
+                  <a:lnTo>
+                    <a:pt x="927346" y="260537"/>
+                  </a:lnTo>
+                  <a:lnTo>
+                    <a:pt x="849712" y="267481"/>
+                  </a:lnTo>
+                  <a:lnTo>
+                    <a:pt x="772078" y="274345"/>
+                  </a:lnTo>
+                  <a:lnTo>
+                    <a:pt x="694444" y="281130"/>
+                  </a:lnTo>
+                  <a:lnTo>
+                    <a:pt x="616810" y="287837"/>
+                  </a:lnTo>
+                  <a:lnTo>
+                    <a:pt x="539176" y="294466"/>
+                  </a:lnTo>
+                  <a:lnTo>
+                    <a:pt x="461542" y="301019"/>
+                  </a:lnTo>
+                  <a:lnTo>
+                    <a:pt x="383908" y="307496"/>
+                  </a:lnTo>
+                  <a:lnTo>
+                    <a:pt x="306274" y="313899"/>
+                  </a:lnTo>
+                  <a:lnTo>
+                    <a:pt x="228640" y="320228"/>
+                  </a:lnTo>
+                  <a:lnTo>
+                    <a:pt x="151006" y="326484"/>
+                  </a:lnTo>
+                  <a:lnTo>
+                    <a:pt x="73372" y="332667"/>
+                  </a:lnTo>
+                  <a:lnTo>
+                    <a:pt x="0" y="338444"/>
                   </a:lnTo>
                 </a:path>
               </a:pathLst>
@@ -4109,297 +4115,300 @@
           </p:nvSpPr>
           <p:spPr>
             <a:xfrm>
-              <a:off x="956754" y="1896563"/>
-              <a:ext cx="7231736" cy="3503189"/>
+              <a:off x="817517" y="2941590"/>
+              <a:ext cx="7370972" cy="2368743"/>
             </a:xfrm>
             <a:custGeom>
               <a:avLst/>
               <a:pathLst>
-                <a:path w="7231736" h="3503189">
+                <a:path w="7370972" h="2368743">
                   <a:moveTo>
                     <a:pt x="0" y="0"/>
                   </a:moveTo>
                   <a:lnTo>
-                    <a:pt x="11770" y="19228"/>
-                  </a:lnTo>
-                  <a:lnTo>
-                    <a:pt x="89404" y="141780"/>
-                  </a:lnTo>
-                  <a:lnTo>
-                    <a:pt x="167038" y="260199"/>
-                  </a:lnTo>
-                  <a:lnTo>
-                    <a:pt x="244672" y="374623"/>
-                  </a:lnTo>
-                  <a:lnTo>
-                    <a:pt x="322306" y="485188"/>
-                  </a:lnTo>
-                  <a:lnTo>
-                    <a:pt x="399940" y="592024"/>
-                  </a:lnTo>
-                  <a:lnTo>
-                    <a:pt x="477574" y="695256"/>
-                  </a:lnTo>
-                  <a:lnTo>
-                    <a:pt x="555208" y="795006"/>
-                  </a:lnTo>
-                  <a:lnTo>
-                    <a:pt x="632842" y="891392"/>
-                  </a:lnTo>
-                  <a:lnTo>
-                    <a:pt x="710476" y="984527"/>
-                  </a:lnTo>
-                  <a:lnTo>
-                    <a:pt x="788110" y="1074520"/>
-                  </a:lnTo>
-                  <a:lnTo>
-                    <a:pt x="865744" y="1161478"/>
-                  </a:lnTo>
-                  <a:lnTo>
-                    <a:pt x="943378" y="1245503"/>
-                  </a:lnTo>
-                  <a:lnTo>
-                    <a:pt x="1021012" y="1326694"/>
-                  </a:lnTo>
-                  <a:lnTo>
-                    <a:pt x="1098646" y="1405147"/>
-                  </a:lnTo>
-                  <a:lnTo>
-                    <a:pt x="1176280" y="1480953"/>
-                  </a:lnTo>
-                  <a:lnTo>
-                    <a:pt x="1253914" y="1554202"/>
-                  </a:lnTo>
-                  <a:lnTo>
-                    <a:pt x="1331548" y="1624981"/>
-                  </a:lnTo>
-                  <a:lnTo>
-                    <a:pt x="1409182" y="1693372"/>
-                  </a:lnTo>
-                  <a:lnTo>
-                    <a:pt x="1486816" y="1759457"/>
-                  </a:lnTo>
-                  <a:lnTo>
-                    <a:pt x="1564451" y="1823313"/>
-                  </a:lnTo>
-                  <a:lnTo>
-                    <a:pt x="1642085" y="1885014"/>
-                  </a:lnTo>
-                  <a:lnTo>
-                    <a:pt x="1719719" y="1944635"/>
-                  </a:lnTo>
-                  <a:lnTo>
-                    <a:pt x="1797353" y="2002245"/>
-                  </a:lnTo>
-                  <a:lnTo>
-                    <a:pt x="1874987" y="2057911"/>
-                  </a:lnTo>
-                  <a:lnTo>
-                    <a:pt x="1952621" y="2111700"/>
-                  </a:lnTo>
-                  <a:lnTo>
-                    <a:pt x="2030255" y="2163675"/>
-                  </a:lnTo>
-                  <a:lnTo>
-                    <a:pt x="2107889" y="2213897"/>
-                  </a:lnTo>
-                  <a:lnTo>
-                    <a:pt x="2185523" y="2262425"/>
-                  </a:lnTo>
-                  <a:lnTo>
-                    <a:pt x="2263157" y="2309316"/>
-                  </a:lnTo>
-                  <a:lnTo>
-                    <a:pt x="2340791" y="2354625"/>
-                  </a:lnTo>
-                  <a:lnTo>
-                    <a:pt x="2418425" y="2398406"/>
-                  </a:lnTo>
-                  <a:lnTo>
-                    <a:pt x="2496059" y="2440710"/>
-                  </a:lnTo>
-                  <a:lnTo>
-                    <a:pt x="2573693" y="2481588"/>
-                  </a:lnTo>
-                  <a:lnTo>
-                    <a:pt x="2651327" y="2521087"/>
-                  </a:lnTo>
-                  <a:lnTo>
-                    <a:pt x="2728961" y="2559253"/>
-                  </a:lnTo>
-                  <a:lnTo>
-                    <a:pt x="2806595" y="2596132"/>
-                  </a:lnTo>
-                  <a:lnTo>
-                    <a:pt x="2884229" y="2631768"/>
-                  </a:lnTo>
-                  <a:lnTo>
-                    <a:pt x="2961863" y="2666201"/>
-                  </a:lnTo>
-                  <a:lnTo>
-                    <a:pt x="3039497" y="2699473"/>
-                  </a:lnTo>
-                  <a:lnTo>
-                    <a:pt x="3117131" y="2731622"/>
-                  </a:lnTo>
-                  <a:lnTo>
-                    <a:pt x="3194765" y="2762688"/>
-                  </a:lnTo>
-                  <a:lnTo>
-                    <a:pt x="3272400" y="2792705"/>
-                  </a:lnTo>
-                  <a:lnTo>
-                    <a:pt x="3350034" y="2821710"/>
-                  </a:lnTo>
-                  <a:lnTo>
-                    <a:pt x="3427668" y="2849737"/>
-                  </a:lnTo>
-                  <a:lnTo>
-                    <a:pt x="3505302" y="2876818"/>
-                  </a:lnTo>
-                  <a:lnTo>
-                    <a:pt x="3582936" y="2902986"/>
-                  </a:lnTo>
-                  <a:lnTo>
-                    <a:pt x="3660570" y="2928272"/>
-                  </a:lnTo>
-                  <a:lnTo>
-                    <a:pt x="3738204" y="2952704"/>
-                  </a:lnTo>
-                  <a:lnTo>
-                    <a:pt x="3815838" y="2976312"/>
-                  </a:lnTo>
-                  <a:lnTo>
-                    <a:pt x="3893472" y="2999125"/>
-                  </a:lnTo>
-                  <a:lnTo>
-                    <a:pt x="3971106" y="3021167"/>
-                  </a:lnTo>
-                  <a:lnTo>
-                    <a:pt x="4048740" y="3042466"/>
-                  </a:lnTo>
-                  <a:lnTo>
-                    <a:pt x="4126374" y="3063047"/>
-                  </a:lnTo>
-                  <a:lnTo>
-                    <a:pt x="4204008" y="3082934"/>
-                  </a:lnTo>
-                  <a:lnTo>
-                    <a:pt x="4281642" y="3102150"/>
-                  </a:lnTo>
-                  <a:lnTo>
-                    <a:pt x="4359276" y="3120717"/>
-                  </a:lnTo>
-                  <a:lnTo>
-                    <a:pt x="4436910" y="3138659"/>
-                  </a:lnTo>
-                  <a:lnTo>
-                    <a:pt x="4514544" y="3155995"/>
-                  </a:lnTo>
-                  <a:lnTo>
-                    <a:pt x="4592178" y="3172747"/>
-                  </a:lnTo>
-                  <a:lnTo>
-                    <a:pt x="4669812" y="3188933"/>
-                  </a:lnTo>
-                  <a:lnTo>
-                    <a:pt x="4747446" y="3204574"/>
-                  </a:lnTo>
-                  <a:lnTo>
-                    <a:pt x="4825080" y="3219687"/>
-                  </a:lnTo>
-                  <a:lnTo>
-                    <a:pt x="4902714" y="3234290"/>
-                  </a:lnTo>
-                  <a:lnTo>
-                    <a:pt x="4980349" y="3248401"/>
-                  </a:lnTo>
-                  <a:lnTo>
-                    <a:pt x="5057983" y="3262035"/>
-                  </a:lnTo>
-                  <a:lnTo>
-                    <a:pt x="5135617" y="3275210"/>
-                  </a:lnTo>
-                  <a:lnTo>
-                    <a:pt x="5213251" y="3287941"/>
-                  </a:lnTo>
-                  <a:lnTo>
-                    <a:pt x="5290885" y="3300242"/>
-                  </a:lnTo>
-                  <a:lnTo>
-                    <a:pt x="5368519" y="3312128"/>
-                  </a:lnTo>
-                  <a:lnTo>
-                    <a:pt x="5446153" y="3323613"/>
-                  </a:lnTo>
-                  <a:lnTo>
-                    <a:pt x="5523787" y="3334711"/>
-                  </a:lnTo>
-                  <a:lnTo>
-                    <a:pt x="5601421" y="3345435"/>
-                  </a:lnTo>
-                  <a:lnTo>
-                    <a:pt x="5679055" y="3355797"/>
-                  </a:lnTo>
-                  <a:lnTo>
-                    <a:pt x="5756689" y="3365809"/>
-                  </a:lnTo>
-                  <a:lnTo>
-                    <a:pt x="5834323" y="3375484"/>
-                  </a:lnTo>
-                  <a:lnTo>
-                    <a:pt x="5911957" y="3384832"/>
-                  </a:lnTo>
-                  <a:lnTo>
-                    <a:pt x="5989591" y="3393865"/>
-                  </a:lnTo>
-                  <a:lnTo>
-                    <a:pt x="6067225" y="3402594"/>
-                  </a:lnTo>
-                  <a:lnTo>
-                    <a:pt x="6144859" y="3411028"/>
-                  </a:lnTo>
-                  <a:lnTo>
-                    <a:pt x="6222493" y="3419177"/>
-                  </a:lnTo>
-                  <a:lnTo>
-                    <a:pt x="6300127" y="3427052"/>
-                  </a:lnTo>
-                  <a:lnTo>
-                    <a:pt x="6377761" y="3434661"/>
-                  </a:lnTo>
-                  <a:lnTo>
-                    <a:pt x="6455395" y="3442013"/>
-                  </a:lnTo>
-                  <a:lnTo>
-                    <a:pt x="6533029" y="3449118"/>
-                  </a:lnTo>
-                  <a:lnTo>
-                    <a:pt x="6610663" y="3455982"/>
-                  </a:lnTo>
-                  <a:lnTo>
-                    <a:pt x="6688298" y="3462616"/>
-                  </a:lnTo>
-                  <a:lnTo>
-                    <a:pt x="6765932" y="3469025"/>
-                  </a:lnTo>
-                  <a:lnTo>
-                    <a:pt x="6843566" y="3475218"/>
-                  </a:lnTo>
-                  <a:lnTo>
-                    <a:pt x="6921200" y="3481203"/>
-                  </a:lnTo>
-                  <a:lnTo>
-                    <a:pt x="6998834" y="3486985"/>
-                  </a:lnTo>
-                  <a:lnTo>
-                    <a:pt x="7076468" y="3492573"/>
-                  </a:lnTo>
-                  <a:lnTo>
-                    <a:pt x="7154102" y="3497972"/>
-                  </a:lnTo>
-                  <a:lnTo>
-                    <a:pt x="7231736" y="3503189"/>
+                    <a:pt x="73372" y="61352"/>
+                  </a:lnTo>
+                  <a:lnTo>
+                    <a:pt x="151006" y="124654"/>
+                  </a:lnTo>
+                  <a:lnTo>
+                    <a:pt x="228640" y="186382"/>
+                  </a:lnTo>
+                  <a:lnTo>
+                    <a:pt x="306274" y="246576"/>
+                  </a:lnTo>
+                  <a:lnTo>
+                    <a:pt x="383908" y="305273"/>
+                  </a:lnTo>
+                  <a:lnTo>
+                    <a:pt x="461542" y="362511"/>
+                  </a:lnTo>
+                  <a:lnTo>
+                    <a:pt x="539176" y="418326"/>
+                  </a:lnTo>
+                  <a:lnTo>
+                    <a:pt x="616810" y="472753"/>
+                  </a:lnTo>
+                  <a:lnTo>
+                    <a:pt x="694444" y="525827"/>
+                  </a:lnTo>
+                  <a:lnTo>
+                    <a:pt x="772078" y="577582"/>
+                  </a:lnTo>
+                  <a:lnTo>
+                    <a:pt x="849712" y="628050"/>
+                  </a:lnTo>
+                  <a:lnTo>
+                    <a:pt x="927346" y="677264"/>
+                  </a:lnTo>
+                  <a:lnTo>
+                    <a:pt x="1004981" y="725254"/>
+                  </a:lnTo>
+                  <a:lnTo>
+                    <a:pt x="1082615" y="772051"/>
+                  </a:lnTo>
+                  <a:lnTo>
+                    <a:pt x="1160249" y="817684"/>
+                  </a:lnTo>
+                  <a:lnTo>
+                    <a:pt x="1237883" y="862183"/>
+                  </a:lnTo>
+                  <a:lnTo>
+                    <a:pt x="1315517" y="905576"/>
+                  </a:lnTo>
+                  <a:lnTo>
+                    <a:pt x="1393151" y="947890"/>
+                  </a:lnTo>
+                  <a:lnTo>
+                    <a:pt x="1470785" y="989152"/>
+                  </a:lnTo>
+                  <a:lnTo>
+                    <a:pt x="1548419" y="1029388"/>
+                  </a:lnTo>
+                  <a:lnTo>
+                    <a:pt x="1626053" y="1068624"/>
+                  </a:lnTo>
+                  <a:lnTo>
+                    <a:pt x="1703687" y="1106884"/>
+                  </a:lnTo>
+                  <a:lnTo>
+                    <a:pt x="1781321" y="1144194"/>
+                  </a:lnTo>
+                  <a:lnTo>
+                    <a:pt x="1858955" y="1180575"/>
+                  </a:lnTo>
+                  <a:lnTo>
+                    <a:pt x="1936589" y="1216053"/>
+                  </a:lnTo>
+                  <a:lnTo>
+                    <a:pt x="2014223" y="1250648"/>
+                  </a:lnTo>
+                  <a:lnTo>
+                    <a:pt x="2091857" y="1284383"/>
+                  </a:lnTo>
+                  <a:lnTo>
+                    <a:pt x="2169491" y="1317280"/>
+                  </a:lnTo>
+                  <a:lnTo>
+                    <a:pt x="2247125" y="1349358"/>
+                  </a:lnTo>
+                  <a:lnTo>
+                    <a:pt x="2324759" y="1380640"/>
+                  </a:lnTo>
+                  <a:lnTo>
+                    <a:pt x="2402393" y="1411143"/>
+                  </a:lnTo>
+                  <a:lnTo>
+                    <a:pt x="2480027" y="1440888"/>
+                  </a:lnTo>
+                  <a:lnTo>
+                    <a:pt x="2557661" y="1469894"/>
+                  </a:lnTo>
+                  <a:lnTo>
+                    <a:pt x="2635295" y="1498179"/>
+                  </a:lnTo>
+                  <a:lnTo>
+                    <a:pt x="2712930" y="1525760"/>
+                  </a:lnTo>
+                  <a:lnTo>
+                    <a:pt x="2790564" y="1552656"/>
+                  </a:lnTo>
+                  <a:lnTo>
+                    <a:pt x="2868198" y="1578883"/>
+                  </a:lnTo>
+                  <a:lnTo>
+                    <a:pt x="2945832" y="1604458"/>
+                  </a:lnTo>
+                  <a:lnTo>
+                    <a:pt x="3023466" y="1629397"/>
+                  </a:lnTo>
+                  <a:lnTo>
+                    <a:pt x="3101100" y="1653716"/>
+                  </a:lnTo>
+                  <a:lnTo>
+                    <a:pt x="3178734" y="1677431"/>
+                  </a:lnTo>
+                  <a:lnTo>
+                    <a:pt x="3256368" y="1700556"/>
+                  </a:lnTo>
+                  <a:lnTo>
+                    <a:pt x="3334002" y="1723106"/>
+                  </a:lnTo>
+                  <a:lnTo>
+                    <a:pt x="3411636" y="1745096"/>
+                  </a:lnTo>
+                  <a:lnTo>
+                    <a:pt x="3489270" y="1766539"/>
+                  </a:lnTo>
+                  <a:lnTo>
+                    <a:pt x="3566904" y="1787449"/>
+                  </a:lnTo>
+                  <a:lnTo>
+                    <a:pt x="3644538" y="1807839"/>
+                  </a:lnTo>
+                  <a:lnTo>
+                    <a:pt x="3722172" y="1827722"/>
+                  </a:lnTo>
+                  <a:lnTo>
+                    <a:pt x="3799806" y="1847110"/>
+                  </a:lnTo>
+                  <a:lnTo>
+                    <a:pt x="3877440" y="1866017"/>
+                  </a:lnTo>
+                  <a:lnTo>
+                    <a:pt x="3955074" y="1884454"/>
+                  </a:lnTo>
+                  <a:lnTo>
+                    <a:pt x="4032708" y="1902432"/>
+                  </a:lnTo>
+                  <a:lnTo>
+                    <a:pt x="4110342" y="1919964"/>
+                  </a:lnTo>
+                  <a:lnTo>
+                    <a:pt x="4187976" y="1937059"/>
+                  </a:lnTo>
+                  <a:lnTo>
+                    <a:pt x="4265610" y="1953730"/>
+                  </a:lnTo>
+                  <a:lnTo>
+                    <a:pt x="4343244" y="1969986"/>
+                  </a:lnTo>
+                  <a:lnTo>
+                    <a:pt x="4420879" y="1985838"/>
+                  </a:lnTo>
+                  <a:lnTo>
+                    <a:pt x="4498513" y="2001296"/>
+                  </a:lnTo>
+                  <a:lnTo>
+                    <a:pt x="4576147" y="2016369"/>
+                  </a:lnTo>
+                  <a:lnTo>
+                    <a:pt x="4653781" y="2031068"/>
+                  </a:lnTo>
+                  <a:lnTo>
+                    <a:pt x="4731415" y="2045401"/>
+                  </a:lnTo>
+                  <a:lnTo>
+                    <a:pt x="4809049" y="2059378"/>
+                  </a:lnTo>
+                  <a:lnTo>
+                    <a:pt x="4886683" y="2073008"/>
+                  </a:lnTo>
+                  <a:lnTo>
+                    <a:pt x="4964317" y="2086299"/>
+                  </a:lnTo>
+                  <a:lnTo>
+                    <a:pt x="5041951" y="2099259"/>
+                  </a:lnTo>
+                  <a:lnTo>
+                    <a:pt x="5119585" y="2111897"/>
+                  </a:lnTo>
+                  <a:lnTo>
+                    <a:pt x="5197219" y="2124221"/>
+                  </a:lnTo>
+                  <a:lnTo>
+                    <a:pt x="5274853" y="2136239"/>
+                  </a:lnTo>
+                  <a:lnTo>
+                    <a:pt x="5352487" y="2147958"/>
+                  </a:lnTo>
+                  <a:lnTo>
+                    <a:pt x="5430121" y="2159385"/>
+                  </a:lnTo>
+                  <a:lnTo>
+                    <a:pt x="5507755" y="2170528"/>
+                  </a:lnTo>
+                  <a:lnTo>
+                    <a:pt x="5585389" y="2181395"/>
+                  </a:lnTo>
+                  <a:lnTo>
+                    <a:pt x="5663023" y="2191991"/>
+                  </a:lnTo>
+                  <a:lnTo>
+                    <a:pt x="5740657" y="2202324"/>
+                  </a:lnTo>
+                  <a:lnTo>
+                    <a:pt x="5818291" y="2212399"/>
+                  </a:lnTo>
+                  <a:lnTo>
+                    <a:pt x="5895925" y="2222225"/>
+                  </a:lnTo>
+                  <a:lnTo>
+                    <a:pt x="5973559" y="2231806"/>
+                  </a:lnTo>
+                  <a:lnTo>
+                    <a:pt x="6051193" y="2241149"/>
+                  </a:lnTo>
+                  <a:lnTo>
+                    <a:pt x="6128827" y="2250260"/>
+                  </a:lnTo>
+                  <a:lnTo>
+                    <a:pt x="6206462" y="2259144"/>
+                  </a:lnTo>
+                  <a:lnTo>
+                    <a:pt x="6284096" y="2267807"/>
+                  </a:lnTo>
+                  <a:lnTo>
+                    <a:pt x="6361730" y="2276255"/>
+                  </a:lnTo>
+                  <a:lnTo>
+                    <a:pt x="6439364" y="2284493"/>
+                  </a:lnTo>
+                  <a:lnTo>
+                    <a:pt x="6516998" y="2292526"/>
+                  </a:lnTo>
+                  <a:lnTo>
+                    <a:pt x="6594632" y="2300359"/>
+                  </a:lnTo>
+                  <a:lnTo>
+                    <a:pt x="6672266" y="2307998"/>
+                  </a:lnTo>
+                  <a:lnTo>
+                    <a:pt x="6749900" y="2315447"/>
+                  </a:lnTo>
+                  <a:lnTo>
+                    <a:pt x="6827534" y="2322710"/>
+                  </a:lnTo>
+                  <a:lnTo>
+                    <a:pt x="6905168" y="2329793"/>
+                  </a:lnTo>
+                  <a:lnTo>
+                    <a:pt x="6982802" y="2336700"/>
+                  </a:lnTo>
+                  <a:lnTo>
+                    <a:pt x="7060436" y="2343435"/>
+                  </a:lnTo>
+                  <a:lnTo>
+                    <a:pt x="7138070" y="2350003"/>
+                  </a:lnTo>
+                  <a:lnTo>
+                    <a:pt x="7215704" y="2356407"/>
+                  </a:lnTo>
+                  <a:lnTo>
+                    <a:pt x="7293338" y="2362653"/>
+                  </a:lnTo>
+                  <a:lnTo>
+                    <a:pt x="7370972" y="2368743"/>
                   </a:lnTo>
                 </a:path>
               </a:pathLst>

--- a/docs/plots/carbo/jx_carbo_linsubhr_ratio_anemia3.pptx
+++ b/docs/plots/carbo/jx_carbo_linsubhr_ratio_anemia3.pptx
@@ -3003,527 +3003,530 @@
           <p:spPr>
             <a:xfrm>
               <a:off x="817517" y="1896563"/>
-              <a:ext cx="7370972" cy="3616459"/>
+              <a:ext cx="7370972" cy="3611785"/>
             </a:xfrm>
             <a:custGeom>
               <a:avLst/>
               <a:pathLst>
-                <a:path w="7370972" h="3616459">
+                <a:path w="7370972" h="3611785">
                   <a:moveTo>
-                    <a:pt x="1588181" y="0"/>
+                    <a:pt x="1516692" y="0"/>
                   </a:moveTo>
                   <a:lnTo>
-                    <a:pt x="1626053" y="110423"/>
-                  </a:lnTo>
-                  <a:lnTo>
-                    <a:pt x="1703687" y="323185"/>
-                  </a:lnTo>
-                  <a:lnTo>
-                    <a:pt x="1781321" y="523168"/>
-                  </a:lnTo>
-                  <a:lnTo>
-                    <a:pt x="1858955" y="711139"/>
-                  </a:lnTo>
-                  <a:lnTo>
-                    <a:pt x="1936589" y="887820"/>
-                  </a:lnTo>
-                  <a:lnTo>
-                    <a:pt x="2014223" y="1053889"/>
-                  </a:lnTo>
-                  <a:lnTo>
-                    <a:pt x="2091857" y="1209982"/>
-                  </a:lnTo>
-                  <a:lnTo>
-                    <a:pt x="2169491" y="1356700"/>
-                  </a:lnTo>
-                  <a:lnTo>
-                    <a:pt x="2247125" y="1494605"/>
-                  </a:lnTo>
-                  <a:lnTo>
-                    <a:pt x="2324759" y="1624227"/>
-                  </a:lnTo>
-                  <a:lnTo>
-                    <a:pt x="2402393" y="1746063"/>
-                  </a:lnTo>
-                  <a:lnTo>
-                    <a:pt x="2480027" y="1860582"/>
-                  </a:lnTo>
-                  <a:lnTo>
-                    <a:pt x="2557661" y="1968221"/>
-                  </a:lnTo>
-                  <a:lnTo>
-                    <a:pt x="2635295" y="2069396"/>
-                  </a:lnTo>
-                  <a:lnTo>
-                    <a:pt x="2712930" y="2164493"/>
-                  </a:lnTo>
-                  <a:lnTo>
-                    <a:pt x="2790564" y="2253878"/>
-                  </a:lnTo>
-                  <a:lnTo>
-                    <a:pt x="2868198" y="2337895"/>
-                  </a:lnTo>
-                  <a:lnTo>
-                    <a:pt x="2945832" y="2416865"/>
-                  </a:lnTo>
-                  <a:lnTo>
-                    <a:pt x="3023466" y="2491092"/>
-                  </a:lnTo>
-                  <a:lnTo>
-                    <a:pt x="3101100" y="2560860"/>
-                  </a:lnTo>
-                  <a:lnTo>
-                    <a:pt x="3178734" y="2626438"/>
-                  </a:lnTo>
-                  <a:lnTo>
-                    <a:pt x="3256368" y="2688076"/>
-                  </a:lnTo>
-                  <a:lnTo>
-                    <a:pt x="3334002" y="2746013"/>
-                  </a:lnTo>
-                  <a:lnTo>
-                    <a:pt x="3411636" y="2779650"/>
-                  </a:lnTo>
-                  <a:lnTo>
-                    <a:pt x="3489270" y="2769470"/>
-                  </a:lnTo>
-                  <a:lnTo>
-                    <a:pt x="3566904" y="2759170"/>
-                  </a:lnTo>
-                  <a:lnTo>
-                    <a:pt x="3644538" y="2748751"/>
-                  </a:lnTo>
-                  <a:lnTo>
-                    <a:pt x="3722172" y="2738210"/>
-                  </a:lnTo>
-                  <a:lnTo>
-                    <a:pt x="3799806" y="2727546"/>
-                  </a:lnTo>
-                  <a:lnTo>
-                    <a:pt x="3877440" y="2716757"/>
-                  </a:lnTo>
-                  <a:lnTo>
-                    <a:pt x="3955074" y="2705843"/>
-                  </a:lnTo>
-                  <a:lnTo>
-                    <a:pt x="4032708" y="2694802"/>
-                  </a:lnTo>
-                  <a:lnTo>
-                    <a:pt x="4110342" y="2683632"/>
-                  </a:lnTo>
-                  <a:lnTo>
-                    <a:pt x="4187976" y="2672331"/>
-                  </a:lnTo>
-                  <a:lnTo>
-                    <a:pt x="4265610" y="2660899"/>
-                  </a:lnTo>
-                  <a:lnTo>
-                    <a:pt x="4343244" y="2649333"/>
-                  </a:lnTo>
-                  <a:lnTo>
-                    <a:pt x="4420879" y="2637633"/>
-                  </a:lnTo>
-                  <a:lnTo>
-                    <a:pt x="4498513" y="2625796"/>
-                  </a:lnTo>
-                  <a:lnTo>
-                    <a:pt x="4576147" y="2613821"/>
-                  </a:lnTo>
-                  <a:lnTo>
-                    <a:pt x="4653781" y="2601707"/>
-                  </a:lnTo>
-                  <a:lnTo>
-                    <a:pt x="4731415" y="2589451"/>
-                  </a:lnTo>
-                  <a:lnTo>
-                    <a:pt x="4809049" y="2577052"/>
-                  </a:lnTo>
-                  <a:lnTo>
-                    <a:pt x="4886683" y="2564509"/>
-                  </a:lnTo>
-                  <a:lnTo>
-                    <a:pt x="4964317" y="2551819"/>
-                  </a:lnTo>
-                  <a:lnTo>
-                    <a:pt x="5041951" y="2538982"/>
-                  </a:lnTo>
-                  <a:lnTo>
-                    <a:pt x="5119585" y="2525994"/>
-                  </a:lnTo>
-                  <a:lnTo>
-                    <a:pt x="5197219" y="2512855"/>
-                  </a:lnTo>
-                  <a:lnTo>
-                    <a:pt x="5274853" y="2499563"/>
-                  </a:lnTo>
-                  <a:lnTo>
-                    <a:pt x="5352487" y="2486116"/>
-                  </a:lnTo>
-                  <a:lnTo>
-                    <a:pt x="5430121" y="2472513"/>
-                  </a:lnTo>
-                  <a:lnTo>
-                    <a:pt x="5507755" y="2458750"/>
-                  </a:lnTo>
-                  <a:lnTo>
-                    <a:pt x="5585389" y="2444827"/>
-                  </a:lnTo>
-                  <a:lnTo>
-                    <a:pt x="5663023" y="2430742"/>
-                  </a:lnTo>
-                  <a:lnTo>
-                    <a:pt x="5740657" y="2416492"/>
-                  </a:lnTo>
-                  <a:lnTo>
-                    <a:pt x="5818291" y="2402076"/>
-                  </a:lnTo>
-                  <a:lnTo>
-                    <a:pt x="5895925" y="2387493"/>
-                  </a:lnTo>
-                  <a:lnTo>
-                    <a:pt x="5973559" y="2372739"/>
-                  </a:lnTo>
-                  <a:lnTo>
-                    <a:pt x="6051193" y="2357813"/>
-                  </a:lnTo>
-                  <a:lnTo>
-                    <a:pt x="6128827" y="2342712"/>
-                  </a:lnTo>
-                  <a:lnTo>
-                    <a:pt x="6206462" y="2327436"/>
-                  </a:lnTo>
-                  <a:lnTo>
-                    <a:pt x="6284096" y="2311982"/>
-                  </a:lnTo>
-                  <a:lnTo>
-                    <a:pt x="6361730" y="2296347"/>
-                  </a:lnTo>
-                  <a:lnTo>
-                    <a:pt x="6439364" y="2280531"/>
-                  </a:lnTo>
-                  <a:lnTo>
-                    <a:pt x="6516998" y="2264529"/>
-                  </a:lnTo>
-                  <a:lnTo>
-                    <a:pt x="6594632" y="2248341"/>
-                  </a:lnTo>
-                  <a:lnTo>
-                    <a:pt x="6672266" y="2231965"/>
-                  </a:lnTo>
-                  <a:lnTo>
-                    <a:pt x="6749900" y="2215397"/>
-                  </a:lnTo>
-                  <a:lnTo>
-                    <a:pt x="6827534" y="2198636"/>
-                  </a:lnTo>
-                  <a:lnTo>
-                    <a:pt x="6905168" y="2181680"/>
-                  </a:lnTo>
-                  <a:lnTo>
-                    <a:pt x="6982802" y="2164525"/>
-                  </a:lnTo>
-                  <a:lnTo>
-                    <a:pt x="7060436" y="2147171"/>
-                  </a:lnTo>
-                  <a:lnTo>
-                    <a:pt x="7138070" y="2129615"/>
-                  </a:lnTo>
-                  <a:lnTo>
-                    <a:pt x="7215704" y="2111853"/>
-                  </a:lnTo>
-                  <a:lnTo>
-                    <a:pt x="7293338" y="2093885"/>
-                  </a:lnTo>
-                  <a:lnTo>
-                    <a:pt x="7370972" y="2075707"/>
-                  </a:lnTo>
-                  <a:lnTo>
-                    <a:pt x="7370972" y="3616459"/>
-                  </a:lnTo>
-                  <a:lnTo>
-                    <a:pt x="7293338" y="3614146"/>
-                  </a:lnTo>
-                  <a:lnTo>
-                    <a:pt x="7215704" y="3611686"/>
-                  </a:lnTo>
-                  <a:lnTo>
-                    <a:pt x="7138070" y="3609069"/>
-                  </a:lnTo>
-                  <a:lnTo>
-                    <a:pt x="7060436" y="3606285"/>
-                  </a:lnTo>
-                  <a:lnTo>
-                    <a:pt x="6982802" y="3603322"/>
-                  </a:lnTo>
-                  <a:lnTo>
-                    <a:pt x="6905168" y="3600170"/>
-                  </a:lnTo>
-                  <a:lnTo>
-                    <a:pt x="6827534" y="3596817"/>
-                  </a:lnTo>
-                  <a:lnTo>
-                    <a:pt x="6749900" y="3593250"/>
-                  </a:lnTo>
-                  <a:lnTo>
-                    <a:pt x="6672266" y="3589454"/>
-                  </a:lnTo>
-                  <a:lnTo>
-                    <a:pt x="6594632" y="3585416"/>
-                  </a:lnTo>
-                  <a:lnTo>
-                    <a:pt x="6516998" y="3581120"/>
-                  </a:lnTo>
-                  <a:lnTo>
-                    <a:pt x="6439364" y="3576550"/>
-                  </a:lnTo>
-                  <a:lnTo>
-                    <a:pt x="6361730" y="3571687"/>
-                  </a:lnTo>
-                  <a:lnTo>
-                    <a:pt x="6284096" y="3566514"/>
-                  </a:lnTo>
-                  <a:lnTo>
-                    <a:pt x="6206462" y="3561010"/>
-                  </a:lnTo>
-                  <a:lnTo>
-                    <a:pt x="6128827" y="3555154"/>
-                  </a:lnTo>
-                  <a:lnTo>
-                    <a:pt x="6051193" y="3548924"/>
-                  </a:lnTo>
-                  <a:lnTo>
-                    <a:pt x="5973559" y="3542296"/>
-                  </a:lnTo>
-                  <a:lnTo>
-                    <a:pt x="5895925" y="3535245"/>
-                  </a:lnTo>
-                  <a:lnTo>
-                    <a:pt x="5818291" y="3527743"/>
-                  </a:lnTo>
-                  <a:lnTo>
-                    <a:pt x="5740657" y="3519761"/>
-                  </a:lnTo>
-                  <a:lnTo>
-                    <a:pt x="5663023" y="3511270"/>
-                  </a:lnTo>
-                  <a:lnTo>
-                    <a:pt x="5585389" y="3502235"/>
-                  </a:lnTo>
-                  <a:lnTo>
-                    <a:pt x="5507755" y="3492624"/>
-                  </a:lnTo>
-                  <a:lnTo>
-                    <a:pt x="5430121" y="3482398"/>
-                  </a:lnTo>
-                  <a:lnTo>
-                    <a:pt x="5352487" y="3471519"/>
-                  </a:lnTo>
-                  <a:lnTo>
-                    <a:pt x="5274853" y="3459945"/>
-                  </a:lnTo>
-                  <a:lnTo>
-                    <a:pt x="5197219" y="3447631"/>
-                  </a:lnTo>
-                  <a:lnTo>
-                    <a:pt x="5119585" y="3434530"/>
-                  </a:lnTo>
-                  <a:lnTo>
-                    <a:pt x="5041951" y="3420591"/>
-                  </a:lnTo>
-                  <a:lnTo>
-                    <a:pt x="4964317" y="3405763"/>
-                  </a:lnTo>
-                  <a:lnTo>
-                    <a:pt x="4886683" y="3389986"/>
-                  </a:lnTo>
-                  <a:lnTo>
-                    <a:pt x="4809049" y="3373202"/>
-                  </a:lnTo>
-                  <a:lnTo>
-                    <a:pt x="4731415" y="3355344"/>
-                  </a:lnTo>
-                  <a:lnTo>
-                    <a:pt x="4653781" y="3336346"/>
-                  </a:lnTo>
-                  <a:lnTo>
-                    <a:pt x="4576147" y="3316134"/>
-                  </a:lnTo>
-                  <a:lnTo>
-                    <a:pt x="4498513" y="3294630"/>
-                  </a:lnTo>
-                  <a:lnTo>
-                    <a:pt x="4420879" y="3271752"/>
-                  </a:lnTo>
-                  <a:lnTo>
-                    <a:pt x="4343244" y="3247412"/>
-                  </a:lnTo>
-                  <a:lnTo>
-                    <a:pt x="4265610" y="3221516"/>
-                  </a:lnTo>
-                  <a:lnTo>
-                    <a:pt x="4187976" y="3193966"/>
-                  </a:lnTo>
-                  <a:lnTo>
-                    <a:pt x="4110342" y="3164655"/>
-                  </a:lnTo>
-                  <a:lnTo>
-                    <a:pt x="4032708" y="3133471"/>
-                  </a:lnTo>
-                  <a:lnTo>
-                    <a:pt x="3955074" y="3100294"/>
-                  </a:lnTo>
-                  <a:lnTo>
-                    <a:pt x="3877440" y="3064997"/>
-                  </a:lnTo>
-                  <a:lnTo>
-                    <a:pt x="3799806" y="3027445"/>
-                  </a:lnTo>
-                  <a:lnTo>
-                    <a:pt x="3722172" y="2987493"/>
-                  </a:lnTo>
-                  <a:lnTo>
-                    <a:pt x="3644538" y="2944988"/>
-                  </a:lnTo>
-                  <a:lnTo>
-                    <a:pt x="3566904" y="2899766"/>
-                  </a:lnTo>
-                  <a:lnTo>
-                    <a:pt x="3489270" y="2851655"/>
-                  </a:lnTo>
-                  <a:lnTo>
-                    <a:pt x="3411636" y="2800469"/>
-                  </a:lnTo>
-                  <a:lnTo>
-                    <a:pt x="3334002" y="2789714"/>
-                  </a:lnTo>
-                  <a:lnTo>
-                    <a:pt x="3256368" y="2799661"/>
-                  </a:lnTo>
-                  <a:lnTo>
-                    <a:pt x="3178734" y="2809494"/>
-                  </a:lnTo>
-                  <a:lnTo>
-                    <a:pt x="3101100" y="2819213"/>
-                  </a:lnTo>
-                  <a:lnTo>
-                    <a:pt x="3023466" y="2828820"/>
-                  </a:lnTo>
-                  <a:lnTo>
-                    <a:pt x="2945832" y="2838317"/>
-                  </a:lnTo>
-                  <a:lnTo>
-                    <a:pt x="2868198" y="2847704"/>
-                  </a:lnTo>
-                  <a:lnTo>
-                    <a:pt x="2790564" y="2856983"/>
-                  </a:lnTo>
-                  <a:lnTo>
-                    <a:pt x="2712930" y="2866155"/>
-                  </a:lnTo>
-                  <a:lnTo>
-                    <a:pt x="2635295" y="2875221"/>
-                  </a:lnTo>
-                  <a:lnTo>
-                    <a:pt x="2557661" y="2884182"/>
-                  </a:lnTo>
-                  <a:lnTo>
-                    <a:pt x="2480027" y="2893041"/>
-                  </a:lnTo>
-                  <a:lnTo>
-                    <a:pt x="2402393" y="2901797"/>
-                  </a:lnTo>
-                  <a:lnTo>
-                    <a:pt x="2324759" y="2910452"/>
-                  </a:lnTo>
-                  <a:lnTo>
-                    <a:pt x="2247125" y="2919008"/>
-                  </a:lnTo>
-                  <a:lnTo>
-                    <a:pt x="2169491" y="2927465"/>
-                  </a:lnTo>
-                  <a:lnTo>
-                    <a:pt x="2091857" y="2935824"/>
-                  </a:lnTo>
-                  <a:lnTo>
-                    <a:pt x="2014223" y="2944087"/>
-                  </a:lnTo>
-                  <a:lnTo>
-                    <a:pt x="1936589" y="2952255"/>
-                  </a:lnTo>
-                  <a:lnTo>
-                    <a:pt x="1858955" y="2960329"/>
-                  </a:lnTo>
-                  <a:lnTo>
-                    <a:pt x="1781321" y="2968309"/>
-                  </a:lnTo>
-                  <a:lnTo>
-                    <a:pt x="1703687" y="2976198"/>
-                  </a:lnTo>
-                  <a:lnTo>
-                    <a:pt x="1626053" y="2983995"/>
-                  </a:lnTo>
-                  <a:lnTo>
-                    <a:pt x="1548419" y="2991703"/>
-                  </a:lnTo>
-                  <a:lnTo>
-                    <a:pt x="1470785" y="2999322"/>
-                  </a:lnTo>
-                  <a:lnTo>
-                    <a:pt x="1393151" y="3006853"/>
-                  </a:lnTo>
-                  <a:lnTo>
-                    <a:pt x="1315517" y="3014297"/>
-                  </a:lnTo>
-                  <a:lnTo>
-                    <a:pt x="1237883" y="3021656"/>
-                  </a:lnTo>
-                  <a:lnTo>
-                    <a:pt x="1160249" y="3028930"/>
-                  </a:lnTo>
-                  <a:lnTo>
-                    <a:pt x="1082615" y="3036119"/>
-                  </a:lnTo>
-                  <a:lnTo>
-                    <a:pt x="1004981" y="3043226"/>
-                  </a:lnTo>
-                  <a:lnTo>
-                    <a:pt x="927346" y="3050251"/>
-                  </a:lnTo>
-                  <a:lnTo>
-                    <a:pt x="849712" y="3057195"/>
-                  </a:lnTo>
-                  <a:lnTo>
-                    <a:pt x="772078" y="3064059"/>
-                  </a:lnTo>
-                  <a:lnTo>
-                    <a:pt x="694444" y="3070844"/>
-                  </a:lnTo>
-                  <a:lnTo>
-                    <a:pt x="616810" y="3077551"/>
-                  </a:lnTo>
-                  <a:lnTo>
-                    <a:pt x="539176" y="3084180"/>
-                  </a:lnTo>
-                  <a:lnTo>
-                    <a:pt x="461542" y="3090733"/>
-                  </a:lnTo>
-                  <a:lnTo>
-                    <a:pt x="383908" y="3097210"/>
-                  </a:lnTo>
-                  <a:lnTo>
-                    <a:pt x="306274" y="3103613"/>
-                  </a:lnTo>
-                  <a:lnTo>
-                    <a:pt x="228640" y="3109942"/>
-                  </a:lnTo>
-                  <a:lnTo>
-                    <a:pt x="151006" y="3116198"/>
-                  </a:lnTo>
-                  <a:lnTo>
-                    <a:pt x="73372" y="3122382"/>
-                  </a:lnTo>
-                  <a:lnTo>
-                    <a:pt x="0" y="3128159"/>
+                    <a:pt x="1548419" y="89393"/>
+                  </a:lnTo>
+                  <a:lnTo>
+                    <a:pt x="1626053" y="295483"/>
+                  </a:lnTo>
+                  <a:lnTo>
+                    <a:pt x="1703687" y="489653"/>
+                  </a:lnTo>
+                  <a:lnTo>
+                    <a:pt x="1781321" y="672592"/>
+                  </a:lnTo>
+                  <a:lnTo>
+                    <a:pt x="1858955" y="844951"/>
+                  </a:lnTo>
+                  <a:lnTo>
+                    <a:pt x="1936589" y="1007341"/>
+                  </a:lnTo>
+                  <a:lnTo>
+                    <a:pt x="2014223" y="1160339"/>
+                  </a:lnTo>
+                  <a:lnTo>
+                    <a:pt x="2091857" y="1304487"/>
+                  </a:lnTo>
+                  <a:lnTo>
+                    <a:pt x="2169491" y="1440299"/>
+                  </a:lnTo>
+                  <a:lnTo>
+                    <a:pt x="2247125" y="1568256"/>
+                  </a:lnTo>
+                  <a:lnTo>
+                    <a:pt x="2324759" y="1688811"/>
+                  </a:lnTo>
+                  <a:lnTo>
+                    <a:pt x="2402393" y="1802395"/>
+                  </a:lnTo>
+                  <a:lnTo>
+                    <a:pt x="2480027" y="1909408"/>
+                  </a:lnTo>
+                  <a:lnTo>
+                    <a:pt x="2557661" y="2010233"/>
+                  </a:lnTo>
+                  <a:lnTo>
+                    <a:pt x="2635295" y="2105226"/>
+                  </a:lnTo>
+                  <a:lnTo>
+                    <a:pt x="2712930" y="2194724"/>
+                  </a:lnTo>
+                  <a:lnTo>
+                    <a:pt x="2790564" y="2279047"/>
+                  </a:lnTo>
+                  <a:lnTo>
+                    <a:pt x="2868198" y="2358492"/>
+                  </a:lnTo>
+                  <a:lnTo>
+                    <a:pt x="2945832" y="2433343"/>
+                  </a:lnTo>
+                  <a:lnTo>
+                    <a:pt x="3023466" y="2503864"/>
+                  </a:lnTo>
+                  <a:lnTo>
+                    <a:pt x="3101100" y="2570307"/>
+                  </a:lnTo>
+                  <a:lnTo>
+                    <a:pt x="3178734" y="2632906"/>
+                  </a:lnTo>
+                  <a:lnTo>
+                    <a:pt x="3256368" y="2691885"/>
+                  </a:lnTo>
+                  <a:lnTo>
+                    <a:pt x="3334002" y="2747453"/>
+                  </a:lnTo>
+                  <a:lnTo>
+                    <a:pt x="3411636" y="2783898"/>
+                  </a:lnTo>
+                  <a:lnTo>
+                    <a:pt x="3489270" y="2786731"/>
+                  </a:lnTo>
+                  <a:lnTo>
+                    <a:pt x="3566904" y="2789554"/>
+                  </a:lnTo>
+                  <a:lnTo>
+                    <a:pt x="3644538" y="2792368"/>
+                  </a:lnTo>
+                  <a:lnTo>
+                    <a:pt x="3722172" y="2795173"/>
+                  </a:lnTo>
+                  <a:lnTo>
+                    <a:pt x="3799806" y="2797969"/>
+                  </a:lnTo>
+                  <a:lnTo>
+                    <a:pt x="3877440" y="2800755"/>
+                  </a:lnTo>
+                  <a:lnTo>
+                    <a:pt x="3955074" y="2803533"/>
+                  </a:lnTo>
+                  <a:lnTo>
+                    <a:pt x="4032708" y="2806302"/>
+                  </a:lnTo>
+                  <a:lnTo>
+                    <a:pt x="4110342" y="2809061"/>
+                  </a:lnTo>
+                  <a:lnTo>
+                    <a:pt x="4187976" y="2811812"/>
+                  </a:lnTo>
+                  <a:lnTo>
+                    <a:pt x="4265610" y="2814553"/>
+                  </a:lnTo>
+                  <a:lnTo>
+                    <a:pt x="4343244" y="2817286"/>
+                  </a:lnTo>
+                  <a:lnTo>
+                    <a:pt x="4420879" y="2820010"/>
+                  </a:lnTo>
+                  <a:lnTo>
+                    <a:pt x="4498513" y="2822724"/>
+                  </a:lnTo>
+                  <a:lnTo>
+                    <a:pt x="4576147" y="2825430"/>
+                  </a:lnTo>
+                  <a:lnTo>
+                    <a:pt x="4653781" y="2828128"/>
+                  </a:lnTo>
+                  <a:lnTo>
+                    <a:pt x="4731415" y="2830816"/>
+                  </a:lnTo>
+                  <a:lnTo>
+                    <a:pt x="4809049" y="2833496"/>
+                  </a:lnTo>
+                  <a:lnTo>
+                    <a:pt x="4886683" y="2836166"/>
+                  </a:lnTo>
+                  <a:lnTo>
+                    <a:pt x="4964317" y="2838829"/>
+                  </a:lnTo>
+                  <a:lnTo>
+                    <a:pt x="5041951" y="2841482"/>
+                  </a:lnTo>
+                  <a:lnTo>
+                    <a:pt x="5119585" y="2844127"/>
+                  </a:lnTo>
+                  <a:lnTo>
+                    <a:pt x="5197219" y="2846763"/>
+                  </a:lnTo>
+                  <a:lnTo>
+                    <a:pt x="5274853" y="2849391"/>
+                  </a:lnTo>
+                  <a:lnTo>
+                    <a:pt x="5352487" y="2852010"/>
+                  </a:lnTo>
+                  <a:lnTo>
+                    <a:pt x="5430121" y="2854620"/>
+                  </a:lnTo>
+                  <a:lnTo>
+                    <a:pt x="5507755" y="2857222"/>
+                  </a:lnTo>
+                  <a:lnTo>
+                    <a:pt x="5585389" y="2859816"/>
+                  </a:lnTo>
+                  <a:lnTo>
+                    <a:pt x="5663023" y="2862401"/>
+                  </a:lnTo>
+                  <a:lnTo>
+                    <a:pt x="5740657" y="2864977"/>
+                  </a:lnTo>
+                  <a:lnTo>
+                    <a:pt x="5818291" y="2867546"/>
+                  </a:lnTo>
+                  <a:lnTo>
+                    <a:pt x="5895925" y="2870105"/>
+                  </a:lnTo>
+                  <a:lnTo>
+                    <a:pt x="5973559" y="2872657"/>
+                  </a:lnTo>
+                  <a:lnTo>
+                    <a:pt x="6051193" y="2875200"/>
+                  </a:lnTo>
+                  <a:lnTo>
+                    <a:pt x="6128827" y="2877735"/>
+                  </a:lnTo>
+                  <a:lnTo>
+                    <a:pt x="6206462" y="2880262"/>
+                  </a:lnTo>
+                  <a:lnTo>
+                    <a:pt x="6284096" y="2882780"/>
+                  </a:lnTo>
+                  <a:lnTo>
+                    <a:pt x="6361730" y="2885290"/>
+                  </a:lnTo>
+                  <a:lnTo>
+                    <a:pt x="6439364" y="2887792"/>
+                  </a:lnTo>
+                  <a:lnTo>
+                    <a:pt x="6516998" y="2890286"/>
+                  </a:lnTo>
+                  <a:lnTo>
+                    <a:pt x="6594632" y="2892772"/>
+                  </a:lnTo>
+                  <a:lnTo>
+                    <a:pt x="6672266" y="2895249"/>
+                  </a:lnTo>
+                  <a:lnTo>
+                    <a:pt x="6749900" y="2897719"/>
+                  </a:lnTo>
+                  <a:lnTo>
+                    <a:pt x="6827534" y="2900180"/>
+                  </a:lnTo>
+                  <a:lnTo>
+                    <a:pt x="6905168" y="2902634"/>
+                  </a:lnTo>
+                  <a:lnTo>
+                    <a:pt x="6982802" y="2905079"/>
+                  </a:lnTo>
+                  <a:lnTo>
+                    <a:pt x="7060436" y="2907517"/>
+                  </a:lnTo>
+                  <a:lnTo>
+                    <a:pt x="7138070" y="2909946"/>
+                  </a:lnTo>
+                  <a:lnTo>
+                    <a:pt x="7215704" y="2912368"/>
+                  </a:lnTo>
+                  <a:lnTo>
+                    <a:pt x="7293338" y="2914781"/>
+                  </a:lnTo>
+                  <a:lnTo>
+                    <a:pt x="7370972" y="2917187"/>
+                  </a:lnTo>
+                  <a:lnTo>
+                    <a:pt x="7370972" y="3611785"/>
+                  </a:lnTo>
+                  <a:lnTo>
+                    <a:pt x="7293338" y="3609277"/>
+                  </a:lnTo>
+                  <a:lnTo>
+                    <a:pt x="7215704" y="3606614"/>
+                  </a:lnTo>
+                  <a:lnTo>
+                    <a:pt x="7138070" y="3603789"/>
+                  </a:lnTo>
+                  <a:lnTo>
+                    <a:pt x="7060436" y="3600790"/>
+                  </a:lnTo>
+                  <a:lnTo>
+                    <a:pt x="6982802" y="3597607"/>
+                  </a:lnTo>
+                  <a:lnTo>
+                    <a:pt x="6905168" y="3594228"/>
+                  </a:lnTo>
+                  <a:lnTo>
+                    <a:pt x="6827534" y="3590642"/>
+                  </a:lnTo>
+                  <a:lnTo>
+                    <a:pt x="6749900" y="3586836"/>
+                  </a:lnTo>
+                  <a:lnTo>
+                    <a:pt x="6672266" y="3582796"/>
+                  </a:lnTo>
+                  <a:lnTo>
+                    <a:pt x="6594632" y="3578508"/>
+                  </a:lnTo>
+                  <a:lnTo>
+                    <a:pt x="6516998" y="3573957"/>
+                  </a:lnTo>
+                  <a:lnTo>
+                    <a:pt x="6439364" y="3569127"/>
+                  </a:lnTo>
+                  <a:lnTo>
+                    <a:pt x="6361730" y="3564000"/>
+                  </a:lnTo>
+                  <a:lnTo>
+                    <a:pt x="6284096" y="3558558"/>
+                  </a:lnTo>
+                  <a:lnTo>
+                    <a:pt x="6206462" y="3552783"/>
+                  </a:lnTo>
+                  <a:lnTo>
+                    <a:pt x="6128827" y="3546652"/>
+                  </a:lnTo>
+                  <a:lnTo>
+                    <a:pt x="6051193" y="3540146"/>
+                  </a:lnTo>
+                  <a:lnTo>
+                    <a:pt x="5973559" y="3533240"/>
+                  </a:lnTo>
+                  <a:lnTo>
+                    <a:pt x="5895925" y="3525910"/>
+                  </a:lnTo>
+                  <a:lnTo>
+                    <a:pt x="5818291" y="3518130"/>
+                  </a:lnTo>
+                  <a:lnTo>
+                    <a:pt x="5740657" y="3509872"/>
+                  </a:lnTo>
+                  <a:lnTo>
+                    <a:pt x="5663023" y="3501108"/>
+                  </a:lnTo>
+                  <a:lnTo>
+                    <a:pt x="5585389" y="3491806"/>
+                  </a:lnTo>
+                  <a:lnTo>
+                    <a:pt x="5507755" y="3481932"/>
+                  </a:lnTo>
+                  <a:lnTo>
+                    <a:pt x="5430121" y="3471452"/>
+                  </a:lnTo>
+                  <a:lnTo>
+                    <a:pt x="5352487" y="3460329"/>
+                  </a:lnTo>
+                  <a:lnTo>
+                    <a:pt x="5274853" y="3448524"/>
+                  </a:lnTo>
+                  <a:lnTo>
+                    <a:pt x="5197219" y="3435993"/>
+                  </a:lnTo>
+                  <a:lnTo>
+                    <a:pt x="5119585" y="3422693"/>
+                  </a:lnTo>
+                  <a:lnTo>
+                    <a:pt x="5041951" y="3408577"/>
+                  </a:lnTo>
+                  <a:lnTo>
+                    <a:pt x="4964317" y="3393594"/>
+                  </a:lnTo>
+                  <a:lnTo>
+                    <a:pt x="4886683" y="3377692"/>
+                  </a:lnTo>
+                  <a:lnTo>
+                    <a:pt x="4809049" y="3360813"/>
+                  </a:lnTo>
+                  <a:lnTo>
+                    <a:pt x="4731415" y="3342898"/>
+                  </a:lnTo>
+                  <a:lnTo>
+                    <a:pt x="4653781" y="3323884"/>
+                  </a:lnTo>
+                  <a:lnTo>
+                    <a:pt x="4576147" y="3303702"/>
+                  </a:lnTo>
+                  <a:lnTo>
+                    <a:pt x="4498513" y="3282281"/>
+                  </a:lnTo>
+                  <a:lnTo>
+                    <a:pt x="4420879" y="3259545"/>
+                  </a:lnTo>
+                  <a:lnTo>
+                    <a:pt x="4343244" y="3235414"/>
+                  </a:lnTo>
+                  <a:lnTo>
+                    <a:pt x="4265610" y="3209801"/>
+                  </a:lnTo>
+                  <a:lnTo>
+                    <a:pt x="4187976" y="3182615"/>
+                  </a:lnTo>
+                  <a:lnTo>
+                    <a:pt x="4110342" y="3153761"/>
+                  </a:lnTo>
+                  <a:lnTo>
+                    <a:pt x="4032708" y="3123136"/>
+                  </a:lnTo>
+                  <a:lnTo>
+                    <a:pt x="3955074" y="3090630"/>
+                  </a:lnTo>
+                  <a:lnTo>
+                    <a:pt x="3877440" y="3056130"/>
+                  </a:lnTo>
+                  <a:lnTo>
+                    <a:pt x="3799806" y="3019511"/>
+                  </a:lnTo>
+                  <a:lnTo>
+                    <a:pt x="3722172" y="2980644"/>
+                  </a:lnTo>
+                  <a:lnTo>
+                    <a:pt x="3644538" y="2939391"/>
+                  </a:lnTo>
+                  <a:lnTo>
+                    <a:pt x="3566904" y="2895606"/>
+                  </a:lnTo>
+                  <a:lnTo>
+                    <a:pt x="3489270" y="2849133"/>
+                  </a:lnTo>
+                  <a:lnTo>
+                    <a:pt x="3411636" y="2799807"/>
+                  </a:lnTo>
+                  <a:lnTo>
+                    <a:pt x="3334002" y="2781056"/>
+                  </a:lnTo>
+                  <a:lnTo>
+                    <a:pt x="3256368" y="2778205"/>
+                  </a:lnTo>
+                  <a:lnTo>
+                    <a:pt x="3178734" y="2775344"/>
+                  </a:lnTo>
+                  <a:lnTo>
+                    <a:pt x="3101100" y="2772475"/>
+                  </a:lnTo>
+                  <a:lnTo>
+                    <a:pt x="3023466" y="2769595"/>
+                  </a:lnTo>
+                  <a:lnTo>
+                    <a:pt x="2945832" y="2766707"/>
+                  </a:lnTo>
+                  <a:lnTo>
+                    <a:pt x="2868198" y="2763809"/>
+                  </a:lnTo>
+                  <a:lnTo>
+                    <a:pt x="2790564" y="2760901"/>
+                  </a:lnTo>
+                  <a:lnTo>
+                    <a:pt x="2712930" y="2757984"/>
+                  </a:lnTo>
+                  <a:lnTo>
+                    <a:pt x="2635295" y="2755057"/>
+                  </a:lnTo>
+                  <a:lnTo>
+                    <a:pt x="2557661" y="2752121"/>
+                  </a:lnTo>
+                  <a:lnTo>
+                    <a:pt x="2480027" y="2749176"/>
+                  </a:lnTo>
+                  <a:lnTo>
+                    <a:pt x="2402393" y="2746220"/>
+                  </a:lnTo>
+                  <a:lnTo>
+                    <a:pt x="2324759" y="2743255"/>
+                  </a:lnTo>
+                  <a:lnTo>
+                    <a:pt x="2247125" y="2740280"/>
+                  </a:lnTo>
+                  <a:lnTo>
+                    <a:pt x="2169491" y="2737296"/>
+                  </a:lnTo>
+                  <a:lnTo>
+                    <a:pt x="2091857" y="2734301"/>
+                  </a:lnTo>
+                  <a:lnTo>
+                    <a:pt x="2014223" y="2731297"/>
+                  </a:lnTo>
+                  <a:lnTo>
+                    <a:pt x="1936589" y="2728283"/>
+                  </a:lnTo>
+                  <a:lnTo>
+                    <a:pt x="1858955" y="2725260"/>
+                  </a:lnTo>
+                  <a:lnTo>
+                    <a:pt x="1781321" y="2722226"/>
+                  </a:lnTo>
+                  <a:lnTo>
+                    <a:pt x="1703687" y="2719182"/>
+                  </a:lnTo>
+                  <a:lnTo>
+                    <a:pt x="1626053" y="2716129"/>
+                  </a:lnTo>
+                  <a:lnTo>
+                    <a:pt x="1548419" y="2713065"/>
+                  </a:lnTo>
+                  <a:lnTo>
+                    <a:pt x="1470785" y="2709992"/>
+                  </a:lnTo>
+                  <a:lnTo>
+                    <a:pt x="1393151" y="2706908"/>
+                  </a:lnTo>
+                  <a:lnTo>
+                    <a:pt x="1315517" y="2703814"/>
+                  </a:lnTo>
+                  <a:lnTo>
+                    <a:pt x="1237883" y="2700711"/>
+                  </a:lnTo>
+                  <a:lnTo>
+                    <a:pt x="1160249" y="2697597"/>
+                  </a:lnTo>
+                  <a:lnTo>
+                    <a:pt x="1082615" y="2694473"/>
+                  </a:lnTo>
+                  <a:lnTo>
+                    <a:pt x="1004981" y="2691338"/>
+                  </a:lnTo>
+                  <a:lnTo>
+                    <a:pt x="927346" y="2688194"/>
+                  </a:lnTo>
+                  <a:lnTo>
+                    <a:pt x="849712" y="2685039"/>
+                  </a:lnTo>
+                  <a:lnTo>
+                    <a:pt x="772078" y="2681873"/>
+                  </a:lnTo>
+                  <a:lnTo>
+                    <a:pt x="694444" y="2678698"/>
+                  </a:lnTo>
+                  <a:lnTo>
+                    <a:pt x="616810" y="2675512"/>
+                  </a:lnTo>
+                  <a:lnTo>
+                    <a:pt x="539176" y="2672315"/>
+                  </a:lnTo>
+                  <a:lnTo>
+                    <a:pt x="461542" y="2669109"/>
+                  </a:lnTo>
+                  <a:lnTo>
+                    <a:pt x="383908" y="2665891"/>
+                  </a:lnTo>
+                  <a:lnTo>
+                    <a:pt x="306274" y="2662663"/>
+                  </a:lnTo>
+                  <a:lnTo>
+                    <a:pt x="228640" y="2659425"/>
+                  </a:lnTo>
+                  <a:lnTo>
+                    <a:pt x="151006" y="2656176"/>
+                  </a:lnTo>
+                  <a:lnTo>
+                    <a:pt x="73372" y="2652916"/>
+                  </a:lnTo>
+                  <a:lnTo>
+                    <a:pt x="0" y="2649825"/>
                   </a:lnTo>
                   <a:close/>
                 </a:path>
@@ -3549,240 +3552,243 @@
           </p:nvSpPr>
           <p:spPr>
             <a:xfrm>
-              <a:off x="2405699" y="1896563"/>
-              <a:ext cx="5782791" cy="2779650"/>
+              <a:off x="2334210" y="1896563"/>
+              <a:ext cx="5854280" cy="2917187"/>
             </a:xfrm>
             <a:custGeom>
               <a:avLst/>
               <a:pathLst>
-                <a:path w="5782791" h="2779650">
+                <a:path w="5854280" h="2917187">
                   <a:moveTo>
                     <a:pt x="0" y="0"/>
                   </a:moveTo>
                   <a:lnTo>
-                    <a:pt x="37871" y="110423"/>
-                  </a:lnTo>
-                  <a:lnTo>
-                    <a:pt x="115505" y="323185"/>
-                  </a:lnTo>
-                  <a:lnTo>
-                    <a:pt x="193139" y="523168"/>
-                  </a:lnTo>
-                  <a:lnTo>
-                    <a:pt x="270773" y="711139"/>
-                  </a:lnTo>
-                  <a:lnTo>
-                    <a:pt x="348407" y="887820"/>
-                  </a:lnTo>
-                  <a:lnTo>
-                    <a:pt x="426041" y="1053889"/>
-                  </a:lnTo>
-                  <a:lnTo>
-                    <a:pt x="503676" y="1209982"/>
-                  </a:lnTo>
-                  <a:lnTo>
-                    <a:pt x="581310" y="1356700"/>
-                  </a:lnTo>
-                  <a:lnTo>
-                    <a:pt x="658944" y="1494605"/>
-                  </a:lnTo>
-                  <a:lnTo>
-                    <a:pt x="736578" y="1624227"/>
-                  </a:lnTo>
-                  <a:lnTo>
-                    <a:pt x="814212" y="1746063"/>
-                  </a:lnTo>
-                  <a:lnTo>
-                    <a:pt x="891846" y="1860582"/>
-                  </a:lnTo>
-                  <a:lnTo>
-                    <a:pt x="969480" y="1968221"/>
-                  </a:lnTo>
-                  <a:lnTo>
-                    <a:pt x="1047114" y="2069396"/>
-                  </a:lnTo>
-                  <a:lnTo>
-                    <a:pt x="1124748" y="2164493"/>
-                  </a:lnTo>
-                  <a:lnTo>
-                    <a:pt x="1202382" y="2253878"/>
-                  </a:lnTo>
-                  <a:lnTo>
-                    <a:pt x="1280016" y="2337895"/>
-                  </a:lnTo>
-                  <a:lnTo>
-                    <a:pt x="1357650" y="2416865"/>
-                  </a:lnTo>
-                  <a:lnTo>
-                    <a:pt x="1435284" y="2491092"/>
-                  </a:lnTo>
-                  <a:lnTo>
-                    <a:pt x="1512918" y="2560860"/>
-                  </a:lnTo>
-                  <a:lnTo>
-                    <a:pt x="1590552" y="2626438"/>
-                  </a:lnTo>
-                  <a:lnTo>
-                    <a:pt x="1668186" y="2688076"/>
-                  </a:lnTo>
-                  <a:lnTo>
-                    <a:pt x="1745820" y="2746013"/>
-                  </a:lnTo>
-                  <a:lnTo>
-                    <a:pt x="1823454" y="2779650"/>
-                  </a:lnTo>
-                  <a:lnTo>
-                    <a:pt x="1901088" y="2769470"/>
-                  </a:lnTo>
-                  <a:lnTo>
-                    <a:pt x="1978722" y="2759170"/>
-                  </a:lnTo>
-                  <a:lnTo>
-                    <a:pt x="2056356" y="2748751"/>
-                  </a:lnTo>
-                  <a:lnTo>
-                    <a:pt x="2133990" y="2738210"/>
-                  </a:lnTo>
-                  <a:lnTo>
-                    <a:pt x="2211624" y="2727546"/>
-                  </a:lnTo>
-                  <a:lnTo>
-                    <a:pt x="2289259" y="2716757"/>
-                  </a:lnTo>
-                  <a:lnTo>
-                    <a:pt x="2366893" y="2705843"/>
-                  </a:lnTo>
-                  <a:lnTo>
-                    <a:pt x="2444527" y="2694802"/>
-                  </a:lnTo>
-                  <a:lnTo>
-                    <a:pt x="2522161" y="2683632"/>
-                  </a:lnTo>
-                  <a:lnTo>
-                    <a:pt x="2599795" y="2672331"/>
-                  </a:lnTo>
-                  <a:lnTo>
-                    <a:pt x="2677429" y="2660899"/>
-                  </a:lnTo>
-                  <a:lnTo>
-                    <a:pt x="2755063" y="2649333"/>
-                  </a:lnTo>
-                  <a:lnTo>
-                    <a:pt x="2832697" y="2637633"/>
-                  </a:lnTo>
-                  <a:lnTo>
-                    <a:pt x="2910331" y="2625796"/>
-                  </a:lnTo>
-                  <a:lnTo>
-                    <a:pt x="2987965" y="2613821"/>
-                  </a:lnTo>
-                  <a:lnTo>
-                    <a:pt x="3065599" y="2601707"/>
-                  </a:lnTo>
-                  <a:lnTo>
-                    <a:pt x="3143233" y="2589451"/>
-                  </a:lnTo>
-                  <a:lnTo>
-                    <a:pt x="3220867" y="2577052"/>
-                  </a:lnTo>
-                  <a:lnTo>
-                    <a:pt x="3298501" y="2564509"/>
-                  </a:lnTo>
-                  <a:lnTo>
-                    <a:pt x="3376135" y="2551819"/>
-                  </a:lnTo>
-                  <a:lnTo>
-                    <a:pt x="3453769" y="2538982"/>
-                  </a:lnTo>
-                  <a:lnTo>
-                    <a:pt x="3531403" y="2525994"/>
-                  </a:lnTo>
-                  <a:lnTo>
-                    <a:pt x="3609037" y="2512855"/>
-                  </a:lnTo>
-                  <a:lnTo>
-                    <a:pt x="3686671" y="2499563"/>
-                  </a:lnTo>
-                  <a:lnTo>
-                    <a:pt x="3764305" y="2486116"/>
-                  </a:lnTo>
-                  <a:lnTo>
-                    <a:pt x="3841939" y="2472513"/>
-                  </a:lnTo>
-                  <a:lnTo>
-                    <a:pt x="3919573" y="2458750"/>
-                  </a:lnTo>
-                  <a:lnTo>
-                    <a:pt x="3997208" y="2444827"/>
-                  </a:lnTo>
-                  <a:lnTo>
-                    <a:pt x="4074842" y="2430742"/>
-                  </a:lnTo>
-                  <a:lnTo>
-                    <a:pt x="4152476" y="2416492"/>
-                  </a:lnTo>
-                  <a:lnTo>
-                    <a:pt x="4230110" y="2402076"/>
-                  </a:lnTo>
-                  <a:lnTo>
-                    <a:pt x="4307744" y="2387493"/>
-                  </a:lnTo>
-                  <a:lnTo>
-                    <a:pt x="4385378" y="2372739"/>
-                  </a:lnTo>
-                  <a:lnTo>
-                    <a:pt x="4463012" y="2357813"/>
-                  </a:lnTo>
-                  <a:lnTo>
-                    <a:pt x="4540646" y="2342712"/>
-                  </a:lnTo>
-                  <a:lnTo>
-                    <a:pt x="4618280" y="2327436"/>
-                  </a:lnTo>
-                  <a:lnTo>
-                    <a:pt x="4695914" y="2311982"/>
-                  </a:lnTo>
-                  <a:lnTo>
-                    <a:pt x="4773548" y="2296347"/>
-                  </a:lnTo>
-                  <a:lnTo>
-                    <a:pt x="4851182" y="2280531"/>
-                  </a:lnTo>
-                  <a:lnTo>
-                    <a:pt x="4928816" y="2264529"/>
-                  </a:lnTo>
-                  <a:lnTo>
-                    <a:pt x="5006450" y="2248341"/>
-                  </a:lnTo>
-                  <a:lnTo>
-                    <a:pt x="5084084" y="2231965"/>
-                  </a:lnTo>
-                  <a:lnTo>
-                    <a:pt x="5161718" y="2215397"/>
-                  </a:lnTo>
-                  <a:lnTo>
-                    <a:pt x="5239352" y="2198636"/>
-                  </a:lnTo>
-                  <a:lnTo>
-                    <a:pt x="5316986" y="2181680"/>
-                  </a:lnTo>
-                  <a:lnTo>
-                    <a:pt x="5394620" y="2164525"/>
-                  </a:lnTo>
-                  <a:lnTo>
-                    <a:pt x="5472254" y="2147171"/>
-                  </a:lnTo>
-                  <a:lnTo>
-                    <a:pt x="5549888" y="2129615"/>
-                  </a:lnTo>
-                  <a:lnTo>
-                    <a:pt x="5627522" y="2111853"/>
-                  </a:lnTo>
-                  <a:lnTo>
-                    <a:pt x="5705157" y="2093885"/>
-                  </a:lnTo>
-                  <a:lnTo>
-                    <a:pt x="5782791" y="2075707"/>
+                    <a:pt x="31727" y="89393"/>
+                  </a:lnTo>
+                  <a:lnTo>
+                    <a:pt x="109361" y="295483"/>
+                  </a:lnTo>
+                  <a:lnTo>
+                    <a:pt x="186995" y="489653"/>
+                  </a:lnTo>
+                  <a:lnTo>
+                    <a:pt x="264629" y="672592"/>
+                  </a:lnTo>
+                  <a:lnTo>
+                    <a:pt x="342263" y="844951"/>
+                  </a:lnTo>
+                  <a:lnTo>
+                    <a:pt x="419897" y="1007341"/>
+                  </a:lnTo>
+                  <a:lnTo>
+                    <a:pt x="497531" y="1160339"/>
+                  </a:lnTo>
+                  <a:lnTo>
+                    <a:pt x="575165" y="1304487"/>
+                  </a:lnTo>
+                  <a:lnTo>
+                    <a:pt x="652799" y="1440299"/>
+                  </a:lnTo>
+                  <a:lnTo>
+                    <a:pt x="730433" y="1568256"/>
+                  </a:lnTo>
+                  <a:lnTo>
+                    <a:pt x="808067" y="1688811"/>
+                  </a:lnTo>
+                  <a:lnTo>
+                    <a:pt x="885701" y="1802395"/>
+                  </a:lnTo>
+                  <a:lnTo>
+                    <a:pt x="963335" y="1909408"/>
+                  </a:lnTo>
+                  <a:lnTo>
+                    <a:pt x="1040969" y="2010233"/>
+                  </a:lnTo>
+                  <a:lnTo>
+                    <a:pt x="1118603" y="2105226"/>
+                  </a:lnTo>
+                  <a:lnTo>
+                    <a:pt x="1196237" y="2194724"/>
+                  </a:lnTo>
+                  <a:lnTo>
+                    <a:pt x="1273871" y="2279047"/>
+                  </a:lnTo>
+                  <a:lnTo>
+                    <a:pt x="1351505" y="2358492"/>
+                  </a:lnTo>
+                  <a:lnTo>
+                    <a:pt x="1429139" y="2433343"/>
+                  </a:lnTo>
+                  <a:lnTo>
+                    <a:pt x="1506773" y="2503864"/>
+                  </a:lnTo>
+                  <a:lnTo>
+                    <a:pt x="1584407" y="2570307"/>
+                  </a:lnTo>
+                  <a:lnTo>
+                    <a:pt x="1662042" y="2632906"/>
+                  </a:lnTo>
+                  <a:lnTo>
+                    <a:pt x="1739676" y="2691885"/>
+                  </a:lnTo>
+                  <a:lnTo>
+                    <a:pt x="1817310" y="2747453"/>
+                  </a:lnTo>
+                  <a:lnTo>
+                    <a:pt x="1894944" y="2783898"/>
+                  </a:lnTo>
+                  <a:lnTo>
+                    <a:pt x="1972578" y="2786731"/>
+                  </a:lnTo>
+                  <a:lnTo>
+                    <a:pt x="2050212" y="2789554"/>
+                  </a:lnTo>
+                  <a:lnTo>
+                    <a:pt x="2127846" y="2792368"/>
+                  </a:lnTo>
+                  <a:lnTo>
+                    <a:pt x="2205480" y="2795173"/>
+                  </a:lnTo>
+                  <a:lnTo>
+                    <a:pt x="2283114" y="2797969"/>
+                  </a:lnTo>
+                  <a:lnTo>
+                    <a:pt x="2360748" y="2800755"/>
+                  </a:lnTo>
+                  <a:lnTo>
+                    <a:pt x="2438382" y="2803533"/>
+                  </a:lnTo>
+                  <a:lnTo>
+                    <a:pt x="2516016" y="2806302"/>
+                  </a:lnTo>
+                  <a:lnTo>
+                    <a:pt x="2593650" y="2809061"/>
+                  </a:lnTo>
+                  <a:lnTo>
+                    <a:pt x="2671284" y="2811812"/>
+                  </a:lnTo>
+                  <a:lnTo>
+                    <a:pt x="2748918" y="2814553"/>
+                  </a:lnTo>
+                  <a:lnTo>
+                    <a:pt x="2826552" y="2817286"/>
+                  </a:lnTo>
+                  <a:lnTo>
+                    <a:pt x="2904186" y="2820010"/>
+                  </a:lnTo>
+                  <a:lnTo>
+                    <a:pt x="2981820" y="2822724"/>
+                  </a:lnTo>
+                  <a:lnTo>
+                    <a:pt x="3059454" y="2825430"/>
+                  </a:lnTo>
+                  <a:lnTo>
+                    <a:pt x="3137088" y="2828128"/>
+                  </a:lnTo>
+                  <a:lnTo>
+                    <a:pt x="3214722" y="2830816"/>
+                  </a:lnTo>
+                  <a:lnTo>
+                    <a:pt x="3292356" y="2833496"/>
+                  </a:lnTo>
+                  <a:lnTo>
+                    <a:pt x="3369990" y="2836166"/>
+                  </a:lnTo>
+                  <a:lnTo>
+                    <a:pt x="3447625" y="2838829"/>
+                  </a:lnTo>
+                  <a:lnTo>
+                    <a:pt x="3525259" y="2841482"/>
+                  </a:lnTo>
+                  <a:lnTo>
+                    <a:pt x="3602893" y="2844127"/>
+                  </a:lnTo>
+                  <a:lnTo>
+                    <a:pt x="3680527" y="2846763"/>
+                  </a:lnTo>
+                  <a:lnTo>
+                    <a:pt x="3758161" y="2849391"/>
+                  </a:lnTo>
+                  <a:lnTo>
+                    <a:pt x="3835795" y="2852010"/>
+                  </a:lnTo>
+                  <a:lnTo>
+                    <a:pt x="3913429" y="2854620"/>
+                  </a:lnTo>
+                  <a:lnTo>
+                    <a:pt x="3991063" y="2857222"/>
+                  </a:lnTo>
+                  <a:lnTo>
+                    <a:pt x="4068697" y="2859816"/>
+                  </a:lnTo>
+                  <a:lnTo>
+                    <a:pt x="4146331" y="2862401"/>
+                  </a:lnTo>
+                  <a:lnTo>
+                    <a:pt x="4223965" y="2864977"/>
+                  </a:lnTo>
+                  <a:lnTo>
+                    <a:pt x="4301599" y="2867546"/>
+                  </a:lnTo>
+                  <a:lnTo>
+                    <a:pt x="4379233" y="2870105"/>
+                  </a:lnTo>
+                  <a:lnTo>
+                    <a:pt x="4456867" y="2872657"/>
+                  </a:lnTo>
+                  <a:lnTo>
+                    <a:pt x="4534501" y="2875200"/>
+                  </a:lnTo>
+                  <a:lnTo>
+                    <a:pt x="4612135" y="2877735"/>
+                  </a:lnTo>
+                  <a:lnTo>
+                    <a:pt x="4689769" y="2880262"/>
+                  </a:lnTo>
+                  <a:lnTo>
+                    <a:pt x="4767403" y="2882780"/>
+                  </a:lnTo>
+                  <a:lnTo>
+                    <a:pt x="4845037" y="2885290"/>
+                  </a:lnTo>
+                  <a:lnTo>
+                    <a:pt x="4922671" y="2887792"/>
+                  </a:lnTo>
+                  <a:lnTo>
+                    <a:pt x="5000305" y="2890286"/>
+                  </a:lnTo>
+                  <a:lnTo>
+                    <a:pt x="5077939" y="2892772"/>
+                  </a:lnTo>
+                  <a:lnTo>
+                    <a:pt x="5155574" y="2895249"/>
+                  </a:lnTo>
+                  <a:lnTo>
+                    <a:pt x="5233208" y="2897719"/>
+                  </a:lnTo>
+                  <a:lnTo>
+                    <a:pt x="5310842" y="2900180"/>
+                  </a:lnTo>
+                  <a:lnTo>
+                    <a:pt x="5388476" y="2902634"/>
+                  </a:lnTo>
+                  <a:lnTo>
+                    <a:pt x="5466110" y="2905079"/>
+                  </a:lnTo>
+                  <a:lnTo>
+                    <a:pt x="5543744" y="2907517"/>
+                  </a:lnTo>
+                  <a:lnTo>
+                    <a:pt x="5621378" y="2909946"/>
+                  </a:lnTo>
+                  <a:lnTo>
+                    <a:pt x="5699012" y="2912368"/>
+                  </a:lnTo>
+                  <a:lnTo>
+                    <a:pt x="5776646" y="2914781"/>
+                  </a:lnTo>
+                  <a:lnTo>
+                    <a:pt x="5854280" y="2917187"/>
                   </a:lnTo>
                 </a:path>
               </a:pathLst>
@@ -3802,300 +3808,300 @@
           </p:nvSpPr>
           <p:spPr>
             <a:xfrm>
-              <a:off x="817517" y="4686277"/>
-              <a:ext cx="7370972" cy="826745"/>
+              <a:off x="817517" y="4546389"/>
+              <a:ext cx="7370972" cy="961959"/>
             </a:xfrm>
             <a:custGeom>
               <a:avLst/>
               <a:pathLst>
-                <a:path w="7370972" h="826745">
+                <a:path w="7370972" h="961959">
                   <a:moveTo>
-                    <a:pt x="7370972" y="826745"/>
+                    <a:pt x="7370972" y="961959"/>
                   </a:moveTo>
                   <a:lnTo>
-                    <a:pt x="7293338" y="824432"/>
-                  </a:lnTo>
-                  <a:lnTo>
-                    <a:pt x="7215704" y="821972"/>
-                  </a:lnTo>
-                  <a:lnTo>
-                    <a:pt x="7138070" y="819355"/>
-                  </a:lnTo>
-                  <a:lnTo>
-                    <a:pt x="7060436" y="816570"/>
-                  </a:lnTo>
-                  <a:lnTo>
-                    <a:pt x="6982802" y="813608"/>
-                  </a:lnTo>
-                  <a:lnTo>
-                    <a:pt x="6905168" y="810456"/>
-                  </a:lnTo>
-                  <a:lnTo>
-                    <a:pt x="6827534" y="807103"/>
-                  </a:lnTo>
-                  <a:lnTo>
-                    <a:pt x="6749900" y="803536"/>
-                  </a:lnTo>
-                  <a:lnTo>
-                    <a:pt x="6672266" y="799740"/>
-                  </a:lnTo>
-                  <a:lnTo>
-                    <a:pt x="6594632" y="795702"/>
-                  </a:lnTo>
-                  <a:lnTo>
-                    <a:pt x="6516998" y="791406"/>
-                  </a:lnTo>
-                  <a:lnTo>
-                    <a:pt x="6439364" y="786836"/>
-                  </a:lnTo>
-                  <a:lnTo>
-                    <a:pt x="6361730" y="781973"/>
-                  </a:lnTo>
-                  <a:lnTo>
-                    <a:pt x="6284096" y="776800"/>
-                  </a:lnTo>
-                  <a:lnTo>
-                    <a:pt x="6206462" y="771296"/>
-                  </a:lnTo>
-                  <a:lnTo>
-                    <a:pt x="6128827" y="765440"/>
-                  </a:lnTo>
-                  <a:lnTo>
-                    <a:pt x="6051193" y="759210"/>
-                  </a:lnTo>
-                  <a:lnTo>
-                    <a:pt x="5973559" y="752582"/>
-                  </a:lnTo>
-                  <a:lnTo>
-                    <a:pt x="5895925" y="745531"/>
-                  </a:lnTo>
-                  <a:lnTo>
-                    <a:pt x="5818291" y="738029"/>
-                  </a:lnTo>
-                  <a:lnTo>
-                    <a:pt x="5740657" y="730047"/>
-                  </a:lnTo>
-                  <a:lnTo>
-                    <a:pt x="5663023" y="721555"/>
-                  </a:lnTo>
-                  <a:lnTo>
-                    <a:pt x="5585389" y="712521"/>
-                  </a:lnTo>
-                  <a:lnTo>
-                    <a:pt x="5507755" y="702910"/>
-                  </a:lnTo>
-                  <a:lnTo>
-                    <a:pt x="5430121" y="692684"/>
-                  </a:lnTo>
-                  <a:lnTo>
-                    <a:pt x="5352487" y="681805"/>
-                  </a:lnTo>
-                  <a:lnTo>
-                    <a:pt x="5274853" y="670230"/>
-                  </a:lnTo>
-                  <a:lnTo>
-                    <a:pt x="5197219" y="657916"/>
-                  </a:lnTo>
-                  <a:lnTo>
-                    <a:pt x="5119585" y="644815"/>
-                  </a:lnTo>
-                  <a:lnTo>
-                    <a:pt x="5041951" y="630877"/>
-                  </a:lnTo>
-                  <a:lnTo>
-                    <a:pt x="4964317" y="616049"/>
-                  </a:lnTo>
-                  <a:lnTo>
-                    <a:pt x="4886683" y="600272"/>
-                  </a:lnTo>
-                  <a:lnTo>
-                    <a:pt x="4809049" y="583487"/>
-                  </a:lnTo>
-                  <a:lnTo>
-                    <a:pt x="4731415" y="565630"/>
-                  </a:lnTo>
-                  <a:lnTo>
-                    <a:pt x="4653781" y="546632"/>
-                  </a:lnTo>
-                  <a:lnTo>
-                    <a:pt x="4576147" y="526420"/>
-                  </a:lnTo>
-                  <a:lnTo>
-                    <a:pt x="4498513" y="504916"/>
-                  </a:lnTo>
-                  <a:lnTo>
-                    <a:pt x="4420879" y="482038"/>
-                  </a:lnTo>
-                  <a:lnTo>
-                    <a:pt x="4343244" y="457697"/>
-                  </a:lnTo>
-                  <a:lnTo>
-                    <a:pt x="4265610" y="431802"/>
-                  </a:lnTo>
-                  <a:lnTo>
-                    <a:pt x="4187976" y="404251"/>
-                  </a:lnTo>
-                  <a:lnTo>
-                    <a:pt x="4110342" y="374941"/>
-                  </a:lnTo>
-                  <a:lnTo>
-                    <a:pt x="4032708" y="343757"/>
-                  </a:lnTo>
-                  <a:lnTo>
-                    <a:pt x="3955074" y="310580"/>
-                  </a:lnTo>
-                  <a:lnTo>
-                    <a:pt x="3877440" y="275283"/>
-                  </a:lnTo>
-                  <a:lnTo>
-                    <a:pt x="3799806" y="237731"/>
-                  </a:lnTo>
-                  <a:lnTo>
-                    <a:pt x="3722172" y="197779"/>
-                  </a:lnTo>
-                  <a:lnTo>
-                    <a:pt x="3644538" y="155273"/>
-                  </a:lnTo>
-                  <a:lnTo>
-                    <a:pt x="3566904" y="110052"/>
-                  </a:lnTo>
-                  <a:lnTo>
-                    <a:pt x="3489270" y="61941"/>
-                  </a:lnTo>
-                  <a:lnTo>
-                    <a:pt x="3411636" y="10755"/>
-                  </a:lnTo>
-                  <a:lnTo>
-                    <a:pt x="3334002" y="0"/>
-                  </a:lnTo>
-                  <a:lnTo>
-                    <a:pt x="3256368" y="9947"/>
-                  </a:lnTo>
-                  <a:lnTo>
-                    <a:pt x="3178734" y="19779"/>
-                  </a:lnTo>
-                  <a:lnTo>
-                    <a:pt x="3101100" y="29499"/>
-                  </a:lnTo>
-                  <a:lnTo>
-                    <a:pt x="3023466" y="39106"/>
-                  </a:lnTo>
-                  <a:lnTo>
-                    <a:pt x="2945832" y="48603"/>
-                  </a:lnTo>
-                  <a:lnTo>
-                    <a:pt x="2868198" y="57990"/>
-                  </a:lnTo>
-                  <a:lnTo>
-                    <a:pt x="2790564" y="67269"/>
-                  </a:lnTo>
-                  <a:lnTo>
-                    <a:pt x="2712930" y="76440"/>
-                  </a:lnTo>
-                  <a:lnTo>
-                    <a:pt x="2635295" y="85507"/>
-                  </a:lnTo>
-                  <a:lnTo>
-                    <a:pt x="2557661" y="94468"/>
-                  </a:lnTo>
-                  <a:lnTo>
-                    <a:pt x="2480027" y="103327"/>
-                  </a:lnTo>
-                  <a:lnTo>
-                    <a:pt x="2402393" y="112083"/>
-                  </a:lnTo>
-                  <a:lnTo>
-                    <a:pt x="2324759" y="120738"/>
-                  </a:lnTo>
-                  <a:lnTo>
-                    <a:pt x="2247125" y="129294"/>
-                  </a:lnTo>
-                  <a:lnTo>
-                    <a:pt x="2169491" y="137751"/>
-                  </a:lnTo>
-                  <a:lnTo>
-                    <a:pt x="2091857" y="146110"/>
-                  </a:lnTo>
-                  <a:lnTo>
-                    <a:pt x="2014223" y="154373"/>
-                  </a:lnTo>
-                  <a:lnTo>
-                    <a:pt x="1936589" y="162541"/>
-                  </a:lnTo>
-                  <a:lnTo>
-                    <a:pt x="1858955" y="170614"/>
-                  </a:lnTo>
-                  <a:lnTo>
-                    <a:pt x="1781321" y="178595"/>
-                  </a:lnTo>
-                  <a:lnTo>
-                    <a:pt x="1703687" y="186484"/>
-                  </a:lnTo>
-                  <a:lnTo>
-                    <a:pt x="1626053" y="194281"/>
-                  </a:lnTo>
-                  <a:lnTo>
-                    <a:pt x="1548419" y="201989"/>
-                  </a:lnTo>
-                  <a:lnTo>
-                    <a:pt x="1470785" y="209608"/>
-                  </a:lnTo>
-                  <a:lnTo>
-                    <a:pt x="1393151" y="217139"/>
-                  </a:lnTo>
-                  <a:lnTo>
-                    <a:pt x="1315517" y="224583"/>
-                  </a:lnTo>
-                  <a:lnTo>
-                    <a:pt x="1237883" y="231942"/>
-                  </a:lnTo>
-                  <a:lnTo>
-                    <a:pt x="1160249" y="239215"/>
-                  </a:lnTo>
-                  <a:lnTo>
-                    <a:pt x="1082615" y="246405"/>
-                  </a:lnTo>
-                  <a:lnTo>
-                    <a:pt x="1004981" y="253512"/>
-                  </a:lnTo>
-                  <a:lnTo>
-                    <a:pt x="927346" y="260537"/>
-                  </a:lnTo>
-                  <a:lnTo>
-                    <a:pt x="849712" y="267481"/>
-                  </a:lnTo>
-                  <a:lnTo>
-                    <a:pt x="772078" y="274345"/>
-                  </a:lnTo>
-                  <a:lnTo>
-                    <a:pt x="694444" y="281130"/>
-                  </a:lnTo>
-                  <a:lnTo>
-                    <a:pt x="616810" y="287837"/>
-                  </a:lnTo>
-                  <a:lnTo>
-                    <a:pt x="539176" y="294466"/>
-                  </a:lnTo>
-                  <a:lnTo>
-                    <a:pt x="461542" y="301019"/>
-                  </a:lnTo>
-                  <a:lnTo>
-                    <a:pt x="383908" y="307496"/>
-                  </a:lnTo>
-                  <a:lnTo>
-                    <a:pt x="306274" y="313899"/>
-                  </a:lnTo>
-                  <a:lnTo>
-                    <a:pt x="228640" y="320228"/>
-                  </a:lnTo>
-                  <a:lnTo>
-                    <a:pt x="151006" y="326484"/>
-                  </a:lnTo>
-                  <a:lnTo>
-                    <a:pt x="73372" y="332667"/>
-                  </a:lnTo>
-                  <a:lnTo>
-                    <a:pt x="0" y="338444"/>
+                    <a:pt x="7293338" y="959451"/>
+                  </a:lnTo>
+                  <a:lnTo>
+                    <a:pt x="7215704" y="956789"/>
+                  </a:lnTo>
+                  <a:lnTo>
+                    <a:pt x="7138070" y="953963"/>
+                  </a:lnTo>
+                  <a:lnTo>
+                    <a:pt x="7060436" y="950964"/>
+                  </a:lnTo>
+                  <a:lnTo>
+                    <a:pt x="6982802" y="947781"/>
+                  </a:lnTo>
+                  <a:lnTo>
+                    <a:pt x="6905168" y="944402"/>
+                  </a:lnTo>
+                  <a:lnTo>
+                    <a:pt x="6827534" y="940816"/>
+                  </a:lnTo>
+                  <a:lnTo>
+                    <a:pt x="6749900" y="937010"/>
+                  </a:lnTo>
+                  <a:lnTo>
+                    <a:pt x="6672266" y="932970"/>
+                  </a:lnTo>
+                  <a:lnTo>
+                    <a:pt x="6594632" y="928682"/>
+                  </a:lnTo>
+                  <a:lnTo>
+                    <a:pt x="6516998" y="924131"/>
+                  </a:lnTo>
+                  <a:lnTo>
+                    <a:pt x="6439364" y="919301"/>
+                  </a:lnTo>
+                  <a:lnTo>
+                    <a:pt x="6361730" y="914174"/>
+                  </a:lnTo>
+                  <a:lnTo>
+                    <a:pt x="6284096" y="908732"/>
+                  </a:lnTo>
+                  <a:lnTo>
+                    <a:pt x="6206462" y="902957"/>
+                  </a:lnTo>
+                  <a:lnTo>
+                    <a:pt x="6128827" y="896826"/>
+                  </a:lnTo>
+                  <a:lnTo>
+                    <a:pt x="6051193" y="890320"/>
+                  </a:lnTo>
+                  <a:lnTo>
+                    <a:pt x="5973559" y="883414"/>
+                  </a:lnTo>
+                  <a:lnTo>
+                    <a:pt x="5895925" y="876084"/>
+                  </a:lnTo>
+                  <a:lnTo>
+                    <a:pt x="5818291" y="868304"/>
+                  </a:lnTo>
+                  <a:lnTo>
+                    <a:pt x="5740657" y="860046"/>
+                  </a:lnTo>
+                  <a:lnTo>
+                    <a:pt x="5663023" y="851282"/>
+                  </a:lnTo>
+                  <a:lnTo>
+                    <a:pt x="5585389" y="841980"/>
+                  </a:lnTo>
+                  <a:lnTo>
+                    <a:pt x="5507755" y="832106"/>
+                  </a:lnTo>
+                  <a:lnTo>
+                    <a:pt x="5430121" y="821626"/>
+                  </a:lnTo>
+                  <a:lnTo>
+                    <a:pt x="5352487" y="810503"/>
+                  </a:lnTo>
+                  <a:lnTo>
+                    <a:pt x="5274853" y="798698"/>
+                  </a:lnTo>
+                  <a:lnTo>
+                    <a:pt x="5197219" y="786167"/>
+                  </a:lnTo>
+                  <a:lnTo>
+                    <a:pt x="5119585" y="772867"/>
+                  </a:lnTo>
+                  <a:lnTo>
+                    <a:pt x="5041951" y="758751"/>
+                  </a:lnTo>
+                  <a:lnTo>
+                    <a:pt x="4964317" y="743769"/>
+                  </a:lnTo>
+                  <a:lnTo>
+                    <a:pt x="4886683" y="727866"/>
+                  </a:lnTo>
+                  <a:lnTo>
+                    <a:pt x="4809049" y="710987"/>
+                  </a:lnTo>
+                  <a:lnTo>
+                    <a:pt x="4731415" y="693072"/>
+                  </a:lnTo>
+                  <a:lnTo>
+                    <a:pt x="4653781" y="674058"/>
+                  </a:lnTo>
+                  <a:lnTo>
+                    <a:pt x="4576147" y="653876"/>
+                  </a:lnTo>
+                  <a:lnTo>
+                    <a:pt x="4498513" y="632455"/>
+                  </a:lnTo>
+                  <a:lnTo>
+                    <a:pt x="4420879" y="609719"/>
+                  </a:lnTo>
+                  <a:lnTo>
+                    <a:pt x="4343244" y="585588"/>
+                  </a:lnTo>
+                  <a:lnTo>
+                    <a:pt x="4265610" y="559975"/>
+                  </a:lnTo>
+                  <a:lnTo>
+                    <a:pt x="4187976" y="532789"/>
+                  </a:lnTo>
+                  <a:lnTo>
+                    <a:pt x="4110342" y="503935"/>
+                  </a:lnTo>
+                  <a:lnTo>
+                    <a:pt x="4032708" y="473310"/>
+                  </a:lnTo>
+                  <a:lnTo>
+                    <a:pt x="3955074" y="440805"/>
+                  </a:lnTo>
+                  <a:lnTo>
+                    <a:pt x="3877440" y="406304"/>
+                  </a:lnTo>
+                  <a:lnTo>
+                    <a:pt x="3799806" y="369685"/>
+                  </a:lnTo>
+                  <a:lnTo>
+                    <a:pt x="3722172" y="330818"/>
+                  </a:lnTo>
+                  <a:lnTo>
+                    <a:pt x="3644538" y="289565"/>
+                  </a:lnTo>
+                  <a:lnTo>
+                    <a:pt x="3566904" y="245780"/>
+                  </a:lnTo>
+                  <a:lnTo>
+                    <a:pt x="3489270" y="199307"/>
+                  </a:lnTo>
+                  <a:lnTo>
+                    <a:pt x="3411636" y="149981"/>
+                  </a:lnTo>
+                  <a:lnTo>
+                    <a:pt x="3334002" y="131230"/>
+                  </a:lnTo>
+                  <a:lnTo>
+                    <a:pt x="3256368" y="128379"/>
+                  </a:lnTo>
+                  <a:lnTo>
+                    <a:pt x="3178734" y="125519"/>
+                  </a:lnTo>
+                  <a:lnTo>
+                    <a:pt x="3101100" y="122649"/>
+                  </a:lnTo>
+                  <a:lnTo>
+                    <a:pt x="3023466" y="119770"/>
+                  </a:lnTo>
+                  <a:lnTo>
+                    <a:pt x="2945832" y="116881"/>
+                  </a:lnTo>
+                  <a:lnTo>
+                    <a:pt x="2868198" y="113983"/>
+                  </a:lnTo>
+                  <a:lnTo>
+                    <a:pt x="2790564" y="111075"/>
+                  </a:lnTo>
+                  <a:lnTo>
+                    <a:pt x="2712930" y="108158"/>
+                  </a:lnTo>
+                  <a:lnTo>
+                    <a:pt x="2635295" y="105232"/>
+                  </a:lnTo>
+                  <a:lnTo>
+                    <a:pt x="2557661" y="102295"/>
+                  </a:lnTo>
+                  <a:lnTo>
+                    <a:pt x="2480027" y="99350"/>
+                  </a:lnTo>
+                  <a:lnTo>
+                    <a:pt x="2402393" y="96394"/>
+                  </a:lnTo>
+                  <a:lnTo>
+                    <a:pt x="2324759" y="93429"/>
+                  </a:lnTo>
+                  <a:lnTo>
+                    <a:pt x="2247125" y="90454"/>
+                  </a:lnTo>
+                  <a:lnTo>
+                    <a:pt x="2169491" y="87470"/>
+                  </a:lnTo>
+                  <a:lnTo>
+                    <a:pt x="2091857" y="84475"/>
+                  </a:lnTo>
+                  <a:lnTo>
+                    <a:pt x="2014223" y="81471"/>
+                  </a:lnTo>
+                  <a:lnTo>
+                    <a:pt x="1936589" y="78457"/>
+                  </a:lnTo>
+                  <a:lnTo>
+                    <a:pt x="1858955" y="75434"/>
+                  </a:lnTo>
+                  <a:lnTo>
+                    <a:pt x="1781321" y="72400"/>
+                  </a:lnTo>
+                  <a:lnTo>
+                    <a:pt x="1703687" y="69356"/>
+                  </a:lnTo>
+                  <a:lnTo>
+                    <a:pt x="1626053" y="66303"/>
+                  </a:lnTo>
+                  <a:lnTo>
+                    <a:pt x="1548419" y="63239"/>
+                  </a:lnTo>
+                  <a:lnTo>
+                    <a:pt x="1470785" y="60166"/>
+                  </a:lnTo>
+                  <a:lnTo>
+                    <a:pt x="1393151" y="57082"/>
+                  </a:lnTo>
+                  <a:lnTo>
+                    <a:pt x="1315517" y="53988"/>
+                  </a:lnTo>
+                  <a:lnTo>
+                    <a:pt x="1237883" y="50885"/>
+                  </a:lnTo>
+                  <a:lnTo>
+                    <a:pt x="1160249" y="47771"/>
+                  </a:lnTo>
+                  <a:lnTo>
+                    <a:pt x="1082615" y="44647"/>
+                  </a:lnTo>
+                  <a:lnTo>
+                    <a:pt x="1004981" y="41512"/>
+                  </a:lnTo>
+                  <a:lnTo>
+                    <a:pt x="927346" y="38368"/>
+                  </a:lnTo>
+                  <a:lnTo>
+                    <a:pt x="849712" y="35213"/>
+                  </a:lnTo>
+                  <a:lnTo>
+                    <a:pt x="772078" y="32047"/>
+                  </a:lnTo>
+                  <a:lnTo>
+                    <a:pt x="694444" y="28872"/>
+                  </a:lnTo>
+                  <a:lnTo>
+                    <a:pt x="616810" y="25686"/>
+                  </a:lnTo>
+                  <a:lnTo>
+                    <a:pt x="539176" y="22489"/>
+                  </a:lnTo>
+                  <a:lnTo>
+                    <a:pt x="461542" y="19283"/>
+                  </a:lnTo>
+                  <a:lnTo>
+                    <a:pt x="383908" y="16065"/>
+                  </a:lnTo>
+                  <a:lnTo>
+                    <a:pt x="306274" y="12837"/>
+                  </a:lnTo>
+                  <a:lnTo>
+                    <a:pt x="228640" y="9599"/>
+                  </a:lnTo>
+                  <a:lnTo>
+                    <a:pt x="151006" y="6350"/>
+                  </a:lnTo>
+                  <a:lnTo>
+                    <a:pt x="73372" y="3090"/>
+                  </a:lnTo>
+                  <a:lnTo>
+                    <a:pt x="0" y="0"/>
                   </a:lnTo>
                 </a:path>
               </a:pathLst>
@@ -4115,300 +4121,300 @@
           </p:nvSpPr>
           <p:spPr>
             <a:xfrm>
-              <a:off x="817517" y="2941590"/>
-              <a:ext cx="7370972" cy="2368743"/>
+              <a:off x="817517" y="2124866"/>
+              <a:ext cx="7370972" cy="3250992"/>
             </a:xfrm>
             <a:custGeom>
               <a:avLst/>
               <a:pathLst>
-                <a:path w="7370972" h="2368743">
+                <a:path w="7370972" h="3250992">
                   <a:moveTo>
                     <a:pt x="0" y="0"/>
                   </a:moveTo>
                   <a:lnTo>
-                    <a:pt x="73372" y="61352"/>
-                  </a:lnTo>
-                  <a:lnTo>
-                    <a:pt x="151006" y="124654"/>
-                  </a:lnTo>
-                  <a:lnTo>
-                    <a:pt x="228640" y="186382"/>
-                  </a:lnTo>
-                  <a:lnTo>
-                    <a:pt x="306274" y="246576"/>
-                  </a:lnTo>
-                  <a:lnTo>
-                    <a:pt x="383908" y="305273"/>
-                  </a:lnTo>
-                  <a:lnTo>
-                    <a:pt x="461542" y="362511"/>
-                  </a:lnTo>
-                  <a:lnTo>
-                    <a:pt x="539176" y="418326"/>
-                  </a:lnTo>
-                  <a:lnTo>
-                    <a:pt x="616810" y="472753"/>
-                  </a:lnTo>
-                  <a:lnTo>
-                    <a:pt x="694444" y="525827"/>
-                  </a:lnTo>
-                  <a:lnTo>
-                    <a:pt x="772078" y="577582"/>
-                  </a:lnTo>
-                  <a:lnTo>
-                    <a:pt x="849712" y="628050"/>
-                  </a:lnTo>
-                  <a:lnTo>
-                    <a:pt x="927346" y="677264"/>
-                  </a:lnTo>
-                  <a:lnTo>
-                    <a:pt x="1004981" y="725254"/>
-                  </a:lnTo>
-                  <a:lnTo>
-                    <a:pt x="1082615" y="772051"/>
-                  </a:lnTo>
-                  <a:lnTo>
-                    <a:pt x="1160249" y="817684"/>
-                  </a:lnTo>
-                  <a:lnTo>
-                    <a:pt x="1237883" y="862183"/>
-                  </a:lnTo>
-                  <a:lnTo>
-                    <a:pt x="1315517" y="905576"/>
-                  </a:lnTo>
-                  <a:lnTo>
-                    <a:pt x="1393151" y="947890"/>
-                  </a:lnTo>
-                  <a:lnTo>
-                    <a:pt x="1470785" y="989152"/>
-                  </a:lnTo>
-                  <a:lnTo>
-                    <a:pt x="1548419" y="1029388"/>
-                  </a:lnTo>
-                  <a:lnTo>
-                    <a:pt x="1626053" y="1068624"/>
-                  </a:lnTo>
-                  <a:lnTo>
-                    <a:pt x="1703687" y="1106884"/>
-                  </a:lnTo>
-                  <a:lnTo>
-                    <a:pt x="1781321" y="1144194"/>
-                  </a:lnTo>
-                  <a:lnTo>
-                    <a:pt x="1858955" y="1180575"/>
-                  </a:lnTo>
-                  <a:lnTo>
-                    <a:pt x="1936589" y="1216053"/>
-                  </a:lnTo>
-                  <a:lnTo>
-                    <a:pt x="2014223" y="1250648"/>
-                  </a:lnTo>
-                  <a:lnTo>
-                    <a:pt x="2091857" y="1284383"/>
-                  </a:lnTo>
-                  <a:lnTo>
-                    <a:pt x="2169491" y="1317280"/>
-                  </a:lnTo>
-                  <a:lnTo>
-                    <a:pt x="2247125" y="1349358"/>
-                  </a:lnTo>
-                  <a:lnTo>
-                    <a:pt x="2324759" y="1380640"/>
-                  </a:lnTo>
-                  <a:lnTo>
-                    <a:pt x="2402393" y="1411143"/>
-                  </a:lnTo>
-                  <a:lnTo>
-                    <a:pt x="2480027" y="1440888"/>
-                  </a:lnTo>
-                  <a:lnTo>
-                    <a:pt x="2557661" y="1469894"/>
-                  </a:lnTo>
-                  <a:lnTo>
-                    <a:pt x="2635295" y="1498179"/>
-                  </a:lnTo>
-                  <a:lnTo>
-                    <a:pt x="2712930" y="1525760"/>
-                  </a:lnTo>
-                  <a:lnTo>
-                    <a:pt x="2790564" y="1552656"/>
-                  </a:lnTo>
-                  <a:lnTo>
-                    <a:pt x="2868198" y="1578883"/>
-                  </a:lnTo>
-                  <a:lnTo>
-                    <a:pt x="2945832" y="1604458"/>
-                  </a:lnTo>
-                  <a:lnTo>
-                    <a:pt x="3023466" y="1629397"/>
-                  </a:lnTo>
-                  <a:lnTo>
-                    <a:pt x="3101100" y="1653716"/>
-                  </a:lnTo>
-                  <a:lnTo>
-                    <a:pt x="3178734" y="1677431"/>
-                  </a:lnTo>
-                  <a:lnTo>
-                    <a:pt x="3256368" y="1700556"/>
-                  </a:lnTo>
-                  <a:lnTo>
-                    <a:pt x="3334002" y="1723106"/>
-                  </a:lnTo>
-                  <a:lnTo>
-                    <a:pt x="3411636" y="1745096"/>
-                  </a:lnTo>
-                  <a:lnTo>
-                    <a:pt x="3489270" y="1766539"/>
-                  </a:lnTo>
-                  <a:lnTo>
-                    <a:pt x="3566904" y="1787449"/>
-                  </a:lnTo>
-                  <a:lnTo>
-                    <a:pt x="3644538" y="1807839"/>
-                  </a:lnTo>
-                  <a:lnTo>
-                    <a:pt x="3722172" y="1827722"/>
-                  </a:lnTo>
-                  <a:lnTo>
-                    <a:pt x="3799806" y="1847110"/>
-                  </a:lnTo>
-                  <a:lnTo>
-                    <a:pt x="3877440" y="1866017"/>
-                  </a:lnTo>
-                  <a:lnTo>
-                    <a:pt x="3955074" y="1884454"/>
-                  </a:lnTo>
-                  <a:lnTo>
-                    <a:pt x="4032708" y="1902432"/>
-                  </a:lnTo>
-                  <a:lnTo>
-                    <a:pt x="4110342" y="1919964"/>
-                  </a:lnTo>
-                  <a:lnTo>
-                    <a:pt x="4187976" y="1937059"/>
-                  </a:lnTo>
-                  <a:lnTo>
-                    <a:pt x="4265610" y="1953730"/>
-                  </a:lnTo>
-                  <a:lnTo>
-                    <a:pt x="4343244" y="1969986"/>
-                  </a:lnTo>
-                  <a:lnTo>
-                    <a:pt x="4420879" y="1985838"/>
-                  </a:lnTo>
-                  <a:lnTo>
-                    <a:pt x="4498513" y="2001296"/>
-                  </a:lnTo>
-                  <a:lnTo>
-                    <a:pt x="4576147" y="2016369"/>
-                  </a:lnTo>
-                  <a:lnTo>
-                    <a:pt x="4653781" y="2031068"/>
-                  </a:lnTo>
-                  <a:lnTo>
-                    <a:pt x="4731415" y="2045401"/>
-                  </a:lnTo>
-                  <a:lnTo>
-                    <a:pt x="4809049" y="2059378"/>
-                  </a:lnTo>
-                  <a:lnTo>
-                    <a:pt x="4886683" y="2073008"/>
-                  </a:lnTo>
-                  <a:lnTo>
-                    <a:pt x="4964317" y="2086299"/>
-                  </a:lnTo>
-                  <a:lnTo>
-                    <a:pt x="5041951" y="2099259"/>
-                  </a:lnTo>
-                  <a:lnTo>
-                    <a:pt x="5119585" y="2111897"/>
-                  </a:lnTo>
-                  <a:lnTo>
-                    <a:pt x="5197219" y="2124221"/>
-                  </a:lnTo>
-                  <a:lnTo>
-                    <a:pt x="5274853" y="2136239"/>
-                  </a:lnTo>
-                  <a:lnTo>
-                    <a:pt x="5352487" y="2147958"/>
-                  </a:lnTo>
-                  <a:lnTo>
-                    <a:pt x="5430121" y="2159385"/>
-                  </a:lnTo>
-                  <a:lnTo>
-                    <a:pt x="5507755" y="2170528"/>
-                  </a:lnTo>
-                  <a:lnTo>
-                    <a:pt x="5585389" y="2181395"/>
-                  </a:lnTo>
-                  <a:lnTo>
-                    <a:pt x="5663023" y="2191991"/>
-                  </a:lnTo>
-                  <a:lnTo>
-                    <a:pt x="5740657" y="2202324"/>
-                  </a:lnTo>
-                  <a:lnTo>
-                    <a:pt x="5818291" y="2212399"/>
-                  </a:lnTo>
-                  <a:lnTo>
-                    <a:pt x="5895925" y="2222225"/>
-                  </a:lnTo>
-                  <a:lnTo>
-                    <a:pt x="5973559" y="2231806"/>
-                  </a:lnTo>
-                  <a:lnTo>
-                    <a:pt x="6051193" y="2241149"/>
-                  </a:lnTo>
-                  <a:lnTo>
-                    <a:pt x="6128827" y="2250260"/>
-                  </a:lnTo>
-                  <a:lnTo>
-                    <a:pt x="6206462" y="2259144"/>
-                  </a:lnTo>
-                  <a:lnTo>
-                    <a:pt x="6284096" y="2267807"/>
-                  </a:lnTo>
-                  <a:lnTo>
-                    <a:pt x="6361730" y="2276255"/>
-                  </a:lnTo>
-                  <a:lnTo>
-                    <a:pt x="6439364" y="2284493"/>
-                  </a:lnTo>
-                  <a:lnTo>
-                    <a:pt x="6516998" y="2292526"/>
-                  </a:lnTo>
-                  <a:lnTo>
-                    <a:pt x="6594632" y="2300359"/>
-                  </a:lnTo>
-                  <a:lnTo>
-                    <a:pt x="6672266" y="2307998"/>
-                  </a:lnTo>
-                  <a:lnTo>
-                    <a:pt x="6749900" y="2315447"/>
-                  </a:lnTo>
-                  <a:lnTo>
-                    <a:pt x="6827534" y="2322710"/>
-                  </a:lnTo>
-                  <a:lnTo>
-                    <a:pt x="6905168" y="2329793"/>
-                  </a:lnTo>
-                  <a:lnTo>
-                    <a:pt x="6982802" y="2336700"/>
-                  </a:lnTo>
-                  <a:lnTo>
-                    <a:pt x="7060436" y="2343435"/>
-                  </a:lnTo>
-                  <a:lnTo>
-                    <a:pt x="7138070" y="2350003"/>
-                  </a:lnTo>
-                  <a:lnTo>
-                    <a:pt x="7215704" y="2356407"/>
-                  </a:lnTo>
-                  <a:lnTo>
-                    <a:pt x="7293338" y="2362653"/>
-                  </a:lnTo>
-                  <a:lnTo>
-                    <a:pt x="7370972" y="2368743"/>
+                    <a:pt x="73372" y="100281"/>
+                  </a:lnTo>
+                  <a:lnTo>
+                    <a:pt x="151006" y="203105"/>
+                  </a:lnTo>
+                  <a:lnTo>
+                    <a:pt x="228640" y="302748"/>
+                  </a:lnTo>
+                  <a:lnTo>
+                    <a:pt x="306274" y="399308"/>
+                  </a:lnTo>
+                  <a:lnTo>
+                    <a:pt x="383908" y="492882"/>
+                  </a:lnTo>
+                  <a:lnTo>
+                    <a:pt x="461542" y="583561"/>
+                  </a:lnTo>
+                  <a:lnTo>
+                    <a:pt x="539176" y="671436"/>
+                  </a:lnTo>
+                  <a:lnTo>
+                    <a:pt x="616810" y="756592"/>
+                  </a:lnTo>
+                  <a:lnTo>
+                    <a:pt x="694444" y="839114"/>
+                  </a:lnTo>
+                  <a:lnTo>
+                    <a:pt x="772078" y="919083"/>
+                  </a:lnTo>
+                  <a:lnTo>
+                    <a:pt x="849712" y="996579"/>
+                  </a:lnTo>
+                  <a:lnTo>
+                    <a:pt x="927346" y="1071677"/>
+                  </a:lnTo>
+                  <a:lnTo>
+                    <a:pt x="1004981" y="1144452"/>
+                  </a:lnTo>
+                  <a:lnTo>
+                    <a:pt x="1082615" y="1214976"/>
+                  </a:lnTo>
+                  <a:lnTo>
+                    <a:pt x="1160249" y="1283319"/>
+                  </a:lnTo>
+                  <a:lnTo>
+                    <a:pt x="1237883" y="1349548"/>
+                  </a:lnTo>
+                  <a:lnTo>
+                    <a:pt x="1315517" y="1413727"/>
+                  </a:lnTo>
+                  <a:lnTo>
+                    <a:pt x="1393151" y="1475922"/>
+                  </a:lnTo>
+                  <a:lnTo>
+                    <a:pt x="1470785" y="1536193"/>
+                  </a:lnTo>
+                  <a:lnTo>
+                    <a:pt x="1548419" y="1594599"/>
+                  </a:lnTo>
+                  <a:lnTo>
+                    <a:pt x="1626053" y="1651199"/>
+                  </a:lnTo>
+                  <a:lnTo>
+                    <a:pt x="1703687" y="1706048"/>
+                  </a:lnTo>
+                  <a:lnTo>
+                    <a:pt x="1781321" y="1759200"/>
+                  </a:lnTo>
+                  <a:lnTo>
+                    <a:pt x="1858955" y="1810708"/>
+                  </a:lnTo>
+                  <a:lnTo>
+                    <a:pt x="1936589" y="1860623"/>
+                  </a:lnTo>
+                  <a:lnTo>
+                    <a:pt x="2014223" y="1908994"/>
+                  </a:lnTo>
+                  <a:lnTo>
+                    <a:pt x="2091857" y="1955868"/>
+                  </a:lnTo>
+                  <a:lnTo>
+                    <a:pt x="2169491" y="2001292"/>
+                  </a:lnTo>
+                  <a:lnTo>
+                    <a:pt x="2247125" y="2045312"/>
+                  </a:lnTo>
+                  <a:lnTo>
+                    <a:pt x="2324759" y="2087970"/>
+                  </a:lnTo>
+                  <a:lnTo>
+                    <a:pt x="2402393" y="2129308"/>
+                  </a:lnTo>
+                  <a:lnTo>
+                    <a:pt x="2480027" y="2169367"/>
+                  </a:lnTo>
+                  <a:lnTo>
+                    <a:pt x="2557661" y="2208187"/>
+                  </a:lnTo>
+                  <a:lnTo>
+                    <a:pt x="2635295" y="2245807"/>
+                  </a:lnTo>
+                  <a:lnTo>
+                    <a:pt x="2712930" y="2282263"/>
+                  </a:lnTo>
+                  <a:lnTo>
+                    <a:pt x="2790564" y="2317591"/>
+                  </a:lnTo>
+                  <a:lnTo>
+                    <a:pt x="2868198" y="2351826"/>
+                  </a:lnTo>
+                  <a:lnTo>
+                    <a:pt x="2945832" y="2385002"/>
+                  </a:lnTo>
+                  <a:lnTo>
+                    <a:pt x="3023466" y="2417152"/>
+                  </a:lnTo>
+                  <a:lnTo>
+                    <a:pt x="3101100" y="2448308"/>
+                  </a:lnTo>
+                  <a:lnTo>
+                    <a:pt x="3178734" y="2478500"/>
+                  </a:lnTo>
+                  <a:lnTo>
+                    <a:pt x="3256368" y="2507757"/>
+                  </a:lnTo>
+                  <a:lnTo>
+                    <a:pt x="3334002" y="2536110"/>
+                  </a:lnTo>
+                  <a:lnTo>
+                    <a:pt x="3411636" y="2563586"/>
+                  </a:lnTo>
+                  <a:lnTo>
+                    <a:pt x="3489270" y="2590212"/>
+                  </a:lnTo>
+                  <a:lnTo>
+                    <a:pt x="3566904" y="2616014"/>
+                  </a:lnTo>
+                  <a:lnTo>
+                    <a:pt x="3644538" y="2641018"/>
+                  </a:lnTo>
+                  <a:lnTo>
+                    <a:pt x="3722172" y="2665249"/>
+                  </a:lnTo>
+                  <a:lnTo>
+                    <a:pt x="3799806" y="2688730"/>
+                  </a:lnTo>
+                  <a:lnTo>
+                    <a:pt x="3877440" y="2711485"/>
+                  </a:lnTo>
+                  <a:lnTo>
+                    <a:pt x="3955074" y="2733535"/>
+                  </a:lnTo>
+                  <a:lnTo>
+                    <a:pt x="4032708" y="2754904"/>
+                  </a:lnTo>
+                  <a:lnTo>
+                    <a:pt x="4110342" y="2775612"/>
+                  </a:lnTo>
+                  <a:lnTo>
+                    <a:pt x="4187976" y="2795679"/>
+                  </a:lnTo>
+                  <a:lnTo>
+                    <a:pt x="4265610" y="2815126"/>
+                  </a:lnTo>
+                  <a:lnTo>
+                    <a:pt x="4343244" y="2833971"/>
+                  </a:lnTo>
+                  <a:lnTo>
+                    <a:pt x="4420879" y="2852233"/>
+                  </a:lnTo>
+                  <a:lnTo>
+                    <a:pt x="4498513" y="2869930"/>
+                  </a:lnTo>
+                  <a:lnTo>
+                    <a:pt x="4576147" y="2887079"/>
+                  </a:lnTo>
+                  <a:lnTo>
+                    <a:pt x="4653781" y="2903699"/>
+                  </a:lnTo>
+                  <a:lnTo>
+                    <a:pt x="4731415" y="2919804"/>
+                  </a:lnTo>
+                  <a:lnTo>
+                    <a:pt x="4809049" y="2935411"/>
+                  </a:lnTo>
+                  <a:lnTo>
+                    <a:pt x="4886683" y="2950535"/>
+                  </a:lnTo>
+                  <a:lnTo>
+                    <a:pt x="4964317" y="2965191"/>
+                  </a:lnTo>
+                  <a:lnTo>
+                    <a:pt x="5041951" y="2979394"/>
+                  </a:lnTo>
+                  <a:lnTo>
+                    <a:pt x="5119585" y="2993158"/>
+                  </a:lnTo>
+                  <a:lnTo>
+                    <a:pt x="5197219" y="3006495"/>
+                  </a:lnTo>
+                  <a:lnTo>
+                    <a:pt x="5274853" y="3019421"/>
+                  </a:lnTo>
+                  <a:lnTo>
+                    <a:pt x="5352487" y="3031946"/>
+                  </a:lnTo>
+                  <a:lnTo>
+                    <a:pt x="5430121" y="3044084"/>
+                  </a:lnTo>
+                  <a:lnTo>
+                    <a:pt x="5507755" y="3055847"/>
+                  </a:lnTo>
+                  <a:lnTo>
+                    <a:pt x="5585389" y="3067245"/>
+                  </a:lnTo>
+                  <a:lnTo>
+                    <a:pt x="5663023" y="3078291"/>
+                  </a:lnTo>
+                  <a:lnTo>
+                    <a:pt x="5740657" y="3088996"/>
+                  </a:lnTo>
+                  <a:lnTo>
+                    <a:pt x="5818291" y="3099369"/>
+                  </a:lnTo>
+                  <a:lnTo>
+                    <a:pt x="5895925" y="3109421"/>
+                  </a:lnTo>
+                  <a:lnTo>
+                    <a:pt x="5973559" y="3119163"/>
+                  </a:lnTo>
+                  <a:lnTo>
+                    <a:pt x="6051193" y="3128603"/>
+                  </a:lnTo>
+                  <a:lnTo>
+                    <a:pt x="6128827" y="3137751"/>
+                  </a:lnTo>
+                  <a:lnTo>
+                    <a:pt x="6206462" y="3146616"/>
+                  </a:lnTo>
+                  <a:lnTo>
+                    <a:pt x="6284096" y="3155207"/>
+                  </a:lnTo>
+                  <a:lnTo>
+                    <a:pt x="6361730" y="3163532"/>
+                  </a:lnTo>
+                  <a:lnTo>
+                    <a:pt x="6439364" y="3171600"/>
+                  </a:lnTo>
+                  <a:lnTo>
+                    <a:pt x="6516998" y="3179418"/>
+                  </a:lnTo>
+                  <a:lnTo>
+                    <a:pt x="6594632" y="3186994"/>
+                  </a:lnTo>
+                  <a:lnTo>
+                    <a:pt x="6672266" y="3194336"/>
+                  </a:lnTo>
+                  <a:lnTo>
+                    <a:pt x="6749900" y="3201451"/>
+                  </a:lnTo>
+                  <a:lnTo>
+                    <a:pt x="6827534" y="3208345"/>
+                  </a:lnTo>
+                  <a:lnTo>
+                    <a:pt x="6905168" y="3215027"/>
+                  </a:lnTo>
+                  <a:lnTo>
+                    <a:pt x="6982802" y="3221501"/>
+                  </a:lnTo>
+                  <a:lnTo>
+                    <a:pt x="7060436" y="3227776"/>
+                  </a:lnTo>
+                  <a:lnTo>
+                    <a:pt x="7138070" y="3233856"/>
+                  </a:lnTo>
+                  <a:lnTo>
+                    <a:pt x="7215704" y="3239748"/>
+                  </a:lnTo>
+                  <a:lnTo>
+                    <a:pt x="7293338" y="3245458"/>
+                  </a:lnTo>
+                  <a:lnTo>
+                    <a:pt x="7370972" y="3250992"/>
                   </a:lnTo>
                 </a:path>
               </a:pathLst>

--- a/docs/plots/carbo/jx_carbo_linsubhr_ratio_anemia3.pptx
+++ b/docs/plots/carbo/jx_carbo_linsubhr_ratio_anemia3.pptx
@@ -3003,530 +3003,527 @@
           <p:spPr>
             <a:xfrm>
               <a:off x="817517" y="1896563"/>
-              <a:ext cx="7370972" cy="3611785"/>
+              <a:ext cx="7370972" cy="3616459"/>
             </a:xfrm>
             <a:custGeom>
               <a:avLst/>
               <a:pathLst>
-                <a:path w="7370972" h="3611785">
+                <a:path w="7370972" h="3616459">
                   <a:moveTo>
-                    <a:pt x="1516692" y="0"/>
+                    <a:pt x="1588181" y="0"/>
                   </a:moveTo>
                   <a:lnTo>
-                    <a:pt x="1548419" y="89393"/>
-                  </a:lnTo>
-                  <a:lnTo>
-                    <a:pt x="1626053" y="295483"/>
-                  </a:lnTo>
-                  <a:lnTo>
-                    <a:pt x="1703687" y="489653"/>
-                  </a:lnTo>
-                  <a:lnTo>
-                    <a:pt x="1781321" y="672592"/>
-                  </a:lnTo>
-                  <a:lnTo>
-                    <a:pt x="1858955" y="844951"/>
-                  </a:lnTo>
-                  <a:lnTo>
-                    <a:pt x="1936589" y="1007341"/>
-                  </a:lnTo>
-                  <a:lnTo>
-                    <a:pt x="2014223" y="1160339"/>
-                  </a:lnTo>
-                  <a:lnTo>
-                    <a:pt x="2091857" y="1304487"/>
-                  </a:lnTo>
-                  <a:lnTo>
-                    <a:pt x="2169491" y="1440299"/>
-                  </a:lnTo>
-                  <a:lnTo>
-                    <a:pt x="2247125" y="1568256"/>
-                  </a:lnTo>
-                  <a:lnTo>
-                    <a:pt x="2324759" y="1688811"/>
-                  </a:lnTo>
-                  <a:lnTo>
-                    <a:pt x="2402393" y="1802395"/>
-                  </a:lnTo>
-                  <a:lnTo>
-                    <a:pt x="2480027" y="1909408"/>
-                  </a:lnTo>
-                  <a:lnTo>
-                    <a:pt x="2557661" y="2010233"/>
-                  </a:lnTo>
-                  <a:lnTo>
-                    <a:pt x="2635295" y="2105226"/>
-                  </a:lnTo>
-                  <a:lnTo>
-                    <a:pt x="2712930" y="2194724"/>
-                  </a:lnTo>
-                  <a:lnTo>
-                    <a:pt x="2790564" y="2279047"/>
-                  </a:lnTo>
-                  <a:lnTo>
-                    <a:pt x="2868198" y="2358492"/>
-                  </a:lnTo>
-                  <a:lnTo>
-                    <a:pt x="2945832" y="2433343"/>
-                  </a:lnTo>
-                  <a:lnTo>
-                    <a:pt x="3023466" y="2503864"/>
-                  </a:lnTo>
-                  <a:lnTo>
-                    <a:pt x="3101100" y="2570307"/>
-                  </a:lnTo>
-                  <a:lnTo>
-                    <a:pt x="3178734" y="2632906"/>
-                  </a:lnTo>
-                  <a:lnTo>
-                    <a:pt x="3256368" y="2691885"/>
-                  </a:lnTo>
-                  <a:lnTo>
-                    <a:pt x="3334002" y="2747453"/>
-                  </a:lnTo>
-                  <a:lnTo>
-                    <a:pt x="3411636" y="2783898"/>
-                  </a:lnTo>
-                  <a:lnTo>
-                    <a:pt x="3489270" y="2786731"/>
-                  </a:lnTo>
-                  <a:lnTo>
-                    <a:pt x="3566904" y="2789554"/>
-                  </a:lnTo>
-                  <a:lnTo>
-                    <a:pt x="3644538" y="2792368"/>
-                  </a:lnTo>
-                  <a:lnTo>
-                    <a:pt x="3722172" y="2795173"/>
-                  </a:lnTo>
-                  <a:lnTo>
-                    <a:pt x="3799806" y="2797969"/>
-                  </a:lnTo>
-                  <a:lnTo>
-                    <a:pt x="3877440" y="2800755"/>
-                  </a:lnTo>
-                  <a:lnTo>
-                    <a:pt x="3955074" y="2803533"/>
-                  </a:lnTo>
-                  <a:lnTo>
-                    <a:pt x="4032708" y="2806302"/>
-                  </a:lnTo>
-                  <a:lnTo>
-                    <a:pt x="4110342" y="2809061"/>
-                  </a:lnTo>
-                  <a:lnTo>
-                    <a:pt x="4187976" y="2811812"/>
-                  </a:lnTo>
-                  <a:lnTo>
-                    <a:pt x="4265610" y="2814553"/>
-                  </a:lnTo>
-                  <a:lnTo>
-                    <a:pt x="4343244" y="2817286"/>
-                  </a:lnTo>
-                  <a:lnTo>
-                    <a:pt x="4420879" y="2820010"/>
-                  </a:lnTo>
-                  <a:lnTo>
-                    <a:pt x="4498513" y="2822724"/>
-                  </a:lnTo>
-                  <a:lnTo>
-                    <a:pt x="4576147" y="2825430"/>
-                  </a:lnTo>
-                  <a:lnTo>
-                    <a:pt x="4653781" y="2828128"/>
-                  </a:lnTo>
-                  <a:lnTo>
-                    <a:pt x="4731415" y="2830816"/>
-                  </a:lnTo>
-                  <a:lnTo>
-                    <a:pt x="4809049" y="2833496"/>
-                  </a:lnTo>
-                  <a:lnTo>
-                    <a:pt x="4886683" y="2836166"/>
-                  </a:lnTo>
-                  <a:lnTo>
-                    <a:pt x="4964317" y="2838829"/>
-                  </a:lnTo>
-                  <a:lnTo>
-                    <a:pt x="5041951" y="2841482"/>
-                  </a:lnTo>
-                  <a:lnTo>
-                    <a:pt x="5119585" y="2844127"/>
-                  </a:lnTo>
-                  <a:lnTo>
-                    <a:pt x="5197219" y="2846763"/>
-                  </a:lnTo>
-                  <a:lnTo>
-                    <a:pt x="5274853" y="2849391"/>
-                  </a:lnTo>
-                  <a:lnTo>
-                    <a:pt x="5352487" y="2852010"/>
-                  </a:lnTo>
-                  <a:lnTo>
-                    <a:pt x="5430121" y="2854620"/>
-                  </a:lnTo>
-                  <a:lnTo>
-                    <a:pt x="5507755" y="2857222"/>
-                  </a:lnTo>
-                  <a:lnTo>
-                    <a:pt x="5585389" y="2859816"/>
-                  </a:lnTo>
-                  <a:lnTo>
-                    <a:pt x="5663023" y="2862401"/>
-                  </a:lnTo>
-                  <a:lnTo>
-                    <a:pt x="5740657" y="2864977"/>
-                  </a:lnTo>
-                  <a:lnTo>
-                    <a:pt x="5818291" y="2867546"/>
-                  </a:lnTo>
-                  <a:lnTo>
-                    <a:pt x="5895925" y="2870105"/>
-                  </a:lnTo>
-                  <a:lnTo>
-                    <a:pt x="5973559" y="2872657"/>
-                  </a:lnTo>
-                  <a:lnTo>
-                    <a:pt x="6051193" y="2875200"/>
-                  </a:lnTo>
-                  <a:lnTo>
-                    <a:pt x="6128827" y="2877735"/>
-                  </a:lnTo>
-                  <a:lnTo>
-                    <a:pt x="6206462" y="2880262"/>
-                  </a:lnTo>
-                  <a:lnTo>
-                    <a:pt x="6284096" y="2882780"/>
-                  </a:lnTo>
-                  <a:lnTo>
-                    <a:pt x="6361730" y="2885290"/>
-                  </a:lnTo>
-                  <a:lnTo>
-                    <a:pt x="6439364" y="2887792"/>
-                  </a:lnTo>
-                  <a:lnTo>
-                    <a:pt x="6516998" y="2890286"/>
-                  </a:lnTo>
-                  <a:lnTo>
-                    <a:pt x="6594632" y="2892772"/>
-                  </a:lnTo>
-                  <a:lnTo>
-                    <a:pt x="6672266" y="2895249"/>
-                  </a:lnTo>
-                  <a:lnTo>
-                    <a:pt x="6749900" y="2897719"/>
-                  </a:lnTo>
-                  <a:lnTo>
-                    <a:pt x="6827534" y="2900180"/>
-                  </a:lnTo>
-                  <a:lnTo>
-                    <a:pt x="6905168" y="2902634"/>
-                  </a:lnTo>
-                  <a:lnTo>
-                    <a:pt x="6982802" y="2905079"/>
-                  </a:lnTo>
-                  <a:lnTo>
-                    <a:pt x="7060436" y="2907517"/>
-                  </a:lnTo>
-                  <a:lnTo>
-                    <a:pt x="7138070" y="2909946"/>
-                  </a:lnTo>
-                  <a:lnTo>
-                    <a:pt x="7215704" y="2912368"/>
-                  </a:lnTo>
-                  <a:lnTo>
-                    <a:pt x="7293338" y="2914781"/>
-                  </a:lnTo>
-                  <a:lnTo>
-                    <a:pt x="7370972" y="2917187"/>
-                  </a:lnTo>
-                  <a:lnTo>
-                    <a:pt x="7370972" y="3611785"/>
-                  </a:lnTo>
-                  <a:lnTo>
-                    <a:pt x="7293338" y="3609277"/>
-                  </a:lnTo>
-                  <a:lnTo>
-                    <a:pt x="7215704" y="3606614"/>
-                  </a:lnTo>
-                  <a:lnTo>
-                    <a:pt x="7138070" y="3603789"/>
-                  </a:lnTo>
-                  <a:lnTo>
-                    <a:pt x="7060436" y="3600790"/>
-                  </a:lnTo>
-                  <a:lnTo>
-                    <a:pt x="6982802" y="3597607"/>
-                  </a:lnTo>
-                  <a:lnTo>
-                    <a:pt x="6905168" y="3594228"/>
-                  </a:lnTo>
-                  <a:lnTo>
-                    <a:pt x="6827534" y="3590642"/>
-                  </a:lnTo>
-                  <a:lnTo>
-                    <a:pt x="6749900" y="3586836"/>
-                  </a:lnTo>
-                  <a:lnTo>
-                    <a:pt x="6672266" y="3582796"/>
-                  </a:lnTo>
-                  <a:lnTo>
-                    <a:pt x="6594632" y="3578508"/>
-                  </a:lnTo>
-                  <a:lnTo>
-                    <a:pt x="6516998" y="3573957"/>
-                  </a:lnTo>
-                  <a:lnTo>
-                    <a:pt x="6439364" y="3569127"/>
-                  </a:lnTo>
-                  <a:lnTo>
-                    <a:pt x="6361730" y="3564000"/>
-                  </a:lnTo>
-                  <a:lnTo>
-                    <a:pt x="6284096" y="3558558"/>
-                  </a:lnTo>
-                  <a:lnTo>
-                    <a:pt x="6206462" y="3552783"/>
-                  </a:lnTo>
-                  <a:lnTo>
-                    <a:pt x="6128827" y="3546652"/>
-                  </a:lnTo>
-                  <a:lnTo>
-                    <a:pt x="6051193" y="3540146"/>
-                  </a:lnTo>
-                  <a:lnTo>
-                    <a:pt x="5973559" y="3533240"/>
-                  </a:lnTo>
-                  <a:lnTo>
-                    <a:pt x="5895925" y="3525910"/>
-                  </a:lnTo>
-                  <a:lnTo>
-                    <a:pt x="5818291" y="3518130"/>
-                  </a:lnTo>
-                  <a:lnTo>
-                    <a:pt x="5740657" y="3509872"/>
-                  </a:lnTo>
-                  <a:lnTo>
-                    <a:pt x="5663023" y="3501108"/>
-                  </a:lnTo>
-                  <a:lnTo>
-                    <a:pt x="5585389" y="3491806"/>
-                  </a:lnTo>
-                  <a:lnTo>
-                    <a:pt x="5507755" y="3481932"/>
-                  </a:lnTo>
-                  <a:lnTo>
-                    <a:pt x="5430121" y="3471452"/>
-                  </a:lnTo>
-                  <a:lnTo>
-                    <a:pt x="5352487" y="3460329"/>
-                  </a:lnTo>
-                  <a:lnTo>
-                    <a:pt x="5274853" y="3448524"/>
-                  </a:lnTo>
-                  <a:lnTo>
-                    <a:pt x="5197219" y="3435993"/>
-                  </a:lnTo>
-                  <a:lnTo>
-                    <a:pt x="5119585" y="3422693"/>
-                  </a:lnTo>
-                  <a:lnTo>
-                    <a:pt x="5041951" y="3408577"/>
-                  </a:lnTo>
-                  <a:lnTo>
-                    <a:pt x="4964317" y="3393594"/>
-                  </a:lnTo>
-                  <a:lnTo>
-                    <a:pt x="4886683" y="3377692"/>
-                  </a:lnTo>
-                  <a:lnTo>
-                    <a:pt x="4809049" y="3360813"/>
-                  </a:lnTo>
-                  <a:lnTo>
-                    <a:pt x="4731415" y="3342898"/>
-                  </a:lnTo>
-                  <a:lnTo>
-                    <a:pt x="4653781" y="3323884"/>
-                  </a:lnTo>
-                  <a:lnTo>
-                    <a:pt x="4576147" y="3303702"/>
-                  </a:lnTo>
-                  <a:lnTo>
-                    <a:pt x="4498513" y="3282281"/>
-                  </a:lnTo>
-                  <a:lnTo>
-                    <a:pt x="4420879" y="3259545"/>
-                  </a:lnTo>
-                  <a:lnTo>
-                    <a:pt x="4343244" y="3235414"/>
-                  </a:lnTo>
-                  <a:lnTo>
-                    <a:pt x="4265610" y="3209801"/>
-                  </a:lnTo>
-                  <a:lnTo>
-                    <a:pt x="4187976" y="3182615"/>
-                  </a:lnTo>
-                  <a:lnTo>
-                    <a:pt x="4110342" y="3153761"/>
-                  </a:lnTo>
-                  <a:lnTo>
-                    <a:pt x="4032708" y="3123136"/>
-                  </a:lnTo>
-                  <a:lnTo>
-                    <a:pt x="3955074" y="3090630"/>
-                  </a:lnTo>
-                  <a:lnTo>
-                    <a:pt x="3877440" y="3056130"/>
-                  </a:lnTo>
-                  <a:lnTo>
-                    <a:pt x="3799806" y="3019511"/>
-                  </a:lnTo>
-                  <a:lnTo>
-                    <a:pt x="3722172" y="2980644"/>
-                  </a:lnTo>
-                  <a:lnTo>
-                    <a:pt x="3644538" y="2939391"/>
-                  </a:lnTo>
-                  <a:lnTo>
-                    <a:pt x="3566904" y="2895606"/>
-                  </a:lnTo>
-                  <a:lnTo>
-                    <a:pt x="3489270" y="2849133"/>
-                  </a:lnTo>
-                  <a:lnTo>
-                    <a:pt x="3411636" y="2799807"/>
-                  </a:lnTo>
-                  <a:lnTo>
-                    <a:pt x="3334002" y="2781056"/>
-                  </a:lnTo>
-                  <a:lnTo>
-                    <a:pt x="3256368" y="2778205"/>
-                  </a:lnTo>
-                  <a:lnTo>
-                    <a:pt x="3178734" y="2775344"/>
-                  </a:lnTo>
-                  <a:lnTo>
-                    <a:pt x="3101100" y="2772475"/>
-                  </a:lnTo>
-                  <a:lnTo>
-                    <a:pt x="3023466" y="2769595"/>
-                  </a:lnTo>
-                  <a:lnTo>
-                    <a:pt x="2945832" y="2766707"/>
-                  </a:lnTo>
-                  <a:lnTo>
-                    <a:pt x="2868198" y="2763809"/>
-                  </a:lnTo>
-                  <a:lnTo>
-                    <a:pt x="2790564" y="2760901"/>
-                  </a:lnTo>
-                  <a:lnTo>
-                    <a:pt x="2712930" y="2757984"/>
-                  </a:lnTo>
-                  <a:lnTo>
-                    <a:pt x="2635295" y="2755057"/>
-                  </a:lnTo>
-                  <a:lnTo>
-                    <a:pt x="2557661" y="2752121"/>
-                  </a:lnTo>
-                  <a:lnTo>
-                    <a:pt x="2480027" y="2749176"/>
-                  </a:lnTo>
-                  <a:lnTo>
-                    <a:pt x="2402393" y="2746220"/>
-                  </a:lnTo>
-                  <a:lnTo>
-                    <a:pt x="2324759" y="2743255"/>
-                  </a:lnTo>
-                  <a:lnTo>
-                    <a:pt x="2247125" y="2740280"/>
-                  </a:lnTo>
-                  <a:lnTo>
-                    <a:pt x="2169491" y="2737296"/>
-                  </a:lnTo>
-                  <a:lnTo>
-                    <a:pt x="2091857" y="2734301"/>
-                  </a:lnTo>
-                  <a:lnTo>
-                    <a:pt x="2014223" y="2731297"/>
-                  </a:lnTo>
-                  <a:lnTo>
-                    <a:pt x="1936589" y="2728283"/>
-                  </a:lnTo>
-                  <a:lnTo>
-                    <a:pt x="1858955" y="2725260"/>
-                  </a:lnTo>
-                  <a:lnTo>
-                    <a:pt x="1781321" y="2722226"/>
-                  </a:lnTo>
-                  <a:lnTo>
-                    <a:pt x="1703687" y="2719182"/>
-                  </a:lnTo>
-                  <a:lnTo>
-                    <a:pt x="1626053" y="2716129"/>
-                  </a:lnTo>
-                  <a:lnTo>
-                    <a:pt x="1548419" y="2713065"/>
-                  </a:lnTo>
-                  <a:lnTo>
-                    <a:pt x="1470785" y="2709992"/>
-                  </a:lnTo>
-                  <a:lnTo>
-                    <a:pt x="1393151" y="2706908"/>
-                  </a:lnTo>
-                  <a:lnTo>
-                    <a:pt x="1315517" y="2703814"/>
-                  </a:lnTo>
-                  <a:lnTo>
-                    <a:pt x="1237883" y="2700711"/>
-                  </a:lnTo>
-                  <a:lnTo>
-                    <a:pt x="1160249" y="2697597"/>
-                  </a:lnTo>
-                  <a:lnTo>
-                    <a:pt x="1082615" y="2694473"/>
-                  </a:lnTo>
-                  <a:lnTo>
-                    <a:pt x="1004981" y="2691338"/>
-                  </a:lnTo>
-                  <a:lnTo>
-                    <a:pt x="927346" y="2688194"/>
-                  </a:lnTo>
-                  <a:lnTo>
-                    <a:pt x="849712" y="2685039"/>
-                  </a:lnTo>
-                  <a:lnTo>
-                    <a:pt x="772078" y="2681873"/>
-                  </a:lnTo>
-                  <a:lnTo>
-                    <a:pt x="694444" y="2678698"/>
-                  </a:lnTo>
-                  <a:lnTo>
-                    <a:pt x="616810" y="2675512"/>
-                  </a:lnTo>
-                  <a:lnTo>
-                    <a:pt x="539176" y="2672315"/>
-                  </a:lnTo>
-                  <a:lnTo>
-                    <a:pt x="461542" y="2669109"/>
-                  </a:lnTo>
-                  <a:lnTo>
-                    <a:pt x="383908" y="2665891"/>
-                  </a:lnTo>
-                  <a:lnTo>
-                    <a:pt x="306274" y="2662663"/>
-                  </a:lnTo>
-                  <a:lnTo>
-                    <a:pt x="228640" y="2659425"/>
-                  </a:lnTo>
-                  <a:lnTo>
-                    <a:pt x="151006" y="2656176"/>
-                  </a:lnTo>
-                  <a:lnTo>
-                    <a:pt x="73372" y="2652916"/>
-                  </a:lnTo>
-                  <a:lnTo>
-                    <a:pt x="0" y="2649825"/>
+                    <a:pt x="1626053" y="110423"/>
+                  </a:lnTo>
+                  <a:lnTo>
+                    <a:pt x="1703687" y="323185"/>
+                  </a:lnTo>
+                  <a:lnTo>
+                    <a:pt x="1781321" y="523168"/>
+                  </a:lnTo>
+                  <a:lnTo>
+                    <a:pt x="1858955" y="711139"/>
+                  </a:lnTo>
+                  <a:lnTo>
+                    <a:pt x="1936589" y="887820"/>
+                  </a:lnTo>
+                  <a:lnTo>
+                    <a:pt x="2014223" y="1053889"/>
+                  </a:lnTo>
+                  <a:lnTo>
+                    <a:pt x="2091857" y="1209982"/>
+                  </a:lnTo>
+                  <a:lnTo>
+                    <a:pt x="2169491" y="1356700"/>
+                  </a:lnTo>
+                  <a:lnTo>
+                    <a:pt x="2247125" y="1494605"/>
+                  </a:lnTo>
+                  <a:lnTo>
+                    <a:pt x="2324759" y="1624227"/>
+                  </a:lnTo>
+                  <a:lnTo>
+                    <a:pt x="2402393" y="1746063"/>
+                  </a:lnTo>
+                  <a:lnTo>
+                    <a:pt x="2480027" y="1860582"/>
+                  </a:lnTo>
+                  <a:lnTo>
+                    <a:pt x="2557661" y="1968221"/>
+                  </a:lnTo>
+                  <a:lnTo>
+                    <a:pt x="2635295" y="2069396"/>
+                  </a:lnTo>
+                  <a:lnTo>
+                    <a:pt x="2712930" y="2164493"/>
+                  </a:lnTo>
+                  <a:lnTo>
+                    <a:pt x="2790564" y="2253878"/>
+                  </a:lnTo>
+                  <a:lnTo>
+                    <a:pt x="2868198" y="2337895"/>
+                  </a:lnTo>
+                  <a:lnTo>
+                    <a:pt x="2945832" y="2416865"/>
+                  </a:lnTo>
+                  <a:lnTo>
+                    <a:pt x="3023466" y="2491092"/>
+                  </a:lnTo>
+                  <a:lnTo>
+                    <a:pt x="3101100" y="2560860"/>
+                  </a:lnTo>
+                  <a:lnTo>
+                    <a:pt x="3178734" y="2626438"/>
+                  </a:lnTo>
+                  <a:lnTo>
+                    <a:pt x="3256368" y="2688076"/>
+                  </a:lnTo>
+                  <a:lnTo>
+                    <a:pt x="3334002" y="2746013"/>
+                  </a:lnTo>
+                  <a:lnTo>
+                    <a:pt x="3411636" y="2779650"/>
+                  </a:lnTo>
+                  <a:lnTo>
+                    <a:pt x="3489270" y="2769470"/>
+                  </a:lnTo>
+                  <a:lnTo>
+                    <a:pt x="3566904" y="2759170"/>
+                  </a:lnTo>
+                  <a:lnTo>
+                    <a:pt x="3644538" y="2748751"/>
+                  </a:lnTo>
+                  <a:lnTo>
+                    <a:pt x="3722172" y="2738210"/>
+                  </a:lnTo>
+                  <a:lnTo>
+                    <a:pt x="3799806" y="2727546"/>
+                  </a:lnTo>
+                  <a:lnTo>
+                    <a:pt x="3877440" y="2716757"/>
+                  </a:lnTo>
+                  <a:lnTo>
+                    <a:pt x="3955074" y="2705843"/>
+                  </a:lnTo>
+                  <a:lnTo>
+                    <a:pt x="4032708" y="2694802"/>
+                  </a:lnTo>
+                  <a:lnTo>
+                    <a:pt x="4110342" y="2683632"/>
+                  </a:lnTo>
+                  <a:lnTo>
+                    <a:pt x="4187976" y="2672331"/>
+                  </a:lnTo>
+                  <a:lnTo>
+                    <a:pt x="4265610" y="2660899"/>
+                  </a:lnTo>
+                  <a:lnTo>
+                    <a:pt x="4343244" y="2649333"/>
+                  </a:lnTo>
+                  <a:lnTo>
+                    <a:pt x="4420879" y="2637633"/>
+                  </a:lnTo>
+                  <a:lnTo>
+                    <a:pt x="4498513" y="2625796"/>
+                  </a:lnTo>
+                  <a:lnTo>
+                    <a:pt x="4576147" y="2613821"/>
+                  </a:lnTo>
+                  <a:lnTo>
+                    <a:pt x="4653781" y="2601707"/>
+                  </a:lnTo>
+                  <a:lnTo>
+                    <a:pt x="4731415" y="2589451"/>
+                  </a:lnTo>
+                  <a:lnTo>
+                    <a:pt x="4809049" y="2577052"/>
+                  </a:lnTo>
+                  <a:lnTo>
+                    <a:pt x="4886683" y="2564509"/>
+                  </a:lnTo>
+                  <a:lnTo>
+                    <a:pt x="4964317" y="2551819"/>
+                  </a:lnTo>
+                  <a:lnTo>
+                    <a:pt x="5041951" y="2538982"/>
+                  </a:lnTo>
+                  <a:lnTo>
+                    <a:pt x="5119585" y="2525994"/>
+                  </a:lnTo>
+                  <a:lnTo>
+                    <a:pt x="5197219" y="2512855"/>
+                  </a:lnTo>
+                  <a:lnTo>
+                    <a:pt x="5274853" y="2499563"/>
+                  </a:lnTo>
+                  <a:lnTo>
+                    <a:pt x="5352487" y="2486116"/>
+                  </a:lnTo>
+                  <a:lnTo>
+                    <a:pt x="5430121" y="2472513"/>
+                  </a:lnTo>
+                  <a:lnTo>
+                    <a:pt x="5507755" y="2458750"/>
+                  </a:lnTo>
+                  <a:lnTo>
+                    <a:pt x="5585389" y="2444827"/>
+                  </a:lnTo>
+                  <a:lnTo>
+                    <a:pt x="5663023" y="2430742"/>
+                  </a:lnTo>
+                  <a:lnTo>
+                    <a:pt x="5740657" y="2416492"/>
+                  </a:lnTo>
+                  <a:lnTo>
+                    <a:pt x="5818291" y="2402076"/>
+                  </a:lnTo>
+                  <a:lnTo>
+                    <a:pt x="5895925" y="2387493"/>
+                  </a:lnTo>
+                  <a:lnTo>
+                    <a:pt x="5973559" y="2372739"/>
+                  </a:lnTo>
+                  <a:lnTo>
+                    <a:pt x="6051193" y="2357813"/>
+                  </a:lnTo>
+                  <a:lnTo>
+                    <a:pt x="6128827" y="2342712"/>
+                  </a:lnTo>
+                  <a:lnTo>
+                    <a:pt x="6206462" y="2327436"/>
+                  </a:lnTo>
+                  <a:lnTo>
+                    <a:pt x="6284096" y="2311982"/>
+                  </a:lnTo>
+                  <a:lnTo>
+                    <a:pt x="6361730" y="2296347"/>
+                  </a:lnTo>
+                  <a:lnTo>
+                    <a:pt x="6439364" y="2280531"/>
+                  </a:lnTo>
+                  <a:lnTo>
+                    <a:pt x="6516998" y="2264529"/>
+                  </a:lnTo>
+                  <a:lnTo>
+                    <a:pt x="6594632" y="2248341"/>
+                  </a:lnTo>
+                  <a:lnTo>
+                    <a:pt x="6672266" y="2231965"/>
+                  </a:lnTo>
+                  <a:lnTo>
+                    <a:pt x="6749900" y="2215397"/>
+                  </a:lnTo>
+                  <a:lnTo>
+                    <a:pt x="6827534" y="2198636"/>
+                  </a:lnTo>
+                  <a:lnTo>
+                    <a:pt x="6905168" y="2181680"/>
+                  </a:lnTo>
+                  <a:lnTo>
+                    <a:pt x="6982802" y="2164525"/>
+                  </a:lnTo>
+                  <a:lnTo>
+                    <a:pt x="7060436" y="2147171"/>
+                  </a:lnTo>
+                  <a:lnTo>
+                    <a:pt x="7138070" y="2129615"/>
+                  </a:lnTo>
+                  <a:lnTo>
+                    <a:pt x="7215704" y="2111853"/>
+                  </a:lnTo>
+                  <a:lnTo>
+                    <a:pt x="7293338" y="2093885"/>
+                  </a:lnTo>
+                  <a:lnTo>
+                    <a:pt x="7370972" y="2075707"/>
+                  </a:lnTo>
+                  <a:lnTo>
+                    <a:pt x="7370972" y="3616459"/>
+                  </a:lnTo>
+                  <a:lnTo>
+                    <a:pt x="7293338" y="3614146"/>
+                  </a:lnTo>
+                  <a:lnTo>
+                    <a:pt x="7215704" y="3611686"/>
+                  </a:lnTo>
+                  <a:lnTo>
+                    <a:pt x="7138070" y="3609069"/>
+                  </a:lnTo>
+                  <a:lnTo>
+                    <a:pt x="7060436" y="3606285"/>
+                  </a:lnTo>
+                  <a:lnTo>
+                    <a:pt x="6982802" y="3603322"/>
+                  </a:lnTo>
+                  <a:lnTo>
+                    <a:pt x="6905168" y="3600170"/>
+                  </a:lnTo>
+                  <a:lnTo>
+                    <a:pt x="6827534" y="3596817"/>
+                  </a:lnTo>
+                  <a:lnTo>
+                    <a:pt x="6749900" y="3593250"/>
+                  </a:lnTo>
+                  <a:lnTo>
+                    <a:pt x="6672266" y="3589454"/>
+                  </a:lnTo>
+                  <a:lnTo>
+                    <a:pt x="6594632" y="3585416"/>
+                  </a:lnTo>
+                  <a:lnTo>
+                    <a:pt x="6516998" y="3581120"/>
+                  </a:lnTo>
+                  <a:lnTo>
+                    <a:pt x="6439364" y="3576550"/>
+                  </a:lnTo>
+                  <a:lnTo>
+                    <a:pt x="6361730" y="3571687"/>
+                  </a:lnTo>
+                  <a:lnTo>
+                    <a:pt x="6284096" y="3566514"/>
+                  </a:lnTo>
+                  <a:lnTo>
+                    <a:pt x="6206462" y="3561010"/>
+                  </a:lnTo>
+                  <a:lnTo>
+                    <a:pt x="6128827" y="3555154"/>
+                  </a:lnTo>
+                  <a:lnTo>
+                    <a:pt x="6051193" y="3548924"/>
+                  </a:lnTo>
+                  <a:lnTo>
+                    <a:pt x="5973559" y="3542296"/>
+                  </a:lnTo>
+                  <a:lnTo>
+                    <a:pt x="5895925" y="3535245"/>
+                  </a:lnTo>
+                  <a:lnTo>
+                    <a:pt x="5818291" y="3527743"/>
+                  </a:lnTo>
+                  <a:lnTo>
+                    <a:pt x="5740657" y="3519761"/>
+                  </a:lnTo>
+                  <a:lnTo>
+                    <a:pt x="5663023" y="3511270"/>
+                  </a:lnTo>
+                  <a:lnTo>
+                    <a:pt x="5585389" y="3502235"/>
+                  </a:lnTo>
+                  <a:lnTo>
+                    <a:pt x="5507755" y="3492624"/>
+                  </a:lnTo>
+                  <a:lnTo>
+                    <a:pt x="5430121" y="3482398"/>
+                  </a:lnTo>
+                  <a:lnTo>
+                    <a:pt x="5352487" y="3471519"/>
+                  </a:lnTo>
+                  <a:lnTo>
+                    <a:pt x="5274853" y="3459945"/>
+                  </a:lnTo>
+                  <a:lnTo>
+                    <a:pt x="5197219" y="3447631"/>
+                  </a:lnTo>
+                  <a:lnTo>
+                    <a:pt x="5119585" y="3434530"/>
+                  </a:lnTo>
+                  <a:lnTo>
+                    <a:pt x="5041951" y="3420591"/>
+                  </a:lnTo>
+                  <a:lnTo>
+                    <a:pt x="4964317" y="3405763"/>
+                  </a:lnTo>
+                  <a:lnTo>
+                    <a:pt x="4886683" y="3389986"/>
+                  </a:lnTo>
+                  <a:lnTo>
+                    <a:pt x="4809049" y="3373202"/>
+                  </a:lnTo>
+                  <a:lnTo>
+                    <a:pt x="4731415" y="3355344"/>
+                  </a:lnTo>
+                  <a:lnTo>
+                    <a:pt x="4653781" y="3336346"/>
+                  </a:lnTo>
+                  <a:lnTo>
+                    <a:pt x="4576147" y="3316134"/>
+                  </a:lnTo>
+                  <a:lnTo>
+                    <a:pt x="4498513" y="3294630"/>
+                  </a:lnTo>
+                  <a:lnTo>
+                    <a:pt x="4420879" y="3271752"/>
+                  </a:lnTo>
+                  <a:lnTo>
+                    <a:pt x="4343244" y="3247412"/>
+                  </a:lnTo>
+                  <a:lnTo>
+                    <a:pt x="4265610" y="3221516"/>
+                  </a:lnTo>
+                  <a:lnTo>
+                    <a:pt x="4187976" y="3193966"/>
+                  </a:lnTo>
+                  <a:lnTo>
+                    <a:pt x="4110342" y="3164655"/>
+                  </a:lnTo>
+                  <a:lnTo>
+                    <a:pt x="4032708" y="3133471"/>
+                  </a:lnTo>
+                  <a:lnTo>
+                    <a:pt x="3955074" y="3100294"/>
+                  </a:lnTo>
+                  <a:lnTo>
+                    <a:pt x="3877440" y="3064997"/>
+                  </a:lnTo>
+                  <a:lnTo>
+                    <a:pt x="3799806" y="3027445"/>
+                  </a:lnTo>
+                  <a:lnTo>
+                    <a:pt x="3722172" y="2987493"/>
+                  </a:lnTo>
+                  <a:lnTo>
+                    <a:pt x="3644538" y="2944988"/>
+                  </a:lnTo>
+                  <a:lnTo>
+                    <a:pt x="3566904" y="2899766"/>
+                  </a:lnTo>
+                  <a:lnTo>
+                    <a:pt x="3489270" y="2851655"/>
+                  </a:lnTo>
+                  <a:lnTo>
+                    <a:pt x="3411636" y="2800469"/>
+                  </a:lnTo>
+                  <a:lnTo>
+                    <a:pt x="3334002" y="2789714"/>
+                  </a:lnTo>
+                  <a:lnTo>
+                    <a:pt x="3256368" y="2799661"/>
+                  </a:lnTo>
+                  <a:lnTo>
+                    <a:pt x="3178734" y="2809494"/>
+                  </a:lnTo>
+                  <a:lnTo>
+                    <a:pt x="3101100" y="2819213"/>
+                  </a:lnTo>
+                  <a:lnTo>
+                    <a:pt x="3023466" y="2828820"/>
+                  </a:lnTo>
+                  <a:lnTo>
+                    <a:pt x="2945832" y="2838317"/>
+                  </a:lnTo>
+                  <a:lnTo>
+                    <a:pt x="2868198" y="2847704"/>
+                  </a:lnTo>
+                  <a:lnTo>
+                    <a:pt x="2790564" y="2856983"/>
+                  </a:lnTo>
+                  <a:lnTo>
+                    <a:pt x="2712930" y="2866155"/>
+                  </a:lnTo>
+                  <a:lnTo>
+                    <a:pt x="2635295" y="2875221"/>
+                  </a:lnTo>
+                  <a:lnTo>
+                    <a:pt x="2557661" y="2884182"/>
+                  </a:lnTo>
+                  <a:lnTo>
+                    <a:pt x="2480027" y="2893041"/>
+                  </a:lnTo>
+                  <a:lnTo>
+                    <a:pt x="2402393" y="2901797"/>
+                  </a:lnTo>
+                  <a:lnTo>
+                    <a:pt x="2324759" y="2910452"/>
+                  </a:lnTo>
+                  <a:lnTo>
+                    <a:pt x="2247125" y="2919008"/>
+                  </a:lnTo>
+                  <a:lnTo>
+                    <a:pt x="2169491" y="2927465"/>
+                  </a:lnTo>
+                  <a:lnTo>
+                    <a:pt x="2091857" y="2935824"/>
+                  </a:lnTo>
+                  <a:lnTo>
+                    <a:pt x="2014223" y="2944087"/>
+                  </a:lnTo>
+                  <a:lnTo>
+                    <a:pt x="1936589" y="2952255"/>
+                  </a:lnTo>
+                  <a:lnTo>
+                    <a:pt x="1858955" y="2960329"/>
+                  </a:lnTo>
+                  <a:lnTo>
+                    <a:pt x="1781321" y="2968309"/>
+                  </a:lnTo>
+                  <a:lnTo>
+                    <a:pt x="1703687" y="2976198"/>
+                  </a:lnTo>
+                  <a:lnTo>
+                    <a:pt x="1626053" y="2983995"/>
+                  </a:lnTo>
+                  <a:lnTo>
+                    <a:pt x="1548419" y="2991703"/>
+                  </a:lnTo>
+                  <a:lnTo>
+                    <a:pt x="1470785" y="2999322"/>
+                  </a:lnTo>
+                  <a:lnTo>
+                    <a:pt x="1393151" y="3006853"/>
+                  </a:lnTo>
+                  <a:lnTo>
+                    <a:pt x="1315517" y="3014297"/>
+                  </a:lnTo>
+                  <a:lnTo>
+                    <a:pt x="1237883" y="3021656"/>
+                  </a:lnTo>
+                  <a:lnTo>
+                    <a:pt x="1160249" y="3028930"/>
+                  </a:lnTo>
+                  <a:lnTo>
+                    <a:pt x="1082615" y="3036119"/>
+                  </a:lnTo>
+                  <a:lnTo>
+                    <a:pt x="1004981" y="3043226"/>
+                  </a:lnTo>
+                  <a:lnTo>
+                    <a:pt x="927346" y="3050251"/>
+                  </a:lnTo>
+                  <a:lnTo>
+                    <a:pt x="849712" y="3057195"/>
+                  </a:lnTo>
+                  <a:lnTo>
+                    <a:pt x="772078" y="3064059"/>
+                  </a:lnTo>
+                  <a:lnTo>
+                    <a:pt x="694444" y="3070844"/>
+                  </a:lnTo>
+                  <a:lnTo>
+                    <a:pt x="616810" y="3077551"/>
+                  </a:lnTo>
+                  <a:lnTo>
+                    <a:pt x="539176" y="3084180"/>
+                  </a:lnTo>
+                  <a:lnTo>
+                    <a:pt x="461542" y="3090733"/>
+                  </a:lnTo>
+                  <a:lnTo>
+                    <a:pt x="383908" y="3097210"/>
+                  </a:lnTo>
+                  <a:lnTo>
+                    <a:pt x="306274" y="3103613"/>
+                  </a:lnTo>
+                  <a:lnTo>
+                    <a:pt x="228640" y="3109942"/>
+                  </a:lnTo>
+                  <a:lnTo>
+                    <a:pt x="151006" y="3116198"/>
+                  </a:lnTo>
+                  <a:lnTo>
+                    <a:pt x="73372" y="3122382"/>
+                  </a:lnTo>
+                  <a:lnTo>
+                    <a:pt x="0" y="3128159"/>
                   </a:lnTo>
                   <a:close/>
                 </a:path>
@@ -3552,243 +3549,240 @@
           </p:nvSpPr>
           <p:spPr>
             <a:xfrm>
-              <a:off x="2334210" y="1896563"/>
-              <a:ext cx="5854280" cy="2917187"/>
+              <a:off x="2405699" y="1896563"/>
+              <a:ext cx="5782791" cy="2779650"/>
             </a:xfrm>
             <a:custGeom>
               <a:avLst/>
               <a:pathLst>
-                <a:path w="5854280" h="2917187">
+                <a:path w="5782791" h="2779650">
                   <a:moveTo>
                     <a:pt x="0" y="0"/>
                   </a:moveTo>
                   <a:lnTo>
-                    <a:pt x="31727" y="89393"/>
-                  </a:lnTo>
-                  <a:lnTo>
-                    <a:pt x="109361" y="295483"/>
-                  </a:lnTo>
-                  <a:lnTo>
-                    <a:pt x="186995" y="489653"/>
-                  </a:lnTo>
-                  <a:lnTo>
-                    <a:pt x="264629" y="672592"/>
-                  </a:lnTo>
-                  <a:lnTo>
-                    <a:pt x="342263" y="844951"/>
-                  </a:lnTo>
-                  <a:lnTo>
-                    <a:pt x="419897" y="1007341"/>
-                  </a:lnTo>
-                  <a:lnTo>
-                    <a:pt x="497531" y="1160339"/>
-                  </a:lnTo>
-                  <a:lnTo>
-                    <a:pt x="575165" y="1304487"/>
-                  </a:lnTo>
-                  <a:lnTo>
-                    <a:pt x="652799" y="1440299"/>
-                  </a:lnTo>
-                  <a:lnTo>
-                    <a:pt x="730433" y="1568256"/>
-                  </a:lnTo>
-                  <a:lnTo>
-                    <a:pt x="808067" y="1688811"/>
-                  </a:lnTo>
-                  <a:lnTo>
-                    <a:pt x="885701" y="1802395"/>
-                  </a:lnTo>
-                  <a:lnTo>
-                    <a:pt x="963335" y="1909408"/>
-                  </a:lnTo>
-                  <a:lnTo>
-                    <a:pt x="1040969" y="2010233"/>
-                  </a:lnTo>
-                  <a:lnTo>
-                    <a:pt x="1118603" y="2105226"/>
-                  </a:lnTo>
-                  <a:lnTo>
-                    <a:pt x="1196237" y="2194724"/>
-                  </a:lnTo>
-                  <a:lnTo>
-                    <a:pt x="1273871" y="2279047"/>
-                  </a:lnTo>
-                  <a:lnTo>
-                    <a:pt x="1351505" y="2358492"/>
-                  </a:lnTo>
-                  <a:lnTo>
-                    <a:pt x="1429139" y="2433343"/>
-                  </a:lnTo>
-                  <a:lnTo>
-                    <a:pt x="1506773" y="2503864"/>
-                  </a:lnTo>
-                  <a:lnTo>
-                    <a:pt x="1584407" y="2570307"/>
-                  </a:lnTo>
-                  <a:lnTo>
-                    <a:pt x="1662042" y="2632906"/>
-                  </a:lnTo>
-                  <a:lnTo>
-                    <a:pt x="1739676" y="2691885"/>
-                  </a:lnTo>
-                  <a:lnTo>
-                    <a:pt x="1817310" y="2747453"/>
-                  </a:lnTo>
-                  <a:lnTo>
-                    <a:pt x="1894944" y="2783898"/>
-                  </a:lnTo>
-                  <a:lnTo>
-                    <a:pt x="1972578" y="2786731"/>
-                  </a:lnTo>
-                  <a:lnTo>
-                    <a:pt x="2050212" y="2789554"/>
-                  </a:lnTo>
-                  <a:lnTo>
-                    <a:pt x="2127846" y="2792368"/>
-                  </a:lnTo>
-                  <a:lnTo>
-                    <a:pt x="2205480" y="2795173"/>
-                  </a:lnTo>
-                  <a:lnTo>
-                    <a:pt x="2283114" y="2797969"/>
-                  </a:lnTo>
-                  <a:lnTo>
-                    <a:pt x="2360748" y="2800755"/>
-                  </a:lnTo>
-                  <a:lnTo>
-                    <a:pt x="2438382" y="2803533"/>
-                  </a:lnTo>
-                  <a:lnTo>
-                    <a:pt x="2516016" y="2806302"/>
-                  </a:lnTo>
-                  <a:lnTo>
-                    <a:pt x="2593650" y="2809061"/>
-                  </a:lnTo>
-                  <a:lnTo>
-                    <a:pt x="2671284" y="2811812"/>
-                  </a:lnTo>
-                  <a:lnTo>
-                    <a:pt x="2748918" y="2814553"/>
-                  </a:lnTo>
-                  <a:lnTo>
-                    <a:pt x="2826552" y="2817286"/>
-                  </a:lnTo>
-                  <a:lnTo>
-                    <a:pt x="2904186" y="2820010"/>
-                  </a:lnTo>
-                  <a:lnTo>
-                    <a:pt x="2981820" y="2822724"/>
-                  </a:lnTo>
-                  <a:lnTo>
-                    <a:pt x="3059454" y="2825430"/>
-                  </a:lnTo>
-                  <a:lnTo>
-                    <a:pt x="3137088" y="2828128"/>
-                  </a:lnTo>
-                  <a:lnTo>
-                    <a:pt x="3214722" y="2830816"/>
-                  </a:lnTo>
-                  <a:lnTo>
-                    <a:pt x="3292356" y="2833496"/>
-                  </a:lnTo>
-                  <a:lnTo>
-                    <a:pt x="3369990" y="2836166"/>
-                  </a:lnTo>
-                  <a:lnTo>
-                    <a:pt x="3447625" y="2838829"/>
-                  </a:lnTo>
-                  <a:lnTo>
-                    <a:pt x="3525259" y="2841482"/>
-                  </a:lnTo>
-                  <a:lnTo>
-                    <a:pt x="3602893" y="2844127"/>
-                  </a:lnTo>
-                  <a:lnTo>
-                    <a:pt x="3680527" y="2846763"/>
-                  </a:lnTo>
-                  <a:lnTo>
-                    <a:pt x="3758161" y="2849391"/>
-                  </a:lnTo>
-                  <a:lnTo>
-                    <a:pt x="3835795" y="2852010"/>
-                  </a:lnTo>
-                  <a:lnTo>
-                    <a:pt x="3913429" y="2854620"/>
-                  </a:lnTo>
-                  <a:lnTo>
-                    <a:pt x="3991063" y="2857222"/>
-                  </a:lnTo>
-                  <a:lnTo>
-                    <a:pt x="4068697" y="2859816"/>
-                  </a:lnTo>
-                  <a:lnTo>
-                    <a:pt x="4146331" y="2862401"/>
-                  </a:lnTo>
-                  <a:lnTo>
-                    <a:pt x="4223965" y="2864977"/>
-                  </a:lnTo>
-                  <a:lnTo>
-                    <a:pt x="4301599" y="2867546"/>
-                  </a:lnTo>
-                  <a:lnTo>
-                    <a:pt x="4379233" y="2870105"/>
-                  </a:lnTo>
-                  <a:lnTo>
-                    <a:pt x="4456867" y="2872657"/>
-                  </a:lnTo>
-                  <a:lnTo>
-                    <a:pt x="4534501" y="2875200"/>
-                  </a:lnTo>
-                  <a:lnTo>
-                    <a:pt x="4612135" y="2877735"/>
-                  </a:lnTo>
-                  <a:lnTo>
-                    <a:pt x="4689769" y="2880262"/>
-                  </a:lnTo>
-                  <a:lnTo>
-                    <a:pt x="4767403" y="2882780"/>
-                  </a:lnTo>
-                  <a:lnTo>
-                    <a:pt x="4845037" y="2885290"/>
-                  </a:lnTo>
-                  <a:lnTo>
-                    <a:pt x="4922671" y="2887792"/>
-                  </a:lnTo>
-                  <a:lnTo>
-                    <a:pt x="5000305" y="2890286"/>
-                  </a:lnTo>
-                  <a:lnTo>
-                    <a:pt x="5077939" y="2892772"/>
-                  </a:lnTo>
-                  <a:lnTo>
-                    <a:pt x="5155574" y="2895249"/>
-                  </a:lnTo>
-                  <a:lnTo>
-                    <a:pt x="5233208" y="2897719"/>
-                  </a:lnTo>
-                  <a:lnTo>
-                    <a:pt x="5310842" y="2900180"/>
-                  </a:lnTo>
-                  <a:lnTo>
-                    <a:pt x="5388476" y="2902634"/>
-                  </a:lnTo>
-                  <a:lnTo>
-                    <a:pt x="5466110" y="2905079"/>
-                  </a:lnTo>
-                  <a:lnTo>
-                    <a:pt x="5543744" y="2907517"/>
-                  </a:lnTo>
-                  <a:lnTo>
-                    <a:pt x="5621378" y="2909946"/>
-                  </a:lnTo>
-                  <a:lnTo>
-                    <a:pt x="5699012" y="2912368"/>
-                  </a:lnTo>
-                  <a:lnTo>
-                    <a:pt x="5776646" y="2914781"/>
-                  </a:lnTo>
-                  <a:lnTo>
-                    <a:pt x="5854280" y="2917187"/>
+                    <a:pt x="37871" y="110423"/>
+                  </a:lnTo>
+                  <a:lnTo>
+                    <a:pt x="115505" y="323185"/>
+                  </a:lnTo>
+                  <a:lnTo>
+                    <a:pt x="193139" y="523168"/>
+                  </a:lnTo>
+                  <a:lnTo>
+                    <a:pt x="270773" y="711139"/>
+                  </a:lnTo>
+                  <a:lnTo>
+                    <a:pt x="348407" y="887820"/>
+                  </a:lnTo>
+                  <a:lnTo>
+                    <a:pt x="426041" y="1053889"/>
+                  </a:lnTo>
+                  <a:lnTo>
+                    <a:pt x="503676" y="1209982"/>
+                  </a:lnTo>
+                  <a:lnTo>
+                    <a:pt x="581310" y="1356700"/>
+                  </a:lnTo>
+                  <a:lnTo>
+                    <a:pt x="658944" y="1494605"/>
+                  </a:lnTo>
+                  <a:lnTo>
+                    <a:pt x="736578" y="1624227"/>
+                  </a:lnTo>
+                  <a:lnTo>
+                    <a:pt x="814212" y="1746063"/>
+                  </a:lnTo>
+                  <a:lnTo>
+                    <a:pt x="891846" y="1860582"/>
+                  </a:lnTo>
+                  <a:lnTo>
+                    <a:pt x="969480" y="1968221"/>
+                  </a:lnTo>
+                  <a:lnTo>
+                    <a:pt x="1047114" y="2069396"/>
+                  </a:lnTo>
+                  <a:lnTo>
+                    <a:pt x="1124748" y="2164493"/>
+                  </a:lnTo>
+                  <a:lnTo>
+                    <a:pt x="1202382" y="2253878"/>
+                  </a:lnTo>
+                  <a:lnTo>
+                    <a:pt x="1280016" y="2337895"/>
+                  </a:lnTo>
+                  <a:lnTo>
+                    <a:pt x="1357650" y="2416865"/>
+                  </a:lnTo>
+                  <a:lnTo>
+                    <a:pt x="1435284" y="2491092"/>
+                  </a:lnTo>
+                  <a:lnTo>
+                    <a:pt x="1512918" y="2560860"/>
+                  </a:lnTo>
+                  <a:lnTo>
+                    <a:pt x="1590552" y="2626438"/>
+                  </a:lnTo>
+                  <a:lnTo>
+                    <a:pt x="1668186" y="2688076"/>
+                  </a:lnTo>
+                  <a:lnTo>
+                    <a:pt x="1745820" y="2746013"/>
+                  </a:lnTo>
+                  <a:lnTo>
+                    <a:pt x="1823454" y="2779650"/>
+                  </a:lnTo>
+                  <a:lnTo>
+                    <a:pt x="1901088" y="2769470"/>
+                  </a:lnTo>
+                  <a:lnTo>
+                    <a:pt x="1978722" y="2759170"/>
+                  </a:lnTo>
+                  <a:lnTo>
+                    <a:pt x="2056356" y="2748751"/>
+                  </a:lnTo>
+                  <a:lnTo>
+                    <a:pt x="2133990" y="2738210"/>
+                  </a:lnTo>
+                  <a:lnTo>
+                    <a:pt x="2211624" y="2727546"/>
+                  </a:lnTo>
+                  <a:lnTo>
+                    <a:pt x="2289259" y="2716757"/>
+                  </a:lnTo>
+                  <a:lnTo>
+                    <a:pt x="2366893" y="2705843"/>
+                  </a:lnTo>
+                  <a:lnTo>
+                    <a:pt x="2444527" y="2694802"/>
+                  </a:lnTo>
+                  <a:lnTo>
+                    <a:pt x="2522161" y="2683632"/>
+                  </a:lnTo>
+                  <a:lnTo>
+                    <a:pt x="2599795" y="2672331"/>
+                  </a:lnTo>
+                  <a:lnTo>
+                    <a:pt x="2677429" y="2660899"/>
+                  </a:lnTo>
+                  <a:lnTo>
+                    <a:pt x="2755063" y="2649333"/>
+                  </a:lnTo>
+                  <a:lnTo>
+                    <a:pt x="2832697" y="2637633"/>
+                  </a:lnTo>
+                  <a:lnTo>
+                    <a:pt x="2910331" y="2625796"/>
+                  </a:lnTo>
+                  <a:lnTo>
+                    <a:pt x="2987965" y="2613821"/>
+                  </a:lnTo>
+                  <a:lnTo>
+                    <a:pt x="3065599" y="2601707"/>
+                  </a:lnTo>
+                  <a:lnTo>
+                    <a:pt x="3143233" y="2589451"/>
+                  </a:lnTo>
+                  <a:lnTo>
+                    <a:pt x="3220867" y="2577052"/>
+                  </a:lnTo>
+                  <a:lnTo>
+                    <a:pt x="3298501" y="2564509"/>
+                  </a:lnTo>
+                  <a:lnTo>
+                    <a:pt x="3376135" y="2551819"/>
+                  </a:lnTo>
+                  <a:lnTo>
+                    <a:pt x="3453769" y="2538982"/>
+                  </a:lnTo>
+                  <a:lnTo>
+                    <a:pt x="3531403" y="2525994"/>
+                  </a:lnTo>
+                  <a:lnTo>
+                    <a:pt x="3609037" y="2512855"/>
+                  </a:lnTo>
+                  <a:lnTo>
+                    <a:pt x="3686671" y="2499563"/>
+                  </a:lnTo>
+                  <a:lnTo>
+                    <a:pt x="3764305" y="2486116"/>
+                  </a:lnTo>
+                  <a:lnTo>
+                    <a:pt x="3841939" y="2472513"/>
+                  </a:lnTo>
+                  <a:lnTo>
+                    <a:pt x="3919573" y="2458750"/>
+                  </a:lnTo>
+                  <a:lnTo>
+                    <a:pt x="3997208" y="2444827"/>
+                  </a:lnTo>
+                  <a:lnTo>
+                    <a:pt x="4074842" y="2430742"/>
+                  </a:lnTo>
+                  <a:lnTo>
+                    <a:pt x="4152476" y="2416492"/>
+                  </a:lnTo>
+                  <a:lnTo>
+                    <a:pt x="4230110" y="2402076"/>
+                  </a:lnTo>
+                  <a:lnTo>
+                    <a:pt x="4307744" y="2387493"/>
+                  </a:lnTo>
+                  <a:lnTo>
+                    <a:pt x="4385378" y="2372739"/>
+                  </a:lnTo>
+                  <a:lnTo>
+                    <a:pt x="4463012" y="2357813"/>
+                  </a:lnTo>
+                  <a:lnTo>
+                    <a:pt x="4540646" y="2342712"/>
+                  </a:lnTo>
+                  <a:lnTo>
+                    <a:pt x="4618280" y="2327436"/>
+                  </a:lnTo>
+                  <a:lnTo>
+                    <a:pt x="4695914" y="2311982"/>
+                  </a:lnTo>
+                  <a:lnTo>
+                    <a:pt x="4773548" y="2296347"/>
+                  </a:lnTo>
+                  <a:lnTo>
+                    <a:pt x="4851182" y="2280531"/>
+                  </a:lnTo>
+                  <a:lnTo>
+                    <a:pt x="4928816" y="2264529"/>
+                  </a:lnTo>
+                  <a:lnTo>
+                    <a:pt x="5006450" y="2248341"/>
+                  </a:lnTo>
+                  <a:lnTo>
+                    <a:pt x="5084084" y="2231965"/>
+                  </a:lnTo>
+                  <a:lnTo>
+                    <a:pt x="5161718" y="2215397"/>
+                  </a:lnTo>
+                  <a:lnTo>
+                    <a:pt x="5239352" y="2198636"/>
+                  </a:lnTo>
+                  <a:lnTo>
+                    <a:pt x="5316986" y="2181680"/>
+                  </a:lnTo>
+                  <a:lnTo>
+                    <a:pt x="5394620" y="2164525"/>
+                  </a:lnTo>
+                  <a:lnTo>
+                    <a:pt x="5472254" y="2147171"/>
+                  </a:lnTo>
+                  <a:lnTo>
+                    <a:pt x="5549888" y="2129615"/>
+                  </a:lnTo>
+                  <a:lnTo>
+                    <a:pt x="5627522" y="2111853"/>
+                  </a:lnTo>
+                  <a:lnTo>
+                    <a:pt x="5705157" y="2093885"/>
+                  </a:lnTo>
+                  <a:lnTo>
+                    <a:pt x="5782791" y="2075707"/>
                   </a:lnTo>
                 </a:path>
               </a:pathLst>
@@ -3808,300 +3802,300 @@
           </p:nvSpPr>
           <p:spPr>
             <a:xfrm>
-              <a:off x="817517" y="4546389"/>
-              <a:ext cx="7370972" cy="961959"/>
+              <a:off x="817517" y="4686277"/>
+              <a:ext cx="7370972" cy="826745"/>
             </a:xfrm>
             <a:custGeom>
               <a:avLst/>
               <a:pathLst>
-                <a:path w="7370972" h="961959">
+                <a:path w="7370972" h="826745">
                   <a:moveTo>
-                    <a:pt x="7370972" y="961959"/>
+                    <a:pt x="7370972" y="826745"/>
                   </a:moveTo>
                   <a:lnTo>
-                    <a:pt x="7293338" y="959451"/>
-                  </a:lnTo>
-                  <a:lnTo>
-                    <a:pt x="7215704" y="956789"/>
-                  </a:lnTo>
-                  <a:lnTo>
-                    <a:pt x="7138070" y="953963"/>
-                  </a:lnTo>
-                  <a:lnTo>
-                    <a:pt x="7060436" y="950964"/>
-                  </a:lnTo>
-                  <a:lnTo>
-                    <a:pt x="6982802" y="947781"/>
-                  </a:lnTo>
-                  <a:lnTo>
-                    <a:pt x="6905168" y="944402"/>
-                  </a:lnTo>
-                  <a:lnTo>
-                    <a:pt x="6827534" y="940816"/>
-                  </a:lnTo>
-                  <a:lnTo>
-                    <a:pt x="6749900" y="937010"/>
-                  </a:lnTo>
-                  <a:lnTo>
-                    <a:pt x="6672266" y="932970"/>
-                  </a:lnTo>
-                  <a:lnTo>
-                    <a:pt x="6594632" y="928682"/>
-                  </a:lnTo>
-                  <a:lnTo>
-                    <a:pt x="6516998" y="924131"/>
-                  </a:lnTo>
-                  <a:lnTo>
-                    <a:pt x="6439364" y="919301"/>
-                  </a:lnTo>
-                  <a:lnTo>
-                    <a:pt x="6361730" y="914174"/>
-                  </a:lnTo>
-                  <a:lnTo>
-                    <a:pt x="6284096" y="908732"/>
-                  </a:lnTo>
-                  <a:lnTo>
-                    <a:pt x="6206462" y="902957"/>
-                  </a:lnTo>
-                  <a:lnTo>
-                    <a:pt x="6128827" y="896826"/>
-                  </a:lnTo>
-                  <a:lnTo>
-                    <a:pt x="6051193" y="890320"/>
-                  </a:lnTo>
-                  <a:lnTo>
-                    <a:pt x="5973559" y="883414"/>
-                  </a:lnTo>
-                  <a:lnTo>
-                    <a:pt x="5895925" y="876084"/>
-                  </a:lnTo>
-                  <a:lnTo>
-                    <a:pt x="5818291" y="868304"/>
-                  </a:lnTo>
-                  <a:lnTo>
-                    <a:pt x="5740657" y="860046"/>
-                  </a:lnTo>
-                  <a:lnTo>
-                    <a:pt x="5663023" y="851282"/>
-                  </a:lnTo>
-                  <a:lnTo>
-                    <a:pt x="5585389" y="841980"/>
-                  </a:lnTo>
-                  <a:lnTo>
-                    <a:pt x="5507755" y="832106"/>
-                  </a:lnTo>
-                  <a:lnTo>
-                    <a:pt x="5430121" y="821626"/>
-                  </a:lnTo>
-                  <a:lnTo>
-                    <a:pt x="5352487" y="810503"/>
-                  </a:lnTo>
-                  <a:lnTo>
-                    <a:pt x="5274853" y="798698"/>
-                  </a:lnTo>
-                  <a:lnTo>
-                    <a:pt x="5197219" y="786167"/>
-                  </a:lnTo>
-                  <a:lnTo>
-                    <a:pt x="5119585" y="772867"/>
-                  </a:lnTo>
-                  <a:lnTo>
-                    <a:pt x="5041951" y="758751"/>
-                  </a:lnTo>
-                  <a:lnTo>
-                    <a:pt x="4964317" y="743769"/>
-                  </a:lnTo>
-                  <a:lnTo>
-                    <a:pt x="4886683" y="727866"/>
-                  </a:lnTo>
-                  <a:lnTo>
-                    <a:pt x="4809049" y="710987"/>
-                  </a:lnTo>
-                  <a:lnTo>
-                    <a:pt x="4731415" y="693072"/>
-                  </a:lnTo>
-                  <a:lnTo>
-                    <a:pt x="4653781" y="674058"/>
-                  </a:lnTo>
-                  <a:lnTo>
-                    <a:pt x="4576147" y="653876"/>
-                  </a:lnTo>
-                  <a:lnTo>
-                    <a:pt x="4498513" y="632455"/>
-                  </a:lnTo>
-                  <a:lnTo>
-                    <a:pt x="4420879" y="609719"/>
-                  </a:lnTo>
-                  <a:lnTo>
-                    <a:pt x="4343244" y="585588"/>
-                  </a:lnTo>
-                  <a:lnTo>
-                    <a:pt x="4265610" y="559975"/>
-                  </a:lnTo>
-                  <a:lnTo>
-                    <a:pt x="4187976" y="532789"/>
-                  </a:lnTo>
-                  <a:lnTo>
-                    <a:pt x="4110342" y="503935"/>
-                  </a:lnTo>
-                  <a:lnTo>
-                    <a:pt x="4032708" y="473310"/>
-                  </a:lnTo>
-                  <a:lnTo>
-                    <a:pt x="3955074" y="440805"/>
-                  </a:lnTo>
-                  <a:lnTo>
-                    <a:pt x="3877440" y="406304"/>
-                  </a:lnTo>
-                  <a:lnTo>
-                    <a:pt x="3799806" y="369685"/>
-                  </a:lnTo>
-                  <a:lnTo>
-                    <a:pt x="3722172" y="330818"/>
-                  </a:lnTo>
-                  <a:lnTo>
-                    <a:pt x="3644538" y="289565"/>
-                  </a:lnTo>
-                  <a:lnTo>
-                    <a:pt x="3566904" y="245780"/>
-                  </a:lnTo>
-                  <a:lnTo>
-                    <a:pt x="3489270" y="199307"/>
-                  </a:lnTo>
-                  <a:lnTo>
-                    <a:pt x="3411636" y="149981"/>
-                  </a:lnTo>
-                  <a:lnTo>
-                    <a:pt x="3334002" y="131230"/>
-                  </a:lnTo>
-                  <a:lnTo>
-                    <a:pt x="3256368" y="128379"/>
-                  </a:lnTo>
-                  <a:lnTo>
-                    <a:pt x="3178734" y="125519"/>
-                  </a:lnTo>
-                  <a:lnTo>
-                    <a:pt x="3101100" y="122649"/>
-                  </a:lnTo>
-                  <a:lnTo>
-                    <a:pt x="3023466" y="119770"/>
-                  </a:lnTo>
-                  <a:lnTo>
-                    <a:pt x="2945832" y="116881"/>
-                  </a:lnTo>
-                  <a:lnTo>
-                    <a:pt x="2868198" y="113983"/>
-                  </a:lnTo>
-                  <a:lnTo>
-                    <a:pt x="2790564" y="111075"/>
-                  </a:lnTo>
-                  <a:lnTo>
-                    <a:pt x="2712930" y="108158"/>
-                  </a:lnTo>
-                  <a:lnTo>
-                    <a:pt x="2635295" y="105232"/>
-                  </a:lnTo>
-                  <a:lnTo>
-                    <a:pt x="2557661" y="102295"/>
-                  </a:lnTo>
-                  <a:lnTo>
-                    <a:pt x="2480027" y="99350"/>
-                  </a:lnTo>
-                  <a:lnTo>
-                    <a:pt x="2402393" y="96394"/>
-                  </a:lnTo>
-                  <a:lnTo>
-                    <a:pt x="2324759" y="93429"/>
-                  </a:lnTo>
-                  <a:lnTo>
-                    <a:pt x="2247125" y="90454"/>
-                  </a:lnTo>
-                  <a:lnTo>
-                    <a:pt x="2169491" y="87470"/>
-                  </a:lnTo>
-                  <a:lnTo>
-                    <a:pt x="2091857" y="84475"/>
-                  </a:lnTo>
-                  <a:lnTo>
-                    <a:pt x="2014223" y="81471"/>
-                  </a:lnTo>
-                  <a:lnTo>
-                    <a:pt x="1936589" y="78457"/>
-                  </a:lnTo>
-                  <a:lnTo>
-                    <a:pt x="1858955" y="75434"/>
-                  </a:lnTo>
-                  <a:lnTo>
-                    <a:pt x="1781321" y="72400"/>
-                  </a:lnTo>
-                  <a:lnTo>
-                    <a:pt x="1703687" y="69356"/>
-                  </a:lnTo>
-                  <a:lnTo>
-                    <a:pt x="1626053" y="66303"/>
-                  </a:lnTo>
-                  <a:lnTo>
-                    <a:pt x="1548419" y="63239"/>
-                  </a:lnTo>
-                  <a:lnTo>
-                    <a:pt x="1470785" y="60166"/>
-                  </a:lnTo>
-                  <a:lnTo>
-                    <a:pt x="1393151" y="57082"/>
-                  </a:lnTo>
-                  <a:lnTo>
-                    <a:pt x="1315517" y="53988"/>
-                  </a:lnTo>
-                  <a:lnTo>
-                    <a:pt x="1237883" y="50885"/>
-                  </a:lnTo>
-                  <a:lnTo>
-                    <a:pt x="1160249" y="47771"/>
-                  </a:lnTo>
-                  <a:lnTo>
-                    <a:pt x="1082615" y="44647"/>
-                  </a:lnTo>
-                  <a:lnTo>
-                    <a:pt x="1004981" y="41512"/>
-                  </a:lnTo>
-                  <a:lnTo>
-                    <a:pt x="927346" y="38368"/>
-                  </a:lnTo>
-                  <a:lnTo>
-                    <a:pt x="849712" y="35213"/>
-                  </a:lnTo>
-                  <a:lnTo>
-                    <a:pt x="772078" y="32047"/>
-                  </a:lnTo>
-                  <a:lnTo>
-                    <a:pt x="694444" y="28872"/>
-                  </a:lnTo>
-                  <a:lnTo>
-                    <a:pt x="616810" y="25686"/>
-                  </a:lnTo>
-                  <a:lnTo>
-                    <a:pt x="539176" y="22489"/>
-                  </a:lnTo>
-                  <a:lnTo>
-                    <a:pt x="461542" y="19283"/>
-                  </a:lnTo>
-                  <a:lnTo>
-                    <a:pt x="383908" y="16065"/>
-                  </a:lnTo>
-                  <a:lnTo>
-                    <a:pt x="306274" y="12837"/>
-                  </a:lnTo>
-                  <a:lnTo>
-                    <a:pt x="228640" y="9599"/>
-                  </a:lnTo>
-                  <a:lnTo>
-                    <a:pt x="151006" y="6350"/>
-                  </a:lnTo>
-                  <a:lnTo>
-                    <a:pt x="73372" y="3090"/>
-                  </a:lnTo>
-                  <a:lnTo>
-                    <a:pt x="0" y="0"/>
+                    <a:pt x="7293338" y="824432"/>
+                  </a:lnTo>
+                  <a:lnTo>
+                    <a:pt x="7215704" y="821972"/>
+                  </a:lnTo>
+                  <a:lnTo>
+                    <a:pt x="7138070" y="819355"/>
+                  </a:lnTo>
+                  <a:lnTo>
+                    <a:pt x="7060436" y="816570"/>
+                  </a:lnTo>
+                  <a:lnTo>
+                    <a:pt x="6982802" y="813608"/>
+                  </a:lnTo>
+                  <a:lnTo>
+                    <a:pt x="6905168" y="810456"/>
+                  </a:lnTo>
+                  <a:lnTo>
+                    <a:pt x="6827534" y="807103"/>
+                  </a:lnTo>
+                  <a:lnTo>
+                    <a:pt x="6749900" y="803536"/>
+                  </a:lnTo>
+                  <a:lnTo>
+                    <a:pt x="6672266" y="799740"/>
+                  </a:lnTo>
+                  <a:lnTo>
+                    <a:pt x="6594632" y="795702"/>
+                  </a:lnTo>
+                  <a:lnTo>
+                    <a:pt x="6516998" y="791406"/>
+                  </a:lnTo>
+                  <a:lnTo>
+                    <a:pt x="6439364" y="786836"/>
+                  </a:lnTo>
+                  <a:lnTo>
+                    <a:pt x="6361730" y="781973"/>
+                  </a:lnTo>
+                  <a:lnTo>
+                    <a:pt x="6284096" y="776800"/>
+                  </a:lnTo>
+                  <a:lnTo>
+                    <a:pt x="6206462" y="771296"/>
+                  </a:lnTo>
+                  <a:lnTo>
+                    <a:pt x="6128827" y="765440"/>
+                  </a:lnTo>
+                  <a:lnTo>
+                    <a:pt x="6051193" y="759210"/>
+                  </a:lnTo>
+                  <a:lnTo>
+                    <a:pt x="5973559" y="752582"/>
+                  </a:lnTo>
+                  <a:lnTo>
+                    <a:pt x="5895925" y="745531"/>
+                  </a:lnTo>
+                  <a:lnTo>
+                    <a:pt x="5818291" y="738029"/>
+                  </a:lnTo>
+                  <a:lnTo>
+                    <a:pt x="5740657" y="730047"/>
+                  </a:lnTo>
+                  <a:lnTo>
+                    <a:pt x="5663023" y="721555"/>
+                  </a:lnTo>
+                  <a:lnTo>
+                    <a:pt x="5585389" y="712521"/>
+                  </a:lnTo>
+                  <a:lnTo>
+                    <a:pt x="5507755" y="702910"/>
+                  </a:lnTo>
+                  <a:lnTo>
+                    <a:pt x="5430121" y="692684"/>
+                  </a:lnTo>
+                  <a:lnTo>
+                    <a:pt x="5352487" y="681805"/>
+                  </a:lnTo>
+                  <a:lnTo>
+                    <a:pt x="5274853" y="670230"/>
+                  </a:lnTo>
+                  <a:lnTo>
+                    <a:pt x="5197219" y="657916"/>
+                  </a:lnTo>
+                  <a:lnTo>
+                    <a:pt x="5119585" y="644815"/>
+                  </a:lnTo>
+                  <a:lnTo>
+                    <a:pt x="5041951" y="630877"/>
+                  </a:lnTo>
+                  <a:lnTo>
+                    <a:pt x="4964317" y="616049"/>
+                  </a:lnTo>
+                  <a:lnTo>
+                    <a:pt x="4886683" y="600272"/>
+                  </a:lnTo>
+                  <a:lnTo>
+                    <a:pt x="4809049" y="583487"/>
+                  </a:lnTo>
+                  <a:lnTo>
+                    <a:pt x="4731415" y="565630"/>
+                  </a:lnTo>
+                  <a:lnTo>
+                    <a:pt x="4653781" y="546632"/>
+                  </a:lnTo>
+                  <a:lnTo>
+                    <a:pt x="4576147" y="526420"/>
+                  </a:lnTo>
+                  <a:lnTo>
+                    <a:pt x="4498513" y="504916"/>
+                  </a:lnTo>
+                  <a:lnTo>
+                    <a:pt x="4420879" y="482038"/>
+                  </a:lnTo>
+                  <a:lnTo>
+                    <a:pt x="4343244" y="457697"/>
+                  </a:lnTo>
+                  <a:lnTo>
+                    <a:pt x="4265610" y="431802"/>
+                  </a:lnTo>
+                  <a:lnTo>
+                    <a:pt x="4187976" y="404251"/>
+                  </a:lnTo>
+                  <a:lnTo>
+                    <a:pt x="4110342" y="374941"/>
+                  </a:lnTo>
+                  <a:lnTo>
+                    <a:pt x="4032708" y="343757"/>
+                  </a:lnTo>
+                  <a:lnTo>
+                    <a:pt x="3955074" y="310580"/>
+                  </a:lnTo>
+                  <a:lnTo>
+                    <a:pt x="3877440" y="275283"/>
+                  </a:lnTo>
+                  <a:lnTo>
+                    <a:pt x="3799806" y="237731"/>
+                  </a:lnTo>
+                  <a:lnTo>
+                    <a:pt x="3722172" y="197779"/>
+                  </a:lnTo>
+                  <a:lnTo>
+                    <a:pt x="3644538" y="155273"/>
+                  </a:lnTo>
+                  <a:lnTo>
+                    <a:pt x="3566904" y="110052"/>
+                  </a:lnTo>
+                  <a:lnTo>
+                    <a:pt x="3489270" y="61941"/>
+                  </a:lnTo>
+                  <a:lnTo>
+                    <a:pt x="3411636" y="10755"/>
+                  </a:lnTo>
+                  <a:lnTo>
+                    <a:pt x="3334002" y="0"/>
+                  </a:lnTo>
+                  <a:lnTo>
+                    <a:pt x="3256368" y="9947"/>
+                  </a:lnTo>
+                  <a:lnTo>
+                    <a:pt x="3178734" y="19779"/>
+                  </a:lnTo>
+                  <a:lnTo>
+                    <a:pt x="3101100" y="29499"/>
+                  </a:lnTo>
+                  <a:lnTo>
+                    <a:pt x="3023466" y="39106"/>
+                  </a:lnTo>
+                  <a:lnTo>
+                    <a:pt x="2945832" y="48603"/>
+                  </a:lnTo>
+                  <a:lnTo>
+                    <a:pt x="2868198" y="57990"/>
+                  </a:lnTo>
+                  <a:lnTo>
+                    <a:pt x="2790564" y="67269"/>
+                  </a:lnTo>
+                  <a:lnTo>
+                    <a:pt x="2712930" y="76440"/>
+                  </a:lnTo>
+                  <a:lnTo>
+                    <a:pt x="2635295" y="85507"/>
+                  </a:lnTo>
+                  <a:lnTo>
+                    <a:pt x="2557661" y="94468"/>
+                  </a:lnTo>
+                  <a:lnTo>
+                    <a:pt x="2480027" y="103327"/>
+                  </a:lnTo>
+                  <a:lnTo>
+                    <a:pt x="2402393" y="112083"/>
+                  </a:lnTo>
+                  <a:lnTo>
+                    <a:pt x="2324759" y="120738"/>
+                  </a:lnTo>
+                  <a:lnTo>
+                    <a:pt x="2247125" y="129294"/>
+                  </a:lnTo>
+                  <a:lnTo>
+                    <a:pt x="2169491" y="137751"/>
+                  </a:lnTo>
+                  <a:lnTo>
+                    <a:pt x="2091857" y="146110"/>
+                  </a:lnTo>
+                  <a:lnTo>
+                    <a:pt x="2014223" y="154373"/>
+                  </a:lnTo>
+                  <a:lnTo>
+                    <a:pt x="1936589" y="162541"/>
+                  </a:lnTo>
+                  <a:lnTo>
+                    <a:pt x="1858955" y="170614"/>
+                  </a:lnTo>
+                  <a:lnTo>
+                    <a:pt x="1781321" y="178595"/>
+                  </a:lnTo>
+                  <a:lnTo>
+                    <a:pt x="1703687" y="186484"/>
+                  </a:lnTo>
+                  <a:lnTo>
+                    <a:pt x="1626053" y="194281"/>
+                  </a:lnTo>
+                  <a:lnTo>
+                    <a:pt x="1548419" y="201989"/>
+                  </a:lnTo>
+                  <a:lnTo>
+                    <a:pt x="1470785" y="209608"/>
+                  </a:lnTo>
+                  <a:lnTo>
+                    <a:pt x="1393151" y="217139"/>
+                  </a:lnTo>
+                  <a:lnTo>
+                    <a:pt x="1315517" y="224583"/>
+                  </a:lnTo>
+                  <a:lnTo>
+                    <a:pt x="1237883" y="231942"/>
+                  </a:lnTo>
+                  <a:lnTo>
+                    <a:pt x="1160249" y="239215"/>
+                  </a:lnTo>
+                  <a:lnTo>
+                    <a:pt x="1082615" y="246405"/>
+                  </a:lnTo>
+                  <a:lnTo>
+                    <a:pt x="1004981" y="253512"/>
+                  </a:lnTo>
+                  <a:lnTo>
+                    <a:pt x="927346" y="260537"/>
+                  </a:lnTo>
+                  <a:lnTo>
+                    <a:pt x="849712" y="267481"/>
+                  </a:lnTo>
+                  <a:lnTo>
+                    <a:pt x="772078" y="274345"/>
+                  </a:lnTo>
+                  <a:lnTo>
+                    <a:pt x="694444" y="281130"/>
+                  </a:lnTo>
+                  <a:lnTo>
+                    <a:pt x="616810" y="287837"/>
+                  </a:lnTo>
+                  <a:lnTo>
+                    <a:pt x="539176" y="294466"/>
+                  </a:lnTo>
+                  <a:lnTo>
+                    <a:pt x="461542" y="301019"/>
+                  </a:lnTo>
+                  <a:lnTo>
+                    <a:pt x="383908" y="307496"/>
+                  </a:lnTo>
+                  <a:lnTo>
+                    <a:pt x="306274" y="313899"/>
+                  </a:lnTo>
+                  <a:lnTo>
+                    <a:pt x="228640" y="320228"/>
+                  </a:lnTo>
+                  <a:lnTo>
+                    <a:pt x="151006" y="326484"/>
+                  </a:lnTo>
+                  <a:lnTo>
+                    <a:pt x="73372" y="332667"/>
+                  </a:lnTo>
+                  <a:lnTo>
+                    <a:pt x="0" y="338444"/>
                   </a:lnTo>
                 </a:path>
               </a:pathLst>
@@ -4121,300 +4115,300 @@
           </p:nvSpPr>
           <p:spPr>
             <a:xfrm>
-              <a:off x="817517" y="2124866"/>
-              <a:ext cx="7370972" cy="3250992"/>
+              <a:off x="817517" y="2941590"/>
+              <a:ext cx="7370972" cy="2368743"/>
             </a:xfrm>
             <a:custGeom>
               <a:avLst/>
               <a:pathLst>
-                <a:path w="7370972" h="3250992">
+                <a:path w="7370972" h="2368743">
                   <a:moveTo>
                     <a:pt x="0" y="0"/>
                   </a:moveTo>
                   <a:lnTo>
-                    <a:pt x="73372" y="100281"/>
-                  </a:lnTo>
-                  <a:lnTo>
-                    <a:pt x="151006" y="203105"/>
-                  </a:lnTo>
-                  <a:lnTo>
-                    <a:pt x="228640" y="302748"/>
-                  </a:lnTo>
-                  <a:lnTo>
-                    <a:pt x="306274" y="399308"/>
-                  </a:lnTo>
-                  <a:lnTo>
-                    <a:pt x="383908" y="492882"/>
-                  </a:lnTo>
-                  <a:lnTo>
-                    <a:pt x="461542" y="583561"/>
-                  </a:lnTo>
-                  <a:lnTo>
-                    <a:pt x="539176" y="671436"/>
-                  </a:lnTo>
-                  <a:lnTo>
-                    <a:pt x="616810" y="756592"/>
-                  </a:lnTo>
-                  <a:lnTo>
-                    <a:pt x="694444" y="839114"/>
-                  </a:lnTo>
-                  <a:lnTo>
-                    <a:pt x="772078" y="919083"/>
-                  </a:lnTo>
-                  <a:lnTo>
-                    <a:pt x="849712" y="996579"/>
-                  </a:lnTo>
-                  <a:lnTo>
-                    <a:pt x="927346" y="1071677"/>
-                  </a:lnTo>
-                  <a:lnTo>
-                    <a:pt x="1004981" y="1144452"/>
-                  </a:lnTo>
-                  <a:lnTo>
-                    <a:pt x="1082615" y="1214976"/>
-                  </a:lnTo>
-                  <a:lnTo>
-                    <a:pt x="1160249" y="1283319"/>
-                  </a:lnTo>
-                  <a:lnTo>
-                    <a:pt x="1237883" y="1349548"/>
-                  </a:lnTo>
-                  <a:lnTo>
-                    <a:pt x="1315517" y="1413727"/>
-                  </a:lnTo>
-                  <a:lnTo>
-                    <a:pt x="1393151" y="1475922"/>
-                  </a:lnTo>
-                  <a:lnTo>
-                    <a:pt x="1470785" y="1536193"/>
-                  </a:lnTo>
-                  <a:lnTo>
-                    <a:pt x="1548419" y="1594599"/>
-                  </a:lnTo>
-                  <a:lnTo>
-                    <a:pt x="1626053" y="1651199"/>
-                  </a:lnTo>
-                  <a:lnTo>
-                    <a:pt x="1703687" y="1706048"/>
-                  </a:lnTo>
-                  <a:lnTo>
-                    <a:pt x="1781321" y="1759200"/>
-                  </a:lnTo>
-                  <a:lnTo>
-                    <a:pt x="1858955" y="1810708"/>
-                  </a:lnTo>
-                  <a:lnTo>
-                    <a:pt x="1936589" y="1860623"/>
-                  </a:lnTo>
-                  <a:lnTo>
-                    <a:pt x="2014223" y="1908994"/>
-                  </a:lnTo>
-                  <a:lnTo>
-                    <a:pt x="2091857" y="1955868"/>
-                  </a:lnTo>
-                  <a:lnTo>
-                    <a:pt x="2169491" y="2001292"/>
-                  </a:lnTo>
-                  <a:lnTo>
-                    <a:pt x="2247125" y="2045312"/>
-                  </a:lnTo>
-                  <a:lnTo>
-                    <a:pt x="2324759" y="2087970"/>
-                  </a:lnTo>
-                  <a:lnTo>
-                    <a:pt x="2402393" y="2129308"/>
-                  </a:lnTo>
-                  <a:lnTo>
-                    <a:pt x="2480027" y="2169367"/>
-                  </a:lnTo>
-                  <a:lnTo>
-                    <a:pt x="2557661" y="2208187"/>
-                  </a:lnTo>
-                  <a:lnTo>
-                    <a:pt x="2635295" y="2245807"/>
-                  </a:lnTo>
-                  <a:lnTo>
-                    <a:pt x="2712930" y="2282263"/>
-                  </a:lnTo>
-                  <a:lnTo>
-                    <a:pt x="2790564" y="2317591"/>
-                  </a:lnTo>
-                  <a:lnTo>
-                    <a:pt x="2868198" y="2351826"/>
-                  </a:lnTo>
-                  <a:lnTo>
-                    <a:pt x="2945832" y="2385002"/>
-                  </a:lnTo>
-                  <a:lnTo>
-                    <a:pt x="3023466" y="2417152"/>
-                  </a:lnTo>
-                  <a:lnTo>
-                    <a:pt x="3101100" y="2448308"/>
-                  </a:lnTo>
-                  <a:lnTo>
-                    <a:pt x="3178734" y="2478500"/>
-                  </a:lnTo>
-                  <a:lnTo>
-                    <a:pt x="3256368" y="2507757"/>
-                  </a:lnTo>
-                  <a:lnTo>
-                    <a:pt x="3334002" y="2536110"/>
-                  </a:lnTo>
-                  <a:lnTo>
-                    <a:pt x="3411636" y="2563586"/>
-                  </a:lnTo>
-                  <a:lnTo>
-                    <a:pt x="3489270" y="2590212"/>
-                  </a:lnTo>
-                  <a:lnTo>
-                    <a:pt x="3566904" y="2616014"/>
-                  </a:lnTo>
-                  <a:lnTo>
-                    <a:pt x="3644538" y="2641018"/>
-                  </a:lnTo>
-                  <a:lnTo>
-                    <a:pt x="3722172" y="2665249"/>
-                  </a:lnTo>
-                  <a:lnTo>
-                    <a:pt x="3799806" y="2688730"/>
-                  </a:lnTo>
-                  <a:lnTo>
-                    <a:pt x="3877440" y="2711485"/>
-                  </a:lnTo>
-                  <a:lnTo>
-                    <a:pt x="3955074" y="2733535"/>
-                  </a:lnTo>
-                  <a:lnTo>
-                    <a:pt x="4032708" y="2754904"/>
-                  </a:lnTo>
-                  <a:lnTo>
-                    <a:pt x="4110342" y="2775612"/>
-                  </a:lnTo>
-                  <a:lnTo>
-                    <a:pt x="4187976" y="2795679"/>
-                  </a:lnTo>
-                  <a:lnTo>
-                    <a:pt x="4265610" y="2815126"/>
-                  </a:lnTo>
-                  <a:lnTo>
-                    <a:pt x="4343244" y="2833971"/>
-                  </a:lnTo>
-                  <a:lnTo>
-                    <a:pt x="4420879" y="2852233"/>
-                  </a:lnTo>
-                  <a:lnTo>
-                    <a:pt x="4498513" y="2869930"/>
-                  </a:lnTo>
-                  <a:lnTo>
-                    <a:pt x="4576147" y="2887079"/>
-                  </a:lnTo>
-                  <a:lnTo>
-                    <a:pt x="4653781" y="2903699"/>
-                  </a:lnTo>
-                  <a:lnTo>
-                    <a:pt x="4731415" y="2919804"/>
-                  </a:lnTo>
-                  <a:lnTo>
-                    <a:pt x="4809049" y="2935411"/>
-                  </a:lnTo>
-                  <a:lnTo>
-                    <a:pt x="4886683" y="2950535"/>
-                  </a:lnTo>
-                  <a:lnTo>
-                    <a:pt x="4964317" y="2965191"/>
-                  </a:lnTo>
-                  <a:lnTo>
-                    <a:pt x="5041951" y="2979394"/>
-                  </a:lnTo>
-                  <a:lnTo>
-                    <a:pt x="5119585" y="2993158"/>
-                  </a:lnTo>
-                  <a:lnTo>
-                    <a:pt x="5197219" y="3006495"/>
-                  </a:lnTo>
-                  <a:lnTo>
-                    <a:pt x="5274853" y="3019421"/>
-                  </a:lnTo>
-                  <a:lnTo>
-                    <a:pt x="5352487" y="3031946"/>
-                  </a:lnTo>
-                  <a:lnTo>
-                    <a:pt x="5430121" y="3044084"/>
-                  </a:lnTo>
-                  <a:lnTo>
-                    <a:pt x="5507755" y="3055847"/>
-                  </a:lnTo>
-                  <a:lnTo>
-                    <a:pt x="5585389" y="3067245"/>
-                  </a:lnTo>
-                  <a:lnTo>
-                    <a:pt x="5663023" y="3078291"/>
-                  </a:lnTo>
-                  <a:lnTo>
-                    <a:pt x="5740657" y="3088996"/>
-                  </a:lnTo>
-                  <a:lnTo>
-                    <a:pt x="5818291" y="3099369"/>
-                  </a:lnTo>
-                  <a:lnTo>
-                    <a:pt x="5895925" y="3109421"/>
-                  </a:lnTo>
-                  <a:lnTo>
-                    <a:pt x="5973559" y="3119163"/>
-                  </a:lnTo>
-                  <a:lnTo>
-                    <a:pt x="6051193" y="3128603"/>
-                  </a:lnTo>
-                  <a:lnTo>
-                    <a:pt x="6128827" y="3137751"/>
-                  </a:lnTo>
-                  <a:lnTo>
-                    <a:pt x="6206462" y="3146616"/>
-                  </a:lnTo>
-                  <a:lnTo>
-                    <a:pt x="6284096" y="3155207"/>
-                  </a:lnTo>
-                  <a:lnTo>
-                    <a:pt x="6361730" y="3163532"/>
-                  </a:lnTo>
-                  <a:lnTo>
-                    <a:pt x="6439364" y="3171600"/>
-                  </a:lnTo>
-                  <a:lnTo>
-                    <a:pt x="6516998" y="3179418"/>
-                  </a:lnTo>
-                  <a:lnTo>
-                    <a:pt x="6594632" y="3186994"/>
-                  </a:lnTo>
-                  <a:lnTo>
-                    <a:pt x="6672266" y="3194336"/>
-                  </a:lnTo>
-                  <a:lnTo>
-                    <a:pt x="6749900" y="3201451"/>
-                  </a:lnTo>
-                  <a:lnTo>
-                    <a:pt x="6827534" y="3208345"/>
-                  </a:lnTo>
-                  <a:lnTo>
-                    <a:pt x="6905168" y="3215027"/>
-                  </a:lnTo>
-                  <a:lnTo>
-                    <a:pt x="6982802" y="3221501"/>
-                  </a:lnTo>
-                  <a:lnTo>
-                    <a:pt x="7060436" y="3227776"/>
-                  </a:lnTo>
-                  <a:lnTo>
-                    <a:pt x="7138070" y="3233856"/>
-                  </a:lnTo>
-                  <a:lnTo>
-                    <a:pt x="7215704" y="3239748"/>
-                  </a:lnTo>
-                  <a:lnTo>
-                    <a:pt x="7293338" y="3245458"/>
-                  </a:lnTo>
-                  <a:lnTo>
-                    <a:pt x="7370972" y="3250992"/>
+                    <a:pt x="73372" y="61352"/>
+                  </a:lnTo>
+                  <a:lnTo>
+                    <a:pt x="151006" y="124654"/>
+                  </a:lnTo>
+                  <a:lnTo>
+                    <a:pt x="228640" y="186382"/>
+                  </a:lnTo>
+                  <a:lnTo>
+                    <a:pt x="306274" y="246576"/>
+                  </a:lnTo>
+                  <a:lnTo>
+                    <a:pt x="383908" y="305273"/>
+                  </a:lnTo>
+                  <a:lnTo>
+                    <a:pt x="461542" y="362511"/>
+                  </a:lnTo>
+                  <a:lnTo>
+                    <a:pt x="539176" y="418326"/>
+                  </a:lnTo>
+                  <a:lnTo>
+                    <a:pt x="616810" y="472753"/>
+                  </a:lnTo>
+                  <a:lnTo>
+                    <a:pt x="694444" y="525827"/>
+                  </a:lnTo>
+                  <a:lnTo>
+                    <a:pt x="772078" y="577582"/>
+                  </a:lnTo>
+                  <a:lnTo>
+                    <a:pt x="849712" y="628050"/>
+                  </a:lnTo>
+                  <a:lnTo>
+                    <a:pt x="927346" y="677264"/>
+                  </a:lnTo>
+                  <a:lnTo>
+                    <a:pt x="1004981" y="725254"/>
+                  </a:lnTo>
+                  <a:lnTo>
+                    <a:pt x="1082615" y="772051"/>
+                  </a:lnTo>
+                  <a:lnTo>
+                    <a:pt x="1160249" y="817684"/>
+                  </a:lnTo>
+                  <a:lnTo>
+                    <a:pt x="1237883" y="862183"/>
+                  </a:lnTo>
+                  <a:lnTo>
+                    <a:pt x="1315517" y="905576"/>
+                  </a:lnTo>
+                  <a:lnTo>
+                    <a:pt x="1393151" y="947890"/>
+                  </a:lnTo>
+                  <a:lnTo>
+                    <a:pt x="1470785" y="989152"/>
+                  </a:lnTo>
+                  <a:lnTo>
+                    <a:pt x="1548419" y="1029388"/>
+                  </a:lnTo>
+                  <a:lnTo>
+                    <a:pt x="1626053" y="1068624"/>
+                  </a:lnTo>
+                  <a:lnTo>
+                    <a:pt x="1703687" y="1106884"/>
+                  </a:lnTo>
+                  <a:lnTo>
+                    <a:pt x="1781321" y="1144194"/>
+                  </a:lnTo>
+                  <a:lnTo>
+                    <a:pt x="1858955" y="1180575"/>
+                  </a:lnTo>
+                  <a:lnTo>
+                    <a:pt x="1936589" y="1216053"/>
+                  </a:lnTo>
+                  <a:lnTo>
+                    <a:pt x="2014223" y="1250648"/>
+                  </a:lnTo>
+                  <a:lnTo>
+                    <a:pt x="2091857" y="1284383"/>
+                  </a:lnTo>
+                  <a:lnTo>
+                    <a:pt x="2169491" y="1317280"/>
+                  </a:lnTo>
+                  <a:lnTo>
+                    <a:pt x="2247125" y="1349358"/>
+                  </a:lnTo>
+                  <a:lnTo>
+                    <a:pt x="2324759" y="1380640"/>
+                  </a:lnTo>
+                  <a:lnTo>
+                    <a:pt x="2402393" y="1411143"/>
+                  </a:lnTo>
+                  <a:lnTo>
+                    <a:pt x="2480027" y="1440888"/>
+                  </a:lnTo>
+                  <a:lnTo>
+                    <a:pt x="2557661" y="1469894"/>
+                  </a:lnTo>
+                  <a:lnTo>
+                    <a:pt x="2635295" y="1498179"/>
+                  </a:lnTo>
+                  <a:lnTo>
+                    <a:pt x="2712930" y="1525760"/>
+                  </a:lnTo>
+                  <a:lnTo>
+                    <a:pt x="2790564" y="1552656"/>
+                  </a:lnTo>
+                  <a:lnTo>
+                    <a:pt x="2868198" y="1578883"/>
+                  </a:lnTo>
+                  <a:lnTo>
+                    <a:pt x="2945832" y="1604458"/>
+                  </a:lnTo>
+                  <a:lnTo>
+                    <a:pt x="3023466" y="1629397"/>
+                  </a:lnTo>
+                  <a:lnTo>
+                    <a:pt x="3101100" y="1653716"/>
+                  </a:lnTo>
+                  <a:lnTo>
+                    <a:pt x="3178734" y="1677431"/>
+                  </a:lnTo>
+                  <a:lnTo>
+                    <a:pt x="3256368" y="1700556"/>
+                  </a:lnTo>
+                  <a:lnTo>
+                    <a:pt x="3334002" y="1723106"/>
+                  </a:lnTo>
+                  <a:lnTo>
+                    <a:pt x="3411636" y="1745096"/>
+                  </a:lnTo>
+                  <a:lnTo>
+                    <a:pt x="3489270" y="1766539"/>
+                  </a:lnTo>
+                  <a:lnTo>
+                    <a:pt x="3566904" y="1787449"/>
+                  </a:lnTo>
+                  <a:lnTo>
+                    <a:pt x="3644538" y="1807839"/>
+                  </a:lnTo>
+                  <a:lnTo>
+                    <a:pt x="3722172" y="1827722"/>
+                  </a:lnTo>
+                  <a:lnTo>
+                    <a:pt x="3799806" y="1847110"/>
+                  </a:lnTo>
+                  <a:lnTo>
+                    <a:pt x="3877440" y="1866017"/>
+                  </a:lnTo>
+                  <a:lnTo>
+                    <a:pt x="3955074" y="1884454"/>
+                  </a:lnTo>
+                  <a:lnTo>
+                    <a:pt x="4032708" y="1902432"/>
+                  </a:lnTo>
+                  <a:lnTo>
+                    <a:pt x="4110342" y="1919964"/>
+                  </a:lnTo>
+                  <a:lnTo>
+                    <a:pt x="4187976" y="1937059"/>
+                  </a:lnTo>
+                  <a:lnTo>
+                    <a:pt x="4265610" y="1953730"/>
+                  </a:lnTo>
+                  <a:lnTo>
+                    <a:pt x="4343244" y="1969986"/>
+                  </a:lnTo>
+                  <a:lnTo>
+                    <a:pt x="4420879" y="1985838"/>
+                  </a:lnTo>
+                  <a:lnTo>
+                    <a:pt x="4498513" y="2001296"/>
+                  </a:lnTo>
+                  <a:lnTo>
+                    <a:pt x="4576147" y="2016369"/>
+                  </a:lnTo>
+                  <a:lnTo>
+                    <a:pt x="4653781" y="2031068"/>
+                  </a:lnTo>
+                  <a:lnTo>
+                    <a:pt x="4731415" y="2045401"/>
+                  </a:lnTo>
+                  <a:lnTo>
+                    <a:pt x="4809049" y="2059378"/>
+                  </a:lnTo>
+                  <a:lnTo>
+                    <a:pt x="4886683" y="2073008"/>
+                  </a:lnTo>
+                  <a:lnTo>
+                    <a:pt x="4964317" y="2086299"/>
+                  </a:lnTo>
+                  <a:lnTo>
+                    <a:pt x="5041951" y="2099259"/>
+                  </a:lnTo>
+                  <a:lnTo>
+                    <a:pt x="5119585" y="2111897"/>
+                  </a:lnTo>
+                  <a:lnTo>
+                    <a:pt x="5197219" y="2124221"/>
+                  </a:lnTo>
+                  <a:lnTo>
+                    <a:pt x="5274853" y="2136239"/>
+                  </a:lnTo>
+                  <a:lnTo>
+                    <a:pt x="5352487" y="2147958"/>
+                  </a:lnTo>
+                  <a:lnTo>
+                    <a:pt x="5430121" y="2159385"/>
+                  </a:lnTo>
+                  <a:lnTo>
+                    <a:pt x="5507755" y="2170528"/>
+                  </a:lnTo>
+                  <a:lnTo>
+                    <a:pt x="5585389" y="2181395"/>
+                  </a:lnTo>
+                  <a:lnTo>
+                    <a:pt x="5663023" y="2191991"/>
+                  </a:lnTo>
+                  <a:lnTo>
+                    <a:pt x="5740657" y="2202324"/>
+                  </a:lnTo>
+                  <a:lnTo>
+                    <a:pt x="5818291" y="2212399"/>
+                  </a:lnTo>
+                  <a:lnTo>
+                    <a:pt x="5895925" y="2222225"/>
+                  </a:lnTo>
+                  <a:lnTo>
+                    <a:pt x="5973559" y="2231806"/>
+                  </a:lnTo>
+                  <a:lnTo>
+                    <a:pt x="6051193" y="2241149"/>
+                  </a:lnTo>
+                  <a:lnTo>
+                    <a:pt x="6128827" y="2250260"/>
+                  </a:lnTo>
+                  <a:lnTo>
+                    <a:pt x="6206462" y="2259144"/>
+                  </a:lnTo>
+                  <a:lnTo>
+                    <a:pt x="6284096" y="2267807"/>
+                  </a:lnTo>
+                  <a:lnTo>
+                    <a:pt x="6361730" y="2276255"/>
+                  </a:lnTo>
+                  <a:lnTo>
+                    <a:pt x="6439364" y="2284493"/>
+                  </a:lnTo>
+                  <a:lnTo>
+                    <a:pt x="6516998" y="2292526"/>
+                  </a:lnTo>
+                  <a:lnTo>
+                    <a:pt x="6594632" y="2300359"/>
+                  </a:lnTo>
+                  <a:lnTo>
+                    <a:pt x="6672266" y="2307998"/>
+                  </a:lnTo>
+                  <a:lnTo>
+                    <a:pt x="6749900" y="2315447"/>
+                  </a:lnTo>
+                  <a:lnTo>
+                    <a:pt x="6827534" y="2322710"/>
+                  </a:lnTo>
+                  <a:lnTo>
+                    <a:pt x="6905168" y="2329793"/>
+                  </a:lnTo>
+                  <a:lnTo>
+                    <a:pt x="6982802" y="2336700"/>
+                  </a:lnTo>
+                  <a:lnTo>
+                    <a:pt x="7060436" y="2343435"/>
+                  </a:lnTo>
+                  <a:lnTo>
+                    <a:pt x="7138070" y="2350003"/>
+                  </a:lnTo>
+                  <a:lnTo>
+                    <a:pt x="7215704" y="2356407"/>
+                  </a:lnTo>
+                  <a:lnTo>
+                    <a:pt x="7293338" y="2362653"/>
+                  </a:lnTo>
+                  <a:lnTo>
+                    <a:pt x="7370972" y="2368743"/>
                   </a:lnTo>
                 </a:path>
               </a:pathLst>

--- a/docs/plots/carbo/jx_carbo_linsubhr_ratio_anemia3.pptx
+++ b/docs/plots/carbo/jx_carbo_linsubhr_ratio_anemia3.pptx
@@ -3028,7 +3028,7 @@
                     <a:pt x="1936589" y="887820"/>
                   </a:lnTo>
                   <a:lnTo>
-                    <a:pt x="2014223" y="1053889"/>
+                    <a:pt x="2014223" y="1053888"/>
                   </a:lnTo>
                   <a:lnTo>
                     <a:pt x="2091857" y="1209982"/>
@@ -3199,7 +3199,7 @@
                     <a:pt x="6361730" y="2296347"/>
                   </a:lnTo>
                   <a:lnTo>
-                    <a:pt x="6439364" y="2280531"/>
+                    <a:pt x="6439364" y="2280530"/>
                   </a:lnTo>
                   <a:lnTo>
                     <a:pt x="6516998" y="2264529"/>
@@ -3328,7 +3328,7 @@
                     <a:pt x="5119585" y="3434530"/>
                   </a:lnTo>
                   <a:lnTo>
-                    <a:pt x="5041951" y="3420591"/>
+                    <a:pt x="5041951" y="3420592"/>
                   </a:lnTo>
                   <a:lnTo>
                     <a:pt x="4964317" y="3405763"/>
@@ -3472,7 +3472,7 @@
                     <a:pt x="1393151" y="3006853"/>
                   </a:lnTo>
                   <a:lnTo>
-                    <a:pt x="1315517" y="3014297"/>
+                    <a:pt x="1315517" y="3014298"/>
                   </a:lnTo>
                   <a:lnTo>
                     <a:pt x="1237883" y="3021656"/>
@@ -3575,10 +3575,10 @@
                     <a:pt x="348407" y="887820"/>
                   </a:lnTo>
                   <a:lnTo>
-                    <a:pt x="426041" y="1053889"/>
-                  </a:lnTo>
-                  <a:lnTo>
-                    <a:pt x="503676" y="1209982"/>
+                    <a:pt x="426041" y="1053888"/>
+                  </a:lnTo>
+                  <a:lnTo>
+                    <a:pt x="503675" y="1209982"/>
                   </a:lnTo>
                   <a:lnTo>
                     <a:pt x="581310" y="1356700"/>
@@ -3713,7 +3713,7 @@
                     <a:pt x="3919573" y="2458750"/>
                   </a:lnTo>
                   <a:lnTo>
-                    <a:pt x="3997208" y="2444827"/>
+                    <a:pt x="3997207" y="2444827"/>
                   </a:lnTo>
                   <a:lnTo>
                     <a:pt x="4074842" y="2430742"/>
@@ -3746,7 +3746,7 @@
                     <a:pt x="4773548" y="2296347"/>
                   </a:lnTo>
                   <a:lnTo>
-                    <a:pt x="4851182" y="2280531"/>
+                    <a:pt x="4851182" y="2280530"/>
                   </a:lnTo>
                   <a:lnTo>
                     <a:pt x="4928816" y="2264529"/>
@@ -3779,7 +3779,7 @@
                     <a:pt x="5627522" y="2111853"/>
                   </a:lnTo>
                   <a:lnTo>
-                    <a:pt x="5705157" y="2093885"/>
+                    <a:pt x="5705156" y="2093885"/>
                   </a:lnTo>
                   <a:lnTo>
                     <a:pt x="5782791" y="2075707"/>

--- a/docs/plots/carbo/jx_carbo_linsubhr_ratio_anemia3.pptx
+++ b/docs/plots/carbo/jx_carbo_linsubhr_ratio_anemia3.pptx
@@ -2271,7 +2271,7 @@
           </p:nvSpPr>
           <p:spPr>
             <a:xfrm>
-              <a:off x="817517" y="5114368"/>
+              <a:off x="817517" y="5142518"/>
               <a:ext cx="7799693" cy="0"/>
             </a:xfrm>
             <a:custGeom>
@@ -2314,7 +2314,7 @@
           </p:nvSpPr>
           <p:spPr>
             <a:xfrm>
-              <a:off x="817517" y="4244691"/>
+              <a:off x="817517" y="4313054"/>
               <a:ext cx="7799693" cy="0"/>
             </a:xfrm>
             <a:custGeom>
@@ -2357,7 +2357,7 @@
           </p:nvSpPr>
           <p:spPr>
             <a:xfrm>
-              <a:off x="817517" y="3375014"/>
+              <a:off x="817517" y="3483591"/>
               <a:ext cx="7799693" cy="0"/>
             </a:xfrm>
             <a:custGeom>
@@ -2400,7 +2400,7 @@
           </p:nvSpPr>
           <p:spPr>
             <a:xfrm>
-              <a:off x="817517" y="2505337"/>
+              <a:off x="817517" y="2654127"/>
               <a:ext cx="7799693" cy="0"/>
             </a:xfrm>
             <a:custGeom>
@@ -2443,15 +2443,15 @@
           </p:nvSpPr>
           <p:spPr>
             <a:xfrm>
-              <a:off x="1615213" y="1896563"/>
-              <a:ext cx="0" cy="3826579"/>
+              <a:off x="1615213" y="2073503"/>
+              <a:ext cx="0" cy="3649639"/>
             </a:xfrm>
             <a:custGeom>
               <a:avLst/>
               <a:pathLst>
-                <a:path w="0" h="3826579">
+                <a:path w="0" h="3649639">
                   <a:moveTo>
-                    <a:pt x="0" y="3826579"/>
+                    <a:pt x="0" y="3649639"/>
                   </a:moveTo>
                   <a:lnTo>
                     <a:pt x="0" y="0"/>
@@ -2486,15 +2486,15 @@
           </p:nvSpPr>
           <p:spPr>
             <a:xfrm>
-              <a:off x="3387871" y="1896563"/>
-              <a:ext cx="0" cy="3826579"/>
+              <a:off x="3387871" y="2073503"/>
+              <a:ext cx="0" cy="3649639"/>
             </a:xfrm>
             <a:custGeom>
               <a:avLst/>
               <a:pathLst>
-                <a:path w="0" h="3826579">
+                <a:path w="0" h="3649639">
                   <a:moveTo>
-                    <a:pt x="0" y="3826579"/>
+                    <a:pt x="0" y="3649639"/>
                   </a:moveTo>
                   <a:lnTo>
                     <a:pt x="0" y="0"/>
@@ -2529,15 +2529,15 @@
           </p:nvSpPr>
           <p:spPr>
             <a:xfrm>
-              <a:off x="5160528" y="1896563"/>
-              <a:ext cx="0" cy="3826579"/>
+              <a:off x="5160528" y="2073503"/>
+              <a:ext cx="0" cy="3649639"/>
             </a:xfrm>
             <a:custGeom>
               <a:avLst/>
               <a:pathLst>
-                <a:path w="0" h="3826579">
+                <a:path w="0" h="3649639">
                   <a:moveTo>
-                    <a:pt x="0" y="3826579"/>
+                    <a:pt x="0" y="3649639"/>
                   </a:moveTo>
                   <a:lnTo>
                     <a:pt x="0" y="0"/>
@@ -2572,15 +2572,15 @@
           </p:nvSpPr>
           <p:spPr>
             <a:xfrm>
-              <a:off x="6933186" y="1896563"/>
-              <a:ext cx="0" cy="3826579"/>
+              <a:off x="6933186" y="2073503"/>
+              <a:ext cx="0" cy="3649639"/>
             </a:xfrm>
             <a:custGeom>
               <a:avLst/>
               <a:pathLst>
-                <a:path w="0" h="3826579">
+                <a:path w="0" h="3649639">
                   <a:moveTo>
-                    <a:pt x="0" y="3826579"/>
+                    <a:pt x="0" y="3649639"/>
                   </a:moveTo>
                   <a:lnTo>
                     <a:pt x="0" y="0"/>
@@ -2615,7 +2615,7 @@
           </p:nvSpPr>
           <p:spPr>
             <a:xfrm>
-              <a:off x="817517" y="5549207"/>
+              <a:off x="817517" y="5557249"/>
               <a:ext cx="7799693" cy="0"/>
             </a:xfrm>
             <a:custGeom>
@@ -2658,7 +2658,7 @@
           </p:nvSpPr>
           <p:spPr>
             <a:xfrm>
-              <a:off x="817517" y="4679530"/>
+              <a:off x="817517" y="4727786"/>
               <a:ext cx="7799693" cy="0"/>
             </a:xfrm>
             <a:custGeom>
@@ -2701,7 +2701,7 @@
           </p:nvSpPr>
           <p:spPr>
             <a:xfrm>
-              <a:off x="817517" y="3809853"/>
+              <a:off x="817517" y="3898322"/>
               <a:ext cx="7799693" cy="0"/>
             </a:xfrm>
             <a:custGeom>
@@ -2744,7 +2744,7 @@
           </p:nvSpPr>
           <p:spPr>
             <a:xfrm>
-              <a:off x="817517" y="2940175"/>
+              <a:off x="817517" y="3068859"/>
               <a:ext cx="7799693" cy="0"/>
             </a:xfrm>
             <a:custGeom>
@@ -2787,7 +2787,7 @@
           </p:nvSpPr>
           <p:spPr>
             <a:xfrm>
-              <a:off x="817517" y="2070498"/>
+              <a:off x="817517" y="2239395"/>
               <a:ext cx="7799693" cy="0"/>
             </a:xfrm>
             <a:custGeom>
@@ -2830,15 +2830,15 @@
           </p:nvSpPr>
           <p:spPr>
             <a:xfrm>
-              <a:off x="2501542" y="1896563"/>
-              <a:ext cx="0" cy="3826579"/>
+              <a:off x="2501542" y="2073503"/>
+              <a:ext cx="0" cy="3649639"/>
             </a:xfrm>
             <a:custGeom>
               <a:avLst/>
               <a:pathLst>
-                <a:path w="0" h="3826579">
+                <a:path w="0" h="3649639">
                   <a:moveTo>
-                    <a:pt x="0" y="3826579"/>
+                    <a:pt x="0" y="3649639"/>
                   </a:moveTo>
                   <a:lnTo>
                     <a:pt x="0" y="0"/>
@@ -2873,15 +2873,15 @@
           </p:nvSpPr>
           <p:spPr>
             <a:xfrm>
-              <a:off x="4274200" y="1896563"/>
-              <a:ext cx="0" cy="3826579"/>
+              <a:off x="4274200" y="2073503"/>
+              <a:ext cx="0" cy="3649639"/>
             </a:xfrm>
             <a:custGeom>
               <a:avLst/>
               <a:pathLst>
-                <a:path w="0" h="3826579">
+                <a:path w="0" h="3649639">
                   <a:moveTo>
-                    <a:pt x="0" y="3826579"/>
+                    <a:pt x="0" y="3649639"/>
                   </a:moveTo>
                   <a:lnTo>
                     <a:pt x="0" y="0"/>
@@ -2916,15 +2916,15 @@
           </p:nvSpPr>
           <p:spPr>
             <a:xfrm>
-              <a:off x="6046857" y="1896563"/>
-              <a:ext cx="0" cy="3826579"/>
+              <a:off x="6046857" y="2073503"/>
+              <a:ext cx="0" cy="3649639"/>
             </a:xfrm>
             <a:custGeom>
               <a:avLst/>
               <a:pathLst>
-                <a:path w="0" h="3826579">
+                <a:path w="0" h="3649639">
                   <a:moveTo>
-                    <a:pt x="0" y="3826579"/>
+                    <a:pt x="0" y="3649639"/>
                   </a:moveTo>
                   <a:lnTo>
                     <a:pt x="0" y="0"/>
@@ -2959,15 +2959,15 @@
           </p:nvSpPr>
           <p:spPr>
             <a:xfrm>
-              <a:off x="7819515" y="1896563"/>
-              <a:ext cx="0" cy="3826579"/>
+              <a:off x="7819515" y="2073503"/>
+              <a:ext cx="0" cy="3649639"/>
             </a:xfrm>
             <a:custGeom>
               <a:avLst/>
               <a:pathLst>
-                <a:path w="0" h="3826579">
+                <a:path w="0" h="3649639">
                   <a:moveTo>
-                    <a:pt x="0" y="3826579"/>
+                    <a:pt x="0" y="3649639"/>
                   </a:moveTo>
                   <a:lnTo>
                     <a:pt x="0" y="0"/>
@@ -3002,528 +3002,528 @@
           </p:nvSpPr>
           <p:spPr>
             <a:xfrm>
-              <a:off x="817517" y="1896563"/>
-              <a:ext cx="7370972" cy="3616459"/>
+              <a:off x="817517" y="2073503"/>
+              <a:ext cx="7370972" cy="3449235"/>
             </a:xfrm>
             <a:custGeom>
               <a:avLst/>
               <a:pathLst>
-                <a:path w="7370972" h="3616459">
+                <a:path w="7370972" h="3449235">
                   <a:moveTo>
                     <a:pt x="1588181" y="0"/>
                   </a:moveTo>
                   <a:lnTo>
-                    <a:pt x="1626053" y="110423"/>
-                  </a:lnTo>
-                  <a:lnTo>
-                    <a:pt x="1703687" y="323185"/>
-                  </a:lnTo>
-                  <a:lnTo>
-                    <a:pt x="1781321" y="523168"/>
-                  </a:lnTo>
-                  <a:lnTo>
-                    <a:pt x="1858955" y="711139"/>
-                  </a:lnTo>
-                  <a:lnTo>
-                    <a:pt x="1936589" y="887820"/>
-                  </a:lnTo>
-                  <a:lnTo>
-                    <a:pt x="2014223" y="1053888"/>
-                  </a:lnTo>
-                  <a:lnTo>
-                    <a:pt x="2091857" y="1209982"/>
-                  </a:lnTo>
-                  <a:lnTo>
-                    <a:pt x="2169491" y="1356700"/>
-                  </a:lnTo>
-                  <a:lnTo>
-                    <a:pt x="2247125" y="1494605"/>
-                  </a:lnTo>
-                  <a:lnTo>
-                    <a:pt x="2324759" y="1624227"/>
-                  </a:lnTo>
-                  <a:lnTo>
-                    <a:pt x="2402393" y="1746063"/>
-                  </a:lnTo>
-                  <a:lnTo>
-                    <a:pt x="2480027" y="1860582"/>
-                  </a:lnTo>
-                  <a:lnTo>
-                    <a:pt x="2557661" y="1968221"/>
-                  </a:lnTo>
-                  <a:lnTo>
-                    <a:pt x="2635295" y="2069396"/>
-                  </a:lnTo>
-                  <a:lnTo>
-                    <a:pt x="2712930" y="2164493"/>
-                  </a:lnTo>
-                  <a:lnTo>
-                    <a:pt x="2790564" y="2253878"/>
-                  </a:lnTo>
-                  <a:lnTo>
-                    <a:pt x="2868198" y="2337895"/>
-                  </a:lnTo>
-                  <a:lnTo>
-                    <a:pt x="2945832" y="2416865"/>
-                  </a:lnTo>
-                  <a:lnTo>
-                    <a:pt x="3023466" y="2491092"/>
-                  </a:lnTo>
-                  <a:lnTo>
-                    <a:pt x="3101100" y="2560860"/>
-                  </a:lnTo>
-                  <a:lnTo>
-                    <a:pt x="3178734" y="2626438"/>
-                  </a:lnTo>
-                  <a:lnTo>
-                    <a:pt x="3256368" y="2688076"/>
-                  </a:lnTo>
-                  <a:lnTo>
-                    <a:pt x="3334002" y="2746013"/>
-                  </a:lnTo>
-                  <a:lnTo>
-                    <a:pt x="3411636" y="2779650"/>
-                  </a:lnTo>
-                  <a:lnTo>
-                    <a:pt x="3489270" y="2769470"/>
-                  </a:lnTo>
-                  <a:lnTo>
-                    <a:pt x="3566904" y="2759170"/>
-                  </a:lnTo>
-                  <a:lnTo>
-                    <a:pt x="3644538" y="2748751"/>
-                  </a:lnTo>
-                  <a:lnTo>
-                    <a:pt x="3722172" y="2738210"/>
-                  </a:lnTo>
-                  <a:lnTo>
-                    <a:pt x="3799806" y="2727546"/>
-                  </a:lnTo>
-                  <a:lnTo>
-                    <a:pt x="3877440" y="2716757"/>
-                  </a:lnTo>
-                  <a:lnTo>
-                    <a:pt x="3955074" y="2705843"/>
-                  </a:lnTo>
-                  <a:lnTo>
-                    <a:pt x="4032708" y="2694802"/>
-                  </a:lnTo>
-                  <a:lnTo>
-                    <a:pt x="4110342" y="2683632"/>
-                  </a:lnTo>
-                  <a:lnTo>
-                    <a:pt x="4187976" y="2672331"/>
-                  </a:lnTo>
-                  <a:lnTo>
-                    <a:pt x="4265610" y="2660899"/>
-                  </a:lnTo>
-                  <a:lnTo>
-                    <a:pt x="4343244" y="2649333"/>
-                  </a:lnTo>
-                  <a:lnTo>
-                    <a:pt x="4420879" y="2637633"/>
-                  </a:lnTo>
-                  <a:lnTo>
-                    <a:pt x="4498513" y="2625796"/>
-                  </a:lnTo>
-                  <a:lnTo>
-                    <a:pt x="4576147" y="2613821"/>
-                  </a:lnTo>
-                  <a:lnTo>
-                    <a:pt x="4653781" y="2601707"/>
-                  </a:lnTo>
-                  <a:lnTo>
-                    <a:pt x="4731415" y="2589451"/>
-                  </a:lnTo>
-                  <a:lnTo>
-                    <a:pt x="4809049" y="2577052"/>
-                  </a:lnTo>
-                  <a:lnTo>
-                    <a:pt x="4886683" y="2564509"/>
-                  </a:lnTo>
-                  <a:lnTo>
-                    <a:pt x="4964317" y="2551819"/>
-                  </a:lnTo>
-                  <a:lnTo>
-                    <a:pt x="5041951" y="2538982"/>
-                  </a:lnTo>
-                  <a:lnTo>
-                    <a:pt x="5119585" y="2525994"/>
-                  </a:lnTo>
-                  <a:lnTo>
-                    <a:pt x="5197219" y="2512855"/>
-                  </a:lnTo>
-                  <a:lnTo>
-                    <a:pt x="5274853" y="2499563"/>
-                  </a:lnTo>
-                  <a:lnTo>
-                    <a:pt x="5352487" y="2486116"/>
-                  </a:lnTo>
-                  <a:lnTo>
-                    <a:pt x="5430121" y="2472513"/>
-                  </a:lnTo>
-                  <a:lnTo>
-                    <a:pt x="5507755" y="2458750"/>
-                  </a:lnTo>
-                  <a:lnTo>
-                    <a:pt x="5585389" y="2444827"/>
-                  </a:lnTo>
-                  <a:lnTo>
-                    <a:pt x="5663023" y="2430742"/>
-                  </a:lnTo>
-                  <a:lnTo>
-                    <a:pt x="5740657" y="2416492"/>
-                  </a:lnTo>
-                  <a:lnTo>
-                    <a:pt x="5818291" y="2402076"/>
-                  </a:lnTo>
-                  <a:lnTo>
-                    <a:pt x="5895925" y="2387493"/>
-                  </a:lnTo>
-                  <a:lnTo>
-                    <a:pt x="5973559" y="2372739"/>
-                  </a:lnTo>
-                  <a:lnTo>
-                    <a:pt x="6051193" y="2357813"/>
-                  </a:lnTo>
-                  <a:lnTo>
-                    <a:pt x="6128827" y="2342712"/>
-                  </a:lnTo>
-                  <a:lnTo>
-                    <a:pt x="6206462" y="2327436"/>
-                  </a:lnTo>
-                  <a:lnTo>
-                    <a:pt x="6284096" y="2311982"/>
-                  </a:lnTo>
-                  <a:lnTo>
-                    <a:pt x="6361730" y="2296347"/>
-                  </a:lnTo>
-                  <a:lnTo>
-                    <a:pt x="6439364" y="2280530"/>
-                  </a:lnTo>
-                  <a:lnTo>
-                    <a:pt x="6516998" y="2264529"/>
-                  </a:lnTo>
-                  <a:lnTo>
-                    <a:pt x="6594632" y="2248341"/>
-                  </a:lnTo>
-                  <a:lnTo>
-                    <a:pt x="6672266" y="2231965"/>
-                  </a:lnTo>
-                  <a:lnTo>
-                    <a:pt x="6749900" y="2215397"/>
-                  </a:lnTo>
-                  <a:lnTo>
-                    <a:pt x="6827534" y="2198636"/>
-                  </a:lnTo>
-                  <a:lnTo>
-                    <a:pt x="6905168" y="2181680"/>
-                  </a:lnTo>
-                  <a:lnTo>
-                    <a:pt x="6982802" y="2164525"/>
-                  </a:lnTo>
-                  <a:lnTo>
-                    <a:pt x="7060436" y="2147171"/>
-                  </a:lnTo>
-                  <a:lnTo>
-                    <a:pt x="7138070" y="2129615"/>
-                  </a:lnTo>
-                  <a:lnTo>
-                    <a:pt x="7215704" y="2111853"/>
-                  </a:lnTo>
-                  <a:lnTo>
-                    <a:pt x="7293338" y="2093885"/>
-                  </a:lnTo>
-                  <a:lnTo>
-                    <a:pt x="7370972" y="2075707"/>
-                  </a:lnTo>
-                  <a:lnTo>
-                    <a:pt x="7370972" y="3616459"/>
-                  </a:lnTo>
-                  <a:lnTo>
-                    <a:pt x="7293338" y="3614146"/>
-                  </a:lnTo>
-                  <a:lnTo>
-                    <a:pt x="7215704" y="3611686"/>
-                  </a:lnTo>
-                  <a:lnTo>
-                    <a:pt x="7138070" y="3609069"/>
-                  </a:lnTo>
-                  <a:lnTo>
-                    <a:pt x="7060436" y="3606285"/>
-                  </a:lnTo>
-                  <a:lnTo>
-                    <a:pt x="6982802" y="3603322"/>
-                  </a:lnTo>
-                  <a:lnTo>
-                    <a:pt x="6905168" y="3600170"/>
-                  </a:lnTo>
-                  <a:lnTo>
-                    <a:pt x="6827534" y="3596817"/>
-                  </a:lnTo>
-                  <a:lnTo>
-                    <a:pt x="6749900" y="3593250"/>
-                  </a:lnTo>
-                  <a:lnTo>
-                    <a:pt x="6672266" y="3589454"/>
-                  </a:lnTo>
-                  <a:lnTo>
-                    <a:pt x="6594632" y="3585416"/>
-                  </a:lnTo>
-                  <a:lnTo>
-                    <a:pt x="6516998" y="3581120"/>
-                  </a:lnTo>
-                  <a:lnTo>
-                    <a:pt x="6439364" y="3576550"/>
-                  </a:lnTo>
-                  <a:lnTo>
-                    <a:pt x="6361730" y="3571687"/>
-                  </a:lnTo>
-                  <a:lnTo>
-                    <a:pt x="6284096" y="3566514"/>
-                  </a:lnTo>
-                  <a:lnTo>
-                    <a:pt x="6206462" y="3561010"/>
-                  </a:lnTo>
-                  <a:lnTo>
-                    <a:pt x="6128827" y="3555154"/>
-                  </a:lnTo>
-                  <a:lnTo>
-                    <a:pt x="6051193" y="3548924"/>
-                  </a:lnTo>
-                  <a:lnTo>
-                    <a:pt x="5973559" y="3542296"/>
-                  </a:lnTo>
-                  <a:lnTo>
-                    <a:pt x="5895925" y="3535245"/>
-                  </a:lnTo>
-                  <a:lnTo>
-                    <a:pt x="5818291" y="3527743"/>
-                  </a:lnTo>
-                  <a:lnTo>
-                    <a:pt x="5740657" y="3519761"/>
-                  </a:lnTo>
-                  <a:lnTo>
-                    <a:pt x="5663023" y="3511270"/>
-                  </a:lnTo>
-                  <a:lnTo>
-                    <a:pt x="5585389" y="3502235"/>
-                  </a:lnTo>
-                  <a:lnTo>
-                    <a:pt x="5507755" y="3492624"/>
-                  </a:lnTo>
-                  <a:lnTo>
-                    <a:pt x="5430121" y="3482398"/>
-                  </a:lnTo>
-                  <a:lnTo>
-                    <a:pt x="5352487" y="3471519"/>
-                  </a:lnTo>
-                  <a:lnTo>
-                    <a:pt x="5274853" y="3459945"/>
-                  </a:lnTo>
-                  <a:lnTo>
-                    <a:pt x="5197219" y="3447631"/>
-                  </a:lnTo>
-                  <a:lnTo>
-                    <a:pt x="5119585" y="3434530"/>
-                  </a:lnTo>
-                  <a:lnTo>
-                    <a:pt x="5041951" y="3420592"/>
-                  </a:lnTo>
-                  <a:lnTo>
-                    <a:pt x="4964317" y="3405763"/>
-                  </a:lnTo>
-                  <a:lnTo>
-                    <a:pt x="4886683" y="3389986"/>
-                  </a:lnTo>
-                  <a:lnTo>
-                    <a:pt x="4809049" y="3373202"/>
-                  </a:lnTo>
-                  <a:lnTo>
-                    <a:pt x="4731415" y="3355344"/>
-                  </a:lnTo>
-                  <a:lnTo>
-                    <a:pt x="4653781" y="3336346"/>
-                  </a:lnTo>
-                  <a:lnTo>
-                    <a:pt x="4576147" y="3316134"/>
-                  </a:lnTo>
-                  <a:lnTo>
-                    <a:pt x="4498513" y="3294630"/>
-                  </a:lnTo>
-                  <a:lnTo>
-                    <a:pt x="4420879" y="3271752"/>
-                  </a:lnTo>
-                  <a:lnTo>
-                    <a:pt x="4343244" y="3247412"/>
-                  </a:lnTo>
-                  <a:lnTo>
-                    <a:pt x="4265610" y="3221516"/>
-                  </a:lnTo>
-                  <a:lnTo>
-                    <a:pt x="4187976" y="3193966"/>
-                  </a:lnTo>
-                  <a:lnTo>
-                    <a:pt x="4110342" y="3164655"/>
-                  </a:lnTo>
-                  <a:lnTo>
-                    <a:pt x="4032708" y="3133471"/>
-                  </a:lnTo>
-                  <a:lnTo>
-                    <a:pt x="3955074" y="3100294"/>
-                  </a:lnTo>
-                  <a:lnTo>
-                    <a:pt x="3877440" y="3064997"/>
-                  </a:lnTo>
-                  <a:lnTo>
-                    <a:pt x="3799806" y="3027445"/>
-                  </a:lnTo>
-                  <a:lnTo>
-                    <a:pt x="3722172" y="2987493"/>
-                  </a:lnTo>
-                  <a:lnTo>
-                    <a:pt x="3644538" y="2944988"/>
-                  </a:lnTo>
-                  <a:lnTo>
-                    <a:pt x="3566904" y="2899766"/>
-                  </a:lnTo>
-                  <a:lnTo>
-                    <a:pt x="3489270" y="2851655"/>
-                  </a:lnTo>
-                  <a:lnTo>
-                    <a:pt x="3411636" y="2800469"/>
-                  </a:lnTo>
-                  <a:lnTo>
-                    <a:pt x="3334002" y="2789714"/>
-                  </a:lnTo>
-                  <a:lnTo>
-                    <a:pt x="3256368" y="2799661"/>
-                  </a:lnTo>
-                  <a:lnTo>
-                    <a:pt x="3178734" y="2809494"/>
-                  </a:lnTo>
-                  <a:lnTo>
-                    <a:pt x="3101100" y="2819213"/>
-                  </a:lnTo>
-                  <a:lnTo>
-                    <a:pt x="3023466" y="2828820"/>
-                  </a:lnTo>
-                  <a:lnTo>
-                    <a:pt x="2945832" y="2838317"/>
-                  </a:lnTo>
-                  <a:lnTo>
-                    <a:pt x="2868198" y="2847704"/>
-                  </a:lnTo>
-                  <a:lnTo>
-                    <a:pt x="2790564" y="2856983"/>
-                  </a:lnTo>
-                  <a:lnTo>
-                    <a:pt x="2712930" y="2866155"/>
-                  </a:lnTo>
-                  <a:lnTo>
-                    <a:pt x="2635295" y="2875221"/>
-                  </a:lnTo>
-                  <a:lnTo>
-                    <a:pt x="2557661" y="2884182"/>
-                  </a:lnTo>
-                  <a:lnTo>
-                    <a:pt x="2480027" y="2893041"/>
-                  </a:lnTo>
-                  <a:lnTo>
-                    <a:pt x="2402393" y="2901797"/>
-                  </a:lnTo>
-                  <a:lnTo>
-                    <a:pt x="2324759" y="2910452"/>
-                  </a:lnTo>
-                  <a:lnTo>
-                    <a:pt x="2247125" y="2919008"/>
-                  </a:lnTo>
-                  <a:lnTo>
-                    <a:pt x="2169491" y="2927465"/>
-                  </a:lnTo>
-                  <a:lnTo>
-                    <a:pt x="2091857" y="2935824"/>
-                  </a:lnTo>
-                  <a:lnTo>
-                    <a:pt x="2014223" y="2944087"/>
-                  </a:lnTo>
-                  <a:lnTo>
-                    <a:pt x="1936589" y="2952255"/>
-                  </a:lnTo>
-                  <a:lnTo>
-                    <a:pt x="1858955" y="2960329"/>
-                  </a:lnTo>
-                  <a:lnTo>
-                    <a:pt x="1781321" y="2968309"/>
-                  </a:lnTo>
-                  <a:lnTo>
-                    <a:pt x="1703687" y="2976198"/>
-                  </a:lnTo>
-                  <a:lnTo>
-                    <a:pt x="1626053" y="2983995"/>
-                  </a:lnTo>
-                  <a:lnTo>
-                    <a:pt x="1548419" y="2991703"/>
-                  </a:lnTo>
-                  <a:lnTo>
-                    <a:pt x="1470785" y="2999322"/>
-                  </a:lnTo>
-                  <a:lnTo>
-                    <a:pt x="1393151" y="3006853"/>
-                  </a:lnTo>
-                  <a:lnTo>
-                    <a:pt x="1315517" y="3014298"/>
-                  </a:lnTo>
-                  <a:lnTo>
-                    <a:pt x="1237883" y="3021656"/>
-                  </a:lnTo>
-                  <a:lnTo>
-                    <a:pt x="1160249" y="3028930"/>
-                  </a:lnTo>
-                  <a:lnTo>
-                    <a:pt x="1082615" y="3036119"/>
-                  </a:lnTo>
-                  <a:lnTo>
-                    <a:pt x="1004981" y="3043226"/>
-                  </a:lnTo>
-                  <a:lnTo>
-                    <a:pt x="927346" y="3050251"/>
-                  </a:lnTo>
-                  <a:lnTo>
-                    <a:pt x="849712" y="3057195"/>
-                  </a:lnTo>
-                  <a:lnTo>
-                    <a:pt x="772078" y="3064059"/>
-                  </a:lnTo>
-                  <a:lnTo>
-                    <a:pt x="694444" y="3070844"/>
-                  </a:lnTo>
-                  <a:lnTo>
-                    <a:pt x="616810" y="3077551"/>
-                  </a:lnTo>
-                  <a:lnTo>
-                    <a:pt x="539176" y="3084180"/>
-                  </a:lnTo>
-                  <a:lnTo>
-                    <a:pt x="461542" y="3090733"/>
-                  </a:lnTo>
-                  <a:lnTo>
-                    <a:pt x="383908" y="3097210"/>
-                  </a:lnTo>
-                  <a:lnTo>
-                    <a:pt x="306274" y="3103613"/>
-                  </a:lnTo>
-                  <a:lnTo>
-                    <a:pt x="228640" y="3109942"/>
-                  </a:lnTo>
-                  <a:lnTo>
-                    <a:pt x="151006" y="3116198"/>
-                  </a:lnTo>
-                  <a:lnTo>
-                    <a:pt x="73372" y="3122382"/>
-                  </a:lnTo>
-                  <a:lnTo>
-                    <a:pt x="0" y="3128159"/>
+                    <a:pt x="1626053" y="105317"/>
+                  </a:lnTo>
+                  <a:lnTo>
+                    <a:pt x="1703687" y="308241"/>
+                  </a:lnTo>
+                  <a:lnTo>
+                    <a:pt x="1781321" y="498977"/>
+                  </a:lnTo>
+                  <a:lnTo>
+                    <a:pt x="1858955" y="678257"/>
+                  </a:lnTo>
+                  <a:lnTo>
+                    <a:pt x="1936589" y="846768"/>
+                  </a:lnTo>
+                  <a:lnTo>
+                    <a:pt x="2014223" y="1005157"/>
+                  </a:lnTo>
+                  <a:lnTo>
+                    <a:pt x="2091857" y="1154033"/>
+                  </a:lnTo>
+                  <a:lnTo>
+                    <a:pt x="2169491" y="1293967"/>
+                  </a:lnTo>
+                  <a:lnTo>
+                    <a:pt x="2247125" y="1425495"/>
+                  </a:lnTo>
+                  <a:lnTo>
+                    <a:pt x="2324759" y="1549123"/>
+                  </a:lnTo>
+                  <a:lnTo>
+                    <a:pt x="2402393" y="1665326"/>
+                  </a:lnTo>
+                  <a:lnTo>
+                    <a:pt x="2480027" y="1774549"/>
+                  </a:lnTo>
+                  <a:lnTo>
+                    <a:pt x="2557661" y="1877212"/>
+                  </a:lnTo>
+                  <a:lnTo>
+                    <a:pt x="2635295" y="1973708"/>
+                  </a:lnTo>
+                  <a:lnTo>
+                    <a:pt x="2712930" y="2064408"/>
+                  </a:lnTo>
+                  <a:lnTo>
+                    <a:pt x="2790564" y="2149660"/>
+                  </a:lnTo>
+                  <a:lnTo>
+                    <a:pt x="2868198" y="2229792"/>
+                  </a:lnTo>
+                  <a:lnTo>
+                    <a:pt x="2945832" y="2305110"/>
+                  </a:lnTo>
+                  <a:lnTo>
+                    <a:pt x="3023466" y="2375904"/>
+                  </a:lnTo>
+                  <a:lnTo>
+                    <a:pt x="3101100" y="2442447"/>
+                  </a:lnTo>
+                  <a:lnTo>
+                    <a:pt x="3178734" y="2504992"/>
+                  </a:lnTo>
+                  <a:lnTo>
+                    <a:pt x="3256368" y="2563781"/>
+                  </a:lnTo>
+                  <a:lnTo>
+                    <a:pt x="3334002" y="2619038"/>
+                  </a:lnTo>
+                  <a:lnTo>
+                    <a:pt x="3411636" y="2651120"/>
+                  </a:lnTo>
+                  <a:lnTo>
+                    <a:pt x="3489270" y="2641410"/>
+                  </a:lnTo>
+                  <a:lnTo>
+                    <a:pt x="3566904" y="2631587"/>
+                  </a:lnTo>
+                  <a:lnTo>
+                    <a:pt x="3644538" y="2621649"/>
+                  </a:lnTo>
+                  <a:lnTo>
+                    <a:pt x="3722172" y="2611596"/>
+                  </a:lnTo>
+                  <a:lnTo>
+                    <a:pt x="3799806" y="2601425"/>
+                  </a:lnTo>
+                  <a:lnTo>
+                    <a:pt x="3877440" y="2591136"/>
+                  </a:lnTo>
+                  <a:lnTo>
+                    <a:pt x="3955074" y="2580726"/>
+                  </a:lnTo>
+                  <a:lnTo>
+                    <a:pt x="4032708" y="2570195"/>
+                  </a:lnTo>
+                  <a:lnTo>
+                    <a:pt x="4110342" y="2559542"/>
+                  </a:lnTo>
+                  <a:lnTo>
+                    <a:pt x="4187976" y="2548764"/>
+                  </a:lnTo>
+                  <a:lnTo>
+                    <a:pt x="4265610" y="2537860"/>
+                  </a:lnTo>
+                  <a:lnTo>
+                    <a:pt x="4343244" y="2526829"/>
+                  </a:lnTo>
+                  <a:lnTo>
+                    <a:pt x="4420879" y="2515670"/>
+                  </a:lnTo>
+                  <a:lnTo>
+                    <a:pt x="4498513" y="2504380"/>
+                  </a:lnTo>
+                  <a:lnTo>
+                    <a:pt x="4576147" y="2492959"/>
+                  </a:lnTo>
+                  <a:lnTo>
+                    <a:pt x="4653781" y="2481405"/>
+                  </a:lnTo>
+                  <a:lnTo>
+                    <a:pt x="4731415" y="2469716"/>
+                  </a:lnTo>
+                  <a:lnTo>
+                    <a:pt x="4809049" y="2457890"/>
+                  </a:lnTo>
+                  <a:lnTo>
+                    <a:pt x="4886683" y="2445927"/>
+                  </a:lnTo>
+                  <a:lnTo>
+                    <a:pt x="4964317" y="2433824"/>
+                  </a:lnTo>
+                  <a:lnTo>
+                    <a:pt x="5041951" y="2421580"/>
+                  </a:lnTo>
+                  <a:lnTo>
+                    <a:pt x="5119585" y="2409193"/>
+                  </a:lnTo>
+                  <a:lnTo>
+                    <a:pt x="5197219" y="2396662"/>
+                  </a:lnTo>
+                  <a:lnTo>
+                    <a:pt x="5274853" y="2383984"/>
+                  </a:lnTo>
+                  <a:lnTo>
+                    <a:pt x="5352487" y="2371159"/>
+                  </a:lnTo>
+                  <a:lnTo>
+                    <a:pt x="5430121" y="2358184"/>
+                  </a:lnTo>
+                  <a:lnTo>
+                    <a:pt x="5507755" y="2345058"/>
+                  </a:lnTo>
+                  <a:lnTo>
+                    <a:pt x="5585389" y="2331779"/>
+                  </a:lnTo>
+                  <a:lnTo>
+                    <a:pt x="5663023" y="2318345"/>
+                  </a:lnTo>
+                  <a:lnTo>
+                    <a:pt x="5740657" y="2304754"/>
+                  </a:lnTo>
+                  <a:lnTo>
+                    <a:pt x="5818291" y="2291005"/>
+                  </a:lnTo>
+                  <a:lnTo>
+                    <a:pt x="5895925" y="2277096"/>
+                  </a:lnTo>
+                  <a:lnTo>
+                    <a:pt x="5973559" y="2263024"/>
+                  </a:lnTo>
+                  <a:lnTo>
+                    <a:pt x="6051193" y="2248788"/>
+                  </a:lnTo>
+                  <a:lnTo>
+                    <a:pt x="6128827" y="2234386"/>
+                  </a:lnTo>
+                  <a:lnTo>
+                    <a:pt x="6206462" y="2219816"/>
+                  </a:lnTo>
+                  <a:lnTo>
+                    <a:pt x="6284096" y="2205077"/>
+                  </a:lnTo>
+                  <a:lnTo>
+                    <a:pt x="6361730" y="2190165"/>
+                  </a:lnTo>
+                  <a:lnTo>
+                    <a:pt x="6439364" y="2175080"/>
+                  </a:lnTo>
+                  <a:lnTo>
+                    <a:pt x="6516998" y="2159818"/>
+                  </a:lnTo>
+                  <a:lnTo>
+                    <a:pt x="6594632" y="2144379"/>
+                  </a:lnTo>
+                  <a:lnTo>
+                    <a:pt x="6672266" y="2128759"/>
+                  </a:lnTo>
+                  <a:lnTo>
+                    <a:pt x="6749900" y="2112958"/>
+                  </a:lnTo>
+                  <a:lnTo>
+                    <a:pt x="6827534" y="2096972"/>
+                  </a:lnTo>
+                  <a:lnTo>
+                    <a:pt x="6905168" y="2080799"/>
+                  </a:lnTo>
+                  <a:lnTo>
+                    <a:pt x="6982802" y="2064439"/>
+                  </a:lnTo>
+                  <a:lnTo>
+                    <a:pt x="7060436" y="2047887"/>
+                  </a:lnTo>
+                  <a:lnTo>
+                    <a:pt x="7138070" y="2031142"/>
+                  </a:lnTo>
+                  <a:lnTo>
+                    <a:pt x="7215704" y="2014202"/>
+                  </a:lnTo>
+                  <a:lnTo>
+                    <a:pt x="7293338" y="1997064"/>
+                  </a:lnTo>
+                  <a:lnTo>
+                    <a:pt x="7370972" y="1979727"/>
+                  </a:lnTo>
+                  <a:lnTo>
+                    <a:pt x="7370972" y="3449235"/>
+                  </a:lnTo>
+                  <a:lnTo>
+                    <a:pt x="7293338" y="3447030"/>
+                  </a:lnTo>
+                  <a:lnTo>
+                    <a:pt x="7215704" y="3444683"/>
+                  </a:lnTo>
+                  <a:lnTo>
+                    <a:pt x="7138070" y="3442187"/>
+                  </a:lnTo>
+                  <a:lnTo>
+                    <a:pt x="7060436" y="3439531"/>
+                  </a:lnTo>
+                  <a:lnTo>
+                    <a:pt x="6982802" y="3436706"/>
+                  </a:lnTo>
+                  <a:lnTo>
+                    <a:pt x="6905168" y="3433700"/>
+                  </a:lnTo>
+                  <a:lnTo>
+                    <a:pt x="6827534" y="3430502"/>
+                  </a:lnTo>
+                  <a:lnTo>
+                    <a:pt x="6749900" y="3427099"/>
+                  </a:lnTo>
+                  <a:lnTo>
+                    <a:pt x="6672266" y="3423479"/>
+                  </a:lnTo>
+                  <a:lnTo>
+                    <a:pt x="6594632" y="3419628"/>
+                  </a:lnTo>
+                  <a:lnTo>
+                    <a:pt x="6516998" y="3415531"/>
+                  </a:lnTo>
+                  <a:lnTo>
+                    <a:pt x="6439364" y="3411171"/>
+                  </a:lnTo>
+                  <a:lnTo>
+                    <a:pt x="6361730" y="3406534"/>
+                  </a:lnTo>
+                  <a:lnTo>
+                    <a:pt x="6284096" y="3401599"/>
+                  </a:lnTo>
+                  <a:lnTo>
+                    <a:pt x="6206462" y="3396350"/>
+                  </a:lnTo>
+                  <a:lnTo>
+                    <a:pt x="6128827" y="3390765"/>
+                  </a:lnTo>
+                  <a:lnTo>
+                    <a:pt x="6051193" y="3384823"/>
+                  </a:lnTo>
+                  <a:lnTo>
+                    <a:pt x="5973559" y="3378502"/>
+                  </a:lnTo>
+                  <a:lnTo>
+                    <a:pt x="5895925" y="3371776"/>
+                  </a:lnTo>
+                  <a:lnTo>
+                    <a:pt x="5818291" y="3364621"/>
+                  </a:lnTo>
+                  <a:lnTo>
+                    <a:pt x="5740657" y="3357009"/>
+                  </a:lnTo>
+                  <a:lnTo>
+                    <a:pt x="5663023" y="3348910"/>
+                  </a:lnTo>
+                  <a:lnTo>
+                    <a:pt x="5585389" y="3340293"/>
+                  </a:lnTo>
+                  <a:lnTo>
+                    <a:pt x="5507755" y="3331126"/>
+                  </a:lnTo>
+                  <a:lnTo>
+                    <a:pt x="5430121" y="3321373"/>
+                  </a:lnTo>
+                  <a:lnTo>
+                    <a:pt x="5352487" y="3310997"/>
+                  </a:lnTo>
+                  <a:lnTo>
+                    <a:pt x="5274853" y="3299958"/>
+                  </a:lnTo>
+                  <a:lnTo>
+                    <a:pt x="5197219" y="3288213"/>
+                  </a:lnTo>
+                  <a:lnTo>
+                    <a:pt x="5119585" y="3275718"/>
+                  </a:lnTo>
+                  <a:lnTo>
+                    <a:pt x="5041951" y="3262425"/>
+                  </a:lnTo>
+                  <a:lnTo>
+                    <a:pt x="4964317" y="3248281"/>
+                  </a:lnTo>
+                  <a:lnTo>
+                    <a:pt x="4886683" y="3233235"/>
+                  </a:lnTo>
+                  <a:lnTo>
+                    <a:pt x="4809049" y="3217226"/>
+                  </a:lnTo>
+                  <a:lnTo>
+                    <a:pt x="4731415" y="3200195"/>
+                  </a:lnTo>
+                  <a:lnTo>
+                    <a:pt x="4653781" y="3182075"/>
+                  </a:lnTo>
+                  <a:lnTo>
+                    <a:pt x="4576147" y="3162797"/>
+                  </a:lnTo>
+                  <a:lnTo>
+                    <a:pt x="4498513" y="3142287"/>
+                  </a:lnTo>
+                  <a:lnTo>
+                    <a:pt x="4420879" y="3120467"/>
+                  </a:lnTo>
+                  <a:lnTo>
+                    <a:pt x="4343244" y="3097252"/>
+                  </a:lnTo>
+                  <a:lnTo>
+                    <a:pt x="4265610" y="3072554"/>
+                  </a:lnTo>
+                  <a:lnTo>
+                    <a:pt x="4187976" y="3046278"/>
+                  </a:lnTo>
+                  <a:lnTo>
+                    <a:pt x="4110342" y="3018322"/>
+                  </a:lnTo>
+                  <a:lnTo>
+                    <a:pt x="4032708" y="2988580"/>
+                  </a:lnTo>
+                  <a:lnTo>
+                    <a:pt x="3955074" y="2956938"/>
+                  </a:lnTo>
+                  <a:lnTo>
+                    <a:pt x="3877440" y="2923273"/>
+                  </a:lnTo>
+                  <a:lnTo>
+                    <a:pt x="3799806" y="2887457"/>
+                  </a:lnTo>
+                  <a:lnTo>
+                    <a:pt x="3722172" y="2849352"/>
+                  </a:lnTo>
+                  <a:lnTo>
+                    <a:pt x="3644538" y="2808812"/>
+                  </a:lnTo>
+                  <a:lnTo>
+                    <a:pt x="3566904" y="2765682"/>
+                  </a:lnTo>
+                  <a:lnTo>
+                    <a:pt x="3489270" y="2719796"/>
+                  </a:lnTo>
+                  <a:lnTo>
+                    <a:pt x="3411636" y="2670977"/>
+                  </a:lnTo>
+                  <a:lnTo>
+                    <a:pt x="3334002" y="2660718"/>
+                  </a:lnTo>
+                  <a:lnTo>
+                    <a:pt x="3256368" y="2670206"/>
+                  </a:lnTo>
+                  <a:lnTo>
+                    <a:pt x="3178734" y="2679584"/>
+                  </a:lnTo>
+                  <a:lnTo>
+                    <a:pt x="3101100" y="2688854"/>
+                  </a:lnTo>
+                  <a:lnTo>
+                    <a:pt x="3023466" y="2698017"/>
+                  </a:lnTo>
+                  <a:lnTo>
+                    <a:pt x="2945832" y="2707074"/>
+                  </a:lnTo>
+                  <a:lnTo>
+                    <a:pt x="2868198" y="2716027"/>
+                  </a:lnTo>
+                  <a:lnTo>
+                    <a:pt x="2790564" y="2724877"/>
+                  </a:lnTo>
+                  <a:lnTo>
+                    <a:pt x="2712930" y="2733625"/>
+                  </a:lnTo>
+                  <a:lnTo>
+                    <a:pt x="2635295" y="2742272"/>
+                  </a:lnTo>
+                  <a:lnTo>
+                    <a:pt x="2557661" y="2750819"/>
+                  </a:lnTo>
+                  <a:lnTo>
+                    <a:pt x="2480027" y="2759268"/>
+                  </a:lnTo>
+                  <a:lnTo>
+                    <a:pt x="2402393" y="2767619"/>
+                  </a:lnTo>
+                  <a:lnTo>
+                    <a:pt x="2324759" y="2775874"/>
+                  </a:lnTo>
+                  <a:lnTo>
+                    <a:pt x="2247125" y="2784034"/>
+                  </a:lnTo>
+                  <a:lnTo>
+                    <a:pt x="2169491" y="2792100"/>
+                  </a:lnTo>
+                  <a:lnTo>
+                    <a:pt x="2091857" y="2800073"/>
+                  </a:lnTo>
+                  <a:lnTo>
+                    <a:pt x="2014223" y="2807954"/>
+                  </a:lnTo>
+                  <a:lnTo>
+                    <a:pt x="1936589" y="2815744"/>
+                  </a:lnTo>
+                  <a:lnTo>
+                    <a:pt x="1858955" y="2823444"/>
+                  </a:lnTo>
+                  <a:lnTo>
+                    <a:pt x="1781321" y="2831056"/>
+                  </a:lnTo>
+                  <a:lnTo>
+                    <a:pt x="1703687" y="2838580"/>
+                  </a:lnTo>
+                  <a:lnTo>
+                    <a:pt x="1626053" y="2846017"/>
+                  </a:lnTo>
+                  <a:lnTo>
+                    <a:pt x="1548419" y="2853368"/>
+                  </a:lnTo>
+                  <a:lnTo>
+                    <a:pt x="1470785" y="2860635"/>
+                  </a:lnTo>
+                  <a:lnTo>
+                    <a:pt x="1393151" y="2867817"/>
+                  </a:lnTo>
+                  <a:lnTo>
+                    <a:pt x="1315517" y="2874917"/>
+                  </a:lnTo>
+                  <a:lnTo>
+                    <a:pt x="1237883" y="2881936"/>
+                  </a:lnTo>
+                  <a:lnTo>
+                    <a:pt x="1160249" y="2888873"/>
+                  </a:lnTo>
+                  <a:lnTo>
+                    <a:pt x="1082615" y="2895730"/>
+                  </a:lnTo>
+                  <a:lnTo>
+                    <a:pt x="1004981" y="2902509"/>
+                  </a:lnTo>
+                  <a:lnTo>
+                    <a:pt x="927346" y="2909209"/>
+                  </a:lnTo>
+                  <a:lnTo>
+                    <a:pt x="849712" y="2915832"/>
+                  </a:lnTo>
+                  <a:lnTo>
+                    <a:pt x="772078" y="2922378"/>
+                  </a:lnTo>
+                  <a:lnTo>
+                    <a:pt x="694444" y="2928849"/>
+                  </a:lnTo>
+                  <a:lnTo>
+                    <a:pt x="616810" y="2935246"/>
+                  </a:lnTo>
+                  <a:lnTo>
+                    <a:pt x="539176" y="2941569"/>
+                  </a:lnTo>
+                  <a:lnTo>
+                    <a:pt x="461542" y="2947819"/>
+                  </a:lnTo>
+                  <a:lnTo>
+                    <a:pt x="383908" y="2953996"/>
+                  </a:lnTo>
+                  <a:lnTo>
+                    <a:pt x="306274" y="2960103"/>
+                  </a:lnTo>
+                  <a:lnTo>
+                    <a:pt x="228640" y="2966139"/>
+                  </a:lnTo>
+                  <a:lnTo>
+                    <a:pt x="151006" y="2972106"/>
+                  </a:lnTo>
+                  <a:lnTo>
+                    <a:pt x="73372" y="2978004"/>
+                  </a:lnTo>
+                  <a:lnTo>
+                    <a:pt x="0" y="2983514"/>
                   </a:lnTo>
                   <a:close/>
                 </a:path>
@@ -3549,240 +3549,240 @@
           </p:nvSpPr>
           <p:spPr>
             <a:xfrm>
-              <a:off x="2405699" y="1896563"/>
-              <a:ext cx="5782791" cy="2779650"/>
+              <a:off x="2405699" y="2073503"/>
+              <a:ext cx="5782791" cy="2651120"/>
             </a:xfrm>
             <a:custGeom>
               <a:avLst/>
               <a:pathLst>
-                <a:path w="5782791" h="2779650">
+                <a:path w="5782791" h="2651120">
                   <a:moveTo>
                     <a:pt x="0" y="0"/>
                   </a:moveTo>
                   <a:lnTo>
-                    <a:pt x="37871" y="110423"/>
-                  </a:lnTo>
-                  <a:lnTo>
-                    <a:pt x="115505" y="323185"/>
-                  </a:lnTo>
-                  <a:lnTo>
-                    <a:pt x="193139" y="523168"/>
-                  </a:lnTo>
-                  <a:lnTo>
-                    <a:pt x="270773" y="711139"/>
-                  </a:lnTo>
-                  <a:lnTo>
-                    <a:pt x="348407" y="887820"/>
-                  </a:lnTo>
-                  <a:lnTo>
-                    <a:pt x="426041" y="1053888"/>
-                  </a:lnTo>
-                  <a:lnTo>
-                    <a:pt x="503675" y="1209982"/>
-                  </a:lnTo>
-                  <a:lnTo>
-                    <a:pt x="581310" y="1356700"/>
-                  </a:lnTo>
-                  <a:lnTo>
-                    <a:pt x="658944" y="1494605"/>
-                  </a:lnTo>
-                  <a:lnTo>
-                    <a:pt x="736578" y="1624227"/>
-                  </a:lnTo>
-                  <a:lnTo>
-                    <a:pt x="814212" y="1746063"/>
-                  </a:lnTo>
-                  <a:lnTo>
-                    <a:pt x="891846" y="1860582"/>
-                  </a:lnTo>
-                  <a:lnTo>
-                    <a:pt x="969480" y="1968221"/>
-                  </a:lnTo>
-                  <a:lnTo>
-                    <a:pt x="1047114" y="2069396"/>
-                  </a:lnTo>
-                  <a:lnTo>
-                    <a:pt x="1124748" y="2164493"/>
-                  </a:lnTo>
-                  <a:lnTo>
-                    <a:pt x="1202382" y="2253878"/>
-                  </a:lnTo>
-                  <a:lnTo>
-                    <a:pt x="1280016" y="2337895"/>
-                  </a:lnTo>
-                  <a:lnTo>
-                    <a:pt x="1357650" y="2416865"/>
-                  </a:lnTo>
-                  <a:lnTo>
-                    <a:pt x="1435284" y="2491092"/>
-                  </a:lnTo>
-                  <a:lnTo>
-                    <a:pt x="1512918" y="2560860"/>
-                  </a:lnTo>
-                  <a:lnTo>
-                    <a:pt x="1590552" y="2626438"/>
-                  </a:lnTo>
-                  <a:lnTo>
-                    <a:pt x="1668186" y="2688076"/>
-                  </a:lnTo>
-                  <a:lnTo>
-                    <a:pt x="1745820" y="2746013"/>
-                  </a:lnTo>
-                  <a:lnTo>
-                    <a:pt x="1823454" y="2779650"/>
-                  </a:lnTo>
-                  <a:lnTo>
-                    <a:pt x="1901088" y="2769470"/>
-                  </a:lnTo>
-                  <a:lnTo>
-                    <a:pt x="1978722" y="2759170"/>
-                  </a:lnTo>
-                  <a:lnTo>
-                    <a:pt x="2056356" y="2748751"/>
-                  </a:lnTo>
-                  <a:lnTo>
-                    <a:pt x="2133990" y="2738210"/>
-                  </a:lnTo>
-                  <a:lnTo>
-                    <a:pt x="2211624" y="2727546"/>
-                  </a:lnTo>
-                  <a:lnTo>
-                    <a:pt x="2289259" y="2716757"/>
-                  </a:lnTo>
-                  <a:lnTo>
-                    <a:pt x="2366893" y="2705843"/>
-                  </a:lnTo>
-                  <a:lnTo>
-                    <a:pt x="2444527" y="2694802"/>
-                  </a:lnTo>
-                  <a:lnTo>
-                    <a:pt x="2522161" y="2683632"/>
-                  </a:lnTo>
-                  <a:lnTo>
-                    <a:pt x="2599795" y="2672331"/>
-                  </a:lnTo>
-                  <a:lnTo>
-                    <a:pt x="2677429" y="2660899"/>
-                  </a:lnTo>
-                  <a:lnTo>
-                    <a:pt x="2755063" y="2649333"/>
-                  </a:lnTo>
-                  <a:lnTo>
-                    <a:pt x="2832697" y="2637633"/>
-                  </a:lnTo>
-                  <a:lnTo>
-                    <a:pt x="2910331" y="2625796"/>
-                  </a:lnTo>
-                  <a:lnTo>
-                    <a:pt x="2987965" y="2613821"/>
-                  </a:lnTo>
-                  <a:lnTo>
-                    <a:pt x="3065599" y="2601707"/>
-                  </a:lnTo>
-                  <a:lnTo>
-                    <a:pt x="3143233" y="2589451"/>
-                  </a:lnTo>
-                  <a:lnTo>
-                    <a:pt x="3220867" y="2577052"/>
-                  </a:lnTo>
-                  <a:lnTo>
-                    <a:pt x="3298501" y="2564509"/>
-                  </a:lnTo>
-                  <a:lnTo>
-                    <a:pt x="3376135" y="2551819"/>
-                  </a:lnTo>
-                  <a:lnTo>
-                    <a:pt x="3453769" y="2538982"/>
-                  </a:lnTo>
-                  <a:lnTo>
-                    <a:pt x="3531403" y="2525994"/>
-                  </a:lnTo>
-                  <a:lnTo>
-                    <a:pt x="3609037" y="2512855"/>
-                  </a:lnTo>
-                  <a:lnTo>
-                    <a:pt x="3686671" y="2499563"/>
-                  </a:lnTo>
-                  <a:lnTo>
-                    <a:pt x="3764305" y="2486116"/>
-                  </a:lnTo>
-                  <a:lnTo>
-                    <a:pt x="3841939" y="2472513"/>
-                  </a:lnTo>
-                  <a:lnTo>
-                    <a:pt x="3919573" y="2458750"/>
-                  </a:lnTo>
-                  <a:lnTo>
-                    <a:pt x="3997207" y="2444827"/>
-                  </a:lnTo>
-                  <a:lnTo>
-                    <a:pt x="4074842" y="2430742"/>
-                  </a:lnTo>
-                  <a:lnTo>
-                    <a:pt x="4152476" y="2416492"/>
-                  </a:lnTo>
-                  <a:lnTo>
-                    <a:pt x="4230110" y="2402076"/>
-                  </a:lnTo>
-                  <a:lnTo>
-                    <a:pt x="4307744" y="2387493"/>
-                  </a:lnTo>
-                  <a:lnTo>
-                    <a:pt x="4385378" y="2372739"/>
-                  </a:lnTo>
-                  <a:lnTo>
-                    <a:pt x="4463012" y="2357813"/>
-                  </a:lnTo>
-                  <a:lnTo>
-                    <a:pt x="4540646" y="2342712"/>
-                  </a:lnTo>
-                  <a:lnTo>
-                    <a:pt x="4618280" y="2327436"/>
-                  </a:lnTo>
-                  <a:lnTo>
-                    <a:pt x="4695914" y="2311982"/>
-                  </a:lnTo>
-                  <a:lnTo>
-                    <a:pt x="4773548" y="2296347"/>
-                  </a:lnTo>
-                  <a:lnTo>
-                    <a:pt x="4851182" y="2280530"/>
-                  </a:lnTo>
-                  <a:lnTo>
-                    <a:pt x="4928816" y="2264529"/>
-                  </a:lnTo>
-                  <a:lnTo>
-                    <a:pt x="5006450" y="2248341"/>
-                  </a:lnTo>
-                  <a:lnTo>
-                    <a:pt x="5084084" y="2231965"/>
-                  </a:lnTo>
-                  <a:lnTo>
-                    <a:pt x="5161718" y="2215397"/>
-                  </a:lnTo>
-                  <a:lnTo>
-                    <a:pt x="5239352" y="2198636"/>
-                  </a:lnTo>
-                  <a:lnTo>
-                    <a:pt x="5316986" y="2181680"/>
-                  </a:lnTo>
-                  <a:lnTo>
-                    <a:pt x="5394620" y="2164525"/>
-                  </a:lnTo>
-                  <a:lnTo>
-                    <a:pt x="5472254" y="2147171"/>
-                  </a:lnTo>
-                  <a:lnTo>
-                    <a:pt x="5549888" y="2129615"/>
-                  </a:lnTo>
-                  <a:lnTo>
-                    <a:pt x="5627522" y="2111853"/>
-                  </a:lnTo>
-                  <a:lnTo>
-                    <a:pt x="5705156" y="2093885"/>
-                  </a:lnTo>
-                  <a:lnTo>
-                    <a:pt x="5782791" y="2075707"/>
+                    <a:pt x="37871" y="105317"/>
+                  </a:lnTo>
+                  <a:lnTo>
+                    <a:pt x="115505" y="308241"/>
+                  </a:lnTo>
+                  <a:lnTo>
+                    <a:pt x="193139" y="498977"/>
+                  </a:lnTo>
+                  <a:lnTo>
+                    <a:pt x="270773" y="678257"/>
+                  </a:lnTo>
+                  <a:lnTo>
+                    <a:pt x="348407" y="846768"/>
+                  </a:lnTo>
+                  <a:lnTo>
+                    <a:pt x="426041" y="1005157"/>
+                  </a:lnTo>
+                  <a:lnTo>
+                    <a:pt x="503675" y="1154033"/>
+                  </a:lnTo>
+                  <a:lnTo>
+                    <a:pt x="581310" y="1293967"/>
+                  </a:lnTo>
+                  <a:lnTo>
+                    <a:pt x="658944" y="1425495"/>
+                  </a:lnTo>
+                  <a:lnTo>
+                    <a:pt x="736578" y="1549123"/>
+                  </a:lnTo>
+                  <a:lnTo>
+                    <a:pt x="814212" y="1665326"/>
+                  </a:lnTo>
+                  <a:lnTo>
+                    <a:pt x="891846" y="1774549"/>
+                  </a:lnTo>
+                  <a:lnTo>
+                    <a:pt x="969480" y="1877212"/>
+                  </a:lnTo>
+                  <a:lnTo>
+                    <a:pt x="1047114" y="1973708"/>
+                  </a:lnTo>
+                  <a:lnTo>
+                    <a:pt x="1124748" y="2064408"/>
+                  </a:lnTo>
+                  <a:lnTo>
+                    <a:pt x="1202382" y="2149660"/>
+                  </a:lnTo>
+                  <a:lnTo>
+                    <a:pt x="1280016" y="2229792"/>
+                  </a:lnTo>
+                  <a:lnTo>
+                    <a:pt x="1357650" y="2305110"/>
+                  </a:lnTo>
+                  <a:lnTo>
+                    <a:pt x="1435284" y="2375904"/>
+                  </a:lnTo>
+                  <a:lnTo>
+                    <a:pt x="1512918" y="2442447"/>
+                  </a:lnTo>
+                  <a:lnTo>
+                    <a:pt x="1590552" y="2504992"/>
+                  </a:lnTo>
+                  <a:lnTo>
+                    <a:pt x="1668186" y="2563781"/>
+                  </a:lnTo>
+                  <a:lnTo>
+                    <a:pt x="1745820" y="2619038"/>
+                  </a:lnTo>
+                  <a:lnTo>
+                    <a:pt x="1823454" y="2651120"/>
+                  </a:lnTo>
+                  <a:lnTo>
+                    <a:pt x="1901088" y="2641410"/>
+                  </a:lnTo>
+                  <a:lnTo>
+                    <a:pt x="1978722" y="2631587"/>
+                  </a:lnTo>
+                  <a:lnTo>
+                    <a:pt x="2056356" y="2621649"/>
+                  </a:lnTo>
+                  <a:lnTo>
+                    <a:pt x="2133990" y="2611596"/>
+                  </a:lnTo>
+                  <a:lnTo>
+                    <a:pt x="2211624" y="2601425"/>
+                  </a:lnTo>
+                  <a:lnTo>
+                    <a:pt x="2289259" y="2591136"/>
+                  </a:lnTo>
+                  <a:lnTo>
+                    <a:pt x="2366893" y="2580726"/>
+                  </a:lnTo>
+                  <a:lnTo>
+                    <a:pt x="2444527" y="2570195"/>
+                  </a:lnTo>
+                  <a:lnTo>
+                    <a:pt x="2522161" y="2559542"/>
+                  </a:lnTo>
+                  <a:lnTo>
+                    <a:pt x="2599795" y="2548764"/>
+                  </a:lnTo>
+                  <a:lnTo>
+                    <a:pt x="2677429" y="2537860"/>
+                  </a:lnTo>
+                  <a:lnTo>
+                    <a:pt x="2755063" y="2526829"/>
+                  </a:lnTo>
+                  <a:lnTo>
+                    <a:pt x="2832697" y="2515670"/>
+                  </a:lnTo>
+                  <a:lnTo>
+                    <a:pt x="2910331" y="2504380"/>
+                  </a:lnTo>
+                  <a:lnTo>
+                    <a:pt x="2987965" y="2492959"/>
+                  </a:lnTo>
+                  <a:lnTo>
+                    <a:pt x="3065599" y="2481405"/>
+                  </a:lnTo>
+                  <a:lnTo>
+                    <a:pt x="3143233" y="2469716"/>
+                  </a:lnTo>
+                  <a:lnTo>
+                    <a:pt x="3220867" y="2457890"/>
+                  </a:lnTo>
+                  <a:lnTo>
+                    <a:pt x="3298501" y="2445927"/>
+                  </a:lnTo>
+                  <a:lnTo>
+                    <a:pt x="3376135" y="2433824"/>
+                  </a:lnTo>
+                  <a:lnTo>
+                    <a:pt x="3453769" y="2421580"/>
+                  </a:lnTo>
+                  <a:lnTo>
+                    <a:pt x="3531403" y="2409193"/>
+                  </a:lnTo>
+                  <a:lnTo>
+                    <a:pt x="3609037" y="2396662"/>
+                  </a:lnTo>
+                  <a:lnTo>
+                    <a:pt x="3686671" y="2383984"/>
+                  </a:lnTo>
+                  <a:lnTo>
+                    <a:pt x="3764305" y="2371159"/>
+                  </a:lnTo>
+                  <a:lnTo>
+                    <a:pt x="3841939" y="2358184"/>
+                  </a:lnTo>
+                  <a:lnTo>
+                    <a:pt x="3919573" y="2345058"/>
+                  </a:lnTo>
+                  <a:lnTo>
+                    <a:pt x="3997207" y="2331779"/>
+                  </a:lnTo>
+                  <a:lnTo>
+                    <a:pt x="4074842" y="2318345"/>
+                  </a:lnTo>
+                  <a:lnTo>
+                    <a:pt x="4152476" y="2304754"/>
+                  </a:lnTo>
+                  <a:lnTo>
+                    <a:pt x="4230110" y="2291005"/>
+                  </a:lnTo>
+                  <a:lnTo>
+                    <a:pt x="4307744" y="2277096"/>
+                  </a:lnTo>
+                  <a:lnTo>
+                    <a:pt x="4385378" y="2263024"/>
+                  </a:lnTo>
+                  <a:lnTo>
+                    <a:pt x="4463012" y="2248788"/>
+                  </a:lnTo>
+                  <a:lnTo>
+                    <a:pt x="4540646" y="2234386"/>
+                  </a:lnTo>
+                  <a:lnTo>
+                    <a:pt x="4618280" y="2219816"/>
+                  </a:lnTo>
+                  <a:lnTo>
+                    <a:pt x="4695914" y="2205077"/>
+                  </a:lnTo>
+                  <a:lnTo>
+                    <a:pt x="4773548" y="2190165"/>
+                  </a:lnTo>
+                  <a:lnTo>
+                    <a:pt x="4851182" y="2175080"/>
+                  </a:lnTo>
+                  <a:lnTo>
+                    <a:pt x="4928816" y="2159818"/>
+                  </a:lnTo>
+                  <a:lnTo>
+                    <a:pt x="5006450" y="2144379"/>
+                  </a:lnTo>
+                  <a:lnTo>
+                    <a:pt x="5084084" y="2128759"/>
+                  </a:lnTo>
+                  <a:lnTo>
+                    <a:pt x="5161718" y="2112958"/>
+                  </a:lnTo>
+                  <a:lnTo>
+                    <a:pt x="5239352" y="2096972"/>
+                  </a:lnTo>
+                  <a:lnTo>
+                    <a:pt x="5316986" y="2080799"/>
+                  </a:lnTo>
+                  <a:lnTo>
+                    <a:pt x="5394620" y="2064439"/>
+                  </a:lnTo>
+                  <a:lnTo>
+                    <a:pt x="5472254" y="2047887"/>
+                  </a:lnTo>
+                  <a:lnTo>
+                    <a:pt x="5549888" y="2031142"/>
+                  </a:lnTo>
+                  <a:lnTo>
+                    <a:pt x="5627522" y="2014202"/>
+                  </a:lnTo>
+                  <a:lnTo>
+                    <a:pt x="5705156" y="1997064"/>
+                  </a:lnTo>
+                  <a:lnTo>
+                    <a:pt x="5782791" y="1979727"/>
                   </a:lnTo>
                 </a:path>
               </a:pathLst>
@@ -3802,300 +3802,300 @@
           </p:nvSpPr>
           <p:spPr>
             <a:xfrm>
-              <a:off x="817517" y="4686277"/>
-              <a:ext cx="7370972" cy="826745"/>
+              <a:off x="817517" y="4734221"/>
+              <a:ext cx="7370972" cy="788516"/>
             </a:xfrm>
             <a:custGeom>
               <a:avLst/>
               <a:pathLst>
-                <a:path w="7370972" h="826745">
+                <a:path w="7370972" h="788516">
                   <a:moveTo>
-                    <a:pt x="7370972" y="826745"/>
+                    <a:pt x="7370972" y="788516"/>
                   </a:moveTo>
                   <a:lnTo>
-                    <a:pt x="7293338" y="824432"/>
-                  </a:lnTo>
-                  <a:lnTo>
-                    <a:pt x="7215704" y="821972"/>
-                  </a:lnTo>
-                  <a:lnTo>
-                    <a:pt x="7138070" y="819355"/>
-                  </a:lnTo>
-                  <a:lnTo>
-                    <a:pt x="7060436" y="816570"/>
-                  </a:lnTo>
-                  <a:lnTo>
-                    <a:pt x="6982802" y="813608"/>
-                  </a:lnTo>
-                  <a:lnTo>
-                    <a:pt x="6905168" y="810456"/>
-                  </a:lnTo>
-                  <a:lnTo>
-                    <a:pt x="6827534" y="807103"/>
-                  </a:lnTo>
-                  <a:lnTo>
-                    <a:pt x="6749900" y="803536"/>
-                  </a:lnTo>
-                  <a:lnTo>
-                    <a:pt x="6672266" y="799740"/>
-                  </a:lnTo>
-                  <a:lnTo>
-                    <a:pt x="6594632" y="795702"/>
-                  </a:lnTo>
-                  <a:lnTo>
-                    <a:pt x="6516998" y="791406"/>
-                  </a:lnTo>
-                  <a:lnTo>
-                    <a:pt x="6439364" y="786836"/>
-                  </a:lnTo>
-                  <a:lnTo>
-                    <a:pt x="6361730" y="781973"/>
-                  </a:lnTo>
-                  <a:lnTo>
-                    <a:pt x="6284096" y="776800"/>
-                  </a:lnTo>
-                  <a:lnTo>
-                    <a:pt x="6206462" y="771296"/>
-                  </a:lnTo>
-                  <a:lnTo>
-                    <a:pt x="6128827" y="765440"/>
-                  </a:lnTo>
-                  <a:lnTo>
-                    <a:pt x="6051193" y="759210"/>
-                  </a:lnTo>
-                  <a:lnTo>
-                    <a:pt x="5973559" y="752582"/>
-                  </a:lnTo>
-                  <a:lnTo>
-                    <a:pt x="5895925" y="745531"/>
-                  </a:lnTo>
-                  <a:lnTo>
-                    <a:pt x="5818291" y="738029"/>
-                  </a:lnTo>
-                  <a:lnTo>
-                    <a:pt x="5740657" y="730047"/>
-                  </a:lnTo>
-                  <a:lnTo>
-                    <a:pt x="5663023" y="721555"/>
-                  </a:lnTo>
-                  <a:lnTo>
-                    <a:pt x="5585389" y="712521"/>
-                  </a:lnTo>
-                  <a:lnTo>
-                    <a:pt x="5507755" y="702910"/>
-                  </a:lnTo>
-                  <a:lnTo>
-                    <a:pt x="5430121" y="692684"/>
-                  </a:lnTo>
-                  <a:lnTo>
-                    <a:pt x="5352487" y="681805"/>
-                  </a:lnTo>
-                  <a:lnTo>
-                    <a:pt x="5274853" y="670230"/>
-                  </a:lnTo>
-                  <a:lnTo>
-                    <a:pt x="5197219" y="657916"/>
-                  </a:lnTo>
-                  <a:lnTo>
-                    <a:pt x="5119585" y="644815"/>
-                  </a:lnTo>
-                  <a:lnTo>
-                    <a:pt x="5041951" y="630877"/>
-                  </a:lnTo>
-                  <a:lnTo>
-                    <a:pt x="4964317" y="616049"/>
-                  </a:lnTo>
-                  <a:lnTo>
-                    <a:pt x="4886683" y="600272"/>
-                  </a:lnTo>
-                  <a:lnTo>
-                    <a:pt x="4809049" y="583487"/>
-                  </a:lnTo>
-                  <a:lnTo>
-                    <a:pt x="4731415" y="565630"/>
-                  </a:lnTo>
-                  <a:lnTo>
-                    <a:pt x="4653781" y="546632"/>
-                  </a:lnTo>
-                  <a:lnTo>
-                    <a:pt x="4576147" y="526420"/>
-                  </a:lnTo>
-                  <a:lnTo>
-                    <a:pt x="4498513" y="504916"/>
-                  </a:lnTo>
-                  <a:lnTo>
-                    <a:pt x="4420879" y="482038"/>
-                  </a:lnTo>
-                  <a:lnTo>
-                    <a:pt x="4343244" y="457697"/>
-                  </a:lnTo>
-                  <a:lnTo>
-                    <a:pt x="4265610" y="431802"/>
-                  </a:lnTo>
-                  <a:lnTo>
-                    <a:pt x="4187976" y="404251"/>
-                  </a:lnTo>
-                  <a:lnTo>
-                    <a:pt x="4110342" y="374941"/>
-                  </a:lnTo>
-                  <a:lnTo>
-                    <a:pt x="4032708" y="343757"/>
-                  </a:lnTo>
-                  <a:lnTo>
-                    <a:pt x="3955074" y="310580"/>
-                  </a:lnTo>
-                  <a:lnTo>
-                    <a:pt x="3877440" y="275283"/>
-                  </a:lnTo>
-                  <a:lnTo>
-                    <a:pt x="3799806" y="237731"/>
-                  </a:lnTo>
-                  <a:lnTo>
-                    <a:pt x="3722172" y="197779"/>
-                  </a:lnTo>
-                  <a:lnTo>
-                    <a:pt x="3644538" y="155273"/>
-                  </a:lnTo>
-                  <a:lnTo>
-                    <a:pt x="3566904" y="110052"/>
-                  </a:lnTo>
-                  <a:lnTo>
-                    <a:pt x="3489270" y="61941"/>
-                  </a:lnTo>
-                  <a:lnTo>
-                    <a:pt x="3411636" y="10755"/>
+                    <a:pt x="7293338" y="786311"/>
+                  </a:lnTo>
+                  <a:lnTo>
+                    <a:pt x="7215704" y="783965"/>
+                  </a:lnTo>
+                  <a:lnTo>
+                    <a:pt x="7138070" y="781468"/>
+                  </a:lnTo>
+                  <a:lnTo>
+                    <a:pt x="7060436" y="778812"/>
+                  </a:lnTo>
+                  <a:lnTo>
+                    <a:pt x="6982802" y="775987"/>
+                  </a:lnTo>
+                  <a:lnTo>
+                    <a:pt x="6905168" y="772981"/>
+                  </a:lnTo>
+                  <a:lnTo>
+                    <a:pt x="6827534" y="769783"/>
+                  </a:lnTo>
+                  <a:lnTo>
+                    <a:pt x="6749900" y="766380"/>
+                  </a:lnTo>
+                  <a:lnTo>
+                    <a:pt x="6672266" y="762760"/>
+                  </a:lnTo>
+                  <a:lnTo>
+                    <a:pt x="6594632" y="758909"/>
+                  </a:lnTo>
+                  <a:lnTo>
+                    <a:pt x="6516998" y="754812"/>
+                  </a:lnTo>
+                  <a:lnTo>
+                    <a:pt x="6439364" y="750453"/>
+                  </a:lnTo>
+                  <a:lnTo>
+                    <a:pt x="6361730" y="745815"/>
+                  </a:lnTo>
+                  <a:lnTo>
+                    <a:pt x="6284096" y="740881"/>
+                  </a:lnTo>
+                  <a:lnTo>
+                    <a:pt x="6206462" y="735631"/>
+                  </a:lnTo>
+                  <a:lnTo>
+                    <a:pt x="6128827" y="730046"/>
+                  </a:lnTo>
+                  <a:lnTo>
+                    <a:pt x="6051193" y="724105"/>
+                  </a:lnTo>
+                  <a:lnTo>
+                    <a:pt x="5973559" y="717783"/>
+                  </a:lnTo>
+                  <a:lnTo>
+                    <a:pt x="5895925" y="711058"/>
+                  </a:lnTo>
+                  <a:lnTo>
+                    <a:pt x="5818291" y="703902"/>
+                  </a:lnTo>
+                  <a:lnTo>
+                    <a:pt x="5740657" y="696290"/>
+                  </a:lnTo>
+                  <a:lnTo>
+                    <a:pt x="5663023" y="688191"/>
+                  </a:lnTo>
+                  <a:lnTo>
+                    <a:pt x="5585389" y="679575"/>
+                  </a:lnTo>
+                  <a:lnTo>
+                    <a:pt x="5507755" y="670407"/>
+                  </a:lnTo>
+                  <a:lnTo>
+                    <a:pt x="5430121" y="660655"/>
+                  </a:lnTo>
+                  <a:lnTo>
+                    <a:pt x="5352487" y="650278"/>
+                  </a:lnTo>
+                  <a:lnTo>
+                    <a:pt x="5274853" y="639239"/>
+                  </a:lnTo>
+                  <a:lnTo>
+                    <a:pt x="5197219" y="627495"/>
+                  </a:lnTo>
+                  <a:lnTo>
+                    <a:pt x="5119585" y="614999"/>
+                  </a:lnTo>
+                  <a:lnTo>
+                    <a:pt x="5041951" y="601706"/>
+                  </a:lnTo>
+                  <a:lnTo>
+                    <a:pt x="4964317" y="587563"/>
+                  </a:lnTo>
+                  <a:lnTo>
+                    <a:pt x="4886683" y="572516"/>
+                  </a:lnTo>
+                  <a:lnTo>
+                    <a:pt x="4809049" y="556507"/>
+                  </a:lnTo>
+                  <a:lnTo>
+                    <a:pt x="4731415" y="539476"/>
+                  </a:lnTo>
+                  <a:lnTo>
+                    <a:pt x="4653781" y="521356"/>
+                  </a:lnTo>
+                  <a:lnTo>
+                    <a:pt x="4576147" y="502078"/>
+                  </a:lnTo>
+                  <a:lnTo>
+                    <a:pt x="4498513" y="481569"/>
+                  </a:lnTo>
+                  <a:lnTo>
+                    <a:pt x="4420879" y="459748"/>
+                  </a:lnTo>
+                  <a:lnTo>
+                    <a:pt x="4343244" y="436534"/>
+                  </a:lnTo>
+                  <a:lnTo>
+                    <a:pt x="4265610" y="411835"/>
+                  </a:lnTo>
+                  <a:lnTo>
+                    <a:pt x="4187976" y="385559"/>
+                  </a:lnTo>
+                  <a:lnTo>
+                    <a:pt x="4110342" y="357603"/>
+                  </a:lnTo>
+                  <a:lnTo>
+                    <a:pt x="4032708" y="327861"/>
+                  </a:lnTo>
+                  <a:lnTo>
+                    <a:pt x="3955074" y="296219"/>
+                  </a:lnTo>
+                  <a:lnTo>
+                    <a:pt x="3877440" y="262554"/>
+                  </a:lnTo>
+                  <a:lnTo>
+                    <a:pt x="3799806" y="226738"/>
+                  </a:lnTo>
+                  <a:lnTo>
+                    <a:pt x="3722172" y="188633"/>
+                  </a:lnTo>
+                  <a:lnTo>
+                    <a:pt x="3644538" y="148094"/>
+                  </a:lnTo>
+                  <a:lnTo>
+                    <a:pt x="3566904" y="104963"/>
+                  </a:lnTo>
+                  <a:lnTo>
+                    <a:pt x="3489270" y="59077"/>
+                  </a:lnTo>
+                  <a:lnTo>
+                    <a:pt x="3411636" y="10258"/>
                   </a:lnTo>
                   <a:lnTo>
                     <a:pt x="3334002" y="0"/>
                   </a:lnTo>
                   <a:lnTo>
-                    <a:pt x="3256368" y="9947"/>
-                  </a:lnTo>
-                  <a:lnTo>
-                    <a:pt x="3178734" y="19779"/>
-                  </a:lnTo>
-                  <a:lnTo>
-                    <a:pt x="3101100" y="29499"/>
-                  </a:lnTo>
-                  <a:lnTo>
-                    <a:pt x="3023466" y="39106"/>
-                  </a:lnTo>
-                  <a:lnTo>
-                    <a:pt x="2945832" y="48603"/>
-                  </a:lnTo>
-                  <a:lnTo>
-                    <a:pt x="2868198" y="57990"/>
-                  </a:lnTo>
-                  <a:lnTo>
-                    <a:pt x="2790564" y="67269"/>
-                  </a:lnTo>
-                  <a:lnTo>
-                    <a:pt x="2712930" y="76440"/>
-                  </a:lnTo>
-                  <a:lnTo>
-                    <a:pt x="2635295" y="85507"/>
-                  </a:lnTo>
-                  <a:lnTo>
-                    <a:pt x="2557661" y="94468"/>
-                  </a:lnTo>
-                  <a:lnTo>
-                    <a:pt x="2480027" y="103327"/>
-                  </a:lnTo>
-                  <a:lnTo>
-                    <a:pt x="2402393" y="112083"/>
-                  </a:lnTo>
-                  <a:lnTo>
-                    <a:pt x="2324759" y="120738"/>
-                  </a:lnTo>
-                  <a:lnTo>
-                    <a:pt x="2247125" y="129294"/>
-                  </a:lnTo>
-                  <a:lnTo>
-                    <a:pt x="2169491" y="137751"/>
-                  </a:lnTo>
-                  <a:lnTo>
-                    <a:pt x="2091857" y="146110"/>
-                  </a:lnTo>
-                  <a:lnTo>
-                    <a:pt x="2014223" y="154373"/>
-                  </a:lnTo>
-                  <a:lnTo>
-                    <a:pt x="1936589" y="162541"/>
-                  </a:lnTo>
-                  <a:lnTo>
-                    <a:pt x="1858955" y="170614"/>
-                  </a:lnTo>
-                  <a:lnTo>
-                    <a:pt x="1781321" y="178595"/>
-                  </a:lnTo>
-                  <a:lnTo>
-                    <a:pt x="1703687" y="186484"/>
-                  </a:lnTo>
-                  <a:lnTo>
-                    <a:pt x="1626053" y="194281"/>
-                  </a:lnTo>
-                  <a:lnTo>
-                    <a:pt x="1548419" y="201989"/>
-                  </a:lnTo>
-                  <a:lnTo>
-                    <a:pt x="1470785" y="209608"/>
-                  </a:lnTo>
-                  <a:lnTo>
-                    <a:pt x="1393151" y="217139"/>
-                  </a:lnTo>
-                  <a:lnTo>
-                    <a:pt x="1315517" y="224583"/>
-                  </a:lnTo>
-                  <a:lnTo>
-                    <a:pt x="1237883" y="231942"/>
-                  </a:lnTo>
-                  <a:lnTo>
-                    <a:pt x="1160249" y="239215"/>
-                  </a:lnTo>
-                  <a:lnTo>
-                    <a:pt x="1082615" y="246405"/>
-                  </a:lnTo>
-                  <a:lnTo>
-                    <a:pt x="1004981" y="253512"/>
-                  </a:lnTo>
-                  <a:lnTo>
-                    <a:pt x="927346" y="260537"/>
-                  </a:lnTo>
-                  <a:lnTo>
-                    <a:pt x="849712" y="267481"/>
-                  </a:lnTo>
-                  <a:lnTo>
-                    <a:pt x="772078" y="274345"/>
-                  </a:lnTo>
-                  <a:lnTo>
-                    <a:pt x="694444" y="281130"/>
-                  </a:lnTo>
-                  <a:lnTo>
-                    <a:pt x="616810" y="287837"/>
-                  </a:lnTo>
-                  <a:lnTo>
-                    <a:pt x="539176" y="294466"/>
-                  </a:lnTo>
-                  <a:lnTo>
-                    <a:pt x="461542" y="301019"/>
-                  </a:lnTo>
-                  <a:lnTo>
-                    <a:pt x="383908" y="307496"/>
-                  </a:lnTo>
-                  <a:lnTo>
-                    <a:pt x="306274" y="313899"/>
-                  </a:lnTo>
-                  <a:lnTo>
-                    <a:pt x="228640" y="320228"/>
-                  </a:lnTo>
-                  <a:lnTo>
-                    <a:pt x="151006" y="326484"/>
-                  </a:lnTo>
-                  <a:lnTo>
-                    <a:pt x="73372" y="332667"/>
-                  </a:lnTo>
-                  <a:lnTo>
-                    <a:pt x="0" y="338444"/>
+                    <a:pt x="3256368" y="9487"/>
+                  </a:lnTo>
+                  <a:lnTo>
+                    <a:pt x="3178734" y="18865"/>
+                  </a:lnTo>
+                  <a:lnTo>
+                    <a:pt x="3101100" y="28135"/>
+                  </a:lnTo>
+                  <a:lnTo>
+                    <a:pt x="3023466" y="37298"/>
+                  </a:lnTo>
+                  <a:lnTo>
+                    <a:pt x="2945832" y="46355"/>
+                  </a:lnTo>
+                  <a:lnTo>
+                    <a:pt x="2868198" y="55308"/>
+                  </a:lnTo>
+                  <a:lnTo>
+                    <a:pt x="2790564" y="64158"/>
+                  </a:lnTo>
+                  <a:lnTo>
+                    <a:pt x="2712930" y="72906"/>
+                  </a:lnTo>
+                  <a:lnTo>
+                    <a:pt x="2635295" y="81553"/>
+                  </a:lnTo>
+                  <a:lnTo>
+                    <a:pt x="2557661" y="90100"/>
+                  </a:lnTo>
+                  <a:lnTo>
+                    <a:pt x="2480027" y="98549"/>
+                  </a:lnTo>
+                  <a:lnTo>
+                    <a:pt x="2402393" y="106900"/>
+                  </a:lnTo>
+                  <a:lnTo>
+                    <a:pt x="2324759" y="115155"/>
+                  </a:lnTo>
+                  <a:lnTo>
+                    <a:pt x="2247125" y="123315"/>
+                  </a:lnTo>
+                  <a:lnTo>
+                    <a:pt x="2169491" y="131381"/>
+                  </a:lnTo>
+                  <a:lnTo>
+                    <a:pt x="2091857" y="139354"/>
+                  </a:lnTo>
+                  <a:lnTo>
+                    <a:pt x="2014223" y="147235"/>
+                  </a:lnTo>
+                  <a:lnTo>
+                    <a:pt x="1936589" y="155025"/>
+                  </a:lnTo>
+                  <a:lnTo>
+                    <a:pt x="1858955" y="162725"/>
+                  </a:lnTo>
+                  <a:lnTo>
+                    <a:pt x="1781321" y="170337"/>
+                  </a:lnTo>
+                  <a:lnTo>
+                    <a:pt x="1703687" y="177861"/>
+                  </a:lnTo>
+                  <a:lnTo>
+                    <a:pt x="1626053" y="185298"/>
+                  </a:lnTo>
+                  <a:lnTo>
+                    <a:pt x="1548419" y="192649"/>
+                  </a:lnTo>
+                  <a:lnTo>
+                    <a:pt x="1470785" y="199916"/>
+                  </a:lnTo>
+                  <a:lnTo>
+                    <a:pt x="1393151" y="207099"/>
+                  </a:lnTo>
+                  <a:lnTo>
+                    <a:pt x="1315517" y="214199"/>
+                  </a:lnTo>
+                  <a:lnTo>
+                    <a:pt x="1237883" y="221217"/>
+                  </a:lnTo>
+                  <a:lnTo>
+                    <a:pt x="1160249" y="228154"/>
+                  </a:lnTo>
+                  <a:lnTo>
+                    <a:pt x="1082615" y="235012"/>
+                  </a:lnTo>
+                  <a:lnTo>
+                    <a:pt x="1004981" y="241790"/>
+                  </a:lnTo>
+                  <a:lnTo>
+                    <a:pt x="927346" y="248490"/>
+                  </a:lnTo>
+                  <a:lnTo>
+                    <a:pt x="849712" y="255113"/>
+                  </a:lnTo>
+                  <a:lnTo>
+                    <a:pt x="772078" y="261659"/>
+                  </a:lnTo>
+                  <a:lnTo>
+                    <a:pt x="694444" y="268131"/>
+                  </a:lnTo>
+                  <a:lnTo>
+                    <a:pt x="616810" y="274527"/>
+                  </a:lnTo>
+                  <a:lnTo>
+                    <a:pt x="539176" y="280850"/>
+                  </a:lnTo>
+                  <a:lnTo>
+                    <a:pt x="461542" y="287100"/>
+                  </a:lnTo>
+                  <a:lnTo>
+                    <a:pt x="383908" y="293278"/>
+                  </a:lnTo>
+                  <a:lnTo>
+                    <a:pt x="306274" y="299384"/>
+                  </a:lnTo>
+                  <a:lnTo>
+                    <a:pt x="228640" y="305420"/>
+                  </a:lnTo>
+                  <a:lnTo>
+                    <a:pt x="151006" y="311387"/>
+                  </a:lnTo>
+                  <a:lnTo>
+                    <a:pt x="73372" y="317285"/>
+                  </a:lnTo>
+                  <a:lnTo>
+                    <a:pt x="0" y="322795"/>
                   </a:lnTo>
                 </a:path>
               </a:pathLst>
@@ -4115,300 +4115,300 @@
           </p:nvSpPr>
           <p:spPr>
             <a:xfrm>
-              <a:off x="817517" y="2941590"/>
-              <a:ext cx="7370972" cy="2368743"/>
+              <a:off x="817517" y="3070208"/>
+              <a:ext cx="7370972" cy="2259213"/>
             </a:xfrm>
             <a:custGeom>
               <a:avLst/>
               <a:pathLst>
-                <a:path w="7370972" h="2368743">
+                <a:path w="7370972" h="2259213">
                   <a:moveTo>
                     <a:pt x="0" y="0"/>
                   </a:moveTo>
                   <a:lnTo>
-                    <a:pt x="73372" y="61352"/>
-                  </a:lnTo>
-                  <a:lnTo>
-                    <a:pt x="151006" y="124654"/>
-                  </a:lnTo>
-                  <a:lnTo>
-                    <a:pt x="228640" y="186382"/>
-                  </a:lnTo>
-                  <a:lnTo>
-                    <a:pt x="306274" y="246576"/>
-                  </a:lnTo>
-                  <a:lnTo>
-                    <a:pt x="383908" y="305273"/>
-                  </a:lnTo>
-                  <a:lnTo>
-                    <a:pt x="461542" y="362511"/>
-                  </a:lnTo>
-                  <a:lnTo>
-                    <a:pt x="539176" y="418326"/>
-                  </a:lnTo>
-                  <a:lnTo>
-                    <a:pt x="616810" y="472753"/>
-                  </a:lnTo>
-                  <a:lnTo>
-                    <a:pt x="694444" y="525827"/>
-                  </a:lnTo>
-                  <a:lnTo>
-                    <a:pt x="772078" y="577582"/>
-                  </a:lnTo>
-                  <a:lnTo>
-                    <a:pt x="849712" y="628050"/>
-                  </a:lnTo>
-                  <a:lnTo>
-                    <a:pt x="927346" y="677264"/>
-                  </a:lnTo>
-                  <a:lnTo>
-                    <a:pt x="1004981" y="725254"/>
-                  </a:lnTo>
-                  <a:lnTo>
-                    <a:pt x="1082615" y="772051"/>
-                  </a:lnTo>
-                  <a:lnTo>
-                    <a:pt x="1160249" y="817684"/>
-                  </a:lnTo>
-                  <a:lnTo>
-                    <a:pt x="1237883" y="862183"/>
-                  </a:lnTo>
-                  <a:lnTo>
-                    <a:pt x="1315517" y="905576"/>
-                  </a:lnTo>
-                  <a:lnTo>
-                    <a:pt x="1393151" y="947890"/>
-                  </a:lnTo>
-                  <a:lnTo>
-                    <a:pt x="1470785" y="989152"/>
-                  </a:lnTo>
-                  <a:lnTo>
-                    <a:pt x="1548419" y="1029388"/>
-                  </a:lnTo>
-                  <a:lnTo>
-                    <a:pt x="1626053" y="1068624"/>
-                  </a:lnTo>
-                  <a:lnTo>
-                    <a:pt x="1703687" y="1106884"/>
-                  </a:lnTo>
-                  <a:lnTo>
-                    <a:pt x="1781321" y="1144194"/>
-                  </a:lnTo>
-                  <a:lnTo>
-                    <a:pt x="1858955" y="1180575"/>
-                  </a:lnTo>
-                  <a:lnTo>
-                    <a:pt x="1936589" y="1216053"/>
-                  </a:lnTo>
-                  <a:lnTo>
-                    <a:pt x="2014223" y="1250648"/>
-                  </a:lnTo>
-                  <a:lnTo>
-                    <a:pt x="2091857" y="1284383"/>
-                  </a:lnTo>
-                  <a:lnTo>
-                    <a:pt x="2169491" y="1317280"/>
-                  </a:lnTo>
-                  <a:lnTo>
-                    <a:pt x="2247125" y="1349358"/>
-                  </a:lnTo>
-                  <a:lnTo>
-                    <a:pt x="2324759" y="1380640"/>
-                  </a:lnTo>
-                  <a:lnTo>
-                    <a:pt x="2402393" y="1411143"/>
-                  </a:lnTo>
-                  <a:lnTo>
-                    <a:pt x="2480027" y="1440888"/>
-                  </a:lnTo>
-                  <a:lnTo>
-                    <a:pt x="2557661" y="1469894"/>
-                  </a:lnTo>
-                  <a:lnTo>
-                    <a:pt x="2635295" y="1498179"/>
-                  </a:lnTo>
-                  <a:lnTo>
-                    <a:pt x="2712930" y="1525760"/>
-                  </a:lnTo>
-                  <a:lnTo>
-                    <a:pt x="2790564" y="1552656"/>
-                  </a:lnTo>
-                  <a:lnTo>
-                    <a:pt x="2868198" y="1578883"/>
-                  </a:lnTo>
-                  <a:lnTo>
-                    <a:pt x="2945832" y="1604458"/>
-                  </a:lnTo>
-                  <a:lnTo>
-                    <a:pt x="3023466" y="1629397"/>
-                  </a:lnTo>
-                  <a:lnTo>
-                    <a:pt x="3101100" y="1653716"/>
-                  </a:lnTo>
-                  <a:lnTo>
-                    <a:pt x="3178734" y="1677431"/>
-                  </a:lnTo>
-                  <a:lnTo>
-                    <a:pt x="3256368" y="1700556"/>
-                  </a:lnTo>
-                  <a:lnTo>
-                    <a:pt x="3334002" y="1723106"/>
-                  </a:lnTo>
-                  <a:lnTo>
-                    <a:pt x="3411636" y="1745096"/>
-                  </a:lnTo>
-                  <a:lnTo>
-                    <a:pt x="3489270" y="1766539"/>
-                  </a:lnTo>
-                  <a:lnTo>
-                    <a:pt x="3566904" y="1787449"/>
-                  </a:lnTo>
-                  <a:lnTo>
-                    <a:pt x="3644538" y="1807839"/>
-                  </a:lnTo>
-                  <a:lnTo>
-                    <a:pt x="3722172" y="1827722"/>
-                  </a:lnTo>
-                  <a:lnTo>
-                    <a:pt x="3799806" y="1847110"/>
-                  </a:lnTo>
-                  <a:lnTo>
-                    <a:pt x="3877440" y="1866017"/>
-                  </a:lnTo>
-                  <a:lnTo>
-                    <a:pt x="3955074" y="1884454"/>
-                  </a:lnTo>
-                  <a:lnTo>
-                    <a:pt x="4032708" y="1902432"/>
-                  </a:lnTo>
-                  <a:lnTo>
-                    <a:pt x="4110342" y="1919964"/>
-                  </a:lnTo>
-                  <a:lnTo>
-                    <a:pt x="4187976" y="1937059"/>
-                  </a:lnTo>
-                  <a:lnTo>
-                    <a:pt x="4265610" y="1953730"/>
-                  </a:lnTo>
-                  <a:lnTo>
-                    <a:pt x="4343244" y="1969986"/>
-                  </a:lnTo>
-                  <a:lnTo>
-                    <a:pt x="4420879" y="1985838"/>
-                  </a:lnTo>
-                  <a:lnTo>
-                    <a:pt x="4498513" y="2001296"/>
-                  </a:lnTo>
-                  <a:lnTo>
-                    <a:pt x="4576147" y="2016369"/>
-                  </a:lnTo>
-                  <a:lnTo>
-                    <a:pt x="4653781" y="2031068"/>
-                  </a:lnTo>
-                  <a:lnTo>
-                    <a:pt x="4731415" y="2045401"/>
-                  </a:lnTo>
-                  <a:lnTo>
-                    <a:pt x="4809049" y="2059378"/>
-                  </a:lnTo>
-                  <a:lnTo>
-                    <a:pt x="4886683" y="2073008"/>
-                  </a:lnTo>
-                  <a:lnTo>
-                    <a:pt x="4964317" y="2086299"/>
-                  </a:lnTo>
-                  <a:lnTo>
-                    <a:pt x="5041951" y="2099259"/>
-                  </a:lnTo>
-                  <a:lnTo>
-                    <a:pt x="5119585" y="2111897"/>
-                  </a:lnTo>
-                  <a:lnTo>
-                    <a:pt x="5197219" y="2124221"/>
-                  </a:lnTo>
-                  <a:lnTo>
-                    <a:pt x="5274853" y="2136239"/>
-                  </a:lnTo>
-                  <a:lnTo>
-                    <a:pt x="5352487" y="2147958"/>
-                  </a:lnTo>
-                  <a:lnTo>
-                    <a:pt x="5430121" y="2159385"/>
-                  </a:lnTo>
-                  <a:lnTo>
-                    <a:pt x="5507755" y="2170528"/>
-                  </a:lnTo>
-                  <a:lnTo>
-                    <a:pt x="5585389" y="2181395"/>
-                  </a:lnTo>
-                  <a:lnTo>
-                    <a:pt x="5663023" y="2191991"/>
-                  </a:lnTo>
-                  <a:lnTo>
-                    <a:pt x="5740657" y="2202324"/>
-                  </a:lnTo>
-                  <a:lnTo>
-                    <a:pt x="5818291" y="2212399"/>
-                  </a:lnTo>
-                  <a:lnTo>
-                    <a:pt x="5895925" y="2222225"/>
-                  </a:lnTo>
-                  <a:lnTo>
-                    <a:pt x="5973559" y="2231806"/>
-                  </a:lnTo>
-                  <a:lnTo>
-                    <a:pt x="6051193" y="2241149"/>
-                  </a:lnTo>
-                  <a:lnTo>
-                    <a:pt x="6128827" y="2250260"/>
-                  </a:lnTo>
-                  <a:lnTo>
-                    <a:pt x="6206462" y="2259144"/>
-                  </a:lnTo>
-                  <a:lnTo>
-                    <a:pt x="6284096" y="2267807"/>
-                  </a:lnTo>
-                  <a:lnTo>
-                    <a:pt x="6361730" y="2276255"/>
-                  </a:lnTo>
-                  <a:lnTo>
-                    <a:pt x="6439364" y="2284493"/>
-                  </a:lnTo>
-                  <a:lnTo>
-                    <a:pt x="6516998" y="2292526"/>
-                  </a:lnTo>
-                  <a:lnTo>
-                    <a:pt x="6594632" y="2300359"/>
-                  </a:lnTo>
-                  <a:lnTo>
-                    <a:pt x="6672266" y="2307998"/>
-                  </a:lnTo>
-                  <a:lnTo>
-                    <a:pt x="6749900" y="2315447"/>
-                  </a:lnTo>
-                  <a:lnTo>
-                    <a:pt x="6827534" y="2322710"/>
-                  </a:lnTo>
-                  <a:lnTo>
-                    <a:pt x="6905168" y="2329793"/>
-                  </a:lnTo>
-                  <a:lnTo>
-                    <a:pt x="6982802" y="2336700"/>
-                  </a:lnTo>
-                  <a:lnTo>
-                    <a:pt x="7060436" y="2343435"/>
-                  </a:lnTo>
-                  <a:lnTo>
-                    <a:pt x="7138070" y="2350003"/>
-                  </a:lnTo>
-                  <a:lnTo>
-                    <a:pt x="7215704" y="2356407"/>
-                  </a:lnTo>
-                  <a:lnTo>
-                    <a:pt x="7293338" y="2362653"/>
-                  </a:lnTo>
-                  <a:lnTo>
-                    <a:pt x="7370972" y="2368743"/>
+                    <a:pt x="73372" y="58515"/>
+                  </a:lnTo>
+                  <a:lnTo>
+                    <a:pt x="151006" y="118890"/>
+                  </a:lnTo>
+                  <a:lnTo>
+                    <a:pt x="228640" y="177764"/>
+                  </a:lnTo>
+                  <a:lnTo>
+                    <a:pt x="306274" y="235174"/>
+                  </a:lnTo>
+                  <a:lnTo>
+                    <a:pt x="383908" y="291157"/>
+                  </a:lnTo>
+                  <a:lnTo>
+                    <a:pt x="461542" y="345748"/>
+                  </a:lnTo>
+                  <a:lnTo>
+                    <a:pt x="539176" y="398983"/>
+                  </a:lnTo>
+                  <a:lnTo>
+                    <a:pt x="616810" y="450893"/>
+                  </a:lnTo>
+                  <a:lnTo>
+                    <a:pt x="694444" y="501513"/>
+                  </a:lnTo>
+                  <a:lnTo>
+                    <a:pt x="772078" y="550875"/>
+                  </a:lnTo>
+                  <a:lnTo>
+                    <a:pt x="849712" y="599009"/>
+                  </a:lnTo>
+                  <a:lnTo>
+                    <a:pt x="927346" y="645947"/>
+                  </a:lnTo>
+                  <a:lnTo>
+                    <a:pt x="1004981" y="691718"/>
+                  </a:lnTo>
+                  <a:lnTo>
+                    <a:pt x="1082615" y="736351"/>
+                  </a:lnTo>
+                  <a:lnTo>
+                    <a:pt x="1160249" y="779875"/>
+                  </a:lnTo>
+                  <a:lnTo>
+                    <a:pt x="1237883" y="822316"/>
+                  </a:lnTo>
+                  <a:lnTo>
+                    <a:pt x="1315517" y="863702"/>
+                  </a:lnTo>
+                  <a:lnTo>
+                    <a:pt x="1393151" y="904060"/>
+                  </a:lnTo>
+                  <a:lnTo>
+                    <a:pt x="1470785" y="943414"/>
+                  </a:lnTo>
+                  <a:lnTo>
+                    <a:pt x="1548419" y="981789"/>
+                  </a:lnTo>
+                  <a:lnTo>
+                    <a:pt x="1626053" y="1019211"/>
+                  </a:lnTo>
+                  <a:lnTo>
+                    <a:pt x="1703687" y="1055702"/>
+                  </a:lnTo>
+                  <a:lnTo>
+                    <a:pt x="1781321" y="1091287"/>
+                  </a:lnTo>
+                  <a:lnTo>
+                    <a:pt x="1858955" y="1125986"/>
+                  </a:lnTo>
+                  <a:lnTo>
+                    <a:pt x="1936589" y="1159823"/>
+                  </a:lnTo>
+                  <a:lnTo>
+                    <a:pt x="2014223" y="1192818"/>
+                  </a:lnTo>
+                  <a:lnTo>
+                    <a:pt x="2091857" y="1224994"/>
+                  </a:lnTo>
+                  <a:lnTo>
+                    <a:pt x="2169491" y="1256369"/>
+                  </a:lnTo>
+                  <a:lnTo>
+                    <a:pt x="2247125" y="1286965"/>
+                  </a:lnTo>
+                  <a:lnTo>
+                    <a:pt x="2324759" y="1316799"/>
+                  </a:lnTo>
+                  <a:lnTo>
+                    <a:pt x="2402393" y="1345892"/>
+                  </a:lnTo>
+                  <a:lnTo>
+                    <a:pt x="2480027" y="1374262"/>
+                  </a:lnTo>
+                  <a:lnTo>
+                    <a:pt x="2557661" y="1401927"/>
+                  </a:lnTo>
+                  <a:lnTo>
+                    <a:pt x="2635295" y="1428903"/>
+                  </a:lnTo>
+                  <a:lnTo>
+                    <a:pt x="2712930" y="1455209"/>
+                  </a:lnTo>
+                  <a:lnTo>
+                    <a:pt x="2790564" y="1480862"/>
+                  </a:lnTo>
+                  <a:lnTo>
+                    <a:pt x="2868198" y="1505876"/>
+                  </a:lnTo>
+                  <a:lnTo>
+                    <a:pt x="2945832" y="1530268"/>
+                  </a:lnTo>
+                  <a:lnTo>
+                    <a:pt x="3023466" y="1554054"/>
+                  </a:lnTo>
+                  <a:lnTo>
+                    <a:pt x="3101100" y="1577249"/>
+                  </a:lnTo>
+                  <a:lnTo>
+                    <a:pt x="3178734" y="1599867"/>
+                  </a:lnTo>
+                  <a:lnTo>
+                    <a:pt x="3256368" y="1621923"/>
+                  </a:lnTo>
+                  <a:lnTo>
+                    <a:pt x="3334002" y="1643431"/>
+                  </a:lnTo>
+                  <a:lnTo>
+                    <a:pt x="3411636" y="1664403"/>
+                  </a:lnTo>
+                  <a:lnTo>
+                    <a:pt x="3489270" y="1684855"/>
+                  </a:lnTo>
+                  <a:lnTo>
+                    <a:pt x="3566904" y="1704798"/>
+                  </a:lnTo>
+                  <a:lnTo>
+                    <a:pt x="3644538" y="1724245"/>
+                  </a:lnTo>
+                  <a:lnTo>
+                    <a:pt x="3722172" y="1743208"/>
+                  </a:lnTo>
+                  <a:lnTo>
+                    <a:pt x="3799806" y="1761701"/>
+                  </a:lnTo>
+                  <a:lnTo>
+                    <a:pt x="3877440" y="1779733"/>
+                  </a:lnTo>
+                  <a:lnTo>
+                    <a:pt x="3955074" y="1797317"/>
+                  </a:lnTo>
+                  <a:lnTo>
+                    <a:pt x="4032708" y="1814464"/>
+                  </a:lnTo>
+                  <a:lnTo>
+                    <a:pt x="4110342" y="1831185"/>
+                  </a:lnTo>
+                  <a:lnTo>
+                    <a:pt x="4187976" y="1847490"/>
+                  </a:lnTo>
+                  <a:lnTo>
+                    <a:pt x="4265610" y="1863390"/>
+                  </a:lnTo>
+                  <a:lnTo>
+                    <a:pt x="4343244" y="1878894"/>
+                  </a:lnTo>
+                  <a:lnTo>
+                    <a:pt x="4420879" y="1894013"/>
+                  </a:lnTo>
+                  <a:lnTo>
+                    <a:pt x="4498513" y="1908756"/>
+                  </a:lnTo>
+                  <a:lnTo>
+                    <a:pt x="4576147" y="1923133"/>
+                  </a:lnTo>
+                  <a:lnTo>
+                    <a:pt x="4653781" y="1937152"/>
+                  </a:lnTo>
+                  <a:lnTo>
+                    <a:pt x="4731415" y="1950823"/>
+                  </a:lnTo>
+                  <a:lnTo>
+                    <a:pt x="4809049" y="1964154"/>
+                  </a:lnTo>
+                  <a:lnTo>
+                    <a:pt x="4886683" y="1977153"/>
+                  </a:lnTo>
+                  <a:lnTo>
+                    <a:pt x="4964317" y="1989829"/>
+                  </a:lnTo>
+                  <a:lnTo>
+                    <a:pt x="5041951" y="2002190"/>
+                  </a:lnTo>
+                  <a:lnTo>
+                    <a:pt x="5119585" y="2014244"/>
+                  </a:lnTo>
+                  <a:lnTo>
+                    <a:pt x="5197219" y="2025998"/>
+                  </a:lnTo>
+                  <a:lnTo>
+                    <a:pt x="5274853" y="2037460"/>
+                  </a:lnTo>
+                  <a:lnTo>
+                    <a:pt x="5352487" y="2048637"/>
+                  </a:lnTo>
+                  <a:lnTo>
+                    <a:pt x="5430121" y="2059536"/>
+                  </a:lnTo>
+                  <a:lnTo>
+                    <a:pt x="5507755" y="2070164"/>
+                  </a:lnTo>
+                  <a:lnTo>
+                    <a:pt x="5585389" y="2080528"/>
+                  </a:lnTo>
+                  <a:lnTo>
+                    <a:pt x="5663023" y="2090634"/>
+                  </a:lnTo>
+                  <a:lnTo>
+                    <a:pt x="5740657" y="2100489"/>
+                  </a:lnTo>
+                  <a:lnTo>
+                    <a:pt x="5818291" y="2110099"/>
+                  </a:lnTo>
+                  <a:lnTo>
+                    <a:pt x="5895925" y="2119470"/>
+                  </a:lnTo>
+                  <a:lnTo>
+                    <a:pt x="5973559" y="2128608"/>
+                  </a:lnTo>
+                  <a:lnTo>
+                    <a:pt x="6051193" y="2137519"/>
+                  </a:lnTo>
+                  <a:lnTo>
+                    <a:pt x="6128827" y="2146208"/>
+                  </a:lnTo>
+                  <a:lnTo>
+                    <a:pt x="6206462" y="2154682"/>
+                  </a:lnTo>
+                  <a:lnTo>
+                    <a:pt x="6284096" y="2162944"/>
+                  </a:lnTo>
+                  <a:lnTo>
+                    <a:pt x="6361730" y="2171002"/>
+                  </a:lnTo>
+                  <a:lnTo>
+                    <a:pt x="6439364" y="2178859"/>
+                  </a:lnTo>
+                  <a:lnTo>
+                    <a:pt x="6516998" y="2186520"/>
+                  </a:lnTo>
+                  <a:lnTo>
+                    <a:pt x="6594632" y="2193991"/>
+                  </a:lnTo>
+                  <a:lnTo>
+                    <a:pt x="6672266" y="2201277"/>
+                  </a:lnTo>
+                  <a:lnTo>
+                    <a:pt x="6749900" y="2208381"/>
+                  </a:lnTo>
+                  <a:lnTo>
+                    <a:pt x="6827534" y="2215309"/>
+                  </a:lnTo>
+                  <a:lnTo>
+                    <a:pt x="6905168" y="2222064"/>
+                  </a:lnTo>
+                  <a:lnTo>
+                    <a:pt x="6982802" y="2228652"/>
+                  </a:lnTo>
+                  <a:lnTo>
+                    <a:pt x="7060436" y="2235076"/>
+                  </a:lnTo>
+                  <a:lnTo>
+                    <a:pt x="7138070" y="2241340"/>
+                  </a:lnTo>
+                  <a:lnTo>
+                    <a:pt x="7215704" y="2247448"/>
+                  </a:lnTo>
+                  <a:lnTo>
+                    <a:pt x="7293338" y="2253404"/>
+                  </a:lnTo>
+                  <a:lnTo>
+                    <a:pt x="7370972" y="2259213"/>
                   </a:lnTo>
                 </a:path>
               </a:pathLst>
@@ -4437,7 +4437,7 @@
           </p:nvSpPr>
           <p:spPr>
             <a:xfrm>
-              <a:off x="817517" y="4679530"/>
+              <a:off x="817517" y="4727786"/>
               <a:ext cx="7799693" cy="0"/>
             </a:xfrm>
             <a:custGeom>
@@ -4480,15 +4480,15 @@
           </p:nvSpPr>
           <p:spPr>
             <a:xfrm>
-              <a:off x="4203673" y="1896563"/>
-              <a:ext cx="0" cy="3826579"/>
+              <a:off x="4203673" y="2073503"/>
+              <a:ext cx="0" cy="3649639"/>
             </a:xfrm>
             <a:custGeom>
               <a:avLst/>
               <a:pathLst>
-                <a:path w="0" h="3826579">
+                <a:path w="0" h="3649639">
                   <a:moveTo>
-                    <a:pt x="0" y="3826579"/>
+                    <a:pt x="0" y="3649639"/>
                   </a:moveTo>
                   <a:lnTo>
                     <a:pt x="0" y="0"/>
@@ -4523,7 +4523,7 @@
           </p:nvSpPr>
           <p:spPr>
             <a:xfrm>
-              <a:off x="692708" y="5509156"/>
+              <a:off x="692708" y="5517199"/>
               <a:ext cx="62179" cy="80101"/>
             </a:xfrm>
             <a:prstGeom prst="rect">
@@ -4569,7 +4569,7 @@
           </p:nvSpPr>
           <p:spPr>
             <a:xfrm>
-              <a:off x="692708" y="4639479"/>
+              <a:off x="692708" y="4687735"/>
               <a:ext cx="62179" cy="80101"/>
             </a:xfrm>
             <a:prstGeom prst="rect">
@@ -4615,7 +4615,7 @@
           </p:nvSpPr>
           <p:spPr>
             <a:xfrm>
-              <a:off x="692708" y="3769802"/>
+              <a:off x="692708" y="3858272"/>
               <a:ext cx="62179" cy="80101"/>
             </a:xfrm>
             <a:prstGeom prst="rect">
@@ -4661,7 +4661,7 @@
           </p:nvSpPr>
           <p:spPr>
             <a:xfrm>
-              <a:off x="692708" y="2900125"/>
+              <a:off x="692708" y="3028808"/>
               <a:ext cx="62179" cy="80101"/>
             </a:xfrm>
             <a:prstGeom prst="rect">
@@ -4707,7 +4707,7 @@
           </p:nvSpPr>
           <p:spPr>
             <a:xfrm>
-              <a:off x="692708" y="2030448"/>
+              <a:off x="692708" y="2199345"/>
               <a:ext cx="62179" cy="80101"/>
             </a:xfrm>
             <a:prstGeom prst="rect">
@@ -4983,7 +4983,7 @@
           </p:nvSpPr>
           <p:spPr>
             <a:xfrm rot="-5400000">
-              <a:off x="68446" y="3759743"/>
+              <a:off x="68446" y="3848213"/>
               <a:ext cx="1016904" cy="100218"/>
             </a:xfrm>
             <a:prstGeom prst="rect">
@@ -5024,6 +5024,52 @@
         <p:sp>
           <p:nvSpPr>
             <p:cNvPr id="38" name="tx38"/>
+            <p:cNvSpPr/>
+            <p:nvPr/>
+          </p:nvSpPr>
+          <p:spPr>
+            <a:xfrm>
+              <a:off x="817517" y="1896563"/>
+              <a:ext cx="4166463" cy="82021"/>
+            </a:xfrm>
+            <a:prstGeom prst="rect">
+              <a:avLst/>
+            </a:prstGeom>
+            <a:noFill/>
+          </p:spPr>
+          <p:txBody>
+            <a:bodyPr lIns="0" rIns="0" tIns="0" bIns="0" anchorCtr="1" anchor="ctr" wrap="none"/>
+            <a:lstStyle/>
+            <a:p>
+              <a:pPr algn="l" marL="0" marR="0" indent="0">
+                <a:lnSpc>
+                  <a:spcPts val="900"/>
+                </a:lnSpc>
+                <a:spcBef>
+                  <a:spcPts val="0"/>
+                </a:spcBef>
+                <a:spcAft>
+                  <a:spcPts val="0"/>
+                </a:spcAft>
+              </a:pPr>
+              <a:r>
+                <a:rPr sz="900">
+                  <a:solidFill>
+                    <a:srgbClr val="404040">
+                      <a:alpha val="100000"/>
+                    </a:srgbClr>
+                  </a:solidFill>
+                  <a:latin typeface="Helvetica"/>
+                  <a:cs typeface="Helvetica"/>
+                </a:rPr>
+                <a:t>subHR = 0.75 (95% CI 0.49-1.14), p = 0.180   (per 0.1-unit increase in eGFR ratio)</a:t>
+              </a:r>
+            </a:p>
+          </p:txBody>
+        </p:sp>
+        <p:sp>
+          <p:nvSpPr>
+            <p:cNvPr id="39" name="tx39"/>
             <p:cNvSpPr/>
             <p:nvPr/>
           </p:nvSpPr>

--- a/docs/plots/carbo/jx_carbo_linsubhr_ratio_anemia3.pptx
+++ b/docs/plots/carbo/jx_carbo_linsubhr_ratio_anemia3.pptx
@@ -2271,26 +2271,26 @@
           </p:nvSpPr>
           <p:spPr>
             <a:xfrm>
-              <a:off x="817517" y="5142518"/>
-              <a:ext cx="7799693" cy="0"/>
+              <a:off x="915645" y="5071743"/>
+              <a:ext cx="7682587" cy="0"/>
             </a:xfrm>
             <a:custGeom>
               <a:avLst/>
               <a:pathLst>
-                <a:path w="7799693" h="0">
+                <a:path w="7682587" h="0">
                   <a:moveTo>
                     <a:pt x="0" y="0"/>
                   </a:moveTo>
                   <a:lnTo>
-                    <a:pt x="7799693" y="0"/>
-                  </a:lnTo>
-                  <a:lnTo>
-                    <a:pt x="7799693" y="0"/>
+                    <a:pt x="7682587" y="0"/>
+                  </a:lnTo>
+                  <a:lnTo>
+                    <a:pt x="7682587" y="0"/>
                   </a:lnTo>
                 </a:path>
               </a:pathLst>
             </a:custGeom>
-            <a:ln w="6775" cap="flat">
+            <a:ln w="8623" cap="flat">
               <a:solidFill>
                 <a:srgbClr val="EBEBEB">
                   <a:alpha val="100000"/>
@@ -2314,26 +2314,26 @@
           </p:nvSpPr>
           <p:spPr>
             <a:xfrm>
-              <a:off x="817517" y="4313054"/>
-              <a:ext cx="7799693" cy="0"/>
+              <a:off x="915645" y="4298074"/>
+              <a:ext cx="7682587" cy="0"/>
             </a:xfrm>
             <a:custGeom>
               <a:avLst/>
               <a:pathLst>
-                <a:path w="7799693" h="0">
+                <a:path w="7682587" h="0">
                   <a:moveTo>
                     <a:pt x="0" y="0"/>
                   </a:moveTo>
                   <a:lnTo>
-                    <a:pt x="7799693" y="0"/>
-                  </a:lnTo>
-                  <a:lnTo>
-                    <a:pt x="7799693" y="0"/>
+                    <a:pt x="7682587" y="0"/>
+                  </a:lnTo>
+                  <a:lnTo>
+                    <a:pt x="7682587" y="0"/>
                   </a:lnTo>
                 </a:path>
               </a:pathLst>
             </a:custGeom>
-            <a:ln w="6775" cap="flat">
+            <a:ln w="8623" cap="flat">
               <a:solidFill>
                 <a:srgbClr val="EBEBEB">
                   <a:alpha val="100000"/>
@@ -2357,26 +2357,26 @@
           </p:nvSpPr>
           <p:spPr>
             <a:xfrm>
-              <a:off x="817517" y="3483591"/>
-              <a:ext cx="7799693" cy="0"/>
+              <a:off x="915645" y="3524405"/>
+              <a:ext cx="7682587" cy="0"/>
             </a:xfrm>
             <a:custGeom>
               <a:avLst/>
               <a:pathLst>
-                <a:path w="7799693" h="0">
+                <a:path w="7682587" h="0">
                   <a:moveTo>
                     <a:pt x="0" y="0"/>
                   </a:moveTo>
                   <a:lnTo>
-                    <a:pt x="7799693" y="0"/>
-                  </a:lnTo>
-                  <a:lnTo>
-                    <a:pt x="7799693" y="0"/>
+                    <a:pt x="7682587" y="0"/>
+                  </a:lnTo>
+                  <a:lnTo>
+                    <a:pt x="7682587" y="0"/>
                   </a:lnTo>
                 </a:path>
               </a:pathLst>
             </a:custGeom>
-            <a:ln w="6775" cap="flat">
+            <a:ln w="8623" cap="flat">
               <a:solidFill>
                 <a:srgbClr val="EBEBEB">
                   <a:alpha val="100000"/>
@@ -2400,26 +2400,26 @@
           </p:nvSpPr>
           <p:spPr>
             <a:xfrm>
-              <a:off x="817517" y="2654127"/>
-              <a:ext cx="7799693" cy="0"/>
+              <a:off x="915645" y="2750737"/>
+              <a:ext cx="7682587" cy="0"/>
             </a:xfrm>
             <a:custGeom>
               <a:avLst/>
               <a:pathLst>
-                <a:path w="7799693" h="0">
+                <a:path w="7682587" h="0">
                   <a:moveTo>
                     <a:pt x="0" y="0"/>
                   </a:moveTo>
                   <a:lnTo>
-                    <a:pt x="7799693" y="0"/>
-                  </a:lnTo>
-                  <a:lnTo>
-                    <a:pt x="7799693" y="0"/>
+                    <a:pt x="7682587" y="0"/>
+                  </a:lnTo>
+                  <a:lnTo>
+                    <a:pt x="7682587" y="0"/>
                   </a:lnTo>
                 </a:path>
               </a:pathLst>
             </a:custGeom>
-            <a:ln w="6775" cap="flat">
+            <a:ln w="8623" cap="flat">
               <a:solidFill>
                 <a:srgbClr val="EBEBEB">
                   <a:alpha val="100000"/>
@@ -2443,15 +2443,15 @@
           </p:nvSpPr>
           <p:spPr>
             <a:xfrm>
-              <a:off x="1615213" y="2073503"/>
-              <a:ext cx="0" cy="3649639"/>
+              <a:off x="1701364" y="2209169"/>
+              <a:ext cx="0" cy="3404141"/>
             </a:xfrm>
             <a:custGeom>
               <a:avLst/>
               <a:pathLst>
-                <a:path w="0" h="3649639">
+                <a:path w="0" h="3404141">
                   <a:moveTo>
-                    <a:pt x="0" y="3649639"/>
+                    <a:pt x="0" y="3404141"/>
                   </a:moveTo>
                   <a:lnTo>
                     <a:pt x="0" y="0"/>
@@ -2462,7 +2462,7 @@
                 </a:path>
               </a:pathLst>
             </a:custGeom>
-            <a:ln w="6775" cap="flat">
+            <a:ln w="8623" cap="flat">
               <a:solidFill>
                 <a:srgbClr val="EBEBEB">
                   <a:alpha val="100000"/>
@@ -2486,15 +2486,15 @@
           </p:nvSpPr>
           <p:spPr>
             <a:xfrm>
-              <a:off x="3387871" y="2073503"/>
-              <a:ext cx="0" cy="3649639"/>
+              <a:off x="3447406" y="2209169"/>
+              <a:ext cx="0" cy="3404141"/>
             </a:xfrm>
             <a:custGeom>
               <a:avLst/>
               <a:pathLst>
-                <a:path w="0" h="3649639">
+                <a:path w="0" h="3404141">
                   <a:moveTo>
-                    <a:pt x="0" y="3649639"/>
+                    <a:pt x="0" y="3404141"/>
                   </a:moveTo>
                   <a:lnTo>
                     <a:pt x="0" y="0"/>
@@ -2505,7 +2505,7 @@
                 </a:path>
               </a:pathLst>
             </a:custGeom>
-            <a:ln w="6775" cap="flat">
+            <a:ln w="8623" cap="flat">
               <a:solidFill>
                 <a:srgbClr val="EBEBEB">
                   <a:alpha val="100000"/>
@@ -2529,15 +2529,15 @@
           </p:nvSpPr>
           <p:spPr>
             <a:xfrm>
-              <a:off x="5160528" y="2073503"/>
-              <a:ext cx="0" cy="3649639"/>
+              <a:off x="5193449" y="2209169"/>
+              <a:ext cx="0" cy="3404141"/>
             </a:xfrm>
             <a:custGeom>
               <a:avLst/>
               <a:pathLst>
-                <a:path w="0" h="3649639">
+                <a:path w="0" h="3404141">
                   <a:moveTo>
-                    <a:pt x="0" y="3649639"/>
+                    <a:pt x="0" y="3404141"/>
                   </a:moveTo>
                   <a:lnTo>
                     <a:pt x="0" y="0"/>
@@ -2548,7 +2548,7 @@
                 </a:path>
               </a:pathLst>
             </a:custGeom>
-            <a:ln w="6775" cap="flat">
+            <a:ln w="8623" cap="flat">
               <a:solidFill>
                 <a:srgbClr val="EBEBEB">
                   <a:alpha val="100000"/>
@@ -2572,15 +2572,15 @@
           </p:nvSpPr>
           <p:spPr>
             <a:xfrm>
-              <a:off x="6933186" y="2073503"/>
-              <a:ext cx="0" cy="3649639"/>
+              <a:off x="6939491" y="2209169"/>
+              <a:ext cx="0" cy="3404141"/>
             </a:xfrm>
             <a:custGeom>
               <a:avLst/>
               <a:pathLst>
-                <a:path w="0" h="3649639">
+                <a:path w="0" h="3404141">
                   <a:moveTo>
-                    <a:pt x="0" y="3649639"/>
+                    <a:pt x="0" y="3404141"/>
                   </a:moveTo>
                   <a:lnTo>
                     <a:pt x="0" y="0"/>
@@ -2591,7 +2591,7 @@
                 </a:path>
               </a:pathLst>
             </a:custGeom>
-            <a:ln w="6775" cap="flat">
+            <a:ln w="8623" cap="flat">
               <a:solidFill>
                 <a:srgbClr val="EBEBEB">
                   <a:alpha val="100000"/>
@@ -2615,26 +2615,26 @@
           </p:nvSpPr>
           <p:spPr>
             <a:xfrm>
-              <a:off x="817517" y="5557249"/>
-              <a:ext cx="7799693" cy="0"/>
+              <a:off x="915645" y="5458577"/>
+              <a:ext cx="7682587" cy="0"/>
             </a:xfrm>
             <a:custGeom>
               <a:avLst/>
               <a:pathLst>
-                <a:path w="7799693" h="0">
+                <a:path w="7682587" h="0">
                   <a:moveTo>
                     <a:pt x="0" y="0"/>
                   </a:moveTo>
                   <a:lnTo>
-                    <a:pt x="7799693" y="0"/>
-                  </a:lnTo>
-                  <a:lnTo>
-                    <a:pt x="7799693" y="0"/>
+                    <a:pt x="7682587" y="0"/>
+                  </a:lnTo>
+                  <a:lnTo>
+                    <a:pt x="7682587" y="0"/>
                   </a:lnTo>
                 </a:path>
               </a:pathLst>
             </a:custGeom>
-            <a:ln w="13550" cap="flat">
+            <a:ln w="17246" cap="flat">
               <a:solidFill>
                 <a:srgbClr val="EBEBEB">
                   <a:alpha val="100000"/>
@@ -2658,26 +2658,26 @@
           </p:nvSpPr>
           <p:spPr>
             <a:xfrm>
-              <a:off x="817517" y="4727786"/>
-              <a:ext cx="7799693" cy="0"/>
+              <a:off x="915645" y="4684908"/>
+              <a:ext cx="7682587" cy="0"/>
             </a:xfrm>
             <a:custGeom>
               <a:avLst/>
               <a:pathLst>
-                <a:path w="7799693" h="0">
+                <a:path w="7682587" h="0">
                   <a:moveTo>
                     <a:pt x="0" y="0"/>
                   </a:moveTo>
                   <a:lnTo>
-                    <a:pt x="7799693" y="0"/>
-                  </a:lnTo>
-                  <a:lnTo>
-                    <a:pt x="7799693" y="0"/>
+                    <a:pt x="7682587" y="0"/>
+                  </a:lnTo>
+                  <a:lnTo>
+                    <a:pt x="7682587" y="0"/>
                   </a:lnTo>
                 </a:path>
               </a:pathLst>
             </a:custGeom>
-            <a:ln w="13550" cap="flat">
+            <a:ln w="17246" cap="flat">
               <a:solidFill>
                 <a:srgbClr val="EBEBEB">
                   <a:alpha val="100000"/>
@@ -2701,26 +2701,26 @@
           </p:nvSpPr>
           <p:spPr>
             <a:xfrm>
-              <a:off x="817517" y="3898322"/>
-              <a:ext cx="7799693" cy="0"/>
+              <a:off x="915645" y="3911240"/>
+              <a:ext cx="7682587" cy="0"/>
             </a:xfrm>
             <a:custGeom>
               <a:avLst/>
               <a:pathLst>
-                <a:path w="7799693" h="0">
+                <a:path w="7682587" h="0">
                   <a:moveTo>
                     <a:pt x="0" y="0"/>
                   </a:moveTo>
                   <a:lnTo>
-                    <a:pt x="7799693" y="0"/>
-                  </a:lnTo>
-                  <a:lnTo>
-                    <a:pt x="7799693" y="0"/>
+                    <a:pt x="7682587" y="0"/>
+                  </a:lnTo>
+                  <a:lnTo>
+                    <a:pt x="7682587" y="0"/>
                   </a:lnTo>
                 </a:path>
               </a:pathLst>
             </a:custGeom>
-            <a:ln w="13550" cap="flat">
+            <a:ln w="17246" cap="flat">
               <a:solidFill>
                 <a:srgbClr val="EBEBEB">
                   <a:alpha val="100000"/>
@@ -2744,26 +2744,26 @@
           </p:nvSpPr>
           <p:spPr>
             <a:xfrm>
-              <a:off x="817517" y="3068859"/>
-              <a:ext cx="7799693" cy="0"/>
+              <a:off x="915645" y="3137571"/>
+              <a:ext cx="7682587" cy="0"/>
             </a:xfrm>
             <a:custGeom>
               <a:avLst/>
               <a:pathLst>
-                <a:path w="7799693" h="0">
+                <a:path w="7682587" h="0">
                   <a:moveTo>
                     <a:pt x="0" y="0"/>
                   </a:moveTo>
                   <a:lnTo>
-                    <a:pt x="7799693" y="0"/>
-                  </a:lnTo>
-                  <a:lnTo>
-                    <a:pt x="7799693" y="0"/>
+                    <a:pt x="7682587" y="0"/>
+                  </a:lnTo>
+                  <a:lnTo>
+                    <a:pt x="7682587" y="0"/>
                   </a:lnTo>
                 </a:path>
               </a:pathLst>
             </a:custGeom>
-            <a:ln w="13550" cap="flat">
+            <a:ln w="17246" cap="flat">
               <a:solidFill>
                 <a:srgbClr val="EBEBEB">
                   <a:alpha val="100000"/>
@@ -2787,26 +2787,26 @@
           </p:nvSpPr>
           <p:spPr>
             <a:xfrm>
-              <a:off x="817517" y="2239395"/>
-              <a:ext cx="7799693" cy="0"/>
+              <a:off x="915645" y="2363903"/>
+              <a:ext cx="7682587" cy="0"/>
             </a:xfrm>
             <a:custGeom>
               <a:avLst/>
               <a:pathLst>
-                <a:path w="7799693" h="0">
+                <a:path w="7682587" h="0">
                   <a:moveTo>
                     <a:pt x="0" y="0"/>
                   </a:moveTo>
                   <a:lnTo>
-                    <a:pt x="7799693" y="0"/>
-                  </a:lnTo>
-                  <a:lnTo>
-                    <a:pt x="7799693" y="0"/>
+                    <a:pt x="7682587" y="0"/>
+                  </a:lnTo>
+                  <a:lnTo>
+                    <a:pt x="7682587" y="0"/>
                   </a:lnTo>
                 </a:path>
               </a:pathLst>
             </a:custGeom>
-            <a:ln w="13550" cap="flat">
+            <a:ln w="17246" cap="flat">
               <a:solidFill>
                 <a:srgbClr val="EBEBEB">
                   <a:alpha val="100000"/>
@@ -2830,15 +2830,15 @@
           </p:nvSpPr>
           <p:spPr>
             <a:xfrm>
-              <a:off x="2501542" y="2073503"/>
-              <a:ext cx="0" cy="3649639"/>
+              <a:off x="2574385" y="2209169"/>
+              <a:ext cx="0" cy="3404141"/>
             </a:xfrm>
             <a:custGeom>
               <a:avLst/>
               <a:pathLst>
-                <a:path w="0" h="3649639">
+                <a:path w="0" h="3404141">
                   <a:moveTo>
-                    <a:pt x="0" y="3649639"/>
+                    <a:pt x="0" y="3404141"/>
                   </a:moveTo>
                   <a:lnTo>
                     <a:pt x="0" y="0"/>
@@ -2849,7 +2849,7 @@
                 </a:path>
               </a:pathLst>
             </a:custGeom>
-            <a:ln w="13550" cap="flat">
+            <a:ln w="17246" cap="flat">
               <a:solidFill>
                 <a:srgbClr val="EBEBEB">
                   <a:alpha val="100000"/>
@@ -2873,15 +2873,15 @@
           </p:nvSpPr>
           <p:spPr>
             <a:xfrm>
-              <a:off x="4274200" y="2073503"/>
-              <a:ext cx="0" cy="3649639"/>
+              <a:off x="4320427" y="2209169"/>
+              <a:ext cx="0" cy="3404141"/>
             </a:xfrm>
             <a:custGeom>
               <a:avLst/>
               <a:pathLst>
-                <a:path w="0" h="3649639">
+                <a:path w="0" h="3404141">
                   <a:moveTo>
-                    <a:pt x="0" y="3649639"/>
+                    <a:pt x="0" y="3404141"/>
                   </a:moveTo>
                   <a:lnTo>
                     <a:pt x="0" y="0"/>
@@ -2892,7 +2892,7 @@
                 </a:path>
               </a:pathLst>
             </a:custGeom>
-            <a:ln w="13550" cap="flat">
+            <a:ln w="17246" cap="flat">
               <a:solidFill>
                 <a:srgbClr val="EBEBEB">
                   <a:alpha val="100000"/>
@@ -2916,15 +2916,15 @@
           </p:nvSpPr>
           <p:spPr>
             <a:xfrm>
-              <a:off x="6046857" y="2073503"/>
-              <a:ext cx="0" cy="3649639"/>
+              <a:off x="6066470" y="2209169"/>
+              <a:ext cx="0" cy="3404141"/>
             </a:xfrm>
             <a:custGeom>
               <a:avLst/>
               <a:pathLst>
-                <a:path w="0" h="3649639">
+                <a:path w="0" h="3404141">
                   <a:moveTo>
-                    <a:pt x="0" y="3649639"/>
+                    <a:pt x="0" y="3404141"/>
                   </a:moveTo>
                   <a:lnTo>
                     <a:pt x="0" y="0"/>
@@ -2935,7 +2935,7 @@
                 </a:path>
               </a:pathLst>
             </a:custGeom>
-            <a:ln w="13550" cap="flat">
+            <a:ln w="17246" cap="flat">
               <a:solidFill>
                 <a:srgbClr val="EBEBEB">
                   <a:alpha val="100000"/>
@@ -2959,15 +2959,15 @@
           </p:nvSpPr>
           <p:spPr>
             <a:xfrm>
-              <a:off x="7819515" y="2073503"/>
-              <a:ext cx="0" cy="3649639"/>
+              <a:off x="7812512" y="2209169"/>
+              <a:ext cx="0" cy="3404141"/>
             </a:xfrm>
             <a:custGeom>
               <a:avLst/>
               <a:pathLst>
-                <a:path w="0" h="3649639">
+                <a:path w="0" h="3404141">
                   <a:moveTo>
-                    <a:pt x="0" y="3649639"/>
+                    <a:pt x="0" y="3404141"/>
                   </a:moveTo>
                   <a:lnTo>
                     <a:pt x="0" y="0"/>
@@ -2978,7 +2978,7 @@
                 </a:path>
               </a:pathLst>
             </a:custGeom>
-            <a:ln w="13550" cap="flat">
+            <a:ln w="17246" cap="flat">
               <a:solidFill>
                 <a:srgbClr val="EBEBEB">
                   <a:alpha val="100000"/>
@@ -3002,528 +3002,528 @@
           </p:nvSpPr>
           <p:spPr>
             <a:xfrm>
-              <a:off x="817517" y="2073503"/>
-              <a:ext cx="7370972" cy="3449235"/>
+              <a:off x="915645" y="2209169"/>
+              <a:ext cx="7260303" cy="3217218"/>
             </a:xfrm>
             <a:custGeom>
               <a:avLst/>
               <a:pathLst>
-                <a:path w="7370972" h="3449235">
+                <a:path w="7260303" h="3217218">
                   <a:moveTo>
-                    <a:pt x="1588181" y="0"/>
+                    <a:pt x="1564336" y="0"/>
                   </a:moveTo>
                   <a:lnTo>
-                    <a:pt x="1626053" y="105317"/>
-                  </a:lnTo>
-                  <a:lnTo>
-                    <a:pt x="1703687" y="308241"/>
-                  </a:lnTo>
-                  <a:lnTo>
-                    <a:pt x="1781321" y="498977"/>
-                  </a:lnTo>
-                  <a:lnTo>
-                    <a:pt x="1858955" y="678257"/>
-                  </a:lnTo>
-                  <a:lnTo>
-                    <a:pt x="1936589" y="846768"/>
-                  </a:lnTo>
-                  <a:lnTo>
-                    <a:pt x="2014223" y="1005157"/>
-                  </a:lnTo>
-                  <a:lnTo>
-                    <a:pt x="2091857" y="1154033"/>
-                  </a:lnTo>
-                  <a:lnTo>
-                    <a:pt x="2169491" y="1293967"/>
-                  </a:lnTo>
-                  <a:lnTo>
-                    <a:pt x="2247125" y="1425495"/>
-                  </a:lnTo>
-                  <a:lnTo>
-                    <a:pt x="2324759" y="1549123"/>
-                  </a:lnTo>
-                  <a:lnTo>
-                    <a:pt x="2402393" y="1665326"/>
-                  </a:lnTo>
-                  <a:lnTo>
-                    <a:pt x="2480027" y="1774549"/>
-                  </a:lnTo>
-                  <a:lnTo>
-                    <a:pt x="2557661" y="1877212"/>
-                  </a:lnTo>
-                  <a:lnTo>
-                    <a:pt x="2635295" y="1973708"/>
-                  </a:lnTo>
-                  <a:lnTo>
-                    <a:pt x="2712930" y="2064408"/>
-                  </a:lnTo>
-                  <a:lnTo>
-                    <a:pt x="2790564" y="2149660"/>
-                  </a:lnTo>
-                  <a:lnTo>
-                    <a:pt x="2868198" y="2229792"/>
-                  </a:lnTo>
-                  <a:lnTo>
-                    <a:pt x="2945832" y="2305110"/>
-                  </a:lnTo>
-                  <a:lnTo>
-                    <a:pt x="3023466" y="2375904"/>
-                  </a:lnTo>
-                  <a:lnTo>
-                    <a:pt x="3101100" y="2442447"/>
-                  </a:lnTo>
-                  <a:lnTo>
-                    <a:pt x="3178734" y="2504992"/>
-                  </a:lnTo>
-                  <a:lnTo>
-                    <a:pt x="3256368" y="2563781"/>
-                  </a:lnTo>
-                  <a:lnTo>
-                    <a:pt x="3334002" y="2619038"/>
-                  </a:lnTo>
-                  <a:lnTo>
-                    <a:pt x="3411636" y="2651120"/>
-                  </a:lnTo>
-                  <a:lnTo>
-                    <a:pt x="3489270" y="2641410"/>
-                  </a:lnTo>
-                  <a:lnTo>
-                    <a:pt x="3566904" y="2631587"/>
-                  </a:lnTo>
-                  <a:lnTo>
-                    <a:pt x="3644538" y="2621649"/>
-                  </a:lnTo>
-                  <a:lnTo>
-                    <a:pt x="3722172" y="2611596"/>
-                  </a:lnTo>
-                  <a:lnTo>
-                    <a:pt x="3799806" y="2601425"/>
-                  </a:lnTo>
-                  <a:lnTo>
-                    <a:pt x="3877440" y="2591136"/>
-                  </a:lnTo>
-                  <a:lnTo>
-                    <a:pt x="3955074" y="2580726"/>
-                  </a:lnTo>
-                  <a:lnTo>
-                    <a:pt x="4032708" y="2570195"/>
-                  </a:lnTo>
-                  <a:lnTo>
-                    <a:pt x="4110342" y="2559542"/>
-                  </a:lnTo>
-                  <a:lnTo>
-                    <a:pt x="4187976" y="2548764"/>
-                  </a:lnTo>
-                  <a:lnTo>
-                    <a:pt x="4265610" y="2537860"/>
-                  </a:lnTo>
-                  <a:lnTo>
-                    <a:pt x="4343244" y="2526829"/>
-                  </a:lnTo>
-                  <a:lnTo>
-                    <a:pt x="4420879" y="2515670"/>
-                  </a:lnTo>
-                  <a:lnTo>
-                    <a:pt x="4498513" y="2504380"/>
-                  </a:lnTo>
-                  <a:lnTo>
-                    <a:pt x="4576147" y="2492959"/>
-                  </a:lnTo>
-                  <a:lnTo>
-                    <a:pt x="4653781" y="2481405"/>
-                  </a:lnTo>
-                  <a:lnTo>
-                    <a:pt x="4731415" y="2469716"/>
-                  </a:lnTo>
-                  <a:lnTo>
-                    <a:pt x="4809049" y="2457890"/>
-                  </a:lnTo>
-                  <a:lnTo>
-                    <a:pt x="4886683" y="2445927"/>
-                  </a:lnTo>
-                  <a:lnTo>
-                    <a:pt x="4964317" y="2433824"/>
-                  </a:lnTo>
-                  <a:lnTo>
-                    <a:pt x="5041951" y="2421580"/>
-                  </a:lnTo>
-                  <a:lnTo>
-                    <a:pt x="5119585" y="2409193"/>
-                  </a:lnTo>
-                  <a:lnTo>
-                    <a:pt x="5197219" y="2396662"/>
-                  </a:lnTo>
-                  <a:lnTo>
-                    <a:pt x="5274853" y="2383984"/>
-                  </a:lnTo>
-                  <a:lnTo>
-                    <a:pt x="5352487" y="2371159"/>
-                  </a:lnTo>
-                  <a:lnTo>
-                    <a:pt x="5430121" y="2358184"/>
-                  </a:lnTo>
-                  <a:lnTo>
-                    <a:pt x="5507755" y="2345058"/>
-                  </a:lnTo>
-                  <a:lnTo>
-                    <a:pt x="5585389" y="2331779"/>
-                  </a:lnTo>
-                  <a:lnTo>
-                    <a:pt x="5663023" y="2318345"/>
-                  </a:lnTo>
-                  <a:lnTo>
-                    <a:pt x="5740657" y="2304754"/>
-                  </a:lnTo>
-                  <a:lnTo>
-                    <a:pt x="5818291" y="2291005"/>
-                  </a:lnTo>
-                  <a:lnTo>
-                    <a:pt x="5895925" y="2277096"/>
-                  </a:lnTo>
-                  <a:lnTo>
-                    <a:pt x="5973559" y="2263024"/>
-                  </a:lnTo>
-                  <a:lnTo>
-                    <a:pt x="6051193" y="2248788"/>
-                  </a:lnTo>
-                  <a:lnTo>
-                    <a:pt x="6128827" y="2234386"/>
-                  </a:lnTo>
-                  <a:lnTo>
-                    <a:pt x="6206462" y="2219816"/>
-                  </a:lnTo>
-                  <a:lnTo>
-                    <a:pt x="6284096" y="2205077"/>
-                  </a:lnTo>
-                  <a:lnTo>
-                    <a:pt x="6361730" y="2190165"/>
-                  </a:lnTo>
-                  <a:lnTo>
-                    <a:pt x="6439364" y="2175080"/>
-                  </a:lnTo>
-                  <a:lnTo>
-                    <a:pt x="6516998" y="2159818"/>
-                  </a:lnTo>
-                  <a:lnTo>
-                    <a:pt x="6594632" y="2144379"/>
-                  </a:lnTo>
-                  <a:lnTo>
-                    <a:pt x="6672266" y="2128759"/>
-                  </a:lnTo>
-                  <a:lnTo>
-                    <a:pt x="6749900" y="2112958"/>
-                  </a:lnTo>
-                  <a:lnTo>
-                    <a:pt x="6827534" y="2096972"/>
-                  </a:lnTo>
-                  <a:lnTo>
-                    <a:pt x="6905168" y="2080799"/>
-                  </a:lnTo>
-                  <a:lnTo>
-                    <a:pt x="6982802" y="2064439"/>
-                  </a:lnTo>
-                  <a:lnTo>
-                    <a:pt x="7060436" y="2047887"/>
-                  </a:lnTo>
-                  <a:lnTo>
-                    <a:pt x="7138070" y="2031142"/>
-                  </a:lnTo>
-                  <a:lnTo>
-                    <a:pt x="7215704" y="2014202"/>
-                  </a:lnTo>
-                  <a:lnTo>
-                    <a:pt x="7293338" y="1997064"/>
-                  </a:lnTo>
-                  <a:lnTo>
-                    <a:pt x="7370972" y="1979727"/>
-                  </a:lnTo>
-                  <a:lnTo>
-                    <a:pt x="7370972" y="3449235"/>
-                  </a:lnTo>
-                  <a:lnTo>
-                    <a:pt x="7293338" y="3447030"/>
-                  </a:lnTo>
-                  <a:lnTo>
-                    <a:pt x="7215704" y="3444683"/>
-                  </a:lnTo>
-                  <a:lnTo>
-                    <a:pt x="7138070" y="3442187"/>
-                  </a:lnTo>
-                  <a:lnTo>
-                    <a:pt x="7060436" y="3439531"/>
-                  </a:lnTo>
-                  <a:lnTo>
-                    <a:pt x="6982802" y="3436706"/>
-                  </a:lnTo>
-                  <a:lnTo>
-                    <a:pt x="6905168" y="3433700"/>
-                  </a:lnTo>
-                  <a:lnTo>
-                    <a:pt x="6827534" y="3430502"/>
-                  </a:lnTo>
-                  <a:lnTo>
-                    <a:pt x="6749900" y="3427099"/>
-                  </a:lnTo>
-                  <a:lnTo>
-                    <a:pt x="6672266" y="3423479"/>
-                  </a:lnTo>
-                  <a:lnTo>
-                    <a:pt x="6594632" y="3419628"/>
-                  </a:lnTo>
-                  <a:lnTo>
-                    <a:pt x="6516998" y="3415531"/>
-                  </a:lnTo>
-                  <a:lnTo>
-                    <a:pt x="6439364" y="3411171"/>
-                  </a:lnTo>
-                  <a:lnTo>
-                    <a:pt x="6361730" y="3406534"/>
-                  </a:lnTo>
-                  <a:lnTo>
-                    <a:pt x="6284096" y="3401599"/>
-                  </a:lnTo>
-                  <a:lnTo>
-                    <a:pt x="6206462" y="3396350"/>
-                  </a:lnTo>
-                  <a:lnTo>
-                    <a:pt x="6128827" y="3390765"/>
-                  </a:lnTo>
-                  <a:lnTo>
-                    <a:pt x="6051193" y="3384823"/>
-                  </a:lnTo>
-                  <a:lnTo>
-                    <a:pt x="5973559" y="3378502"/>
-                  </a:lnTo>
-                  <a:lnTo>
-                    <a:pt x="5895925" y="3371776"/>
-                  </a:lnTo>
-                  <a:lnTo>
-                    <a:pt x="5818291" y="3364621"/>
-                  </a:lnTo>
-                  <a:lnTo>
-                    <a:pt x="5740657" y="3357009"/>
-                  </a:lnTo>
-                  <a:lnTo>
-                    <a:pt x="5663023" y="3348910"/>
-                  </a:lnTo>
-                  <a:lnTo>
-                    <a:pt x="5585389" y="3340293"/>
-                  </a:lnTo>
-                  <a:lnTo>
-                    <a:pt x="5507755" y="3331126"/>
-                  </a:lnTo>
-                  <a:lnTo>
-                    <a:pt x="5430121" y="3321373"/>
-                  </a:lnTo>
-                  <a:lnTo>
-                    <a:pt x="5352487" y="3310997"/>
-                  </a:lnTo>
-                  <a:lnTo>
-                    <a:pt x="5274853" y="3299958"/>
-                  </a:lnTo>
-                  <a:lnTo>
-                    <a:pt x="5197219" y="3288213"/>
-                  </a:lnTo>
-                  <a:lnTo>
-                    <a:pt x="5119585" y="3275718"/>
-                  </a:lnTo>
-                  <a:lnTo>
-                    <a:pt x="5041951" y="3262425"/>
-                  </a:lnTo>
-                  <a:lnTo>
-                    <a:pt x="4964317" y="3248281"/>
-                  </a:lnTo>
-                  <a:lnTo>
-                    <a:pt x="4886683" y="3233235"/>
-                  </a:lnTo>
-                  <a:lnTo>
-                    <a:pt x="4809049" y="3217226"/>
-                  </a:lnTo>
-                  <a:lnTo>
-                    <a:pt x="4731415" y="3200195"/>
-                  </a:lnTo>
-                  <a:lnTo>
-                    <a:pt x="4653781" y="3182075"/>
-                  </a:lnTo>
-                  <a:lnTo>
-                    <a:pt x="4576147" y="3162797"/>
-                  </a:lnTo>
-                  <a:lnTo>
-                    <a:pt x="4498513" y="3142287"/>
-                  </a:lnTo>
-                  <a:lnTo>
-                    <a:pt x="4420879" y="3120467"/>
-                  </a:lnTo>
-                  <a:lnTo>
-                    <a:pt x="4343244" y="3097252"/>
-                  </a:lnTo>
-                  <a:lnTo>
-                    <a:pt x="4265610" y="3072554"/>
-                  </a:lnTo>
-                  <a:lnTo>
-                    <a:pt x="4187976" y="3046278"/>
-                  </a:lnTo>
-                  <a:lnTo>
-                    <a:pt x="4110342" y="3018322"/>
-                  </a:lnTo>
-                  <a:lnTo>
-                    <a:pt x="4032708" y="2988580"/>
-                  </a:lnTo>
-                  <a:lnTo>
-                    <a:pt x="3955074" y="2956938"/>
-                  </a:lnTo>
-                  <a:lnTo>
-                    <a:pt x="3877440" y="2923273"/>
-                  </a:lnTo>
-                  <a:lnTo>
-                    <a:pt x="3799806" y="2887457"/>
-                  </a:lnTo>
-                  <a:lnTo>
-                    <a:pt x="3722172" y="2849352"/>
-                  </a:lnTo>
-                  <a:lnTo>
-                    <a:pt x="3644538" y="2808812"/>
-                  </a:lnTo>
-                  <a:lnTo>
-                    <a:pt x="3566904" y="2765682"/>
-                  </a:lnTo>
-                  <a:lnTo>
-                    <a:pt x="3489270" y="2719796"/>
-                  </a:lnTo>
-                  <a:lnTo>
-                    <a:pt x="3411636" y="2670977"/>
-                  </a:lnTo>
-                  <a:lnTo>
-                    <a:pt x="3334002" y="2660718"/>
-                  </a:lnTo>
-                  <a:lnTo>
-                    <a:pt x="3256368" y="2670206"/>
-                  </a:lnTo>
-                  <a:lnTo>
-                    <a:pt x="3178734" y="2679584"/>
-                  </a:lnTo>
-                  <a:lnTo>
-                    <a:pt x="3101100" y="2688854"/>
-                  </a:lnTo>
-                  <a:lnTo>
-                    <a:pt x="3023466" y="2698017"/>
-                  </a:lnTo>
-                  <a:lnTo>
-                    <a:pt x="2945832" y="2707074"/>
-                  </a:lnTo>
-                  <a:lnTo>
-                    <a:pt x="2868198" y="2716027"/>
-                  </a:lnTo>
-                  <a:lnTo>
-                    <a:pt x="2790564" y="2724877"/>
-                  </a:lnTo>
-                  <a:lnTo>
-                    <a:pt x="2712930" y="2733625"/>
-                  </a:lnTo>
-                  <a:lnTo>
-                    <a:pt x="2635295" y="2742272"/>
-                  </a:lnTo>
-                  <a:lnTo>
-                    <a:pt x="2557661" y="2750819"/>
-                  </a:lnTo>
-                  <a:lnTo>
-                    <a:pt x="2480027" y="2759268"/>
-                  </a:lnTo>
-                  <a:lnTo>
-                    <a:pt x="2402393" y="2767619"/>
-                  </a:lnTo>
-                  <a:lnTo>
-                    <a:pt x="2324759" y="2775874"/>
-                  </a:lnTo>
-                  <a:lnTo>
-                    <a:pt x="2247125" y="2784034"/>
-                  </a:lnTo>
-                  <a:lnTo>
-                    <a:pt x="2169491" y="2792100"/>
-                  </a:lnTo>
-                  <a:lnTo>
-                    <a:pt x="2091857" y="2800073"/>
-                  </a:lnTo>
-                  <a:lnTo>
-                    <a:pt x="2014223" y="2807954"/>
-                  </a:lnTo>
-                  <a:lnTo>
-                    <a:pt x="1936589" y="2815744"/>
-                  </a:lnTo>
-                  <a:lnTo>
-                    <a:pt x="1858955" y="2823444"/>
-                  </a:lnTo>
-                  <a:lnTo>
-                    <a:pt x="1781321" y="2831056"/>
-                  </a:lnTo>
-                  <a:lnTo>
-                    <a:pt x="1703687" y="2838580"/>
-                  </a:lnTo>
-                  <a:lnTo>
-                    <a:pt x="1626053" y="2846017"/>
-                  </a:lnTo>
-                  <a:lnTo>
-                    <a:pt x="1548419" y="2853368"/>
-                  </a:lnTo>
-                  <a:lnTo>
-                    <a:pt x="1470785" y="2860635"/>
-                  </a:lnTo>
-                  <a:lnTo>
-                    <a:pt x="1393151" y="2867817"/>
-                  </a:lnTo>
-                  <a:lnTo>
-                    <a:pt x="1315517" y="2874917"/>
-                  </a:lnTo>
-                  <a:lnTo>
-                    <a:pt x="1237883" y="2881936"/>
-                  </a:lnTo>
-                  <a:lnTo>
-                    <a:pt x="1160249" y="2888873"/>
-                  </a:lnTo>
-                  <a:lnTo>
-                    <a:pt x="1082615" y="2895730"/>
-                  </a:lnTo>
-                  <a:lnTo>
-                    <a:pt x="1004981" y="2902509"/>
-                  </a:lnTo>
-                  <a:lnTo>
-                    <a:pt x="927346" y="2909209"/>
-                  </a:lnTo>
-                  <a:lnTo>
-                    <a:pt x="849712" y="2915832"/>
-                  </a:lnTo>
-                  <a:lnTo>
-                    <a:pt x="772078" y="2922378"/>
-                  </a:lnTo>
-                  <a:lnTo>
-                    <a:pt x="694444" y="2928849"/>
-                  </a:lnTo>
-                  <a:lnTo>
-                    <a:pt x="616810" y="2935246"/>
-                  </a:lnTo>
-                  <a:lnTo>
-                    <a:pt x="539176" y="2941569"/>
-                  </a:lnTo>
-                  <a:lnTo>
-                    <a:pt x="461542" y="2947819"/>
-                  </a:lnTo>
-                  <a:lnTo>
-                    <a:pt x="383908" y="2953996"/>
-                  </a:lnTo>
-                  <a:lnTo>
-                    <a:pt x="306274" y="2960103"/>
-                  </a:lnTo>
-                  <a:lnTo>
-                    <a:pt x="228640" y="2966139"/>
-                  </a:lnTo>
-                  <a:lnTo>
-                    <a:pt x="151006" y="2972106"/>
-                  </a:lnTo>
-                  <a:lnTo>
-                    <a:pt x="73372" y="2978004"/>
-                  </a:lnTo>
-                  <a:lnTo>
-                    <a:pt x="0" y="2983514"/>
+                    <a:pt x="1601639" y="98232"/>
+                  </a:lnTo>
+                  <a:lnTo>
+                    <a:pt x="1678107" y="287507"/>
+                  </a:lnTo>
+                  <a:lnTo>
+                    <a:pt x="1754576" y="465413"/>
+                  </a:lnTo>
+                  <a:lnTo>
+                    <a:pt x="1831044" y="632633"/>
+                  </a:lnTo>
+                  <a:lnTo>
+                    <a:pt x="1907513" y="789809"/>
+                  </a:lnTo>
+                  <a:lnTo>
+                    <a:pt x="1983981" y="937544"/>
+                  </a:lnTo>
+                  <a:lnTo>
+                    <a:pt x="2060450" y="1076405"/>
+                  </a:lnTo>
+                  <a:lnTo>
+                    <a:pt x="2136918" y="1206926"/>
+                  </a:lnTo>
+                  <a:lnTo>
+                    <a:pt x="2213386" y="1329607"/>
+                  </a:lnTo>
+                  <a:lnTo>
+                    <a:pt x="2289855" y="1444920"/>
+                  </a:lnTo>
+                  <a:lnTo>
+                    <a:pt x="2366323" y="1553306"/>
+                  </a:lnTo>
+                  <a:lnTo>
+                    <a:pt x="2442792" y="1655182"/>
+                  </a:lnTo>
+                  <a:lnTo>
+                    <a:pt x="2519260" y="1750938"/>
+                  </a:lnTo>
+                  <a:lnTo>
+                    <a:pt x="2595729" y="1840944"/>
+                  </a:lnTo>
+                  <a:lnTo>
+                    <a:pt x="2672197" y="1925543"/>
+                  </a:lnTo>
+                  <a:lnTo>
+                    <a:pt x="2748666" y="2005060"/>
+                  </a:lnTo>
+                  <a:lnTo>
+                    <a:pt x="2825134" y="2079802"/>
+                  </a:lnTo>
+                  <a:lnTo>
+                    <a:pt x="2901602" y="2150054"/>
+                  </a:lnTo>
+                  <a:lnTo>
+                    <a:pt x="2978071" y="2216086"/>
+                  </a:lnTo>
+                  <a:lnTo>
+                    <a:pt x="3054539" y="2278152"/>
+                  </a:lnTo>
+                  <a:lnTo>
+                    <a:pt x="3131008" y="2336490"/>
+                  </a:lnTo>
+                  <a:lnTo>
+                    <a:pt x="3207476" y="2391325"/>
+                  </a:lnTo>
+                  <a:lnTo>
+                    <a:pt x="3283945" y="2442865"/>
+                  </a:lnTo>
+                  <a:lnTo>
+                    <a:pt x="3360413" y="2472789"/>
+                  </a:lnTo>
+                  <a:lnTo>
+                    <a:pt x="3436881" y="2463732"/>
+                  </a:lnTo>
+                  <a:lnTo>
+                    <a:pt x="3513350" y="2454570"/>
+                  </a:lnTo>
+                  <a:lnTo>
+                    <a:pt x="3589818" y="2445301"/>
+                  </a:lnTo>
+                  <a:lnTo>
+                    <a:pt x="3666287" y="2435923"/>
+                  </a:lnTo>
+                  <a:lnTo>
+                    <a:pt x="3742755" y="2426437"/>
+                  </a:lnTo>
+                  <a:lnTo>
+                    <a:pt x="3819224" y="2416839"/>
+                  </a:lnTo>
+                  <a:lnTo>
+                    <a:pt x="3895692" y="2407130"/>
+                  </a:lnTo>
+                  <a:lnTo>
+                    <a:pt x="3972160" y="2397308"/>
+                  </a:lnTo>
+                  <a:lnTo>
+                    <a:pt x="4048629" y="2387371"/>
+                  </a:lnTo>
+                  <a:lnTo>
+                    <a:pt x="4125097" y="2377318"/>
+                  </a:lnTo>
+                  <a:lnTo>
+                    <a:pt x="4201566" y="2367147"/>
+                  </a:lnTo>
+                  <a:lnTo>
+                    <a:pt x="4278034" y="2356859"/>
+                  </a:lnTo>
+                  <a:lnTo>
+                    <a:pt x="4354503" y="2346450"/>
+                  </a:lnTo>
+                  <a:lnTo>
+                    <a:pt x="4430971" y="2335920"/>
+                  </a:lnTo>
+                  <a:lnTo>
+                    <a:pt x="4507439" y="2325267"/>
+                  </a:lnTo>
+                  <a:lnTo>
+                    <a:pt x="4583908" y="2314490"/>
+                  </a:lnTo>
+                  <a:lnTo>
+                    <a:pt x="4660376" y="2303587"/>
+                  </a:lnTo>
+                  <a:lnTo>
+                    <a:pt x="4736845" y="2292557"/>
+                  </a:lnTo>
+                  <a:lnTo>
+                    <a:pt x="4813313" y="2281398"/>
+                  </a:lnTo>
+                  <a:lnTo>
+                    <a:pt x="4889782" y="2270110"/>
+                  </a:lnTo>
+                  <a:lnTo>
+                    <a:pt x="4966250" y="2258689"/>
+                  </a:lnTo>
+                  <a:lnTo>
+                    <a:pt x="5042719" y="2247136"/>
+                  </a:lnTo>
+                  <a:lnTo>
+                    <a:pt x="5119187" y="2235447"/>
+                  </a:lnTo>
+                  <a:lnTo>
+                    <a:pt x="5195655" y="2223623"/>
+                  </a:lnTo>
+                  <a:lnTo>
+                    <a:pt x="5272124" y="2211660"/>
+                  </a:lnTo>
+                  <a:lnTo>
+                    <a:pt x="5348592" y="2199558"/>
+                  </a:lnTo>
+                  <a:lnTo>
+                    <a:pt x="5425061" y="2187315"/>
+                  </a:lnTo>
+                  <a:lnTo>
+                    <a:pt x="5501529" y="2174929"/>
+                  </a:lnTo>
+                  <a:lnTo>
+                    <a:pt x="5577998" y="2162399"/>
+                  </a:lnTo>
+                  <a:lnTo>
+                    <a:pt x="5654466" y="2149722"/>
+                  </a:lnTo>
+                  <a:lnTo>
+                    <a:pt x="5730934" y="2136898"/>
+                  </a:lnTo>
+                  <a:lnTo>
+                    <a:pt x="5807403" y="2123924"/>
+                  </a:lnTo>
+                  <a:lnTo>
+                    <a:pt x="5883871" y="2110799"/>
+                  </a:lnTo>
+                  <a:lnTo>
+                    <a:pt x="5960340" y="2097520"/>
+                  </a:lnTo>
+                  <a:lnTo>
+                    <a:pt x="6036808" y="2084087"/>
+                  </a:lnTo>
+                  <a:lnTo>
+                    <a:pt x="6113277" y="2070498"/>
+                  </a:lnTo>
+                  <a:lnTo>
+                    <a:pt x="6189745" y="2056749"/>
+                  </a:lnTo>
+                  <a:lnTo>
+                    <a:pt x="6266213" y="2042841"/>
+                  </a:lnTo>
+                  <a:lnTo>
+                    <a:pt x="6342682" y="2028770"/>
+                  </a:lnTo>
+                  <a:lnTo>
+                    <a:pt x="6419150" y="2014535"/>
+                  </a:lnTo>
+                  <a:lnTo>
+                    <a:pt x="6495619" y="2000134"/>
+                  </a:lnTo>
+                  <a:lnTo>
+                    <a:pt x="6572087" y="1985565"/>
+                  </a:lnTo>
+                  <a:lnTo>
+                    <a:pt x="6648556" y="1970827"/>
+                  </a:lnTo>
+                  <a:lnTo>
+                    <a:pt x="6725024" y="1955916"/>
+                  </a:lnTo>
+                  <a:lnTo>
+                    <a:pt x="6801492" y="1940832"/>
+                  </a:lnTo>
+                  <a:lnTo>
+                    <a:pt x="6877961" y="1925571"/>
+                  </a:lnTo>
+                  <a:lnTo>
+                    <a:pt x="6954429" y="1910133"/>
+                  </a:lnTo>
+                  <a:lnTo>
+                    <a:pt x="7030898" y="1894515"/>
+                  </a:lnTo>
+                  <a:lnTo>
+                    <a:pt x="7107366" y="1878714"/>
+                  </a:lnTo>
+                  <a:lnTo>
+                    <a:pt x="7183835" y="1862729"/>
+                  </a:lnTo>
+                  <a:lnTo>
+                    <a:pt x="7260303" y="1846558"/>
+                  </a:lnTo>
+                  <a:lnTo>
+                    <a:pt x="7260303" y="3217218"/>
+                  </a:lnTo>
+                  <a:lnTo>
+                    <a:pt x="7183835" y="3215161"/>
+                  </a:lnTo>
+                  <a:lnTo>
+                    <a:pt x="7107366" y="3212972"/>
+                  </a:lnTo>
+                  <a:lnTo>
+                    <a:pt x="7030898" y="3210644"/>
+                  </a:lnTo>
+                  <a:lnTo>
+                    <a:pt x="6954429" y="3208167"/>
+                  </a:lnTo>
+                  <a:lnTo>
+                    <a:pt x="6877961" y="3205531"/>
+                  </a:lnTo>
+                  <a:lnTo>
+                    <a:pt x="6801492" y="3202727"/>
+                  </a:lnTo>
+                  <a:lnTo>
+                    <a:pt x="6725024" y="3199744"/>
+                  </a:lnTo>
+                  <a:lnTo>
+                    <a:pt x="6648556" y="3196571"/>
+                  </a:lnTo>
+                  <a:lnTo>
+                    <a:pt x="6572087" y="3193194"/>
+                  </a:lnTo>
+                  <a:lnTo>
+                    <a:pt x="6495619" y="3189602"/>
+                  </a:lnTo>
+                  <a:lnTo>
+                    <a:pt x="6419150" y="3185780"/>
+                  </a:lnTo>
+                  <a:lnTo>
+                    <a:pt x="6342682" y="3181714"/>
+                  </a:lnTo>
+                  <a:lnTo>
+                    <a:pt x="6266213" y="3177389"/>
+                  </a:lnTo>
+                  <a:lnTo>
+                    <a:pt x="6189745" y="3172786"/>
+                  </a:lnTo>
+                  <a:lnTo>
+                    <a:pt x="6113277" y="3167890"/>
+                  </a:lnTo>
+                  <a:lnTo>
+                    <a:pt x="6036808" y="3162681"/>
+                  </a:lnTo>
+                  <a:lnTo>
+                    <a:pt x="5960340" y="3157139"/>
+                  </a:lnTo>
+                  <a:lnTo>
+                    <a:pt x="5883871" y="3151242"/>
+                  </a:lnTo>
+                  <a:lnTo>
+                    <a:pt x="5807403" y="3144969"/>
+                  </a:lnTo>
+                  <a:lnTo>
+                    <a:pt x="5730934" y="3138295"/>
+                  </a:lnTo>
+                  <a:lnTo>
+                    <a:pt x="5654466" y="3131195"/>
+                  </a:lnTo>
+                  <a:lnTo>
+                    <a:pt x="5577998" y="3123641"/>
+                  </a:lnTo>
+                  <a:lnTo>
+                    <a:pt x="5501529" y="3115604"/>
+                  </a:lnTo>
+                  <a:lnTo>
+                    <a:pt x="5425061" y="3107054"/>
+                  </a:lnTo>
+                  <a:lnTo>
+                    <a:pt x="5348592" y="3097957"/>
+                  </a:lnTo>
+                  <a:lnTo>
+                    <a:pt x="5272124" y="3088279"/>
+                  </a:lnTo>
+                  <a:lnTo>
+                    <a:pt x="5195655" y="3077982"/>
+                  </a:lnTo>
+                  <a:lnTo>
+                    <a:pt x="5119187" y="3067027"/>
+                  </a:lnTo>
+                  <a:lnTo>
+                    <a:pt x="5042719" y="3055373"/>
+                  </a:lnTo>
+                  <a:lnTo>
+                    <a:pt x="4966250" y="3042973"/>
+                  </a:lnTo>
+                  <a:lnTo>
+                    <a:pt x="4889782" y="3029781"/>
+                  </a:lnTo>
+                  <a:lnTo>
+                    <a:pt x="4813313" y="3015747"/>
+                  </a:lnTo>
+                  <a:lnTo>
+                    <a:pt x="4736845" y="3000815"/>
+                  </a:lnTo>
+                  <a:lnTo>
+                    <a:pt x="4660376" y="2984929"/>
+                  </a:lnTo>
+                  <a:lnTo>
+                    <a:pt x="4583908" y="2968028"/>
+                  </a:lnTo>
+                  <a:lnTo>
+                    <a:pt x="4507439" y="2950047"/>
+                  </a:lnTo>
+                  <a:lnTo>
+                    <a:pt x="4430971" y="2930917"/>
+                  </a:lnTo>
+                  <a:lnTo>
+                    <a:pt x="4354503" y="2910565"/>
+                  </a:lnTo>
+                  <a:lnTo>
+                    <a:pt x="4278034" y="2888912"/>
+                  </a:lnTo>
+                  <a:lnTo>
+                    <a:pt x="4201566" y="2865875"/>
+                  </a:lnTo>
+                  <a:lnTo>
+                    <a:pt x="4125097" y="2841366"/>
+                  </a:lnTo>
+                  <a:lnTo>
+                    <a:pt x="4048629" y="2815291"/>
+                  </a:lnTo>
+                  <a:lnTo>
+                    <a:pt x="3972160" y="2787549"/>
+                  </a:lnTo>
+                  <a:lnTo>
+                    <a:pt x="3895692" y="2758035"/>
+                  </a:lnTo>
+                  <a:lnTo>
+                    <a:pt x="3819224" y="2726635"/>
+                  </a:lnTo>
+                  <a:lnTo>
+                    <a:pt x="3742755" y="2693228"/>
+                  </a:lnTo>
+                  <a:lnTo>
+                    <a:pt x="3666287" y="2657687"/>
+                  </a:lnTo>
+                  <a:lnTo>
+                    <a:pt x="3589818" y="2619874"/>
+                  </a:lnTo>
+                  <a:lnTo>
+                    <a:pt x="3513350" y="2579645"/>
+                  </a:lnTo>
+                  <a:lnTo>
+                    <a:pt x="3436881" y="2536845"/>
+                  </a:lnTo>
+                  <a:lnTo>
+                    <a:pt x="3360413" y="2491310"/>
+                  </a:lnTo>
+                  <a:lnTo>
+                    <a:pt x="3283945" y="2481742"/>
+                  </a:lnTo>
+                  <a:lnTo>
+                    <a:pt x="3207476" y="2490591"/>
+                  </a:lnTo>
+                  <a:lnTo>
+                    <a:pt x="3131008" y="2499338"/>
+                  </a:lnTo>
+                  <a:lnTo>
+                    <a:pt x="3054539" y="2507984"/>
+                  </a:lnTo>
+                  <a:lnTo>
+                    <a:pt x="2978071" y="2516531"/>
+                  </a:lnTo>
+                  <a:lnTo>
+                    <a:pt x="2901602" y="2524979"/>
+                  </a:lnTo>
+                  <a:lnTo>
+                    <a:pt x="2825134" y="2533330"/>
+                  </a:lnTo>
+                  <a:lnTo>
+                    <a:pt x="2748666" y="2541584"/>
+                  </a:lnTo>
+                  <a:lnTo>
+                    <a:pt x="2672197" y="2549744"/>
+                  </a:lnTo>
+                  <a:lnTo>
+                    <a:pt x="2595729" y="2557809"/>
+                  </a:lnTo>
+                  <a:lnTo>
+                    <a:pt x="2519260" y="2565781"/>
+                  </a:lnTo>
+                  <a:lnTo>
+                    <a:pt x="2442792" y="2573662"/>
+                  </a:lnTo>
+                  <a:lnTo>
+                    <a:pt x="2366323" y="2581451"/>
+                  </a:lnTo>
+                  <a:lnTo>
+                    <a:pt x="2289855" y="2589151"/>
+                  </a:lnTo>
+                  <a:lnTo>
+                    <a:pt x="2213386" y="2596762"/>
+                  </a:lnTo>
+                  <a:lnTo>
+                    <a:pt x="2136918" y="2604285"/>
+                  </a:lnTo>
+                  <a:lnTo>
+                    <a:pt x="2060450" y="2611722"/>
+                  </a:lnTo>
+                  <a:lnTo>
+                    <a:pt x="1983981" y="2619073"/>
+                  </a:lnTo>
+                  <a:lnTo>
+                    <a:pt x="1907513" y="2626339"/>
+                  </a:lnTo>
+                  <a:lnTo>
+                    <a:pt x="1831044" y="2633521"/>
+                  </a:lnTo>
+                  <a:lnTo>
+                    <a:pt x="1754576" y="2640621"/>
+                  </a:lnTo>
+                  <a:lnTo>
+                    <a:pt x="1678107" y="2647639"/>
+                  </a:lnTo>
+                  <a:lnTo>
+                    <a:pt x="1601639" y="2654575"/>
+                  </a:lnTo>
+                  <a:lnTo>
+                    <a:pt x="1525171" y="2661432"/>
+                  </a:lnTo>
+                  <a:lnTo>
+                    <a:pt x="1448702" y="2668210"/>
+                  </a:lnTo>
+                  <a:lnTo>
+                    <a:pt x="1372234" y="2674910"/>
+                  </a:lnTo>
+                  <a:lnTo>
+                    <a:pt x="1295765" y="2681532"/>
+                  </a:lnTo>
+                  <a:lnTo>
+                    <a:pt x="1219297" y="2688078"/>
+                  </a:lnTo>
+                  <a:lnTo>
+                    <a:pt x="1142828" y="2694549"/>
+                  </a:lnTo>
+                  <a:lnTo>
+                    <a:pt x="1066360" y="2700945"/>
+                  </a:lnTo>
+                  <a:lnTo>
+                    <a:pt x="989892" y="2707268"/>
+                  </a:lnTo>
+                  <a:lnTo>
+                    <a:pt x="913423" y="2713517"/>
+                  </a:lnTo>
+                  <a:lnTo>
+                    <a:pt x="836955" y="2719694"/>
+                  </a:lnTo>
+                  <a:lnTo>
+                    <a:pt x="760486" y="2725801"/>
+                  </a:lnTo>
+                  <a:lnTo>
+                    <a:pt x="684018" y="2731836"/>
+                  </a:lnTo>
+                  <a:lnTo>
+                    <a:pt x="607549" y="2737803"/>
+                  </a:lnTo>
+                  <a:lnTo>
+                    <a:pt x="531081" y="2743700"/>
+                  </a:lnTo>
+                  <a:lnTo>
+                    <a:pt x="454613" y="2749530"/>
+                  </a:lnTo>
+                  <a:lnTo>
+                    <a:pt x="378144" y="2755292"/>
+                  </a:lnTo>
+                  <a:lnTo>
+                    <a:pt x="301676" y="2760988"/>
+                  </a:lnTo>
+                  <a:lnTo>
+                    <a:pt x="225207" y="2766618"/>
+                  </a:lnTo>
+                  <a:lnTo>
+                    <a:pt x="148739" y="2772183"/>
+                  </a:lnTo>
+                  <a:lnTo>
+                    <a:pt x="72270" y="2777684"/>
+                  </a:lnTo>
+                  <a:lnTo>
+                    <a:pt x="0" y="2782824"/>
                   </a:lnTo>
                   <a:close/>
                 </a:path>
@@ -3549,240 +3549,240 @@
           </p:nvSpPr>
           <p:spPr>
             <a:xfrm>
-              <a:off x="2405699" y="2073503"/>
-              <a:ext cx="5782791" cy="2651120"/>
+              <a:off x="2479981" y="2209169"/>
+              <a:ext cx="5695967" cy="2472789"/>
             </a:xfrm>
             <a:custGeom>
               <a:avLst/>
               <a:pathLst>
-                <a:path w="5782791" h="2651120">
+                <a:path w="5695967" h="2472789">
                   <a:moveTo>
                     <a:pt x="0" y="0"/>
                   </a:moveTo>
                   <a:lnTo>
-                    <a:pt x="37871" y="105317"/>
-                  </a:lnTo>
-                  <a:lnTo>
-                    <a:pt x="115505" y="308241"/>
-                  </a:lnTo>
-                  <a:lnTo>
-                    <a:pt x="193139" y="498977"/>
-                  </a:lnTo>
-                  <a:lnTo>
-                    <a:pt x="270773" y="678257"/>
-                  </a:lnTo>
-                  <a:lnTo>
-                    <a:pt x="348407" y="846768"/>
-                  </a:lnTo>
-                  <a:lnTo>
-                    <a:pt x="426041" y="1005157"/>
-                  </a:lnTo>
-                  <a:lnTo>
-                    <a:pt x="503675" y="1154033"/>
-                  </a:lnTo>
-                  <a:lnTo>
-                    <a:pt x="581310" y="1293967"/>
-                  </a:lnTo>
-                  <a:lnTo>
-                    <a:pt x="658944" y="1425495"/>
-                  </a:lnTo>
-                  <a:lnTo>
-                    <a:pt x="736578" y="1549123"/>
-                  </a:lnTo>
-                  <a:lnTo>
-                    <a:pt x="814212" y="1665326"/>
-                  </a:lnTo>
-                  <a:lnTo>
-                    <a:pt x="891846" y="1774549"/>
-                  </a:lnTo>
-                  <a:lnTo>
-                    <a:pt x="969480" y="1877212"/>
-                  </a:lnTo>
-                  <a:lnTo>
-                    <a:pt x="1047114" y="1973708"/>
-                  </a:lnTo>
-                  <a:lnTo>
-                    <a:pt x="1124748" y="2064408"/>
-                  </a:lnTo>
-                  <a:lnTo>
-                    <a:pt x="1202382" y="2149660"/>
-                  </a:lnTo>
-                  <a:lnTo>
-                    <a:pt x="1280016" y="2229792"/>
-                  </a:lnTo>
-                  <a:lnTo>
-                    <a:pt x="1357650" y="2305110"/>
-                  </a:lnTo>
-                  <a:lnTo>
-                    <a:pt x="1435284" y="2375904"/>
-                  </a:lnTo>
-                  <a:lnTo>
-                    <a:pt x="1512918" y="2442447"/>
-                  </a:lnTo>
-                  <a:lnTo>
-                    <a:pt x="1590552" y="2504992"/>
-                  </a:lnTo>
-                  <a:lnTo>
-                    <a:pt x="1668186" y="2563781"/>
-                  </a:lnTo>
-                  <a:lnTo>
-                    <a:pt x="1745820" y="2619038"/>
-                  </a:lnTo>
-                  <a:lnTo>
-                    <a:pt x="1823454" y="2651120"/>
-                  </a:lnTo>
-                  <a:lnTo>
-                    <a:pt x="1901088" y="2641410"/>
-                  </a:lnTo>
-                  <a:lnTo>
-                    <a:pt x="1978722" y="2631587"/>
-                  </a:lnTo>
-                  <a:lnTo>
-                    <a:pt x="2056356" y="2621649"/>
-                  </a:lnTo>
-                  <a:lnTo>
-                    <a:pt x="2133990" y="2611596"/>
-                  </a:lnTo>
-                  <a:lnTo>
-                    <a:pt x="2211624" y="2601425"/>
-                  </a:lnTo>
-                  <a:lnTo>
-                    <a:pt x="2289259" y="2591136"/>
-                  </a:lnTo>
-                  <a:lnTo>
-                    <a:pt x="2366893" y="2580726"/>
-                  </a:lnTo>
-                  <a:lnTo>
-                    <a:pt x="2444527" y="2570195"/>
-                  </a:lnTo>
-                  <a:lnTo>
-                    <a:pt x="2522161" y="2559542"/>
-                  </a:lnTo>
-                  <a:lnTo>
-                    <a:pt x="2599795" y="2548764"/>
-                  </a:lnTo>
-                  <a:lnTo>
-                    <a:pt x="2677429" y="2537860"/>
-                  </a:lnTo>
-                  <a:lnTo>
-                    <a:pt x="2755063" y="2526829"/>
-                  </a:lnTo>
-                  <a:lnTo>
-                    <a:pt x="2832697" y="2515670"/>
-                  </a:lnTo>
-                  <a:lnTo>
-                    <a:pt x="2910331" y="2504380"/>
-                  </a:lnTo>
-                  <a:lnTo>
-                    <a:pt x="2987965" y="2492959"/>
-                  </a:lnTo>
-                  <a:lnTo>
-                    <a:pt x="3065599" y="2481405"/>
-                  </a:lnTo>
-                  <a:lnTo>
-                    <a:pt x="3143233" y="2469716"/>
-                  </a:lnTo>
-                  <a:lnTo>
-                    <a:pt x="3220867" y="2457890"/>
-                  </a:lnTo>
-                  <a:lnTo>
-                    <a:pt x="3298501" y="2445927"/>
-                  </a:lnTo>
-                  <a:lnTo>
-                    <a:pt x="3376135" y="2433824"/>
-                  </a:lnTo>
-                  <a:lnTo>
-                    <a:pt x="3453769" y="2421580"/>
-                  </a:lnTo>
-                  <a:lnTo>
-                    <a:pt x="3531403" y="2409193"/>
-                  </a:lnTo>
-                  <a:lnTo>
-                    <a:pt x="3609037" y="2396662"/>
-                  </a:lnTo>
-                  <a:lnTo>
-                    <a:pt x="3686671" y="2383984"/>
-                  </a:lnTo>
-                  <a:lnTo>
-                    <a:pt x="3764305" y="2371159"/>
-                  </a:lnTo>
-                  <a:lnTo>
-                    <a:pt x="3841939" y="2358184"/>
-                  </a:lnTo>
-                  <a:lnTo>
-                    <a:pt x="3919573" y="2345058"/>
-                  </a:lnTo>
-                  <a:lnTo>
-                    <a:pt x="3997207" y="2331779"/>
-                  </a:lnTo>
-                  <a:lnTo>
-                    <a:pt x="4074842" y="2318345"/>
-                  </a:lnTo>
-                  <a:lnTo>
-                    <a:pt x="4152476" y="2304754"/>
-                  </a:lnTo>
-                  <a:lnTo>
-                    <a:pt x="4230110" y="2291005"/>
-                  </a:lnTo>
-                  <a:lnTo>
-                    <a:pt x="4307744" y="2277096"/>
-                  </a:lnTo>
-                  <a:lnTo>
-                    <a:pt x="4385378" y="2263024"/>
-                  </a:lnTo>
-                  <a:lnTo>
-                    <a:pt x="4463012" y="2248788"/>
-                  </a:lnTo>
-                  <a:lnTo>
-                    <a:pt x="4540646" y="2234386"/>
-                  </a:lnTo>
-                  <a:lnTo>
-                    <a:pt x="4618280" y="2219816"/>
-                  </a:lnTo>
-                  <a:lnTo>
-                    <a:pt x="4695914" y="2205077"/>
-                  </a:lnTo>
-                  <a:lnTo>
-                    <a:pt x="4773548" y="2190165"/>
-                  </a:lnTo>
-                  <a:lnTo>
-                    <a:pt x="4851182" y="2175080"/>
-                  </a:lnTo>
-                  <a:lnTo>
-                    <a:pt x="4928816" y="2159818"/>
-                  </a:lnTo>
-                  <a:lnTo>
-                    <a:pt x="5006450" y="2144379"/>
-                  </a:lnTo>
-                  <a:lnTo>
-                    <a:pt x="5084084" y="2128759"/>
-                  </a:lnTo>
-                  <a:lnTo>
-                    <a:pt x="5161718" y="2112958"/>
-                  </a:lnTo>
-                  <a:lnTo>
-                    <a:pt x="5239352" y="2096972"/>
-                  </a:lnTo>
-                  <a:lnTo>
-                    <a:pt x="5316986" y="2080799"/>
-                  </a:lnTo>
-                  <a:lnTo>
-                    <a:pt x="5394620" y="2064439"/>
-                  </a:lnTo>
-                  <a:lnTo>
-                    <a:pt x="5472254" y="2047887"/>
-                  </a:lnTo>
-                  <a:lnTo>
-                    <a:pt x="5549888" y="2031142"/>
-                  </a:lnTo>
-                  <a:lnTo>
-                    <a:pt x="5627522" y="2014202"/>
-                  </a:lnTo>
-                  <a:lnTo>
-                    <a:pt x="5705156" y="1997064"/>
-                  </a:lnTo>
-                  <a:lnTo>
-                    <a:pt x="5782791" y="1979727"/>
+                    <a:pt x="37303" y="98232"/>
+                  </a:lnTo>
+                  <a:lnTo>
+                    <a:pt x="113771" y="287507"/>
+                  </a:lnTo>
+                  <a:lnTo>
+                    <a:pt x="190239" y="465413"/>
+                  </a:lnTo>
+                  <a:lnTo>
+                    <a:pt x="266708" y="632633"/>
+                  </a:lnTo>
+                  <a:lnTo>
+                    <a:pt x="343176" y="789809"/>
+                  </a:lnTo>
+                  <a:lnTo>
+                    <a:pt x="419645" y="937544"/>
+                  </a:lnTo>
+                  <a:lnTo>
+                    <a:pt x="496113" y="1076405"/>
+                  </a:lnTo>
+                  <a:lnTo>
+                    <a:pt x="572582" y="1206926"/>
+                  </a:lnTo>
+                  <a:lnTo>
+                    <a:pt x="649050" y="1329607"/>
+                  </a:lnTo>
+                  <a:lnTo>
+                    <a:pt x="725518" y="1444920"/>
+                  </a:lnTo>
+                  <a:lnTo>
+                    <a:pt x="801987" y="1553306"/>
+                  </a:lnTo>
+                  <a:lnTo>
+                    <a:pt x="878455" y="1655182"/>
+                  </a:lnTo>
+                  <a:lnTo>
+                    <a:pt x="954924" y="1750938"/>
+                  </a:lnTo>
+                  <a:lnTo>
+                    <a:pt x="1031392" y="1840944"/>
+                  </a:lnTo>
+                  <a:lnTo>
+                    <a:pt x="1107861" y="1925543"/>
+                  </a:lnTo>
+                  <a:lnTo>
+                    <a:pt x="1184329" y="2005060"/>
+                  </a:lnTo>
+                  <a:lnTo>
+                    <a:pt x="1260798" y="2079802"/>
+                  </a:lnTo>
+                  <a:lnTo>
+                    <a:pt x="1337266" y="2150054"/>
+                  </a:lnTo>
+                  <a:lnTo>
+                    <a:pt x="1413734" y="2216086"/>
+                  </a:lnTo>
+                  <a:lnTo>
+                    <a:pt x="1490203" y="2278152"/>
+                  </a:lnTo>
+                  <a:lnTo>
+                    <a:pt x="1566671" y="2336490"/>
+                  </a:lnTo>
+                  <a:lnTo>
+                    <a:pt x="1643140" y="2391325"/>
+                  </a:lnTo>
+                  <a:lnTo>
+                    <a:pt x="1719608" y="2442865"/>
+                  </a:lnTo>
+                  <a:lnTo>
+                    <a:pt x="1796077" y="2472789"/>
+                  </a:lnTo>
+                  <a:lnTo>
+                    <a:pt x="1872545" y="2463732"/>
+                  </a:lnTo>
+                  <a:lnTo>
+                    <a:pt x="1949013" y="2454570"/>
+                  </a:lnTo>
+                  <a:lnTo>
+                    <a:pt x="2025482" y="2445301"/>
+                  </a:lnTo>
+                  <a:lnTo>
+                    <a:pt x="2101950" y="2435923"/>
+                  </a:lnTo>
+                  <a:lnTo>
+                    <a:pt x="2178419" y="2426437"/>
+                  </a:lnTo>
+                  <a:lnTo>
+                    <a:pt x="2254887" y="2416839"/>
+                  </a:lnTo>
+                  <a:lnTo>
+                    <a:pt x="2331356" y="2407130"/>
+                  </a:lnTo>
+                  <a:lnTo>
+                    <a:pt x="2407824" y="2397308"/>
+                  </a:lnTo>
+                  <a:lnTo>
+                    <a:pt x="2484292" y="2387371"/>
+                  </a:lnTo>
+                  <a:lnTo>
+                    <a:pt x="2560761" y="2377318"/>
+                  </a:lnTo>
+                  <a:lnTo>
+                    <a:pt x="2637229" y="2367147"/>
+                  </a:lnTo>
+                  <a:lnTo>
+                    <a:pt x="2713698" y="2356859"/>
+                  </a:lnTo>
+                  <a:lnTo>
+                    <a:pt x="2790166" y="2346450"/>
+                  </a:lnTo>
+                  <a:lnTo>
+                    <a:pt x="2866635" y="2335920"/>
+                  </a:lnTo>
+                  <a:lnTo>
+                    <a:pt x="2943103" y="2325267"/>
+                  </a:lnTo>
+                  <a:lnTo>
+                    <a:pt x="3019571" y="2314490"/>
+                  </a:lnTo>
+                  <a:lnTo>
+                    <a:pt x="3096040" y="2303587"/>
+                  </a:lnTo>
+                  <a:lnTo>
+                    <a:pt x="3172508" y="2292557"/>
+                  </a:lnTo>
+                  <a:lnTo>
+                    <a:pt x="3248977" y="2281398"/>
+                  </a:lnTo>
+                  <a:lnTo>
+                    <a:pt x="3325445" y="2270110"/>
+                  </a:lnTo>
+                  <a:lnTo>
+                    <a:pt x="3401914" y="2258689"/>
+                  </a:lnTo>
+                  <a:lnTo>
+                    <a:pt x="3478382" y="2247136"/>
+                  </a:lnTo>
+                  <a:lnTo>
+                    <a:pt x="3554851" y="2235447"/>
+                  </a:lnTo>
+                  <a:lnTo>
+                    <a:pt x="3631319" y="2223623"/>
+                  </a:lnTo>
+                  <a:lnTo>
+                    <a:pt x="3707787" y="2211660"/>
+                  </a:lnTo>
+                  <a:lnTo>
+                    <a:pt x="3784256" y="2199558"/>
+                  </a:lnTo>
+                  <a:lnTo>
+                    <a:pt x="3860724" y="2187315"/>
+                  </a:lnTo>
+                  <a:lnTo>
+                    <a:pt x="3937193" y="2174929"/>
+                  </a:lnTo>
+                  <a:lnTo>
+                    <a:pt x="4013661" y="2162399"/>
+                  </a:lnTo>
+                  <a:lnTo>
+                    <a:pt x="4090130" y="2149722"/>
+                  </a:lnTo>
+                  <a:lnTo>
+                    <a:pt x="4166598" y="2136898"/>
+                  </a:lnTo>
+                  <a:lnTo>
+                    <a:pt x="4243066" y="2123924"/>
+                  </a:lnTo>
+                  <a:lnTo>
+                    <a:pt x="4319535" y="2110799"/>
+                  </a:lnTo>
+                  <a:lnTo>
+                    <a:pt x="4396003" y="2097520"/>
+                  </a:lnTo>
+                  <a:lnTo>
+                    <a:pt x="4472472" y="2084087"/>
+                  </a:lnTo>
+                  <a:lnTo>
+                    <a:pt x="4548940" y="2070498"/>
+                  </a:lnTo>
+                  <a:lnTo>
+                    <a:pt x="4625409" y="2056749"/>
+                  </a:lnTo>
+                  <a:lnTo>
+                    <a:pt x="4701877" y="2042841"/>
+                  </a:lnTo>
+                  <a:lnTo>
+                    <a:pt x="4778345" y="2028770"/>
+                  </a:lnTo>
+                  <a:lnTo>
+                    <a:pt x="4854814" y="2014535"/>
+                  </a:lnTo>
+                  <a:lnTo>
+                    <a:pt x="4931282" y="2000134"/>
+                  </a:lnTo>
+                  <a:lnTo>
+                    <a:pt x="5007751" y="1985565"/>
+                  </a:lnTo>
+                  <a:lnTo>
+                    <a:pt x="5084219" y="1970827"/>
+                  </a:lnTo>
+                  <a:lnTo>
+                    <a:pt x="5160688" y="1955916"/>
+                  </a:lnTo>
+                  <a:lnTo>
+                    <a:pt x="5237156" y="1940832"/>
+                  </a:lnTo>
+                  <a:lnTo>
+                    <a:pt x="5313624" y="1925571"/>
+                  </a:lnTo>
+                  <a:lnTo>
+                    <a:pt x="5390093" y="1910133"/>
+                  </a:lnTo>
+                  <a:lnTo>
+                    <a:pt x="5466561" y="1894515"/>
+                  </a:lnTo>
+                  <a:lnTo>
+                    <a:pt x="5543030" y="1878714"/>
+                  </a:lnTo>
+                  <a:lnTo>
+                    <a:pt x="5619498" y="1862729"/>
+                  </a:lnTo>
+                  <a:lnTo>
+                    <a:pt x="5695967" y="1846558"/>
                   </a:lnTo>
                 </a:path>
               </a:pathLst>
@@ -3802,300 +3802,300 @@
           </p:nvSpPr>
           <p:spPr>
             <a:xfrm>
-              <a:off x="817517" y="4734221"/>
-              <a:ext cx="7370972" cy="788516"/>
+              <a:off x="915645" y="4690911"/>
+              <a:ext cx="7260303" cy="735476"/>
             </a:xfrm>
             <a:custGeom>
               <a:avLst/>
               <a:pathLst>
-                <a:path w="7370972" h="788516">
+                <a:path w="7260303" h="735476">
                   <a:moveTo>
-                    <a:pt x="7370972" y="788516"/>
+                    <a:pt x="7260303" y="735476"/>
                   </a:moveTo>
                   <a:lnTo>
-                    <a:pt x="7293338" y="786311"/>
-                  </a:lnTo>
-                  <a:lnTo>
-                    <a:pt x="7215704" y="783965"/>
-                  </a:lnTo>
-                  <a:lnTo>
-                    <a:pt x="7138070" y="781468"/>
-                  </a:lnTo>
-                  <a:lnTo>
-                    <a:pt x="7060436" y="778812"/>
-                  </a:lnTo>
-                  <a:lnTo>
-                    <a:pt x="6982802" y="775987"/>
-                  </a:lnTo>
-                  <a:lnTo>
-                    <a:pt x="6905168" y="772981"/>
-                  </a:lnTo>
-                  <a:lnTo>
-                    <a:pt x="6827534" y="769783"/>
-                  </a:lnTo>
-                  <a:lnTo>
-                    <a:pt x="6749900" y="766380"/>
-                  </a:lnTo>
-                  <a:lnTo>
-                    <a:pt x="6672266" y="762760"/>
-                  </a:lnTo>
-                  <a:lnTo>
-                    <a:pt x="6594632" y="758909"/>
-                  </a:lnTo>
-                  <a:lnTo>
-                    <a:pt x="6516998" y="754812"/>
-                  </a:lnTo>
-                  <a:lnTo>
-                    <a:pt x="6439364" y="750453"/>
-                  </a:lnTo>
-                  <a:lnTo>
-                    <a:pt x="6361730" y="745815"/>
-                  </a:lnTo>
-                  <a:lnTo>
-                    <a:pt x="6284096" y="740881"/>
-                  </a:lnTo>
-                  <a:lnTo>
-                    <a:pt x="6206462" y="735631"/>
-                  </a:lnTo>
-                  <a:lnTo>
-                    <a:pt x="6128827" y="730046"/>
-                  </a:lnTo>
-                  <a:lnTo>
-                    <a:pt x="6051193" y="724105"/>
-                  </a:lnTo>
-                  <a:lnTo>
-                    <a:pt x="5973559" y="717783"/>
-                  </a:lnTo>
-                  <a:lnTo>
-                    <a:pt x="5895925" y="711058"/>
-                  </a:lnTo>
-                  <a:lnTo>
-                    <a:pt x="5818291" y="703902"/>
-                  </a:lnTo>
-                  <a:lnTo>
-                    <a:pt x="5740657" y="696290"/>
-                  </a:lnTo>
-                  <a:lnTo>
-                    <a:pt x="5663023" y="688191"/>
-                  </a:lnTo>
-                  <a:lnTo>
-                    <a:pt x="5585389" y="679575"/>
-                  </a:lnTo>
-                  <a:lnTo>
-                    <a:pt x="5507755" y="670407"/>
-                  </a:lnTo>
-                  <a:lnTo>
-                    <a:pt x="5430121" y="660655"/>
-                  </a:lnTo>
-                  <a:lnTo>
-                    <a:pt x="5352487" y="650278"/>
-                  </a:lnTo>
-                  <a:lnTo>
-                    <a:pt x="5274853" y="639239"/>
-                  </a:lnTo>
-                  <a:lnTo>
-                    <a:pt x="5197219" y="627495"/>
-                  </a:lnTo>
-                  <a:lnTo>
-                    <a:pt x="5119585" y="614999"/>
-                  </a:lnTo>
-                  <a:lnTo>
-                    <a:pt x="5041951" y="601706"/>
-                  </a:lnTo>
-                  <a:lnTo>
-                    <a:pt x="4964317" y="587563"/>
-                  </a:lnTo>
-                  <a:lnTo>
-                    <a:pt x="4886683" y="572516"/>
-                  </a:lnTo>
-                  <a:lnTo>
-                    <a:pt x="4809049" y="556507"/>
-                  </a:lnTo>
-                  <a:lnTo>
-                    <a:pt x="4731415" y="539476"/>
-                  </a:lnTo>
-                  <a:lnTo>
-                    <a:pt x="4653781" y="521356"/>
-                  </a:lnTo>
-                  <a:lnTo>
-                    <a:pt x="4576147" y="502078"/>
-                  </a:lnTo>
-                  <a:lnTo>
-                    <a:pt x="4498513" y="481569"/>
-                  </a:lnTo>
-                  <a:lnTo>
-                    <a:pt x="4420879" y="459748"/>
-                  </a:lnTo>
-                  <a:lnTo>
-                    <a:pt x="4343244" y="436534"/>
-                  </a:lnTo>
-                  <a:lnTo>
-                    <a:pt x="4265610" y="411835"/>
-                  </a:lnTo>
-                  <a:lnTo>
-                    <a:pt x="4187976" y="385559"/>
-                  </a:lnTo>
-                  <a:lnTo>
-                    <a:pt x="4110342" y="357603"/>
-                  </a:lnTo>
-                  <a:lnTo>
-                    <a:pt x="4032708" y="327861"/>
-                  </a:lnTo>
-                  <a:lnTo>
-                    <a:pt x="3955074" y="296219"/>
-                  </a:lnTo>
-                  <a:lnTo>
-                    <a:pt x="3877440" y="262554"/>
-                  </a:lnTo>
-                  <a:lnTo>
-                    <a:pt x="3799806" y="226738"/>
-                  </a:lnTo>
-                  <a:lnTo>
-                    <a:pt x="3722172" y="188633"/>
-                  </a:lnTo>
-                  <a:lnTo>
-                    <a:pt x="3644538" y="148094"/>
-                  </a:lnTo>
-                  <a:lnTo>
-                    <a:pt x="3566904" y="104963"/>
-                  </a:lnTo>
-                  <a:lnTo>
-                    <a:pt x="3489270" y="59077"/>
-                  </a:lnTo>
-                  <a:lnTo>
-                    <a:pt x="3411636" y="10258"/>
-                  </a:lnTo>
-                  <a:lnTo>
-                    <a:pt x="3334002" y="0"/>
-                  </a:lnTo>
-                  <a:lnTo>
-                    <a:pt x="3256368" y="9487"/>
-                  </a:lnTo>
-                  <a:lnTo>
-                    <a:pt x="3178734" y="18865"/>
-                  </a:lnTo>
-                  <a:lnTo>
-                    <a:pt x="3101100" y="28135"/>
-                  </a:lnTo>
-                  <a:lnTo>
-                    <a:pt x="3023466" y="37298"/>
-                  </a:lnTo>
-                  <a:lnTo>
-                    <a:pt x="2945832" y="46355"/>
-                  </a:lnTo>
-                  <a:lnTo>
-                    <a:pt x="2868198" y="55308"/>
-                  </a:lnTo>
-                  <a:lnTo>
-                    <a:pt x="2790564" y="64158"/>
-                  </a:lnTo>
-                  <a:lnTo>
-                    <a:pt x="2712930" y="72906"/>
-                  </a:lnTo>
-                  <a:lnTo>
-                    <a:pt x="2635295" y="81553"/>
-                  </a:lnTo>
-                  <a:lnTo>
-                    <a:pt x="2557661" y="90100"/>
-                  </a:lnTo>
-                  <a:lnTo>
-                    <a:pt x="2480027" y="98549"/>
-                  </a:lnTo>
-                  <a:lnTo>
-                    <a:pt x="2402393" y="106900"/>
-                  </a:lnTo>
-                  <a:lnTo>
-                    <a:pt x="2324759" y="115155"/>
-                  </a:lnTo>
-                  <a:lnTo>
-                    <a:pt x="2247125" y="123315"/>
-                  </a:lnTo>
-                  <a:lnTo>
-                    <a:pt x="2169491" y="131381"/>
-                  </a:lnTo>
-                  <a:lnTo>
-                    <a:pt x="2091857" y="139354"/>
-                  </a:lnTo>
-                  <a:lnTo>
-                    <a:pt x="2014223" y="147235"/>
-                  </a:lnTo>
-                  <a:lnTo>
-                    <a:pt x="1936589" y="155025"/>
-                  </a:lnTo>
-                  <a:lnTo>
-                    <a:pt x="1858955" y="162725"/>
-                  </a:lnTo>
-                  <a:lnTo>
-                    <a:pt x="1781321" y="170337"/>
-                  </a:lnTo>
-                  <a:lnTo>
-                    <a:pt x="1703687" y="177861"/>
-                  </a:lnTo>
-                  <a:lnTo>
-                    <a:pt x="1626053" y="185298"/>
-                  </a:lnTo>
-                  <a:lnTo>
-                    <a:pt x="1548419" y="192649"/>
-                  </a:lnTo>
-                  <a:lnTo>
-                    <a:pt x="1470785" y="199916"/>
-                  </a:lnTo>
-                  <a:lnTo>
-                    <a:pt x="1393151" y="207099"/>
-                  </a:lnTo>
-                  <a:lnTo>
-                    <a:pt x="1315517" y="214199"/>
-                  </a:lnTo>
-                  <a:lnTo>
-                    <a:pt x="1237883" y="221217"/>
-                  </a:lnTo>
-                  <a:lnTo>
-                    <a:pt x="1160249" y="228154"/>
-                  </a:lnTo>
-                  <a:lnTo>
-                    <a:pt x="1082615" y="235012"/>
-                  </a:lnTo>
-                  <a:lnTo>
-                    <a:pt x="1004981" y="241790"/>
-                  </a:lnTo>
-                  <a:lnTo>
-                    <a:pt x="927346" y="248490"/>
-                  </a:lnTo>
-                  <a:lnTo>
-                    <a:pt x="849712" y="255113"/>
-                  </a:lnTo>
-                  <a:lnTo>
-                    <a:pt x="772078" y="261659"/>
-                  </a:lnTo>
-                  <a:lnTo>
-                    <a:pt x="694444" y="268131"/>
-                  </a:lnTo>
-                  <a:lnTo>
-                    <a:pt x="616810" y="274527"/>
-                  </a:lnTo>
-                  <a:lnTo>
-                    <a:pt x="539176" y="280850"/>
-                  </a:lnTo>
-                  <a:lnTo>
-                    <a:pt x="461542" y="287100"/>
-                  </a:lnTo>
-                  <a:lnTo>
-                    <a:pt x="383908" y="293278"/>
-                  </a:lnTo>
-                  <a:lnTo>
-                    <a:pt x="306274" y="299384"/>
-                  </a:lnTo>
-                  <a:lnTo>
-                    <a:pt x="228640" y="305420"/>
-                  </a:lnTo>
-                  <a:lnTo>
-                    <a:pt x="151006" y="311387"/>
-                  </a:lnTo>
-                  <a:lnTo>
-                    <a:pt x="73372" y="317285"/>
-                  </a:lnTo>
-                  <a:lnTo>
-                    <a:pt x="0" y="322795"/>
+                    <a:pt x="7183835" y="733419"/>
+                  </a:lnTo>
+                  <a:lnTo>
+                    <a:pt x="7107366" y="731230"/>
+                  </a:lnTo>
+                  <a:lnTo>
+                    <a:pt x="7030898" y="728902"/>
+                  </a:lnTo>
+                  <a:lnTo>
+                    <a:pt x="6954429" y="726425"/>
+                  </a:lnTo>
+                  <a:lnTo>
+                    <a:pt x="6877961" y="723789"/>
+                  </a:lnTo>
+                  <a:lnTo>
+                    <a:pt x="6801492" y="720985"/>
+                  </a:lnTo>
+                  <a:lnTo>
+                    <a:pt x="6725024" y="718002"/>
+                  </a:lnTo>
+                  <a:lnTo>
+                    <a:pt x="6648556" y="714829"/>
+                  </a:lnTo>
+                  <a:lnTo>
+                    <a:pt x="6572087" y="711452"/>
+                  </a:lnTo>
+                  <a:lnTo>
+                    <a:pt x="6495619" y="707860"/>
+                  </a:lnTo>
+                  <a:lnTo>
+                    <a:pt x="6419150" y="704038"/>
+                  </a:lnTo>
+                  <a:lnTo>
+                    <a:pt x="6342682" y="699972"/>
+                  </a:lnTo>
+                  <a:lnTo>
+                    <a:pt x="6266213" y="695647"/>
+                  </a:lnTo>
+                  <a:lnTo>
+                    <a:pt x="6189745" y="691044"/>
+                  </a:lnTo>
+                  <a:lnTo>
+                    <a:pt x="6113277" y="686148"/>
+                  </a:lnTo>
+                  <a:lnTo>
+                    <a:pt x="6036808" y="680939"/>
+                  </a:lnTo>
+                  <a:lnTo>
+                    <a:pt x="5960340" y="675397"/>
+                  </a:lnTo>
+                  <a:lnTo>
+                    <a:pt x="5883871" y="669500"/>
+                  </a:lnTo>
+                  <a:lnTo>
+                    <a:pt x="5807403" y="663227"/>
+                  </a:lnTo>
+                  <a:lnTo>
+                    <a:pt x="5730934" y="656553"/>
+                  </a:lnTo>
+                  <a:lnTo>
+                    <a:pt x="5654466" y="649453"/>
+                  </a:lnTo>
+                  <a:lnTo>
+                    <a:pt x="5577998" y="641899"/>
+                  </a:lnTo>
+                  <a:lnTo>
+                    <a:pt x="5501529" y="633862"/>
+                  </a:lnTo>
+                  <a:lnTo>
+                    <a:pt x="5425061" y="625312"/>
+                  </a:lnTo>
+                  <a:lnTo>
+                    <a:pt x="5348592" y="616215"/>
+                  </a:lnTo>
+                  <a:lnTo>
+                    <a:pt x="5272124" y="606537"/>
+                  </a:lnTo>
+                  <a:lnTo>
+                    <a:pt x="5195655" y="596240"/>
+                  </a:lnTo>
+                  <a:lnTo>
+                    <a:pt x="5119187" y="585285"/>
+                  </a:lnTo>
+                  <a:lnTo>
+                    <a:pt x="5042719" y="573631"/>
+                  </a:lnTo>
+                  <a:lnTo>
+                    <a:pt x="4966250" y="561231"/>
+                  </a:lnTo>
+                  <a:lnTo>
+                    <a:pt x="4889782" y="548039"/>
+                  </a:lnTo>
+                  <a:lnTo>
+                    <a:pt x="4813313" y="534005"/>
+                  </a:lnTo>
+                  <a:lnTo>
+                    <a:pt x="4736845" y="519073"/>
+                  </a:lnTo>
+                  <a:lnTo>
+                    <a:pt x="4660376" y="503187"/>
+                  </a:lnTo>
+                  <a:lnTo>
+                    <a:pt x="4583908" y="486286"/>
+                  </a:lnTo>
+                  <a:lnTo>
+                    <a:pt x="4507439" y="468305"/>
+                  </a:lnTo>
+                  <a:lnTo>
+                    <a:pt x="4430971" y="449175"/>
+                  </a:lnTo>
+                  <a:lnTo>
+                    <a:pt x="4354503" y="428823"/>
+                  </a:lnTo>
+                  <a:lnTo>
+                    <a:pt x="4278034" y="407170"/>
+                  </a:lnTo>
+                  <a:lnTo>
+                    <a:pt x="4201566" y="384133"/>
+                  </a:lnTo>
+                  <a:lnTo>
+                    <a:pt x="4125097" y="359624"/>
+                  </a:lnTo>
+                  <a:lnTo>
+                    <a:pt x="4048629" y="333549"/>
+                  </a:lnTo>
+                  <a:lnTo>
+                    <a:pt x="3972160" y="305807"/>
+                  </a:lnTo>
+                  <a:lnTo>
+                    <a:pt x="3895692" y="276293"/>
+                  </a:lnTo>
+                  <a:lnTo>
+                    <a:pt x="3819224" y="244893"/>
+                  </a:lnTo>
+                  <a:lnTo>
+                    <a:pt x="3742755" y="211486"/>
+                  </a:lnTo>
+                  <a:lnTo>
+                    <a:pt x="3666287" y="175945"/>
+                  </a:lnTo>
+                  <a:lnTo>
+                    <a:pt x="3589818" y="138132"/>
+                  </a:lnTo>
+                  <a:lnTo>
+                    <a:pt x="3513350" y="97903"/>
+                  </a:lnTo>
+                  <a:lnTo>
+                    <a:pt x="3436881" y="55103"/>
+                  </a:lnTo>
+                  <a:lnTo>
+                    <a:pt x="3360413" y="9568"/>
+                  </a:lnTo>
+                  <a:lnTo>
+                    <a:pt x="3283945" y="0"/>
+                  </a:lnTo>
+                  <a:lnTo>
+                    <a:pt x="3207476" y="8849"/>
+                  </a:lnTo>
+                  <a:lnTo>
+                    <a:pt x="3131008" y="17596"/>
+                  </a:lnTo>
+                  <a:lnTo>
+                    <a:pt x="3054539" y="26242"/>
+                  </a:lnTo>
+                  <a:lnTo>
+                    <a:pt x="2978071" y="34789"/>
+                  </a:lnTo>
+                  <a:lnTo>
+                    <a:pt x="2901602" y="43237"/>
+                  </a:lnTo>
+                  <a:lnTo>
+                    <a:pt x="2825134" y="51588"/>
+                  </a:lnTo>
+                  <a:lnTo>
+                    <a:pt x="2748666" y="59842"/>
+                  </a:lnTo>
+                  <a:lnTo>
+                    <a:pt x="2672197" y="68002"/>
+                  </a:lnTo>
+                  <a:lnTo>
+                    <a:pt x="2595729" y="76067"/>
+                  </a:lnTo>
+                  <a:lnTo>
+                    <a:pt x="2519260" y="84039"/>
+                  </a:lnTo>
+                  <a:lnTo>
+                    <a:pt x="2442792" y="91920"/>
+                  </a:lnTo>
+                  <a:lnTo>
+                    <a:pt x="2366323" y="99709"/>
+                  </a:lnTo>
+                  <a:lnTo>
+                    <a:pt x="2289855" y="107409"/>
+                  </a:lnTo>
+                  <a:lnTo>
+                    <a:pt x="2213386" y="115020"/>
+                  </a:lnTo>
+                  <a:lnTo>
+                    <a:pt x="2136918" y="122543"/>
+                  </a:lnTo>
+                  <a:lnTo>
+                    <a:pt x="2060450" y="129980"/>
+                  </a:lnTo>
+                  <a:lnTo>
+                    <a:pt x="1983981" y="137331"/>
+                  </a:lnTo>
+                  <a:lnTo>
+                    <a:pt x="1907513" y="144597"/>
+                  </a:lnTo>
+                  <a:lnTo>
+                    <a:pt x="1831044" y="151779"/>
+                  </a:lnTo>
+                  <a:lnTo>
+                    <a:pt x="1754576" y="158879"/>
+                  </a:lnTo>
+                  <a:lnTo>
+                    <a:pt x="1678107" y="165897"/>
+                  </a:lnTo>
+                  <a:lnTo>
+                    <a:pt x="1601639" y="172833"/>
+                  </a:lnTo>
+                  <a:lnTo>
+                    <a:pt x="1525171" y="179690"/>
+                  </a:lnTo>
+                  <a:lnTo>
+                    <a:pt x="1448702" y="186468"/>
+                  </a:lnTo>
+                  <a:lnTo>
+                    <a:pt x="1372234" y="193168"/>
+                  </a:lnTo>
+                  <a:lnTo>
+                    <a:pt x="1295765" y="199790"/>
+                  </a:lnTo>
+                  <a:lnTo>
+                    <a:pt x="1219297" y="206336"/>
+                  </a:lnTo>
+                  <a:lnTo>
+                    <a:pt x="1142828" y="212807"/>
+                  </a:lnTo>
+                  <a:lnTo>
+                    <a:pt x="1066360" y="219203"/>
+                  </a:lnTo>
+                  <a:lnTo>
+                    <a:pt x="989892" y="225525"/>
+                  </a:lnTo>
+                  <a:lnTo>
+                    <a:pt x="913423" y="231775"/>
+                  </a:lnTo>
+                  <a:lnTo>
+                    <a:pt x="836955" y="237952"/>
+                  </a:lnTo>
+                  <a:lnTo>
+                    <a:pt x="760486" y="244059"/>
+                  </a:lnTo>
+                  <a:lnTo>
+                    <a:pt x="684018" y="250094"/>
+                  </a:lnTo>
+                  <a:lnTo>
+                    <a:pt x="607549" y="256061"/>
+                  </a:lnTo>
+                  <a:lnTo>
+                    <a:pt x="531081" y="261958"/>
+                  </a:lnTo>
+                  <a:lnTo>
+                    <a:pt x="454613" y="267788"/>
+                  </a:lnTo>
+                  <a:lnTo>
+                    <a:pt x="378144" y="273550"/>
+                  </a:lnTo>
+                  <a:lnTo>
+                    <a:pt x="301676" y="279246"/>
+                  </a:lnTo>
+                  <a:lnTo>
+                    <a:pt x="225207" y="284876"/>
+                  </a:lnTo>
+                  <a:lnTo>
+                    <a:pt x="148739" y="290441"/>
+                  </a:lnTo>
+                  <a:lnTo>
+                    <a:pt x="72270" y="295942"/>
+                  </a:lnTo>
+                  <a:lnTo>
+                    <a:pt x="0" y="301082"/>
                   </a:lnTo>
                 </a:path>
               </a:pathLst>
@@ -4115,300 +4115,300 @@
           </p:nvSpPr>
           <p:spPr>
             <a:xfrm>
-              <a:off x="817517" y="3070208"/>
-              <a:ext cx="7370972" cy="2259213"/>
+              <a:off x="915645" y="3138829"/>
+              <a:ext cx="7260303" cy="2107244"/>
             </a:xfrm>
             <a:custGeom>
               <a:avLst/>
               <a:pathLst>
-                <a:path w="7370972" h="2259213">
+                <a:path w="7260303" h="2107244">
                   <a:moveTo>
                     <a:pt x="0" y="0"/>
                   </a:moveTo>
                   <a:lnTo>
-                    <a:pt x="73372" y="58515"/>
-                  </a:lnTo>
-                  <a:lnTo>
-                    <a:pt x="151006" y="118890"/>
-                  </a:lnTo>
-                  <a:lnTo>
-                    <a:pt x="228640" y="177764"/>
-                  </a:lnTo>
-                  <a:lnTo>
-                    <a:pt x="306274" y="235174"/>
-                  </a:lnTo>
-                  <a:lnTo>
-                    <a:pt x="383908" y="291157"/>
-                  </a:lnTo>
-                  <a:lnTo>
-                    <a:pt x="461542" y="345748"/>
-                  </a:lnTo>
-                  <a:lnTo>
-                    <a:pt x="539176" y="398983"/>
-                  </a:lnTo>
-                  <a:lnTo>
-                    <a:pt x="616810" y="450893"/>
-                  </a:lnTo>
-                  <a:lnTo>
-                    <a:pt x="694444" y="501513"/>
-                  </a:lnTo>
-                  <a:lnTo>
-                    <a:pt x="772078" y="550875"/>
-                  </a:lnTo>
-                  <a:lnTo>
-                    <a:pt x="849712" y="599009"/>
-                  </a:lnTo>
-                  <a:lnTo>
-                    <a:pt x="927346" y="645947"/>
-                  </a:lnTo>
-                  <a:lnTo>
-                    <a:pt x="1004981" y="691718"/>
-                  </a:lnTo>
-                  <a:lnTo>
-                    <a:pt x="1082615" y="736351"/>
-                  </a:lnTo>
-                  <a:lnTo>
-                    <a:pt x="1160249" y="779875"/>
-                  </a:lnTo>
-                  <a:lnTo>
-                    <a:pt x="1237883" y="822316"/>
-                  </a:lnTo>
-                  <a:lnTo>
-                    <a:pt x="1315517" y="863702"/>
-                  </a:lnTo>
-                  <a:lnTo>
-                    <a:pt x="1393151" y="904060"/>
-                  </a:lnTo>
-                  <a:lnTo>
-                    <a:pt x="1470785" y="943414"/>
-                  </a:lnTo>
-                  <a:lnTo>
-                    <a:pt x="1548419" y="981789"/>
-                  </a:lnTo>
-                  <a:lnTo>
-                    <a:pt x="1626053" y="1019211"/>
-                  </a:lnTo>
-                  <a:lnTo>
-                    <a:pt x="1703687" y="1055702"/>
-                  </a:lnTo>
-                  <a:lnTo>
-                    <a:pt x="1781321" y="1091287"/>
-                  </a:lnTo>
-                  <a:lnTo>
-                    <a:pt x="1858955" y="1125986"/>
-                  </a:lnTo>
-                  <a:lnTo>
-                    <a:pt x="1936589" y="1159823"/>
-                  </a:lnTo>
-                  <a:lnTo>
-                    <a:pt x="2014223" y="1192818"/>
-                  </a:lnTo>
-                  <a:lnTo>
-                    <a:pt x="2091857" y="1224994"/>
-                  </a:lnTo>
-                  <a:lnTo>
-                    <a:pt x="2169491" y="1256369"/>
-                  </a:lnTo>
-                  <a:lnTo>
-                    <a:pt x="2247125" y="1286965"/>
-                  </a:lnTo>
-                  <a:lnTo>
-                    <a:pt x="2324759" y="1316799"/>
-                  </a:lnTo>
-                  <a:lnTo>
-                    <a:pt x="2402393" y="1345892"/>
-                  </a:lnTo>
-                  <a:lnTo>
-                    <a:pt x="2480027" y="1374262"/>
-                  </a:lnTo>
-                  <a:lnTo>
-                    <a:pt x="2557661" y="1401927"/>
-                  </a:lnTo>
-                  <a:lnTo>
-                    <a:pt x="2635295" y="1428903"/>
-                  </a:lnTo>
-                  <a:lnTo>
-                    <a:pt x="2712930" y="1455209"/>
-                  </a:lnTo>
-                  <a:lnTo>
-                    <a:pt x="2790564" y="1480862"/>
-                  </a:lnTo>
-                  <a:lnTo>
-                    <a:pt x="2868198" y="1505876"/>
-                  </a:lnTo>
-                  <a:lnTo>
-                    <a:pt x="2945832" y="1530268"/>
-                  </a:lnTo>
-                  <a:lnTo>
-                    <a:pt x="3023466" y="1554054"/>
-                  </a:lnTo>
-                  <a:lnTo>
-                    <a:pt x="3101100" y="1577249"/>
-                  </a:lnTo>
-                  <a:lnTo>
-                    <a:pt x="3178734" y="1599867"/>
-                  </a:lnTo>
-                  <a:lnTo>
-                    <a:pt x="3256368" y="1621923"/>
-                  </a:lnTo>
-                  <a:lnTo>
-                    <a:pt x="3334002" y="1643431"/>
-                  </a:lnTo>
-                  <a:lnTo>
-                    <a:pt x="3411636" y="1664403"/>
-                  </a:lnTo>
-                  <a:lnTo>
-                    <a:pt x="3489270" y="1684855"/>
-                  </a:lnTo>
-                  <a:lnTo>
-                    <a:pt x="3566904" y="1704798"/>
-                  </a:lnTo>
-                  <a:lnTo>
-                    <a:pt x="3644538" y="1724245"/>
-                  </a:lnTo>
-                  <a:lnTo>
-                    <a:pt x="3722172" y="1743208"/>
-                  </a:lnTo>
-                  <a:lnTo>
-                    <a:pt x="3799806" y="1761701"/>
-                  </a:lnTo>
-                  <a:lnTo>
-                    <a:pt x="3877440" y="1779733"/>
-                  </a:lnTo>
-                  <a:lnTo>
-                    <a:pt x="3955074" y="1797317"/>
-                  </a:lnTo>
-                  <a:lnTo>
-                    <a:pt x="4032708" y="1814464"/>
-                  </a:lnTo>
-                  <a:lnTo>
-                    <a:pt x="4110342" y="1831185"/>
-                  </a:lnTo>
-                  <a:lnTo>
-                    <a:pt x="4187976" y="1847490"/>
-                  </a:lnTo>
-                  <a:lnTo>
-                    <a:pt x="4265610" y="1863390"/>
-                  </a:lnTo>
-                  <a:lnTo>
-                    <a:pt x="4343244" y="1878894"/>
-                  </a:lnTo>
-                  <a:lnTo>
-                    <a:pt x="4420879" y="1894013"/>
-                  </a:lnTo>
-                  <a:lnTo>
-                    <a:pt x="4498513" y="1908756"/>
-                  </a:lnTo>
-                  <a:lnTo>
-                    <a:pt x="4576147" y="1923133"/>
-                  </a:lnTo>
-                  <a:lnTo>
-                    <a:pt x="4653781" y="1937152"/>
-                  </a:lnTo>
-                  <a:lnTo>
-                    <a:pt x="4731415" y="1950823"/>
-                  </a:lnTo>
-                  <a:lnTo>
-                    <a:pt x="4809049" y="1964154"/>
-                  </a:lnTo>
-                  <a:lnTo>
-                    <a:pt x="4886683" y="1977153"/>
-                  </a:lnTo>
-                  <a:lnTo>
-                    <a:pt x="4964317" y="1989829"/>
-                  </a:lnTo>
-                  <a:lnTo>
-                    <a:pt x="5041951" y="2002190"/>
-                  </a:lnTo>
-                  <a:lnTo>
-                    <a:pt x="5119585" y="2014244"/>
-                  </a:lnTo>
-                  <a:lnTo>
-                    <a:pt x="5197219" y="2025998"/>
-                  </a:lnTo>
-                  <a:lnTo>
-                    <a:pt x="5274853" y="2037460"/>
-                  </a:lnTo>
-                  <a:lnTo>
-                    <a:pt x="5352487" y="2048637"/>
-                  </a:lnTo>
-                  <a:lnTo>
-                    <a:pt x="5430121" y="2059536"/>
-                  </a:lnTo>
-                  <a:lnTo>
-                    <a:pt x="5507755" y="2070164"/>
-                  </a:lnTo>
-                  <a:lnTo>
-                    <a:pt x="5585389" y="2080528"/>
-                  </a:lnTo>
-                  <a:lnTo>
-                    <a:pt x="5663023" y="2090634"/>
-                  </a:lnTo>
-                  <a:lnTo>
-                    <a:pt x="5740657" y="2100489"/>
-                  </a:lnTo>
-                  <a:lnTo>
-                    <a:pt x="5818291" y="2110099"/>
-                  </a:lnTo>
-                  <a:lnTo>
-                    <a:pt x="5895925" y="2119470"/>
-                  </a:lnTo>
-                  <a:lnTo>
-                    <a:pt x="5973559" y="2128608"/>
-                  </a:lnTo>
-                  <a:lnTo>
-                    <a:pt x="6051193" y="2137519"/>
-                  </a:lnTo>
-                  <a:lnTo>
-                    <a:pt x="6128827" y="2146208"/>
-                  </a:lnTo>
-                  <a:lnTo>
-                    <a:pt x="6206462" y="2154682"/>
-                  </a:lnTo>
-                  <a:lnTo>
-                    <a:pt x="6284096" y="2162944"/>
-                  </a:lnTo>
-                  <a:lnTo>
-                    <a:pt x="6361730" y="2171002"/>
-                  </a:lnTo>
-                  <a:lnTo>
-                    <a:pt x="6439364" y="2178859"/>
-                  </a:lnTo>
-                  <a:lnTo>
-                    <a:pt x="6516998" y="2186520"/>
-                  </a:lnTo>
-                  <a:lnTo>
-                    <a:pt x="6594632" y="2193991"/>
-                  </a:lnTo>
-                  <a:lnTo>
-                    <a:pt x="6672266" y="2201277"/>
-                  </a:lnTo>
-                  <a:lnTo>
-                    <a:pt x="6749900" y="2208381"/>
-                  </a:lnTo>
-                  <a:lnTo>
-                    <a:pt x="6827534" y="2215309"/>
-                  </a:lnTo>
-                  <a:lnTo>
-                    <a:pt x="6905168" y="2222064"/>
-                  </a:lnTo>
-                  <a:lnTo>
-                    <a:pt x="6982802" y="2228652"/>
-                  </a:lnTo>
-                  <a:lnTo>
-                    <a:pt x="7060436" y="2235076"/>
-                  </a:lnTo>
-                  <a:lnTo>
-                    <a:pt x="7138070" y="2241340"/>
-                  </a:lnTo>
-                  <a:lnTo>
-                    <a:pt x="7215704" y="2247448"/>
-                  </a:lnTo>
-                  <a:lnTo>
-                    <a:pt x="7293338" y="2253404"/>
-                  </a:lnTo>
-                  <a:lnTo>
-                    <a:pt x="7370972" y="2259213"/>
+                    <a:pt x="72270" y="54579"/>
+                  </a:lnTo>
+                  <a:lnTo>
+                    <a:pt x="148739" y="110893"/>
+                  </a:lnTo>
+                  <a:lnTo>
+                    <a:pt x="225207" y="165806"/>
+                  </a:lnTo>
+                  <a:lnTo>
+                    <a:pt x="301676" y="219355"/>
+                  </a:lnTo>
+                  <a:lnTo>
+                    <a:pt x="378144" y="271572"/>
+                  </a:lnTo>
+                  <a:lnTo>
+                    <a:pt x="454613" y="322491"/>
+                  </a:lnTo>
+                  <a:lnTo>
+                    <a:pt x="531081" y="372144"/>
+                  </a:lnTo>
+                  <a:lnTo>
+                    <a:pt x="607549" y="420563"/>
+                  </a:lnTo>
+                  <a:lnTo>
+                    <a:pt x="684018" y="467778"/>
+                  </a:lnTo>
+                  <a:lnTo>
+                    <a:pt x="760486" y="513820"/>
+                  </a:lnTo>
+                  <a:lnTo>
+                    <a:pt x="836955" y="558716"/>
+                  </a:lnTo>
+                  <a:lnTo>
+                    <a:pt x="913423" y="602497"/>
+                  </a:lnTo>
+                  <a:lnTo>
+                    <a:pt x="989892" y="645189"/>
+                  </a:lnTo>
+                  <a:lnTo>
+                    <a:pt x="1066360" y="686820"/>
+                  </a:lnTo>
+                  <a:lnTo>
+                    <a:pt x="1142828" y="727415"/>
+                  </a:lnTo>
+                  <a:lnTo>
+                    <a:pt x="1219297" y="767002"/>
+                  </a:lnTo>
+                  <a:lnTo>
+                    <a:pt x="1295765" y="805604"/>
+                  </a:lnTo>
+                  <a:lnTo>
+                    <a:pt x="1372234" y="843247"/>
+                  </a:lnTo>
+                  <a:lnTo>
+                    <a:pt x="1448702" y="879954"/>
+                  </a:lnTo>
+                  <a:lnTo>
+                    <a:pt x="1525171" y="915748"/>
+                  </a:lnTo>
+                  <a:lnTo>
+                    <a:pt x="1601639" y="950652"/>
+                  </a:lnTo>
+                  <a:lnTo>
+                    <a:pt x="1678107" y="984689"/>
+                  </a:lnTo>
+                  <a:lnTo>
+                    <a:pt x="1754576" y="1017880"/>
+                  </a:lnTo>
+                  <a:lnTo>
+                    <a:pt x="1831044" y="1050245"/>
+                  </a:lnTo>
+                  <a:lnTo>
+                    <a:pt x="1907513" y="1081806"/>
+                  </a:lnTo>
+                  <a:lnTo>
+                    <a:pt x="1983981" y="1112582"/>
+                  </a:lnTo>
+                  <a:lnTo>
+                    <a:pt x="2060450" y="1142593"/>
+                  </a:lnTo>
+                  <a:lnTo>
+                    <a:pt x="2136918" y="1171858"/>
+                  </a:lnTo>
+                  <a:lnTo>
+                    <a:pt x="2213386" y="1200395"/>
+                  </a:lnTo>
+                  <a:lnTo>
+                    <a:pt x="2289855" y="1228223"/>
+                  </a:lnTo>
+                  <a:lnTo>
+                    <a:pt x="2366323" y="1255359"/>
+                  </a:lnTo>
+                  <a:lnTo>
+                    <a:pt x="2442792" y="1281821"/>
+                  </a:lnTo>
+                  <a:lnTo>
+                    <a:pt x="2519260" y="1307624"/>
+                  </a:lnTo>
+                  <a:lnTo>
+                    <a:pt x="2595729" y="1332786"/>
+                  </a:lnTo>
+                  <a:lnTo>
+                    <a:pt x="2672197" y="1357323"/>
+                  </a:lnTo>
+                  <a:lnTo>
+                    <a:pt x="2748666" y="1381249"/>
+                  </a:lnTo>
+                  <a:lnTo>
+                    <a:pt x="2825134" y="1404581"/>
+                  </a:lnTo>
+                  <a:lnTo>
+                    <a:pt x="2901602" y="1427333"/>
+                  </a:lnTo>
+                  <a:lnTo>
+                    <a:pt x="2978071" y="1449519"/>
+                  </a:lnTo>
+                  <a:lnTo>
+                    <a:pt x="3054539" y="1471153"/>
+                  </a:lnTo>
+                  <a:lnTo>
+                    <a:pt x="3131008" y="1492250"/>
+                  </a:lnTo>
+                  <a:lnTo>
+                    <a:pt x="3207476" y="1512822"/>
+                  </a:lnTo>
+                  <a:lnTo>
+                    <a:pt x="3283945" y="1532883"/>
+                  </a:lnTo>
+                  <a:lnTo>
+                    <a:pt x="3360413" y="1552445"/>
+                  </a:lnTo>
+                  <a:lnTo>
+                    <a:pt x="3436881" y="1571521"/>
+                  </a:lnTo>
+                  <a:lnTo>
+                    <a:pt x="3513350" y="1590122"/>
+                  </a:lnTo>
+                  <a:lnTo>
+                    <a:pt x="3589818" y="1608261"/>
+                  </a:lnTo>
+                  <a:lnTo>
+                    <a:pt x="3666287" y="1625949"/>
+                  </a:lnTo>
+                  <a:lnTo>
+                    <a:pt x="3742755" y="1643197"/>
+                  </a:lnTo>
+                  <a:lnTo>
+                    <a:pt x="3819224" y="1660017"/>
+                  </a:lnTo>
+                  <a:lnTo>
+                    <a:pt x="3895692" y="1676418"/>
+                  </a:lnTo>
+                  <a:lnTo>
+                    <a:pt x="3972160" y="1692412"/>
+                  </a:lnTo>
+                  <a:lnTo>
+                    <a:pt x="4048629" y="1708008"/>
+                  </a:lnTo>
+                  <a:lnTo>
+                    <a:pt x="4125097" y="1723216"/>
+                  </a:lnTo>
+                  <a:lnTo>
+                    <a:pt x="4201566" y="1738046"/>
+                  </a:lnTo>
+                  <a:lnTo>
+                    <a:pt x="4278034" y="1752508"/>
+                  </a:lnTo>
+                  <a:lnTo>
+                    <a:pt x="4354503" y="1766610"/>
+                  </a:lnTo>
+                  <a:lnTo>
+                    <a:pt x="4430971" y="1780361"/>
+                  </a:lnTo>
+                  <a:lnTo>
+                    <a:pt x="4507439" y="1793771"/>
+                  </a:lnTo>
+                  <a:lnTo>
+                    <a:pt x="4583908" y="1806847"/>
+                  </a:lnTo>
+                  <a:lnTo>
+                    <a:pt x="4660376" y="1819598"/>
+                  </a:lnTo>
+                  <a:lnTo>
+                    <a:pt x="4736845" y="1832032"/>
+                  </a:lnTo>
+                  <a:lnTo>
+                    <a:pt x="4813313" y="1844157"/>
+                  </a:lnTo>
+                  <a:lnTo>
+                    <a:pt x="4889782" y="1855981"/>
+                  </a:lnTo>
+                  <a:lnTo>
+                    <a:pt x="4966250" y="1867510"/>
+                  </a:lnTo>
+                  <a:lnTo>
+                    <a:pt x="5042719" y="1878753"/>
+                  </a:lnTo>
+                  <a:lnTo>
+                    <a:pt x="5119187" y="1889717"/>
+                  </a:lnTo>
+                  <a:lnTo>
+                    <a:pt x="5195655" y="1900407"/>
+                  </a:lnTo>
+                  <a:lnTo>
+                    <a:pt x="5272124" y="1910832"/>
+                  </a:lnTo>
+                  <a:lnTo>
+                    <a:pt x="5348592" y="1920998"/>
+                  </a:lnTo>
+                  <a:lnTo>
+                    <a:pt x="5425061" y="1930912"/>
+                  </a:lnTo>
+                  <a:lnTo>
+                    <a:pt x="5501529" y="1940578"/>
+                  </a:lnTo>
+                  <a:lnTo>
+                    <a:pt x="5577998" y="1950005"/>
+                  </a:lnTo>
+                  <a:lnTo>
+                    <a:pt x="5654466" y="1959197"/>
+                  </a:lnTo>
+                  <a:lnTo>
+                    <a:pt x="5730934" y="1968160"/>
+                  </a:lnTo>
+                  <a:lnTo>
+                    <a:pt x="5807403" y="1976901"/>
+                  </a:lnTo>
+                  <a:lnTo>
+                    <a:pt x="5883871" y="1985424"/>
+                  </a:lnTo>
+                  <a:lnTo>
+                    <a:pt x="5960340" y="1993736"/>
+                  </a:lnTo>
+                  <a:lnTo>
+                    <a:pt x="6036808" y="2001841"/>
+                  </a:lnTo>
+                  <a:lnTo>
+                    <a:pt x="6113277" y="2009744"/>
+                  </a:lnTo>
+                  <a:lnTo>
+                    <a:pt x="6189745" y="2017451"/>
+                  </a:lnTo>
+                  <a:lnTo>
+                    <a:pt x="6266213" y="2024966"/>
+                  </a:lnTo>
+                  <a:lnTo>
+                    <a:pt x="6342682" y="2032295"/>
+                  </a:lnTo>
+                  <a:lnTo>
+                    <a:pt x="6419150" y="2039441"/>
+                  </a:lnTo>
+                  <a:lnTo>
+                    <a:pt x="6495619" y="2046410"/>
+                  </a:lnTo>
+                  <a:lnTo>
+                    <a:pt x="6572087" y="2053205"/>
+                  </a:lnTo>
+                  <a:lnTo>
+                    <a:pt x="6648556" y="2059831"/>
+                  </a:lnTo>
+                  <a:lnTo>
+                    <a:pt x="6725024" y="2066293"/>
+                  </a:lnTo>
+                  <a:lnTo>
+                    <a:pt x="6801492" y="2072594"/>
+                  </a:lnTo>
+                  <a:lnTo>
+                    <a:pt x="6877961" y="2078739"/>
+                  </a:lnTo>
+                  <a:lnTo>
+                    <a:pt x="6954429" y="2084730"/>
+                  </a:lnTo>
+                  <a:lnTo>
+                    <a:pt x="7030898" y="2090573"/>
+                  </a:lnTo>
+                  <a:lnTo>
+                    <a:pt x="7107366" y="2096270"/>
+                  </a:lnTo>
+                  <a:lnTo>
+                    <a:pt x="7183835" y="2101826"/>
+                  </a:lnTo>
+                  <a:lnTo>
+                    <a:pt x="7260303" y="2107244"/>
                   </a:lnTo>
                 </a:path>
               </a:pathLst>
@@ -4437,21 +4437,21 @@
           </p:nvSpPr>
           <p:spPr>
             <a:xfrm>
-              <a:off x="817517" y="4727786"/>
-              <a:ext cx="7799693" cy="0"/>
+              <a:off x="915645" y="4684908"/>
+              <a:ext cx="7682587" cy="0"/>
             </a:xfrm>
             <a:custGeom>
               <a:avLst/>
               <a:pathLst>
-                <a:path w="7799693" h="0">
+                <a:path w="7682587" h="0">
                   <a:moveTo>
                     <a:pt x="0" y="0"/>
                   </a:moveTo>
                   <a:lnTo>
-                    <a:pt x="7799693" y="0"/>
-                  </a:lnTo>
-                  <a:lnTo>
-                    <a:pt x="7799693" y="0"/>
+                    <a:pt x="7682587" y="0"/>
+                  </a:lnTo>
+                  <a:lnTo>
+                    <a:pt x="7682587" y="0"/>
                   </a:lnTo>
                 </a:path>
               </a:pathLst>
@@ -4480,15 +4480,15 @@
           </p:nvSpPr>
           <p:spPr>
             <a:xfrm>
-              <a:off x="4203673" y="2073503"/>
-              <a:ext cx="0" cy="3649639"/>
+              <a:off x="4250960" y="2209169"/>
+              <a:ext cx="0" cy="3404141"/>
             </a:xfrm>
             <a:custGeom>
               <a:avLst/>
               <a:pathLst>
-                <a:path w="0" h="3649639">
+                <a:path w="0" h="3404141">
                   <a:moveTo>
-                    <a:pt x="0" y="3649639"/>
+                    <a:pt x="0" y="3404141"/>
                   </a:moveTo>
                   <a:lnTo>
                     <a:pt x="0" y="0"/>
@@ -4523,8 +4523,8 @@
           </p:nvSpPr>
           <p:spPr>
             <a:xfrm>
-              <a:off x="692708" y="5517199"/>
-              <a:ext cx="62179" cy="80101"/>
+              <a:off x="756929" y="5407599"/>
+              <a:ext cx="79004" cy="101955"/>
             </a:xfrm>
             <a:prstGeom prst="rect">
               <a:avLst/>
@@ -4537,7 +4537,7 @@
             <a:p>
               <a:pPr algn="l" marL="0" marR="0" indent="0">
                 <a:lnSpc>
-                  <a:spcPts val="880"/>
+                  <a:spcPts val="1120"/>
                 </a:lnSpc>
                 <a:spcBef>
                   <a:spcPts val="0"/>
@@ -4547,7 +4547,7 @@
                 </a:spcAft>
               </a:pPr>
               <a:r>
-                <a:rPr sz="880">
+                <a:rPr sz="1120">
                   <a:solidFill>
                     <a:srgbClr val="4D4D4D">
                       <a:alpha val="100000"/>
@@ -4569,8 +4569,8 @@
           </p:nvSpPr>
           <p:spPr>
             <a:xfrm>
-              <a:off x="692708" y="4687735"/>
-              <a:ext cx="62179" cy="80101"/>
+              <a:off x="756929" y="4633931"/>
+              <a:ext cx="79004" cy="101955"/>
             </a:xfrm>
             <a:prstGeom prst="rect">
               <a:avLst/>
@@ -4583,7 +4583,7 @@
             <a:p>
               <a:pPr algn="l" marL="0" marR="0" indent="0">
                 <a:lnSpc>
-                  <a:spcPts val="880"/>
+                  <a:spcPts val="1120"/>
                 </a:lnSpc>
                 <a:spcBef>
                   <a:spcPts val="0"/>
@@ -4593,7 +4593,7 @@
                 </a:spcAft>
               </a:pPr>
               <a:r>
-                <a:rPr sz="880">
+                <a:rPr sz="1120">
                   <a:solidFill>
                     <a:srgbClr val="4D4D4D">
                       <a:alpha val="100000"/>
@@ -4615,8 +4615,8 @@
           </p:nvSpPr>
           <p:spPr>
             <a:xfrm>
-              <a:off x="692708" y="3858272"/>
-              <a:ext cx="62179" cy="80101"/>
+              <a:off x="756929" y="3860262"/>
+              <a:ext cx="79004" cy="101955"/>
             </a:xfrm>
             <a:prstGeom prst="rect">
               <a:avLst/>
@@ -4629,7 +4629,7 @@
             <a:p>
               <a:pPr algn="l" marL="0" marR="0" indent="0">
                 <a:lnSpc>
-                  <a:spcPts val="880"/>
+                  <a:spcPts val="1120"/>
                 </a:lnSpc>
                 <a:spcBef>
                   <a:spcPts val="0"/>
@@ -4639,7 +4639,7 @@
                 </a:spcAft>
               </a:pPr>
               <a:r>
-                <a:rPr sz="880">
+                <a:rPr sz="1120">
                   <a:solidFill>
                     <a:srgbClr val="4D4D4D">
                       <a:alpha val="100000"/>
@@ -4661,8 +4661,8 @@
           </p:nvSpPr>
           <p:spPr>
             <a:xfrm>
-              <a:off x="692708" y="3028808"/>
-              <a:ext cx="62179" cy="80101"/>
+              <a:off x="756929" y="3086593"/>
+              <a:ext cx="79004" cy="101955"/>
             </a:xfrm>
             <a:prstGeom prst="rect">
               <a:avLst/>
@@ -4675,7 +4675,7 @@
             <a:p>
               <a:pPr algn="l" marL="0" marR="0" indent="0">
                 <a:lnSpc>
-                  <a:spcPts val="880"/>
+                  <a:spcPts val="1120"/>
                 </a:lnSpc>
                 <a:spcBef>
                   <a:spcPts val="0"/>
@@ -4685,7 +4685,7 @@
                 </a:spcAft>
               </a:pPr>
               <a:r>
-                <a:rPr sz="880">
+                <a:rPr sz="1120">
                   <a:solidFill>
                     <a:srgbClr val="4D4D4D">
                       <a:alpha val="100000"/>
@@ -4707,8 +4707,8 @@
           </p:nvSpPr>
           <p:spPr>
             <a:xfrm>
-              <a:off x="692708" y="2199345"/>
-              <a:ext cx="62179" cy="80101"/>
+              <a:off x="756929" y="2312925"/>
+              <a:ext cx="79004" cy="101955"/>
             </a:xfrm>
             <a:prstGeom prst="rect">
               <a:avLst/>
@@ -4721,7 +4721,7 @@
             <a:p>
               <a:pPr algn="l" marL="0" marR="0" indent="0">
                 <a:lnSpc>
-                  <a:spcPts val="880"/>
+                  <a:spcPts val="1120"/>
                 </a:lnSpc>
                 <a:spcBef>
                   <a:spcPts val="0"/>
@@ -4731,7 +4731,7 @@
                 </a:spcAft>
               </a:pPr>
               <a:r>
-                <a:rPr sz="880">
+                <a:rPr sz="1120">
                   <a:solidFill>
                     <a:srgbClr val="4D4D4D">
                       <a:alpha val="100000"/>
@@ -4753,8 +4753,8 @@
           </p:nvSpPr>
           <p:spPr>
             <a:xfrm>
-              <a:off x="2423864" y="5785772"/>
-              <a:ext cx="155356" cy="80101"/>
+              <a:off x="2475630" y="5693022"/>
+              <a:ext cx="197510" cy="101955"/>
             </a:xfrm>
             <a:prstGeom prst="rect">
               <a:avLst/>
@@ -4767,7 +4767,7 @@
             <a:p>
               <a:pPr algn="l" marL="0" marR="0" indent="0">
                 <a:lnSpc>
-                  <a:spcPts val="880"/>
+                  <a:spcPts val="1120"/>
                 </a:lnSpc>
                 <a:spcBef>
                   <a:spcPts val="0"/>
@@ -4777,7 +4777,7 @@
                 </a:spcAft>
               </a:pPr>
               <a:r>
-                <a:rPr sz="880">
+                <a:rPr sz="1120">
                   <a:solidFill>
                     <a:srgbClr val="4D4D4D">
                       <a:alpha val="100000"/>
@@ -4799,8 +4799,8 @@
           </p:nvSpPr>
           <p:spPr>
             <a:xfrm>
-              <a:off x="4196521" y="5785772"/>
-              <a:ext cx="155356" cy="80101"/>
+              <a:off x="4221672" y="5693022"/>
+              <a:ext cx="197510" cy="101955"/>
             </a:xfrm>
             <a:prstGeom prst="rect">
               <a:avLst/>
@@ -4813,7 +4813,7 @@
             <a:p>
               <a:pPr algn="l" marL="0" marR="0" indent="0">
                 <a:lnSpc>
-                  <a:spcPts val="880"/>
+                  <a:spcPts val="1120"/>
                 </a:lnSpc>
                 <a:spcBef>
                   <a:spcPts val="0"/>
@@ -4823,7 +4823,7 @@
                 </a:spcAft>
               </a:pPr>
               <a:r>
-                <a:rPr sz="880">
+                <a:rPr sz="1120">
                   <a:solidFill>
                     <a:srgbClr val="4D4D4D">
                       <a:alpha val="100000"/>
@@ -4845,8 +4845,8 @@
           </p:nvSpPr>
           <p:spPr>
             <a:xfrm>
-              <a:off x="5969179" y="5785772"/>
-              <a:ext cx="155356" cy="80101"/>
+              <a:off x="5967715" y="5693022"/>
+              <a:ext cx="197510" cy="101955"/>
             </a:xfrm>
             <a:prstGeom prst="rect">
               <a:avLst/>
@@ -4859,7 +4859,7 @@
             <a:p>
               <a:pPr algn="l" marL="0" marR="0" indent="0">
                 <a:lnSpc>
-                  <a:spcPts val="880"/>
+                  <a:spcPts val="1120"/>
                 </a:lnSpc>
                 <a:spcBef>
                   <a:spcPts val="0"/>
@@ -4869,7 +4869,7 @@
                 </a:spcAft>
               </a:pPr>
               <a:r>
-                <a:rPr sz="880">
+                <a:rPr sz="1120">
                   <a:solidFill>
                     <a:srgbClr val="4D4D4D">
                       <a:alpha val="100000"/>
@@ -4891,8 +4891,8 @@
           </p:nvSpPr>
           <p:spPr>
             <a:xfrm>
-              <a:off x="7741836" y="5785772"/>
-              <a:ext cx="155356" cy="80101"/>
+              <a:off x="7713757" y="5693022"/>
+              <a:ext cx="197510" cy="101955"/>
             </a:xfrm>
             <a:prstGeom prst="rect">
               <a:avLst/>
@@ -4905,7 +4905,7 @@
             <a:p>
               <a:pPr algn="l" marL="0" marR="0" indent="0">
                 <a:lnSpc>
-                  <a:spcPts val="880"/>
+                  <a:spcPts val="1120"/>
                 </a:lnSpc>
                 <a:spcBef>
                   <a:spcPts val="0"/>
@@ -4915,7 +4915,7 @@
                 </a:spcAft>
               </a:pPr>
               <a:r>
-                <a:rPr sz="880">
+                <a:rPr sz="1120">
                   <a:solidFill>
                     <a:srgbClr val="4D4D4D">
                       <a:alpha val="100000"/>
@@ -4937,8 +4937,8 @@
           </p:nvSpPr>
           <p:spPr>
             <a:xfrm>
-              <a:off x="3879271" y="5925448"/>
-              <a:ext cx="1676186" cy="100218"/>
+              <a:off x="3690153" y="5870717"/>
+              <a:ext cx="2133569" cy="127558"/>
             </a:xfrm>
             <a:prstGeom prst="rect">
               <a:avLst/>
@@ -4951,7 +4951,7 @@
             <a:p>
               <a:pPr algn="l" marL="0" marR="0" indent="0">
                 <a:lnSpc>
-                  <a:spcPts val="1100"/>
+                  <a:spcPts val="1400"/>
                 </a:lnSpc>
                 <a:spcBef>
                   <a:spcPts val="0"/>
@@ -4961,7 +4961,7 @@
                 </a:spcAft>
               </a:pPr>
               <a:r>
-                <a:rPr sz="1100">
+                <a:rPr sz="1400">
                   <a:solidFill>
                     <a:srgbClr val="000000">
                       <a:alpha val="100000"/>
@@ -4983,8 +4983,8 @@
           </p:nvSpPr>
           <p:spPr>
             <a:xfrm rot="-5400000">
-              <a:off x="68446" y="3848213"/>
-              <a:ext cx="1016904" cy="100218"/>
+              <a:off x="-37527" y="3847460"/>
+              <a:ext cx="1294150" cy="127558"/>
             </a:xfrm>
             <a:prstGeom prst="rect">
               <a:avLst/>
@@ -4997,7 +4997,7 @@
             <a:p>
               <a:pPr algn="l" marL="0" marR="0" indent="0">
                 <a:lnSpc>
-                  <a:spcPts val="1100"/>
+                  <a:spcPts val="1400"/>
                 </a:lnSpc>
                 <a:spcBef>
                   <a:spcPts val="0"/>
@@ -5007,7 +5007,7 @@
                 </a:spcAft>
               </a:pPr>
               <a:r>
-                <a:rPr sz="1100">
+                <a:rPr sz="1400">
                   <a:solidFill>
                     <a:srgbClr val="000000">
                       <a:alpha val="100000"/>
@@ -5029,8 +5029,8 @@
           </p:nvSpPr>
           <p:spPr>
             <a:xfrm>
-              <a:off x="817517" y="1896563"/>
-              <a:ext cx="4166463" cy="82021"/>
+              <a:off x="915645" y="1977589"/>
+              <a:ext cx="5556900" cy="109362"/>
             </a:xfrm>
             <a:prstGeom prst="rect">
               <a:avLst/>
@@ -5043,7 +5043,7 @@
             <a:p>
               <a:pPr algn="l" marL="0" marR="0" indent="0">
                 <a:lnSpc>
-                  <a:spcPts val="900"/>
+                  <a:spcPts val="1200"/>
                 </a:lnSpc>
                 <a:spcBef>
                   <a:spcPts val="0"/>
@@ -5053,7 +5053,7 @@
                 </a:spcAft>
               </a:pPr>
               <a:r>
-                <a:rPr sz="900">
+                <a:rPr sz="1200">
                   <a:solidFill>
                     <a:srgbClr val="404040">
                       <a:alpha val="100000"/>
@@ -5075,8 +5075,8 @@
           </p:nvSpPr>
           <p:spPr>
             <a:xfrm>
-              <a:off x="817517" y="1669789"/>
-              <a:ext cx="2234793" cy="120152"/>
+              <a:off x="915645" y="1688767"/>
+              <a:ext cx="2845064" cy="153070"/>
             </a:xfrm>
             <a:prstGeom prst="rect">
               <a:avLst/>
@@ -5089,7 +5089,7 @@
             <a:p>
               <a:pPr algn="l" marL="0" marR="0" indent="0">
                 <a:lnSpc>
-                  <a:spcPts val="1320"/>
+                  <a:spcPts val="1680"/>
                 </a:lnSpc>
                 <a:spcBef>
                   <a:spcPts val="0"/>
@@ -5099,7 +5099,7 @@
                 </a:spcAft>
               </a:pPr>
               <a:r>
-                <a:rPr sz="1320">
+                <a:rPr sz="1680">
                   <a:solidFill>
                     <a:srgbClr val="000000">
                       <a:alpha val="100000"/>
